--- a/Apresentacao.pptx
+++ b/Apresentacao.pptx
@@ -31,19 +31,19 @@
   <p:notesSz cx="6858000" cy="9144000"/>
   <p:embeddedFontLst>
     <p:embeddedFont>
-      <p:font typeface="Montserrat Medium" charset="1" panose="00000600000000000000"/>
+      <p:font typeface="Anton" charset="1" panose="00000500000000000000"/>
       <p:regular r:id="rId27"/>
     </p:embeddedFont>
     <p:embeddedFont>
-      <p:font typeface="Anton" charset="1" panose="00000500000000000000"/>
+      <p:font typeface="Montserrat Bold" charset="1" panose="00000800000000000000"/>
       <p:regular r:id="rId28"/>
     </p:embeddedFont>
     <p:embeddedFont>
-      <p:font typeface="Montserrat Bold" charset="1" panose="00000800000000000000"/>
+      <p:font typeface="Montserrat" charset="1" panose="00000500000000000000"/>
       <p:regular r:id="rId29"/>
     </p:embeddedFont>
     <p:embeddedFont>
-      <p:font typeface="Montserrat" charset="1" panose="00000500000000000000"/>
+      <p:font typeface="Montserrat Medium" charset="1" panose="00000600000000000000"/>
       <p:regular r:id="rId30"/>
     </p:embeddedFont>
   </p:embeddedFontLst>
@@ -3112,8 +3112,8 @@
         </p:nvSpPr>
         <p:spPr>
           <a:xfrm rot="0">
-            <a:off x="1028700" y="981466"/>
-            <a:ext cx="12794523" cy="4231887"/>
+            <a:off x="1028700" y="667141"/>
+            <a:ext cx="13111952" cy="7082643"/>
           </a:xfrm>
           <a:prstGeom prst="rect">
             <a:avLst/>
@@ -3127,39 +3127,20 @@
           <a:p>
             <a:pPr algn="l">
               <a:lnSpc>
-                <a:spcPts val="3449"/>
+                <a:spcPts val="28413"/>
               </a:lnSpc>
             </a:pPr>
             <a:r>
-              <a:rPr lang="en-US" b="true" sz="2499">
+              <a:rPr lang="en-US" sz="20589">
                 <a:solidFill>
-                  <a:srgbClr val="F5E8C7"/>
+                  <a:srgbClr val="FFFFFF"/>
                 </a:solidFill>
-                <a:latin typeface="Montserrat Medium"/>
-                <a:ea typeface="Montserrat Medium"/>
-                <a:cs typeface="Montserrat Medium"/>
-                <a:sym typeface="Montserrat Medium"/>
+                <a:latin typeface="Anton"/>
+                <a:ea typeface="Anton"/>
+                <a:cs typeface="Anton"/>
+                <a:sym typeface="Anton"/>
               </a:rPr>
-              <a:t>GABRIEL NUNES E</a:t>
-            </a:r>
-          </a:p>
-          <a:p>
-            <a:pPr algn="l">
-              <a:lnSpc>
-                <a:spcPts val="3449"/>
-              </a:lnSpc>
-            </a:pPr>
-            <a:r>
-              <a:rPr lang="en-US" b="true" sz="2499">
-                <a:solidFill>
-                  <a:srgbClr val="F5E8C7"/>
-                </a:solidFill>
-                <a:latin typeface="Montserrat Medium"/>
-                <a:ea typeface="Montserrat Medium"/>
-                <a:cs typeface="Montserrat Medium"/>
-                <a:sym typeface="Montserrat Medium"/>
-              </a:rPr>
-              <a:t>JOÃO PEDRO</a:t>
+              <a:t>ARQUITETURA</a:t>
             </a:r>
           </a:p>
           <a:p>
@@ -3171,14 +3152,14 @@
             <a:r>
               <a:rPr lang="en-US" sz="20589">
                 <a:solidFill>
-                  <a:srgbClr val="F5E8C7"/>
+                  <a:srgbClr val="FFFFFF"/>
                 </a:solidFill>
                 <a:latin typeface="Anton"/>
                 <a:ea typeface="Anton"/>
                 <a:cs typeface="Anton"/>
                 <a:sym typeface="Anton"/>
               </a:rPr>
-              <a:t>ARQUITETURA</a:t>
+              <a:t>DE SOFTWARE</a:t>
             </a:r>
           </a:p>
         </p:txBody>
@@ -3232,8 +3213,8 @@
         </p:nvSpPr>
         <p:spPr>
           <a:xfrm rot="0">
-            <a:off x="1028700" y="4819469"/>
-            <a:ext cx="13198183" cy="3704520"/>
+            <a:off x="1692389" y="7711684"/>
+            <a:ext cx="2740184" cy="1266831"/>
           </a:xfrm>
           <a:prstGeom prst="rect">
             <a:avLst/>
@@ -3247,45 +3228,68 @@
           <a:p>
             <a:pPr algn="l">
               <a:lnSpc>
-                <a:spcPts val="28839"/>
+                <a:spcPts val="3449"/>
               </a:lnSpc>
+              <a:spcBef>
+                <a:spcPct val="0"/>
+              </a:spcBef>
             </a:pPr>
             <a:r>
-              <a:rPr lang="en-US" sz="20599">
+              <a:rPr lang="en-US" b="true" sz="2499">
                 <a:solidFill>
-                  <a:srgbClr val="F5E8C7"/>
+                  <a:srgbClr val="FFFFFF"/>
                 </a:solidFill>
-                <a:latin typeface="Anton"/>
-                <a:ea typeface="Anton"/>
-                <a:cs typeface="Anton"/>
-                <a:sym typeface="Anton"/>
+                <a:latin typeface="Montserrat Bold"/>
+                <a:ea typeface="Montserrat Bold"/>
+                <a:cs typeface="Montserrat Bold"/>
+                <a:sym typeface="Montserrat Bold"/>
               </a:rPr>
-              <a:t>DE</a:t>
+              <a:t>GABRIEL</a:t>
             </a:r>
             <a:r>
-              <a:rPr lang="en-US" sz="20599">
+              <a:rPr lang="en-US" b="true" sz="2499">
                 <a:solidFill>
-                  <a:srgbClr val="000000"/>
+                  <a:srgbClr val="FFFFFF"/>
                 </a:solidFill>
-                <a:latin typeface="Anton"/>
-                <a:ea typeface="Anton"/>
-                <a:cs typeface="Anton"/>
-                <a:sym typeface="Anton"/>
+                <a:latin typeface="Montserrat Bold"/>
+                <a:ea typeface="Montserrat Bold"/>
+                <a:cs typeface="Montserrat Bold"/>
+                <a:sym typeface="Montserrat Bold"/>
               </a:rPr>
-              <a:t> </a:t>
+              <a:t> NUNES</a:t>
             </a:r>
+          </a:p>
+          <a:p>
+            <a:pPr algn="l">
+              <a:lnSpc>
+                <a:spcPts val="3449"/>
+              </a:lnSpc>
+              <a:spcBef>
+                <a:spcPct val="0"/>
+              </a:spcBef>
+            </a:pPr>
             <a:r>
-              <a:rPr lang="en-US" sz="20599">
+              <a:rPr lang="en-US" b="true" sz="2499">
                 <a:solidFill>
-                  <a:srgbClr val="F5E8C7"/>
+                  <a:srgbClr val="FFFFFF"/>
                 </a:solidFill>
-                <a:latin typeface="Anton"/>
-                <a:ea typeface="Anton"/>
-                <a:cs typeface="Anton"/>
-                <a:sym typeface="Anton"/>
+                <a:latin typeface="Montserrat Bold"/>
+                <a:ea typeface="Montserrat Bold"/>
+                <a:cs typeface="Montserrat Bold"/>
+                <a:sym typeface="Montserrat Bold"/>
               </a:rPr>
-              <a:t>SOFTWARE</a:t>
+              <a:t>JOÃO PEDRO</a:t>
             </a:r>
+          </a:p>
+          <a:p>
+            <a:pPr algn="l">
+              <a:lnSpc>
+                <a:spcPts val="3449"/>
+              </a:lnSpc>
+              <a:spcBef>
+                <a:spcPct val="0"/>
+              </a:spcBef>
+            </a:pPr>
           </a:p>
         </p:txBody>
       </p:sp>
@@ -3329,8 +3333,8 @@
         </p:nvSpPr>
         <p:spPr>
           <a:xfrm flipH="false" flipV="false" rot="0">
-            <a:off x="581692" y="2221148"/>
-            <a:ext cx="9757019" cy="5420566"/>
+            <a:off x="264263" y="3102777"/>
+            <a:ext cx="8202407" cy="4556893"/>
           </a:xfrm>
           <a:custGeom>
             <a:avLst/>
@@ -3339,18 +3343,18 @@
             <a:cxnLst/>
             <a:rect r="r" b="b" t="t" l="l"/>
             <a:pathLst>
-              <a:path h="5420566" w="9757019">
+              <a:path h="4556893" w="8202407">
                 <a:moveTo>
                   <a:pt x="0" y="0"/>
                 </a:moveTo>
                 <a:lnTo>
-                  <a:pt x="9757019" y="0"/>
+                  <a:pt x="8202407" y="0"/>
                 </a:lnTo>
                 <a:lnTo>
-                  <a:pt x="9757019" y="5420567"/>
+                  <a:pt x="8202407" y="4556893"/>
                 </a:lnTo>
                 <a:lnTo>
-                  <a:pt x="0" y="5420567"/>
+                  <a:pt x="0" y="4556893"/>
                 </a:lnTo>
                 <a:lnTo>
                   <a:pt x="0" y="0"/>
@@ -3367,9 +3371,97 @@
           </a:blipFill>
         </p:spPr>
       </p:sp>
+      <p:grpSp>
+        <p:nvGrpSpPr>
+          <p:cNvPr name="Group 3" id="3"/>
+          <p:cNvGrpSpPr/>
+          <p:nvPr/>
+        </p:nvGrpSpPr>
+        <p:grpSpPr>
+          <a:xfrm rot="0">
+            <a:off x="9245025" y="2876969"/>
+            <a:ext cx="7042897" cy="1671538"/>
+            <a:chOff x="0" y="0"/>
+            <a:chExt cx="11500046" cy="2729392"/>
+          </a:xfrm>
+        </p:grpSpPr>
+        <p:sp>
+          <p:nvSpPr>
+            <p:cNvPr name="Freeform 4" id="4"/>
+            <p:cNvSpPr/>
+            <p:nvPr/>
+          </p:nvSpPr>
+          <p:spPr>
+            <a:xfrm flipH="false" flipV="false" rot="0">
+              <a:off x="0" y="0"/>
+              <a:ext cx="11499952" cy="2729345"/>
+            </a:xfrm>
+            <a:custGeom>
+              <a:avLst/>
+              <a:gdLst/>
+              <a:ahLst/>
+              <a:cxnLst/>
+              <a:rect r="r" b="b" t="t" l="l"/>
+              <a:pathLst>
+                <a:path h="2729345" w="11499952">
+                  <a:moveTo>
+                    <a:pt x="329839" y="0"/>
+                  </a:moveTo>
+                  <a:lnTo>
+                    <a:pt x="11170114" y="0"/>
+                  </a:lnTo>
+                  <a:cubicBezTo>
+                    <a:pt x="11352278" y="0"/>
+                    <a:pt x="11499952" y="147674"/>
+                    <a:pt x="11499952" y="329839"/>
+                  </a:cubicBezTo>
+                  <a:lnTo>
+                    <a:pt x="11499952" y="2399507"/>
+                  </a:lnTo>
+                  <a:cubicBezTo>
+                    <a:pt x="11499952" y="2581671"/>
+                    <a:pt x="11352278" y="2729345"/>
+                    <a:pt x="11170114" y="2729345"/>
+                  </a:cubicBezTo>
+                  <a:lnTo>
+                    <a:pt x="329839" y="2729345"/>
+                  </a:lnTo>
+                  <a:cubicBezTo>
+                    <a:pt x="242360" y="2729345"/>
+                    <a:pt x="158464" y="2694595"/>
+                    <a:pt x="96608" y="2632738"/>
+                  </a:cubicBezTo>
+                  <a:cubicBezTo>
+                    <a:pt x="34751" y="2570881"/>
+                    <a:pt x="0" y="2486985"/>
+                    <a:pt x="0" y="2399507"/>
+                  </a:cubicBezTo>
+                  <a:lnTo>
+                    <a:pt x="0" y="329839"/>
+                  </a:lnTo>
+                  <a:cubicBezTo>
+                    <a:pt x="0" y="242360"/>
+                    <a:pt x="34751" y="158464"/>
+                    <a:pt x="96608" y="96608"/>
+                  </a:cubicBezTo>
+                  <a:cubicBezTo>
+                    <a:pt x="158464" y="34751"/>
+                    <a:pt x="242360" y="0"/>
+                    <a:pt x="329839" y="0"/>
+                  </a:cubicBezTo>
+                  <a:close/>
+                </a:path>
+              </a:pathLst>
+            </a:custGeom>
+            <a:solidFill>
+              <a:srgbClr val="FFFFFF"/>
+            </a:solidFill>
+          </p:spPr>
+        </p:sp>
+      </p:grpSp>
       <p:sp>
         <p:nvSpPr>
-          <p:cNvPr name="TextBox 3" id="3"/>
+          <p:cNvPr name="TextBox 5" id="5"/>
           <p:cNvSpPr txBox="true"/>
           <p:nvPr/>
         </p:nvSpPr>
@@ -3396,7 +3488,7 @@
             <a:r>
               <a:rPr lang="en-US" sz="10535">
                 <a:solidFill>
-                  <a:srgbClr val="F5E8C7"/>
+                  <a:srgbClr val="FFFFFF"/>
                 </a:solidFill>
                 <a:latin typeface="Anton"/>
                 <a:ea typeface="Anton"/>
@@ -3408,7 +3500,7 @@
             <a:r>
               <a:rPr lang="en-US" sz="10535">
                 <a:solidFill>
-                  <a:srgbClr val="F5E8C7"/>
+                  <a:srgbClr val="FFFFFF"/>
                 </a:solidFill>
                 <a:latin typeface="Anton"/>
                 <a:ea typeface="Anton"/>
@@ -3422,7 +3514,7 @@
       </p:sp>
       <p:sp>
         <p:nvSpPr>
-          <p:cNvPr name="TextBox 4" id="4"/>
+          <p:cNvPr name="TextBox 6" id="6"/>
           <p:cNvSpPr txBox="true"/>
           <p:nvPr/>
         </p:nvSpPr>
@@ -3463,7 +3555,7 @@
       </p:sp>
       <p:sp>
         <p:nvSpPr>
-          <p:cNvPr name="TextBox 5" id="5"/>
+          <p:cNvPr name="TextBox 7" id="7"/>
           <p:cNvSpPr txBox="true"/>
           <p:nvPr/>
         </p:nvSpPr>
@@ -3504,14 +3596,14 @@
       </p:sp>
       <p:sp>
         <p:nvSpPr>
-          <p:cNvPr name="TextBox 6" id="6"/>
+          <p:cNvPr name="TextBox 8" id="8"/>
           <p:cNvSpPr txBox="true"/>
           <p:nvPr/>
         </p:nvSpPr>
         <p:spPr>
           <a:xfrm rot="0">
-            <a:off x="10962027" y="2591953"/>
-            <a:ext cx="6453645" cy="1266831"/>
+            <a:off x="9455450" y="3015875"/>
+            <a:ext cx="6670074" cy="1266831"/>
           </a:xfrm>
           <a:prstGeom prst="rect">
             <a:avLst/>
@@ -3523,7 +3615,26 @@
           </a:bodyPr>
           <a:lstStyle/>
           <a:p>
-            <a:pPr algn="ctr">
+            <a:pPr algn="l">
+              <a:lnSpc>
+                <a:spcPts val="3449"/>
+              </a:lnSpc>
+            </a:pPr>
+            <a:r>
+              <a:rPr lang="en-US" sz="2499" b="true">
+                <a:solidFill>
+                  <a:srgbClr val="47423E"/>
+                </a:solidFill>
+                <a:latin typeface="Montserrat Bold"/>
+                <a:ea typeface="Montserrat Bold"/>
+                <a:cs typeface="Montserrat Bold"/>
+                <a:sym typeface="Montserrat Bold"/>
+              </a:rPr>
+              <a:t>Similar a Microsserviços. </a:t>
+            </a:r>
+          </a:p>
+          <a:p>
+            <a:pPr algn="l">
               <a:lnSpc>
                 <a:spcPts val="3449"/>
               </a:lnSpc>
@@ -3531,28 +3642,106 @@
             <a:r>
               <a:rPr lang="en-US" b="true" sz="2499">
                 <a:solidFill>
-                  <a:srgbClr val="F5E8C7"/>
+                  <a:srgbClr val="47423E"/>
                 </a:solidFill>
-                <a:latin typeface="Montserrat Medium"/>
-                <a:ea typeface="Montserrat Medium"/>
-                <a:cs typeface="Montserrat Medium"/>
-                <a:sym typeface="Montserrat Medium"/>
+                <a:latin typeface="Montserrat Bold"/>
+                <a:ea typeface="Montserrat Bold"/>
+                <a:cs typeface="Montserrat Bold"/>
+                <a:sym typeface="Montserrat Bold"/>
               </a:rPr>
-              <a:t>Similar a Microsserviços. Deu origem a esse subtipo. Porém com maior foco em serviços reutilizaveis</a:t>
+              <a:t>Deu origem a esse subtipo. Porém com maior foco em serviços reutilizaveis</a:t>
             </a:r>
           </a:p>
         </p:txBody>
       </p:sp>
+      <p:grpSp>
+        <p:nvGrpSpPr>
+          <p:cNvPr name="Group 9" id="9"/>
+          <p:cNvGrpSpPr/>
+          <p:nvPr/>
+        </p:nvGrpSpPr>
+        <p:grpSpPr>
+          <a:xfrm rot="0">
+            <a:off x="9245025" y="5597658"/>
+            <a:ext cx="7152532" cy="2436254"/>
+            <a:chOff x="0" y="0"/>
+            <a:chExt cx="11679064" cy="3978067"/>
+          </a:xfrm>
+        </p:grpSpPr>
+        <p:sp>
+          <p:nvSpPr>
+            <p:cNvPr name="Freeform 10" id="10"/>
+            <p:cNvSpPr/>
+            <p:nvPr/>
+          </p:nvSpPr>
+          <p:spPr>
+            <a:xfrm flipH="false" flipV="false" rot="0">
+              <a:off x="0" y="0"/>
+              <a:ext cx="11678969" cy="3977999"/>
+            </a:xfrm>
+            <a:custGeom>
+              <a:avLst/>
+              <a:gdLst/>
+              <a:ahLst/>
+              <a:cxnLst/>
+              <a:rect r="r" b="b" t="t" l="l"/>
+              <a:pathLst>
+                <a:path h="3977999" w="11678969">
+                  <a:moveTo>
+                    <a:pt x="324783" y="0"/>
+                  </a:moveTo>
+                  <a:lnTo>
+                    <a:pt x="11354185" y="0"/>
+                  </a:lnTo>
+                  <a:cubicBezTo>
+                    <a:pt x="11533558" y="0"/>
+                    <a:pt x="11678969" y="145410"/>
+                    <a:pt x="11678969" y="324783"/>
+                  </a:cubicBezTo>
+                  <a:lnTo>
+                    <a:pt x="11678969" y="3653216"/>
+                  </a:lnTo>
+                  <a:cubicBezTo>
+                    <a:pt x="11678969" y="3832589"/>
+                    <a:pt x="11533558" y="3977999"/>
+                    <a:pt x="11354185" y="3977999"/>
+                  </a:cubicBezTo>
+                  <a:lnTo>
+                    <a:pt x="324783" y="3977999"/>
+                  </a:lnTo>
+                  <a:cubicBezTo>
+                    <a:pt x="145410" y="3977999"/>
+                    <a:pt x="0" y="3832589"/>
+                    <a:pt x="0" y="3653216"/>
+                  </a:cubicBezTo>
+                  <a:lnTo>
+                    <a:pt x="0" y="324783"/>
+                  </a:lnTo>
+                  <a:cubicBezTo>
+                    <a:pt x="0" y="145410"/>
+                    <a:pt x="145410" y="0"/>
+                    <a:pt x="324783" y="0"/>
+                  </a:cubicBezTo>
+                  <a:close/>
+                </a:path>
+              </a:pathLst>
+            </a:custGeom>
+            <a:solidFill>
+              <a:srgbClr val="FFFFFF"/>
+            </a:solidFill>
+          </p:spPr>
+        </p:sp>
+      </p:grpSp>
       <p:sp>
         <p:nvSpPr>
-          <p:cNvPr name="TextBox 7" id="7"/>
+          <p:cNvPr name="TextBox 11" id="11"/>
           <p:cNvSpPr txBox="true"/>
           <p:nvPr/>
         </p:nvSpPr>
         <p:spPr>
           <a:xfrm rot="0">
-            <a:off x="10962027" y="4893331"/>
-            <a:ext cx="6453645" cy="2124081"/>
+            <a:off x="9482197" y="5676320"/>
+            <a:ext cx="6805725" cy="2124081"/>
           </a:xfrm>
           <a:prstGeom prst="rect">
             <a:avLst/>
@@ -3564,7 +3753,7 @@
           </a:bodyPr>
           <a:lstStyle/>
           <a:p>
-            <a:pPr algn="ctr">
+            <a:pPr algn="l">
               <a:lnSpc>
                 <a:spcPts val="3449"/>
               </a:lnSpc>
@@ -3572,14 +3761,14 @@
             <a:r>
               <a:rPr lang="en-US" b="true" sz="2499">
                 <a:solidFill>
-                  <a:srgbClr val="F5E8C7"/>
+                  <a:srgbClr val="47423E"/>
                 </a:solidFill>
-                <a:latin typeface="Montserrat Medium"/>
-                <a:ea typeface="Montserrat Medium"/>
-                <a:cs typeface="Montserrat Medium"/>
-                <a:sym typeface="Montserrat Medium"/>
+                <a:latin typeface="Montserrat Bold"/>
+                <a:ea typeface="Montserrat Bold"/>
+                <a:cs typeface="Montserrat Bold"/>
+                <a:sym typeface="Montserrat Bold"/>
               </a:rPr>
-              <a:t>A principal diferença está em como os servços estãlo expostos e sonsumidos, por meio de um barramento de serviços, que facilita a integração de sistemas legados</a:t>
+              <a:t>A principal diferença: está em como os serviços estão expostos e consumidos, por meio de um barramento de serviços, que facilita a integração de sistemas legados</a:t>
             </a:r>
           </a:p>
         </p:txBody>
@@ -3691,7 +3880,7 @@
             <a:r>
               <a:rPr lang="en-US" sz="10535">
                 <a:solidFill>
-                  <a:srgbClr val="F5E8C7"/>
+                  <a:srgbClr val="FFFFFF"/>
                 </a:solidFill>
                 <a:latin typeface="Anton"/>
                 <a:ea typeface="Anton"/>
@@ -3703,7 +3892,7 @@
             <a:r>
               <a:rPr lang="en-US" sz="10535">
                 <a:solidFill>
-                  <a:srgbClr val="F5E8C7"/>
+                  <a:srgbClr val="FFFFFF"/>
                 </a:solidFill>
                 <a:latin typeface="Anton"/>
                 <a:ea typeface="Anton"/>
@@ -3711,6 +3900,467 @@
                 <a:sym typeface="Anton"/>
               </a:rPr>
               <a:t>. Em camadas (Layers)</a:t>
+            </a:r>
+          </a:p>
+        </p:txBody>
+      </p:sp>
+      <p:grpSp>
+        <p:nvGrpSpPr>
+          <p:cNvPr name="Group 4" id="4"/>
+          <p:cNvGrpSpPr/>
+          <p:nvPr/>
+        </p:nvGrpSpPr>
+        <p:grpSpPr>
+          <a:xfrm rot="0">
+            <a:off x="10082422" y="2876969"/>
+            <a:ext cx="7176878" cy="1665748"/>
+            <a:chOff x="0" y="0"/>
+            <a:chExt cx="14430129" cy="3349233"/>
+          </a:xfrm>
+        </p:grpSpPr>
+        <p:sp>
+          <p:nvSpPr>
+            <p:cNvPr name="Freeform 5" id="5"/>
+            <p:cNvSpPr/>
+            <p:nvPr/>
+          </p:nvSpPr>
+          <p:spPr>
+            <a:xfrm flipH="false" flipV="false" rot="0">
+              <a:off x="0" y="0"/>
+              <a:ext cx="14430012" cy="3349175"/>
+            </a:xfrm>
+            <a:custGeom>
+              <a:avLst/>
+              <a:gdLst/>
+              <a:ahLst/>
+              <a:cxnLst/>
+              <a:rect r="r" b="b" t="t" l="l"/>
+              <a:pathLst>
+                <a:path h="3349175" w="14430012">
+                  <a:moveTo>
+                    <a:pt x="323681" y="0"/>
+                  </a:moveTo>
+                  <a:lnTo>
+                    <a:pt x="14106331" y="0"/>
+                  </a:lnTo>
+                  <a:cubicBezTo>
+                    <a:pt x="14192177" y="0"/>
+                    <a:pt x="14274507" y="34102"/>
+                    <a:pt x="14335209" y="94804"/>
+                  </a:cubicBezTo>
+                  <a:cubicBezTo>
+                    <a:pt x="14395910" y="155506"/>
+                    <a:pt x="14430012" y="237836"/>
+                    <a:pt x="14430012" y="323681"/>
+                  </a:cubicBezTo>
+                  <a:lnTo>
+                    <a:pt x="14430012" y="3025494"/>
+                  </a:lnTo>
+                  <a:cubicBezTo>
+                    <a:pt x="14430012" y="3204258"/>
+                    <a:pt x="14285095" y="3349175"/>
+                    <a:pt x="14106331" y="3349175"/>
+                  </a:cubicBezTo>
+                  <a:lnTo>
+                    <a:pt x="323681" y="3349175"/>
+                  </a:lnTo>
+                  <a:cubicBezTo>
+                    <a:pt x="144917" y="3349175"/>
+                    <a:pt x="0" y="3204258"/>
+                    <a:pt x="0" y="3025494"/>
+                  </a:cubicBezTo>
+                  <a:lnTo>
+                    <a:pt x="0" y="323681"/>
+                  </a:lnTo>
+                  <a:cubicBezTo>
+                    <a:pt x="0" y="144917"/>
+                    <a:pt x="144917" y="0"/>
+                    <a:pt x="323681" y="0"/>
+                  </a:cubicBezTo>
+                  <a:close/>
+                </a:path>
+              </a:pathLst>
+            </a:custGeom>
+            <a:solidFill>
+              <a:srgbClr val="FFFFFF"/>
+            </a:solidFill>
+          </p:spPr>
+        </p:sp>
+      </p:grpSp>
+      <p:sp>
+        <p:nvSpPr>
+          <p:cNvPr name="TextBox 6" id="6"/>
+          <p:cNvSpPr txBox="true"/>
+          <p:nvPr/>
+        </p:nvSpPr>
+        <p:spPr>
+          <a:xfrm rot="0">
+            <a:off x="14358195" y="2400719"/>
+            <a:ext cx="87106" cy="420567"/>
+          </a:xfrm>
+          <a:prstGeom prst="rect">
+            <a:avLst/>
+          </a:prstGeom>
+        </p:spPr>
+        <p:txBody>
+          <a:bodyPr anchor="t" rtlCol="false" tIns="0" lIns="0" bIns="0" rIns="0">
+            <a:spAutoFit/>
+          </a:bodyPr>
+          <a:lstStyle/>
+          <a:p>
+            <a:pPr algn="l">
+              <a:lnSpc>
+                <a:spcPts val="3499"/>
+              </a:lnSpc>
+            </a:pPr>
+            <a:r>
+              <a:rPr lang="en-US" b="true" sz="2499">
+                <a:solidFill>
+                  <a:srgbClr val="F5E8C7"/>
+                </a:solidFill>
+                <a:latin typeface="Montserrat Medium"/>
+                <a:ea typeface="Montserrat Medium"/>
+                <a:cs typeface="Montserrat Medium"/>
+                <a:sym typeface="Montserrat Medium"/>
+              </a:rPr>
+              <a:t> </a:t>
+            </a:r>
+          </a:p>
+        </p:txBody>
+      </p:sp>
+      <p:sp>
+        <p:nvSpPr>
+          <p:cNvPr name="TextBox 7" id="7"/>
+          <p:cNvSpPr txBox="true"/>
+          <p:nvPr/>
+        </p:nvSpPr>
+        <p:spPr>
+          <a:xfrm rot="0">
+            <a:off x="14101743" y="2838869"/>
+            <a:ext cx="87106" cy="420567"/>
+          </a:xfrm>
+          <a:prstGeom prst="rect">
+            <a:avLst/>
+          </a:prstGeom>
+        </p:spPr>
+        <p:txBody>
+          <a:bodyPr anchor="t" rtlCol="false" tIns="0" lIns="0" bIns="0" rIns="0">
+            <a:spAutoFit/>
+          </a:bodyPr>
+          <a:lstStyle/>
+          <a:p>
+            <a:pPr algn="l">
+              <a:lnSpc>
+                <a:spcPts val="3499"/>
+              </a:lnSpc>
+            </a:pPr>
+            <a:r>
+              <a:rPr lang="en-US" b="true" sz="2499">
+                <a:solidFill>
+                  <a:srgbClr val="F5E8C7"/>
+                </a:solidFill>
+                <a:latin typeface="Montserrat Medium"/>
+                <a:ea typeface="Montserrat Medium"/>
+                <a:cs typeface="Montserrat Medium"/>
+                <a:sym typeface="Montserrat Medium"/>
+              </a:rPr>
+              <a:t> </a:t>
+            </a:r>
+          </a:p>
+        </p:txBody>
+      </p:sp>
+      <p:sp>
+        <p:nvSpPr>
+          <p:cNvPr name="TextBox 8" id="8"/>
+          <p:cNvSpPr txBox="true"/>
+          <p:nvPr/>
+        </p:nvSpPr>
+        <p:spPr>
+          <a:xfrm rot="0">
+            <a:off x="10334216" y="3207030"/>
+            <a:ext cx="6857645" cy="838206"/>
+          </a:xfrm>
+          <a:prstGeom prst="rect">
+            <a:avLst/>
+          </a:prstGeom>
+        </p:spPr>
+        <p:txBody>
+          <a:bodyPr anchor="t" rtlCol="false" tIns="0" lIns="0" bIns="0" rIns="0">
+            <a:spAutoFit/>
+          </a:bodyPr>
+          <a:lstStyle/>
+          <a:p>
+            <a:pPr algn="l">
+              <a:lnSpc>
+                <a:spcPts val="3449"/>
+              </a:lnSpc>
+            </a:pPr>
+            <a:r>
+              <a:rPr lang="en-US" b="true" sz="2499">
+                <a:solidFill>
+                  <a:srgbClr val="47423E"/>
+                </a:solidFill>
+                <a:latin typeface="Montserrat Bold"/>
+                <a:ea typeface="Montserrat Bold"/>
+                <a:cs typeface="Montserrat Bold"/>
+                <a:sym typeface="Montserrat Bold"/>
+              </a:rPr>
+              <a:t>Ogarnização em diferentes niveis, desde a interface de usuário até o back-end</a:t>
+            </a:r>
+          </a:p>
+        </p:txBody>
+      </p:sp>
+      <p:grpSp>
+        <p:nvGrpSpPr>
+          <p:cNvPr name="Group 9" id="9"/>
+          <p:cNvGrpSpPr/>
+          <p:nvPr/>
+        </p:nvGrpSpPr>
+        <p:grpSpPr>
+          <a:xfrm rot="0">
+            <a:off x="10174600" y="5143500"/>
+            <a:ext cx="6628999" cy="1538586"/>
+            <a:chOff x="0" y="0"/>
+            <a:chExt cx="14430129" cy="3349233"/>
+          </a:xfrm>
+        </p:grpSpPr>
+        <p:sp>
+          <p:nvSpPr>
+            <p:cNvPr name="Freeform 10" id="10"/>
+            <p:cNvSpPr/>
+            <p:nvPr/>
+          </p:nvSpPr>
+          <p:spPr>
+            <a:xfrm flipH="false" flipV="false" rot="0">
+              <a:off x="0" y="0"/>
+              <a:ext cx="14430012" cy="3349175"/>
+            </a:xfrm>
+            <a:custGeom>
+              <a:avLst/>
+              <a:gdLst/>
+              <a:ahLst/>
+              <a:cxnLst/>
+              <a:rect r="r" b="b" t="t" l="l"/>
+              <a:pathLst>
+                <a:path h="3349175" w="14430012">
+                  <a:moveTo>
+                    <a:pt x="350433" y="0"/>
+                  </a:moveTo>
+                  <a:lnTo>
+                    <a:pt x="14079579" y="0"/>
+                  </a:lnTo>
+                  <a:cubicBezTo>
+                    <a:pt x="14172519" y="0"/>
+                    <a:pt x="14261654" y="36921"/>
+                    <a:pt x="14327374" y="102639"/>
+                  </a:cubicBezTo>
+                  <a:cubicBezTo>
+                    <a:pt x="14393092" y="168358"/>
+                    <a:pt x="14430012" y="257492"/>
+                    <a:pt x="14430012" y="350433"/>
+                  </a:cubicBezTo>
+                  <a:lnTo>
+                    <a:pt x="14430012" y="2998742"/>
+                  </a:lnTo>
+                  <a:cubicBezTo>
+                    <a:pt x="14430012" y="3192281"/>
+                    <a:pt x="14273118" y="3349175"/>
+                    <a:pt x="14079579" y="3349175"/>
+                  </a:cubicBezTo>
+                  <a:lnTo>
+                    <a:pt x="350433" y="3349175"/>
+                  </a:lnTo>
+                  <a:cubicBezTo>
+                    <a:pt x="156894" y="3349175"/>
+                    <a:pt x="0" y="3192281"/>
+                    <a:pt x="0" y="2998742"/>
+                  </a:cubicBezTo>
+                  <a:lnTo>
+                    <a:pt x="0" y="350433"/>
+                  </a:lnTo>
+                  <a:cubicBezTo>
+                    <a:pt x="0" y="156894"/>
+                    <a:pt x="156894" y="0"/>
+                    <a:pt x="350433" y="0"/>
+                  </a:cubicBezTo>
+                  <a:close/>
+                </a:path>
+              </a:pathLst>
+            </a:custGeom>
+            <a:solidFill>
+              <a:srgbClr val="FFFFFF"/>
+            </a:solidFill>
+          </p:spPr>
+        </p:sp>
+      </p:grpSp>
+      <p:sp>
+        <p:nvSpPr>
+          <p:cNvPr name="TextBox 11" id="11"/>
+          <p:cNvSpPr txBox="true"/>
+          <p:nvPr/>
+        </p:nvSpPr>
+        <p:spPr>
+          <a:xfrm rot="0">
+            <a:off x="10170797" y="5191972"/>
+            <a:ext cx="6453645" cy="1266831"/>
+          </a:xfrm>
+          <a:prstGeom prst="rect">
+            <a:avLst/>
+          </a:prstGeom>
+        </p:spPr>
+        <p:txBody>
+          <a:bodyPr anchor="t" rtlCol="false" tIns="0" lIns="0" bIns="0" rIns="0">
+            <a:spAutoFit/>
+          </a:bodyPr>
+          <a:lstStyle/>
+          <a:p>
+            <a:pPr algn="ctr">
+              <a:lnSpc>
+                <a:spcPts val="3449"/>
+              </a:lnSpc>
+            </a:pPr>
+            <a:r>
+              <a:rPr lang="en-US" b="true" sz="2499">
+                <a:solidFill>
+                  <a:srgbClr val="47423E"/>
+                </a:solidFill>
+                <a:latin typeface="Montserrat Bold"/>
+                <a:ea typeface="Montserrat Bold"/>
+                <a:cs typeface="Montserrat Bold"/>
+                <a:sym typeface="Montserrat Bold"/>
+              </a:rPr>
+              <a:t>A organização em camadas permite uma manutenção e atualização do sistema facilitada </a:t>
+            </a:r>
+          </a:p>
+        </p:txBody>
+      </p:sp>
+    </p:spTree>
+  </p:cSld>
+  <p:clrMapOvr>
+    <a:masterClrMapping/>
+  </p:clrMapOvr>
+</p:sld>
+</file>
+
+<file path=ppt/slides/slide12.xml><?xml version="1.0" encoding="utf-8"?>
+<p:sld xmlns:p="http://schemas.openxmlformats.org/presentationml/2006/main" xmlns:a="http://schemas.openxmlformats.org/drawingml/2006/main" xmlns:r="http://schemas.openxmlformats.org/officeDocument/2006/relationships">
+  <p:cSld>
+    <p:bg>
+      <p:bgPr>
+        <a:solidFill>
+          <a:srgbClr val="1E3A8A"/>
+        </a:solidFill>
+      </p:bgPr>
+    </p:bg>
+    <p:spTree>
+      <p:nvGrpSpPr>
+        <p:cNvPr id="1" name=""/>
+        <p:cNvGrpSpPr/>
+        <p:nvPr/>
+      </p:nvGrpSpPr>
+      <p:grpSpPr>
+        <a:xfrm>
+          <a:off x="0" y="0"/>
+          <a:ext cx="0" cy="0"/>
+          <a:chOff x="0" y="0"/>
+          <a:chExt cx="0" cy="0"/>
+        </a:xfrm>
+      </p:grpSpPr>
+      <p:sp>
+        <p:nvSpPr>
+          <p:cNvPr name="Freeform 2" id="2"/>
+          <p:cNvSpPr/>
+          <p:nvPr/>
+        </p:nvSpPr>
+        <p:spPr>
+          <a:xfrm flipH="false" flipV="false" rot="0">
+            <a:off x="581692" y="2438819"/>
+            <a:ext cx="7950449" cy="5972775"/>
+          </a:xfrm>
+          <a:custGeom>
+            <a:avLst/>
+            <a:gdLst/>
+            <a:ahLst/>
+            <a:cxnLst/>
+            <a:rect r="r" b="b" t="t" l="l"/>
+            <a:pathLst>
+              <a:path h="5972775" w="7950449">
+                <a:moveTo>
+                  <a:pt x="0" y="0"/>
+                </a:moveTo>
+                <a:lnTo>
+                  <a:pt x="7950449" y="0"/>
+                </a:lnTo>
+                <a:lnTo>
+                  <a:pt x="7950449" y="5972775"/>
+                </a:lnTo>
+                <a:lnTo>
+                  <a:pt x="0" y="5972775"/>
+                </a:lnTo>
+                <a:lnTo>
+                  <a:pt x="0" y="0"/>
+                </a:lnTo>
+                <a:close/>
+              </a:path>
+            </a:pathLst>
+          </a:custGeom>
+          <a:blipFill>
+            <a:blip r:embed="rId2"/>
+            <a:stretch>
+              <a:fillRect l="0" t="0" r="0" b="0"/>
+            </a:stretch>
+          </a:blipFill>
+        </p:spPr>
+      </p:sp>
+      <p:sp>
+        <p:nvSpPr>
+          <p:cNvPr name="TextBox 3" id="3"/>
+          <p:cNvSpPr txBox="true"/>
+          <p:nvPr/>
+        </p:nvSpPr>
+        <p:spPr>
+          <a:xfrm rot="0">
+            <a:off x="581692" y="102832"/>
+            <a:ext cx="10053003" cy="1808841"/>
+          </a:xfrm>
+          <a:prstGeom prst="rect">
+            <a:avLst/>
+          </a:prstGeom>
+        </p:spPr>
+        <p:txBody>
+          <a:bodyPr anchor="t" rtlCol="false" tIns="0" lIns="0" bIns="0" rIns="0">
+            <a:spAutoFit/>
+          </a:bodyPr>
+          <a:lstStyle/>
+          <a:p>
+            <a:pPr algn="l">
+              <a:lnSpc>
+                <a:spcPts val="14750"/>
+              </a:lnSpc>
+            </a:pPr>
+            <a:r>
+              <a:rPr lang="en-US" sz="10535">
+                <a:solidFill>
+                  <a:srgbClr val="FFFFFF"/>
+                </a:solidFill>
+                <a:latin typeface="Anton"/>
+                <a:ea typeface="Anton"/>
+                <a:cs typeface="Anton"/>
+                <a:sym typeface="Anton"/>
+              </a:rPr>
+              <a:t>6</a:t>
+            </a:r>
+            <a:r>
+              <a:rPr lang="en-US" sz="10535">
+                <a:solidFill>
+                  <a:srgbClr val="FFFFFF"/>
+                </a:solidFill>
+                <a:latin typeface="Anton"/>
+                <a:ea typeface="Anton"/>
+                <a:cs typeface="Anton"/>
+                <a:sym typeface="Anton"/>
+              </a:rPr>
+              <a:t>. CLiente-servidor</a:t>
             </a:r>
           </a:p>
         </p:txBody>
@@ -3879,6 +4529,84 @@
           </a:p>
         </p:txBody>
       </p:sp>
+      <p:grpSp>
+        <p:nvGrpSpPr>
+          <p:cNvPr name="Group 8" id="8"/>
+          <p:cNvGrpSpPr/>
+          <p:nvPr/>
+        </p:nvGrpSpPr>
+        <p:grpSpPr>
+          <a:xfrm rot="0">
+            <a:off x="733101" y="7691171"/>
+            <a:ext cx="5719590" cy="1665748"/>
+            <a:chOff x="0" y="0"/>
+            <a:chExt cx="11500046" cy="3349233"/>
+          </a:xfrm>
+        </p:grpSpPr>
+        <p:sp>
+          <p:nvSpPr>
+            <p:cNvPr name="Freeform 9" id="9"/>
+            <p:cNvSpPr/>
+            <p:nvPr/>
+          </p:nvSpPr>
+          <p:spPr>
+            <a:xfrm flipH="false" flipV="false" rot="0">
+              <a:off x="0" y="0"/>
+              <a:ext cx="11499952" cy="3349175"/>
+            </a:xfrm>
+            <a:custGeom>
+              <a:avLst/>
+              <a:gdLst/>
+              <a:ahLst/>
+              <a:cxnLst/>
+              <a:rect r="r" b="b" t="t" l="l"/>
+              <a:pathLst>
+                <a:path h="3349175" w="11499952">
+                  <a:moveTo>
+                    <a:pt x="406152" y="0"/>
+                  </a:moveTo>
+                  <a:lnTo>
+                    <a:pt x="11093800" y="0"/>
+                  </a:lnTo>
+                  <a:cubicBezTo>
+                    <a:pt x="11318112" y="0"/>
+                    <a:pt x="11499952" y="181840"/>
+                    <a:pt x="11499952" y="406152"/>
+                  </a:cubicBezTo>
+                  <a:lnTo>
+                    <a:pt x="11499952" y="2943024"/>
+                  </a:lnTo>
+                  <a:cubicBezTo>
+                    <a:pt x="11499952" y="3167335"/>
+                    <a:pt x="11318112" y="3349175"/>
+                    <a:pt x="11093800" y="3349175"/>
+                  </a:cubicBezTo>
+                  <a:lnTo>
+                    <a:pt x="406152" y="3349175"/>
+                  </a:lnTo>
+                  <a:cubicBezTo>
+                    <a:pt x="181840" y="3349175"/>
+                    <a:pt x="0" y="3167335"/>
+                    <a:pt x="0" y="2943024"/>
+                  </a:cubicBezTo>
+                  <a:lnTo>
+                    <a:pt x="0" y="406152"/>
+                  </a:lnTo>
+                  <a:cubicBezTo>
+                    <a:pt x="0" y="181840"/>
+                    <a:pt x="181840" y="0"/>
+                    <a:pt x="406152" y="0"/>
+                  </a:cubicBezTo>
+                  <a:close/>
+                </a:path>
+              </a:pathLst>
+            </a:custGeom>
+            <a:solidFill>
+              <a:srgbClr val="FFFFFF"/>
+            </a:solidFill>
+          </p:spPr>
+        </p:sp>
+      </p:grpSp>
     </p:spTree>
   </p:cSld>
   <p:clrMapOvr>
@@ -3887,8 +4615,8 @@
 </p:sld>
 </file>
 
-<file path=ppt/slides/slide12.xml><?xml version="1.0" encoding="utf-8"?>
-<p:sld xmlns:p="http://schemas.openxmlformats.org/presentationml/2006/main" xmlns:a="http://schemas.openxmlformats.org/drawingml/2006/main">
+<file path=ppt/slides/slide13.xml><?xml version="1.0" encoding="utf-8"?>
+<p:sld xmlns:p="http://schemas.openxmlformats.org/presentationml/2006/main" xmlns:a="http://schemas.openxmlformats.org/drawingml/2006/main" xmlns:r="http://schemas.openxmlformats.org/officeDocument/2006/relationships">
   <p:cSld>
     <p:bg>
       <p:bgPr>
@@ -3911,6 +4639,347 @@
           <a:chExt cx="0" cy="0"/>
         </a:xfrm>
       </p:grpSpPr>
+      <p:sp>
+        <p:nvSpPr>
+          <p:cNvPr name="Freeform 2" id="2"/>
+          <p:cNvSpPr/>
+          <p:nvPr/>
+        </p:nvSpPr>
+        <p:spPr>
+          <a:xfrm flipH="false" flipV="false" rot="0">
+            <a:off x="404427" y="2727019"/>
+            <a:ext cx="9711652" cy="3968589"/>
+          </a:xfrm>
+          <a:custGeom>
+            <a:avLst/>
+            <a:gdLst/>
+            <a:ahLst/>
+            <a:cxnLst/>
+            <a:rect r="r" b="b" t="t" l="l"/>
+            <a:pathLst>
+              <a:path h="3968589" w="9711652">
+                <a:moveTo>
+                  <a:pt x="0" y="0"/>
+                </a:moveTo>
+                <a:lnTo>
+                  <a:pt x="9711652" y="0"/>
+                </a:lnTo>
+                <a:lnTo>
+                  <a:pt x="9711652" y="3968588"/>
+                </a:lnTo>
+                <a:lnTo>
+                  <a:pt x="0" y="3968588"/>
+                </a:lnTo>
+                <a:lnTo>
+                  <a:pt x="0" y="0"/>
+                </a:lnTo>
+                <a:close/>
+              </a:path>
+            </a:pathLst>
+          </a:custGeom>
+          <a:blipFill>
+            <a:blip r:embed="rId2"/>
+            <a:stretch>
+              <a:fillRect l="0" t="0" r="0" b="0"/>
+            </a:stretch>
+          </a:blipFill>
+        </p:spPr>
+      </p:sp>
+      <p:sp>
+        <p:nvSpPr>
+          <p:cNvPr name="TextBox 3" id="3"/>
+          <p:cNvSpPr txBox="true"/>
+          <p:nvPr/>
+        </p:nvSpPr>
+        <p:spPr>
+          <a:xfrm rot="0">
+            <a:off x="581692" y="102832"/>
+            <a:ext cx="12455207" cy="1808841"/>
+          </a:xfrm>
+          <a:prstGeom prst="rect">
+            <a:avLst/>
+          </a:prstGeom>
+        </p:spPr>
+        <p:txBody>
+          <a:bodyPr anchor="t" rtlCol="false" tIns="0" lIns="0" bIns="0" rIns="0">
+            <a:spAutoFit/>
+          </a:bodyPr>
+          <a:lstStyle/>
+          <a:p>
+            <a:pPr algn="l">
+              <a:lnSpc>
+                <a:spcPts val="14750"/>
+              </a:lnSpc>
+            </a:pPr>
+            <a:r>
+              <a:rPr lang="en-US" sz="10535">
+                <a:solidFill>
+                  <a:srgbClr val="FFFFFF"/>
+                </a:solidFill>
+                <a:latin typeface="Anton"/>
+                <a:ea typeface="Anton"/>
+                <a:cs typeface="Anton"/>
+                <a:sym typeface="Anton"/>
+              </a:rPr>
+              <a:t>7. </a:t>
+            </a:r>
+            <a:r>
+              <a:rPr lang="en-US" sz="10535">
+                <a:solidFill>
+                  <a:srgbClr val="FFFFFF"/>
+                </a:solidFill>
+                <a:latin typeface="Anton"/>
+                <a:ea typeface="Anton"/>
+                <a:cs typeface="Anton"/>
+                <a:sym typeface="Anton"/>
+              </a:rPr>
+              <a:t>Pipes-and-filters (PF)</a:t>
+            </a:r>
+          </a:p>
+        </p:txBody>
+      </p:sp>
+      <p:sp>
+        <p:nvSpPr>
+          <p:cNvPr name="TextBox 4" id="4"/>
+          <p:cNvSpPr txBox="true"/>
+          <p:nvPr/>
+        </p:nvSpPr>
+        <p:spPr>
+          <a:xfrm rot="0">
+            <a:off x="14358195" y="2400719"/>
+            <a:ext cx="87106" cy="420567"/>
+          </a:xfrm>
+          <a:prstGeom prst="rect">
+            <a:avLst/>
+          </a:prstGeom>
+        </p:spPr>
+        <p:txBody>
+          <a:bodyPr anchor="t" rtlCol="false" tIns="0" lIns="0" bIns="0" rIns="0">
+            <a:spAutoFit/>
+          </a:bodyPr>
+          <a:lstStyle/>
+          <a:p>
+            <a:pPr algn="l">
+              <a:lnSpc>
+                <a:spcPts val="3499"/>
+              </a:lnSpc>
+            </a:pPr>
+            <a:r>
+              <a:rPr lang="en-US" b="true" sz="2499">
+                <a:solidFill>
+                  <a:srgbClr val="F5E8C7"/>
+                </a:solidFill>
+                <a:latin typeface="Montserrat Medium"/>
+                <a:ea typeface="Montserrat Medium"/>
+                <a:cs typeface="Montserrat Medium"/>
+                <a:sym typeface="Montserrat Medium"/>
+              </a:rPr>
+              <a:t> </a:t>
+            </a:r>
+          </a:p>
+        </p:txBody>
+      </p:sp>
+      <p:sp>
+        <p:nvSpPr>
+          <p:cNvPr name="TextBox 5" id="5"/>
+          <p:cNvSpPr txBox="true"/>
+          <p:nvPr/>
+        </p:nvSpPr>
+        <p:spPr>
+          <a:xfrm rot="0">
+            <a:off x="14101743" y="2838869"/>
+            <a:ext cx="87106" cy="420567"/>
+          </a:xfrm>
+          <a:prstGeom prst="rect">
+            <a:avLst/>
+          </a:prstGeom>
+        </p:spPr>
+        <p:txBody>
+          <a:bodyPr anchor="t" rtlCol="false" tIns="0" lIns="0" bIns="0" rIns="0">
+            <a:spAutoFit/>
+          </a:bodyPr>
+          <a:lstStyle/>
+          <a:p>
+            <a:pPr algn="l">
+              <a:lnSpc>
+                <a:spcPts val="3499"/>
+              </a:lnSpc>
+            </a:pPr>
+            <a:r>
+              <a:rPr lang="en-US" b="true" sz="2499">
+                <a:solidFill>
+                  <a:srgbClr val="F5E8C7"/>
+                </a:solidFill>
+                <a:latin typeface="Montserrat Medium"/>
+                <a:ea typeface="Montserrat Medium"/>
+                <a:cs typeface="Montserrat Medium"/>
+                <a:sym typeface="Montserrat Medium"/>
+              </a:rPr>
+              <a:t> </a:t>
+            </a:r>
+          </a:p>
+        </p:txBody>
+      </p:sp>
+      <p:sp>
+        <p:nvSpPr>
+          <p:cNvPr name="TextBox 6" id="6"/>
+          <p:cNvSpPr txBox="true"/>
+          <p:nvPr/>
+        </p:nvSpPr>
+        <p:spPr>
+          <a:xfrm rot="0">
+            <a:off x="10805655" y="2838869"/>
+            <a:ext cx="6453645" cy="1266831"/>
+          </a:xfrm>
+          <a:prstGeom prst="rect">
+            <a:avLst/>
+          </a:prstGeom>
+        </p:spPr>
+        <p:txBody>
+          <a:bodyPr anchor="t" rtlCol="false" tIns="0" lIns="0" bIns="0" rIns="0">
+            <a:spAutoFit/>
+          </a:bodyPr>
+          <a:lstStyle/>
+          <a:p>
+            <a:pPr algn="ctr">
+              <a:lnSpc>
+                <a:spcPts val="3449"/>
+              </a:lnSpc>
+            </a:pPr>
+            <a:r>
+              <a:rPr lang="en-US" b="true" sz="2499">
+                <a:solidFill>
+                  <a:srgbClr val="F5E8C7"/>
+                </a:solidFill>
+                <a:latin typeface="Montserrat Medium"/>
+                <a:ea typeface="Montserrat Medium"/>
+                <a:cs typeface="Montserrat Medium"/>
+                <a:sym typeface="Montserrat Medium"/>
+              </a:rPr>
+              <a:t>Ogarnização em diferentes niveis, desde a interface de usuário até o back-end</a:t>
+            </a:r>
+          </a:p>
+        </p:txBody>
+      </p:sp>
+      <p:sp>
+        <p:nvSpPr>
+          <p:cNvPr name="TextBox 7" id="7"/>
+          <p:cNvSpPr txBox="true"/>
+          <p:nvPr/>
+        </p:nvSpPr>
+        <p:spPr>
+          <a:xfrm rot="0">
+            <a:off x="10805655" y="5105400"/>
+            <a:ext cx="6453645" cy="1266831"/>
+          </a:xfrm>
+          <a:prstGeom prst="rect">
+            <a:avLst/>
+          </a:prstGeom>
+        </p:spPr>
+        <p:txBody>
+          <a:bodyPr anchor="t" rtlCol="false" tIns="0" lIns="0" bIns="0" rIns="0">
+            <a:spAutoFit/>
+          </a:bodyPr>
+          <a:lstStyle/>
+          <a:p>
+            <a:pPr algn="ctr">
+              <a:lnSpc>
+                <a:spcPts val="3449"/>
+              </a:lnSpc>
+            </a:pPr>
+            <a:r>
+              <a:rPr lang="en-US" b="true" sz="2499">
+                <a:solidFill>
+                  <a:srgbClr val="F5E8C7"/>
+                </a:solidFill>
+                <a:latin typeface="Montserrat Medium"/>
+                <a:ea typeface="Montserrat Medium"/>
+                <a:cs typeface="Montserrat Medium"/>
+                <a:sym typeface="Montserrat Medium"/>
+              </a:rPr>
+              <a:t>A organização em camadas permite uma manutenção e atualização do sistema facilitada </a:t>
+            </a:r>
+          </a:p>
+        </p:txBody>
+      </p:sp>
+      <p:grpSp>
+        <p:nvGrpSpPr>
+          <p:cNvPr name="Group 8" id="8"/>
+          <p:cNvGrpSpPr/>
+          <p:nvPr/>
+        </p:nvGrpSpPr>
+        <p:grpSpPr>
+          <a:xfrm rot="0">
+            <a:off x="733101" y="7691171"/>
+            <a:ext cx="5719590" cy="1665748"/>
+            <a:chOff x="0" y="0"/>
+            <a:chExt cx="11500046" cy="3349233"/>
+          </a:xfrm>
+        </p:grpSpPr>
+        <p:sp>
+          <p:nvSpPr>
+            <p:cNvPr name="Freeform 9" id="9"/>
+            <p:cNvSpPr/>
+            <p:nvPr/>
+          </p:nvSpPr>
+          <p:spPr>
+            <a:xfrm flipH="false" flipV="false" rot="0">
+              <a:off x="0" y="0"/>
+              <a:ext cx="11499952" cy="3349175"/>
+            </a:xfrm>
+            <a:custGeom>
+              <a:avLst/>
+              <a:gdLst/>
+              <a:ahLst/>
+              <a:cxnLst/>
+              <a:rect r="r" b="b" t="t" l="l"/>
+              <a:pathLst>
+                <a:path h="3349175" w="11499952">
+                  <a:moveTo>
+                    <a:pt x="406152" y="0"/>
+                  </a:moveTo>
+                  <a:lnTo>
+                    <a:pt x="11093800" y="0"/>
+                  </a:lnTo>
+                  <a:cubicBezTo>
+                    <a:pt x="11318112" y="0"/>
+                    <a:pt x="11499952" y="181840"/>
+                    <a:pt x="11499952" y="406152"/>
+                  </a:cubicBezTo>
+                  <a:lnTo>
+                    <a:pt x="11499952" y="2943024"/>
+                  </a:lnTo>
+                  <a:cubicBezTo>
+                    <a:pt x="11499952" y="3167335"/>
+                    <a:pt x="11318112" y="3349175"/>
+                    <a:pt x="11093800" y="3349175"/>
+                  </a:cubicBezTo>
+                  <a:lnTo>
+                    <a:pt x="406152" y="3349175"/>
+                  </a:lnTo>
+                  <a:cubicBezTo>
+                    <a:pt x="181840" y="3349175"/>
+                    <a:pt x="0" y="3167335"/>
+                    <a:pt x="0" y="2943024"/>
+                  </a:cubicBezTo>
+                  <a:lnTo>
+                    <a:pt x="0" y="406152"/>
+                  </a:lnTo>
+                  <a:cubicBezTo>
+                    <a:pt x="0" y="181840"/>
+                    <a:pt x="181840" y="0"/>
+                    <a:pt x="406152" y="0"/>
+                  </a:cubicBezTo>
+                  <a:close/>
+                </a:path>
+              </a:pathLst>
+            </a:custGeom>
+            <a:solidFill>
+              <a:srgbClr val="FFFFFF"/>
+            </a:solidFill>
+          </p:spPr>
+        </p:sp>
+      </p:grpSp>
     </p:spTree>
   </p:cSld>
   <p:clrMapOvr>
@@ -3919,8 +4988,8 @@
 </p:sld>
 </file>
 
-<file path=ppt/slides/slide13.xml><?xml version="1.0" encoding="utf-8"?>
-<p:sld xmlns:p="http://schemas.openxmlformats.org/presentationml/2006/main" xmlns:a="http://schemas.openxmlformats.org/drawingml/2006/main">
+<file path=ppt/slides/slide14.xml><?xml version="1.0" encoding="utf-8"?>
+<p:sld xmlns:p="http://schemas.openxmlformats.org/presentationml/2006/main" xmlns:a="http://schemas.openxmlformats.org/drawingml/2006/main" xmlns:r="http://schemas.openxmlformats.org/officeDocument/2006/relationships">
   <p:cSld>
     <p:bg>
       <p:bgPr>
@@ -3943,6 +5012,347 @@
           <a:chExt cx="0" cy="0"/>
         </a:xfrm>
       </p:grpSpPr>
+      <p:sp>
+        <p:nvSpPr>
+          <p:cNvPr name="Freeform 2" id="2"/>
+          <p:cNvSpPr/>
+          <p:nvPr/>
+        </p:nvSpPr>
+        <p:spPr>
+          <a:xfrm flipH="false" flipV="false" rot="0">
+            <a:off x="235596" y="2630053"/>
+            <a:ext cx="9354889" cy="5262125"/>
+          </a:xfrm>
+          <a:custGeom>
+            <a:avLst/>
+            <a:gdLst/>
+            <a:ahLst/>
+            <a:cxnLst/>
+            <a:rect r="r" b="b" t="t" l="l"/>
+            <a:pathLst>
+              <a:path h="5262125" w="9354889">
+                <a:moveTo>
+                  <a:pt x="0" y="0"/>
+                </a:moveTo>
+                <a:lnTo>
+                  <a:pt x="9354889" y="0"/>
+                </a:lnTo>
+                <a:lnTo>
+                  <a:pt x="9354889" y="5262124"/>
+                </a:lnTo>
+                <a:lnTo>
+                  <a:pt x="0" y="5262124"/>
+                </a:lnTo>
+                <a:lnTo>
+                  <a:pt x="0" y="0"/>
+                </a:lnTo>
+                <a:close/>
+              </a:path>
+            </a:pathLst>
+          </a:custGeom>
+          <a:blipFill>
+            <a:blip r:embed="rId2"/>
+            <a:stretch>
+              <a:fillRect l="0" t="0" r="0" b="0"/>
+            </a:stretch>
+          </a:blipFill>
+        </p:spPr>
+      </p:sp>
+      <p:sp>
+        <p:nvSpPr>
+          <p:cNvPr name="TextBox 3" id="3"/>
+          <p:cNvSpPr txBox="true"/>
+          <p:nvPr/>
+        </p:nvSpPr>
+        <p:spPr>
+          <a:xfrm rot="0">
+            <a:off x="581692" y="102832"/>
+            <a:ext cx="11996420" cy="1808841"/>
+          </a:xfrm>
+          <a:prstGeom prst="rect">
+            <a:avLst/>
+          </a:prstGeom>
+        </p:spPr>
+        <p:txBody>
+          <a:bodyPr anchor="t" rtlCol="false" tIns="0" lIns="0" bIns="0" rIns="0">
+            <a:spAutoFit/>
+          </a:bodyPr>
+          <a:lstStyle/>
+          <a:p>
+            <a:pPr algn="l">
+              <a:lnSpc>
+                <a:spcPts val="14750"/>
+              </a:lnSpc>
+            </a:pPr>
+            <a:r>
+              <a:rPr lang="en-US" sz="10535">
+                <a:solidFill>
+                  <a:srgbClr val="FFFFFF"/>
+                </a:solidFill>
+                <a:latin typeface="Anton"/>
+                <a:ea typeface="Anton"/>
+                <a:cs typeface="Anton"/>
+                <a:sym typeface="Anton"/>
+              </a:rPr>
+              <a:t>8</a:t>
+            </a:r>
+            <a:r>
+              <a:rPr lang="en-US" sz="10535">
+                <a:solidFill>
+                  <a:srgbClr val="FFFFFF"/>
+                </a:solidFill>
+                <a:latin typeface="Anton"/>
+                <a:ea typeface="Anton"/>
+                <a:cs typeface="Anton"/>
+                <a:sym typeface="Anton"/>
+              </a:rPr>
+              <a:t>. Orientado a eventos</a:t>
+            </a:r>
+          </a:p>
+        </p:txBody>
+      </p:sp>
+      <p:sp>
+        <p:nvSpPr>
+          <p:cNvPr name="TextBox 4" id="4"/>
+          <p:cNvSpPr txBox="true"/>
+          <p:nvPr/>
+        </p:nvSpPr>
+        <p:spPr>
+          <a:xfrm rot="0">
+            <a:off x="14358195" y="2400719"/>
+            <a:ext cx="87106" cy="420567"/>
+          </a:xfrm>
+          <a:prstGeom prst="rect">
+            <a:avLst/>
+          </a:prstGeom>
+        </p:spPr>
+        <p:txBody>
+          <a:bodyPr anchor="t" rtlCol="false" tIns="0" lIns="0" bIns="0" rIns="0">
+            <a:spAutoFit/>
+          </a:bodyPr>
+          <a:lstStyle/>
+          <a:p>
+            <a:pPr algn="l">
+              <a:lnSpc>
+                <a:spcPts val="3499"/>
+              </a:lnSpc>
+            </a:pPr>
+            <a:r>
+              <a:rPr lang="en-US" b="true" sz="2499">
+                <a:solidFill>
+                  <a:srgbClr val="F5E8C7"/>
+                </a:solidFill>
+                <a:latin typeface="Montserrat Medium"/>
+                <a:ea typeface="Montserrat Medium"/>
+                <a:cs typeface="Montserrat Medium"/>
+                <a:sym typeface="Montserrat Medium"/>
+              </a:rPr>
+              <a:t> </a:t>
+            </a:r>
+          </a:p>
+        </p:txBody>
+      </p:sp>
+      <p:sp>
+        <p:nvSpPr>
+          <p:cNvPr name="TextBox 5" id="5"/>
+          <p:cNvSpPr txBox="true"/>
+          <p:nvPr/>
+        </p:nvSpPr>
+        <p:spPr>
+          <a:xfrm rot="0">
+            <a:off x="14101743" y="2838869"/>
+            <a:ext cx="87106" cy="420567"/>
+          </a:xfrm>
+          <a:prstGeom prst="rect">
+            <a:avLst/>
+          </a:prstGeom>
+        </p:spPr>
+        <p:txBody>
+          <a:bodyPr anchor="t" rtlCol="false" tIns="0" lIns="0" bIns="0" rIns="0">
+            <a:spAutoFit/>
+          </a:bodyPr>
+          <a:lstStyle/>
+          <a:p>
+            <a:pPr algn="l">
+              <a:lnSpc>
+                <a:spcPts val="3499"/>
+              </a:lnSpc>
+            </a:pPr>
+            <a:r>
+              <a:rPr lang="en-US" b="true" sz="2499">
+                <a:solidFill>
+                  <a:srgbClr val="F5E8C7"/>
+                </a:solidFill>
+                <a:latin typeface="Montserrat Medium"/>
+                <a:ea typeface="Montserrat Medium"/>
+                <a:cs typeface="Montserrat Medium"/>
+                <a:sym typeface="Montserrat Medium"/>
+              </a:rPr>
+              <a:t> </a:t>
+            </a:r>
+          </a:p>
+        </p:txBody>
+      </p:sp>
+      <p:sp>
+        <p:nvSpPr>
+          <p:cNvPr name="TextBox 6" id="6"/>
+          <p:cNvSpPr txBox="true"/>
+          <p:nvPr/>
+        </p:nvSpPr>
+        <p:spPr>
+          <a:xfrm rot="0">
+            <a:off x="10805655" y="2838869"/>
+            <a:ext cx="6453645" cy="1266831"/>
+          </a:xfrm>
+          <a:prstGeom prst="rect">
+            <a:avLst/>
+          </a:prstGeom>
+        </p:spPr>
+        <p:txBody>
+          <a:bodyPr anchor="t" rtlCol="false" tIns="0" lIns="0" bIns="0" rIns="0">
+            <a:spAutoFit/>
+          </a:bodyPr>
+          <a:lstStyle/>
+          <a:p>
+            <a:pPr algn="ctr">
+              <a:lnSpc>
+                <a:spcPts val="3449"/>
+              </a:lnSpc>
+            </a:pPr>
+            <a:r>
+              <a:rPr lang="en-US" b="true" sz="2499">
+                <a:solidFill>
+                  <a:srgbClr val="F5E8C7"/>
+                </a:solidFill>
+                <a:latin typeface="Montserrat Medium"/>
+                <a:ea typeface="Montserrat Medium"/>
+                <a:cs typeface="Montserrat Medium"/>
+                <a:sym typeface="Montserrat Medium"/>
+              </a:rPr>
+              <a:t>Ogarnização em diferentes niveis, desde a interface de usuário até o back-end</a:t>
+            </a:r>
+          </a:p>
+        </p:txBody>
+      </p:sp>
+      <p:sp>
+        <p:nvSpPr>
+          <p:cNvPr name="TextBox 7" id="7"/>
+          <p:cNvSpPr txBox="true"/>
+          <p:nvPr/>
+        </p:nvSpPr>
+        <p:spPr>
+          <a:xfrm rot="0">
+            <a:off x="10805655" y="5105400"/>
+            <a:ext cx="6453645" cy="1266831"/>
+          </a:xfrm>
+          <a:prstGeom prst="rect">
+            <a:avLst/>
+          </a:prstGeom>
+        </p:spPr>
+        <p:txBody>
+          <a:bodyPr anchor="t" rtlCol="false" tIns="0" lIns="0" bIns="0" rIns="0">
+            <a:spAutoFit/>
+          </a:bodyPr>
+          <a:lstStyle/>
+          <a:p>
+            <a:pPr algn="ctr">
+              <a:lnSpc>
+                <a:spcPts val="3449"/>
+              </a:lnSpc>
+            </a:pPr>
+            <a:r>
+              <a:rPr lang="en-US" b="true" sz="2499">
+                <a:solidFill>
+                  <a:srgbClr val="F5E8C7"/>
+                </a:solidFill>
+                <a:latin typeface="Montserrat Medium"/>
+                <a:ea typeface="Montserrat Medium"/>
+                <a:cs typeface="Montserrat Medium"/>
+                <a:sym typeface="Montserrat Medium"/>
+              </a:rPr>
+              <a:t>A organização em camadas permite uma manutenção e atualização do sistema facilitada </a:t>
+            </a:r>
+          </a:p>
+        </p:txBody>
+      </p:sp>
+      <p:grpSp>
+        <p:nvGrpSpPr>
+          <p:cNvPr name="Group 8" id="8"/>
+          <p:cNvGrpSpPr/>
+          <p:nvPr/>
+        </p:nvGrpSpPr>
+        <p:grpSpPr>
+          <a:xfrm rot="0">
+            <a:off x="733101" y="7691171"/>
+            <a:ext cx="5719590" cy="1665748"/>
+            <a:chOff x="0" y="0"/>
+            <a:chExt cx="11500046" cy="3349233"/>
+          </a:xfrm>
+        </p:grpSpPr>
+        <p:sp>
+          <p:nvSpPr>
+            <p:cNvPr name="Freeform 9" id="9"/>
+            <p:cNvSpPr/>
+            <p:nvPr/>
+          </p:nvSpPr>
+          <p:spPr>
+            <a:xfrm flipH="false" flipV="false" rot="0">
+              <a:off x="0" y="0"/>
+              <a:ext cx="11499952" cy="3349175"/>
+            </a:xfrm>
+            <a:custGeom>
+              <a:avLst/>
+              <a:gdLst/>
+              <a:ahLst/>
+              <a:cxnLst/>
+              <a:rect r="r" b="b" t="t" l="l"/>
+              <a:pathLst>
+                <a:path h="3349175" w="11499952">
+                  <a:moveTo>
+                    <a:pt x="406152" y="0"/>
+                  </a:moveTo>
+                  <a:lnTo>
+                    <a:pt x="11093800" y="0"/>
+                  </a:lnTo>
+                  <a:cubicBezTo>
+                    <a:pt x="11318112" y="0"/>
+                    <a:pt x="11499952" y="181840"/>
+                    <a:pt x="11499952" y="406152"/>
+                  </a:cubicBezTo>
+                  <a:lnTo>
+                    <a:pt x="11499952" y="2943024"/>
+                  </a:lnTo>
+                  <a:cubicBezTo>
+                    <a:pt x="11499952" y="3167335"/>
+                    <a:pt x="11318112" y="3349175"/>
+                    <a:pt x="11093800" y="3349175"/>
+                  </a:cubicBezTo>
+                  <a:lnTo>
+                    <a:pt x="406152" y="3349175"/>
+                  </a:lnTo>
+                  <a:cubicBezTo>
+                    <a:pt x="181840" y="3349175"/>
+                    <a:pt x="0" y="3167335"/>
+                    <a:pt x="0" y="2943024"/>
+                  </a:cubicBezTo>
+                  <a:lnTo>
+                    <a:pt x="0" y="406152"/>
+                  </a:lnTo>
+                  <a:cubicBezTo>
+                    <a:pt x="0" y="181840"/>
+                    <a:pt x="181840" y="0"/>
+                    <a:pt x="406152" y="0"/>
+                  </a:cubicBezTo>
+                  <a:close/>
+                </a:path>
+              </a:pathLst>
+            </a:custGeom>
+            <a:solidFill>
+              <a:srgbClr val="FFFFFF"/>
+            </a:solidFill>
+          </p:spPr>
+        </p:sp>
+      </p:grpSp>
     </p:spTree>
   </p:cSld>
   <p:clrMapOvr>
@@ -3951,8 +5361,8 @@
 </p:sld>
 </file>
 
-<file path=ppt/slides/slide14.xml><?xml version="1.0" encoding="utf-8"?>
-<p:sld xmlns:p="http://schemas.openxmlformats.org/presentationml/2006/main" xmlns:a="http://schemas.openxmlformats.org/drawingml/2006/main">
+<file path=ppt/slides/slide15.xml><?xml version="1.0" encoding="utf-8"?>
+<p:sld xmlns:p="http://schemas.openxmlformats.org/presentationml/2006/main" xmlns:a="http://schemas.openxmlformats.org/drawingml/2006/main" xmlns:r="http://schemas.openxmlformats.org/officeDocument/2006/relationships">
   <p:cSld>
     <p:bg>
       <p:bgPr>
@@ -3975,6 +5385,347 @@
           <a:chExt cx="0" cy="0"/>
         </a:xfrm>
       </p:grpSpPr>
+      <p:sp>
+        <p:nvSpPr>
+          <p:cNvPr name="Freeform 2" id="2"/>
+          <p:cNvSpPr/>
+          <p:nvPr/>
+        </p:nvSpPr>
+        <p:spPr>
+          <a:xfrm flipH="false" flipV="false" rot="0">
+            <a:off x="581692" y="2531978"/>
+            <a:ext cx="9607816" cy="4845085"/>
+          </a:xfrm>
+          <a:custGeom>
+            <a:avLst/>
+            <a:gdLst/>
+            <a:ahLst/>
+            <a:cxnLst/>
+            <a:rect r="r" b="b" t="t" l="l"/>
+            <a:pathLst>
+              <a:path h="4845085" w="9607816">
+                <a:moveTo>
+                  <a:pt x="0" y="0"/>
+                </a:moveTo>
+                <a:lnTo>
+                  <a:pt x="9607816" y="0"/>
+                </a:lnTo>
+                <a:lnTo>
+                  <a:pt x="9607816" y="4845085"/>
+                </a:lnTo>
+                <a:lnTo>
+                  <a:pt x="0" y="4845085"/>
+                </a:lnTo>
+                <a:lnTo>
+                  <a:pt x="0" y="0"/>
+                </a:lnTo>
+                <a:close/>
+              </a:path>
+            </a:pathLst>
+          </a:custGeom>
+          <a:blipFill>
+            <a:blip r:embed="rId2"/>
+            <a:stretch>
+              <a:fillRect l="0" t="0" r="0" b="0"/>
+            </a:stretch>
+          </a:blipFill>
+        </p:spPr>
+      </p:sp>
+      <p:sp>
+        <p:nvSpPr>
+          <p:cNvPr name="TextBox 3" id="3"/>
+          <p:cNvSpPr txBox="true"/>
+          <p:nvPr/>
+        </p:nvSpPr>
+        <p:spPr>
+          <a:xfrm rot="0">
+            <a:off x="581692" y="102832"/>
+            <a:ext cx="12068810" cy="1808841"/>
+          </a:xfrm>
+          <a:prstGeom prst="rect">
+            <a:avLst/>
+          </a:prstGeom>
+        </p:spPr>
+        <p:txBody>
+          <a:bodyPr anchor="t" rtlCol="false" tIns="0" lIns="0" bIns="0" rIns="0">
+            <a:spAutoFit/>
+          </a:bodyPr>
+          <a:lstStyle/>
+          <a:p>
+            <a:pPr algn="l">
+              <a:lnSpc>
+                <a:spcPts val="14750"/>
+              </a:lnSpc>
+            </a:pPr>
+            <a:r>
+              <a:rPr lang="en-US" sz="10535">
+                <a:solidFill>
+                  <a:srgbClr val="FFFFFF"/>
+                </a:solidFill>
+                <a:latin typeface="Anton"/>
+                <a:ea typeface="Anton"/>
+                <a:cs typeface="Anton"/>
+                <a:sym typeface="Anton"/>
+              </a:rPr>
+              <a:t>9</a:t>
+            </a:r>
+            <a:r>
+              <a:rPr lang="en-US" sz="10535">
+                <a:solidFill>
+                  <a:srgbClr val="FFFFFF"/>
+                </a:solidFill>
+                <a:latin typeface="Anton"/>
+                <a:ea typeface="Anton"/>
+                <a:cs typeface="Anton"/>
+                <a:sym typeface="Anton"/>
+              </a:rPr>
+              <a:t>. Baseado em espaço</a:t>
+            </a:r>
+          </a:p>
+        </p:txBody>
+      </p:sp>
+      <p:sp>
+        <p:nvSpPr>
+          <p:cNvPr name="TextBox 4" id="4"/>
+          <p:cNvSpPr txBox="true"/>
+          <p:nvPr/>
+        </p:nvSpPr>
+        <p:spPr>
+          <a:xfrm rot="0">
+            <a:off x="14358195" y="2400719"/>
+            <a:ext cx="87106" cy="420567"/>
+          </a:xfrm>
+          <a:prstGeom prst="rect">
+            <a:avLst/>
+          </a:prstGeom>
+        </p:spPr>
+        <p:txBody>
+          <a:bodyPr anchor="t" rtlCol="false" tIns="0" lIns="0" bIns="0" rIns="0">
+            <a:spAutoFit/>
+          </a:bodyPr>
+          <a:lstStyle/>
+          <a:p>
+            <a:pPr algn="l">
+              <a:lnSpc>
+                <a:spcPts val="3499"/>
+              </a:lnSpc>
+            </a:pPr>
+            <a:r>
+              <a:rPr lang="en-US" b="true" sz="2499">
+                <a:solidFill>
+                  <a:srgbClr val="F5E8C7"/>
+                </a:solidFill>
+                <a:latin typeface="Montserrat Medium"/>
+                <a:ea typeface="Montserrat Medium"/>
+                <a:cs typeface="Montserrat Medium"/>
+                <a:sym typeface="Montserrat Medium"/>
+              </a:rPr>
+              <a:t> </a:t>
+            </a:r>
+          </a:p>
+        </p:txBody>
+      </p:sp>
+      <p:sp>
+        <p:nvSpPr>
+          <p:cNvPr name="TextBox 5" id="5"/>
+          <p:cNvSpPr txBox="true"/>
+          <p:nvPr/>
+        </p:nvSpPr>
+        <p:spPr>
+          <a:xfrm rot="0">
+            <a:off x="14101743" y="2838869"/>
+            <a:ext cx="87106" cy="420567"/>
+          </a:xfrm>
+          <a:prstGeom prst="rect">
+            <a:avLst/>
+          </a:prstGeom>
+        </p:spPr>
+        <p:txBody>
+          <a:bodyPr anchor="t" rtlCol="false" tIns="0" lIns="0" bIns="0" rIns="0">
+            <a:spAutoFit/>
+          </a:bodyPr>
+          <a:lstStyle/>
+          <a:p>
+            <a:pPr algn="l">
+              <a:lnSpc>
+                <a:spcPts val="3499"/>
+              </a:lnSpc>
+            </a:pPr>
+            <a:r>
+              <a:rPr lang="en-US" b="true" sz="2499">
+                <a:solidFill>
+                  <a:srgbClr val="F5E8C7"/>
+                </a:solidFill>
+                <a:latin typeface="Montserrat Medium"/>
+                <a:ea typeface="Montserrat Medium"/>
+                <a:cs typeface="Montserrat Medium"/>
+                <a:sym typeface="Montserrat Medium"/>
+              </a:rPr>
+              <a:t> </a:t>
+            </a:r>
+          </a:p>
+        </p:txBody>
+      </p:sp>
+      <p:sp>
+        <p:nvSpPr>
+          <p:cNvPr name="TextBox 6" id="6"/>
+          <p:cNvSpPr txBox="true"/>
+          <p:nvPr/>
+        </p:nvSpPr>
+        <p:spPr>
+          <a:xfrm rot="0">
+            <a:off x="10805655" y="2838869"/>
+            <a:ext cx="6453645" cy="1266831"/>
+          </a:xfrm>
+          <a:prstGeom prst="rect">
+            <a:avLst/>
+          </a:prstGeom>
+        </p:spPr>
+        <p:txBody>
+          <a:bodyPr anchor="t" rtlCol="false" tIns="0" lIns="0" bIns="0" rIns="0">
+            <a:spAutoFit/>
+          </a:bodyPr>
+          <a:lstStyle/>
+          <a:p>
+            <a:pPr algn="ctr">
+              <a:lnSpc>
+                <a:spcPts val="3449"/>
+              </a:lnSpc>
+            </a:pPr>
+            <a:r>
+              <a:rPr lang="en-US" b="true" sz="2499">
+                <a:solidFill>
+                  <a:srgbClr val="F5E8C7"/>
+                </a:solidFill>
+                <a:latin typeface="Montserrat Medium"/>
+                <a:ea typeface="Montserrat Medium"/>
+                <a:cs typeface="Montserrat Medium"/>
+                <a:sym typeface="Montserrat Medium"/>
+              </a:rPr>
+              <a:t>Ogarnização em diferentes niveis, desde a interface de usuário até o back-end</a:t>
+            </a:r>
+          </a:p>
+        </p:txBody>
+      </p:sp>
+      <p:sp>
+        <p:nvSpPr>
+          <p:cNvPr name="TextBox 7" id="7"/>
+          <p:cNvSpPr txBox="true"/>
+          <p:nvPr/>
+        </p:nvSpPr>
+        <p:spPr>
+          <a:xfrm rot="0">
+            <a:off x="10805655" y="5105400"/>
+            <a:ext cx="6453645" cy="1266831"/>
+          </a:xfrm>
+          <a:prstGeom prst="rect">
+            <a:avLst/>
+          </a:prstGeom>
+        </p:spPr>
+        <p:txBody>
+          <a:bodyPr anchor="t" rtlCol="false" tIns="0" lIns="0" bIns="0" rIns="0">
+            <a:spAutoFit/>
+          </a:bodyPr>
+          <a:lstStyle/>
+          <a:p>
+            <a:pPr algn="ctr">
+              <a:lnSpc>
+                <a:spcPts val="3449"/>
+              </a:lnSpc>
+            </a:pPr>
+            <a:r>
+              <a:rPr lang="en-US" b="true" sz="2499">
+                <a:solidFill>
+                  <a:srgbClr val="F5E8C7"/>
+                </a:solidFill>
+                <a:latin typeface="Montserrat Medium"/>
+                <a:ea typeface="Montserrat Medium"/>
+                <a:cs typeface="Montserrat Medium"/>
+                <a:sym typeface="Montserrat Medium"/>
+              </a:rPr>
+              <a:t>A organização em camadas permite uma manutenção e atualização do sistema facilitada </a:t>
+            </a:r>
+          </a:p>
+        </p:txBody>
+      </p:sp>
+      <p:grpSp>
+        <p:nvGrpSpPr>
+          <p:cNvPr name="Group 8" id="8"/>
+          <p:cNvGrpSpPr/>
+          <p:nvPr/>
+        </p:nvGrpSpPr>
+        <p:grpSpPr>
+          <a:xfrm rot="0">
+            <a:off x="733101" y="7691171"/>
+            <a:ext cx="5719590" cy="1665748"/>
+            <a:chOff x="0" y="0"/>
+            <a:chExt cx="11500046" cy="3349233"/>
+          </a:xfrm>
+        </p:grpSpPr>
+        <p:sp>
+          <p:nvSpPr>
+            <p:cNvPr name="Freeform 9" id="9"/>
+            <p:cNvSpPr/>
+            <p:nvPr/>
+          </p:nvSpPr>
+          <p:spPr>
+            <a:xfrm flipH="false" flipV="false" rot="0">
+              <a:off x="0" y="0"/>
+              <a:ext cx="11499952" cy="3349175"/>
+            </a:xfrm>
+            <a:custGeom>
+              <a:avLst/>
+              <a:gdLst/>
+              <a:ahLst/>
+              <a:cxnLst/>
+              <a:rect r="r" b="b" t="t" l="l"/>
+              <a:pathLst>
+                <a:path h="3349175" w="11499952">
+                  <a:moveTo>
+                    <a:pt x="406152" y="0"/>
+                  </a:moveTo>
+                  <a:lnTo>
+                    <a:pt x="11093800" y="0"/>
+                  </a:lnTo>
+                  <a:cubicBezTo>
+                    <a:pt x="11318112" y="0"/>
+                    <a:pt x="11499952" y="181840"/>
+                    <a:pt x="11499952" y="406152"/>
+                  </a:cubicBezTo>
+                  <a:lnTo>
+                    <a:pt x="11499952" y="2943024"/>
+                  </a:lnTo>
+                  <a:cubicBezTo>
+                    <a:pt x="11499952" y="3167335"/>
+                    <a:pt x="11318112" y="3349175"/>
+                    <a:pt x="11093800" y="3349175"/>
+                  </a:cubicBezTo>
+                  <a:lnTo>
+                    <a:pt x="406152" y="3349175"/>
+                  </a:lnTo>
+                  <a:cubicBezTo>
+                    <a:pt x="181840" y="3349175"/>
+                    <a:pt x="0" y="3167335"/>
+                    <a:pt x="0" y="2943024"/>
+                  </a:cubicBezTo>
+                  <a:lnTo>
+                    <a:pt x="0" y="406152"/>
+                  </a:lnTo>
+                  <a:cubicBezTo>
+                    <a:pt x="0" y="181840"/>
+                    <a:pt x="181840" y="0"/>
+                    <a:pt x="406152" y="0"/>
+                  </a:cubicBezTo>
+                  <a:close/>
+                </a:path>
+              </a:pathLst>
+            </a:custGeom>
+            <a:solidFill>
+              <a:srgbClr val="FFFFFF"/>
+            </a:solidFill>
+          </p:spPr>
+        </p:sp>
+      </p:grpSp>
     </p:spTree>
   </p:cSld>
   <p:clrMapOvr>
@@ -3983,8 +5734,8 @@
 </p:sld>
 </file>
 
-<file path=ppt/slides/slide15.xml><?xml version="1.0" encoding="utf-8"?>
-<p:sld xmlns:p="http://schemas.openxmlformats.org/presentationml/2006/main" xmlns:a="http://schemas.openxmlformats.org/drawingml/2006/main">
+<file path=ppt/slides/slide16.xml><?xml version="1.0" encoding="utf-8"?>
+<p:sld xmlns:p="http://schemas.openxmlformats.org/presentationml/2006/main" xmlns:a="http://schemas.openxmlformats.org/drawingml/2006/main" xmlns:r="http://schemas.openxmlformats.org/officeDocument/2006/relationships">
   <p:cSld>
     <p:bg>
       <p:bgPr>
@@ -4007,38 +5758,347 @@
           <a:chExt cx="0" cy="0"/>
         </a:xfrm>
       </p:grpSpPr>
-    </p:spTree>
-  </p:cSld>
-  <p:clrMapOvr>
-    <a:masterClrMapping/>
-  </p:clrMapOvr>
-</p:sld>
-</file>
-
-<file path=ppt/slides/slide16.xml><?xml version="1.0" encoding="utf-8"?>
-<p:sld xmlns:p="http://schemas.openxmlformats.org/presentationml/2006/main" xmlns:a="http://schemas.openxmlformats.org/drawingml/2006/main">
-  <p:cSld>
-    <p:bg>
-      <p:bgPr>
-        <a:solidFill>
-          <a:srgbClr val="1E3A8A"/>
-        </a:solidFill>
-      </p:bgPr>
-    </p:bg>
-    <p:spTree>
-      <p:nvGrpSpPr>
-        <p:cNvPr id="1" name=""/>
-        <p:cNvGrpSpPr/>
-        <p:nvPr/>
-      </p:nvGrpSpPr>
-      <p:grpSpPr>
-        <a:xfrm>
-          <a:off x="0" y="0"/>
-          <a:ext cx="0" cy="0"/>
-          <a:chOff x="0" y="0"/>
-          <a:chExt cx="0" cy="0"/>
-        </a:xfrm>
-      </p:grpSpPr>
+      <p:sp>
+        <p:nvSpPr>
+          <p:cNvPr name="Freeform 2" id="2"/>
+          <p:cNvSpPr/>
+          <p:nvPr/>
+        </p:nvSpPr>
+        <p:spPr>
+          <a:xfrm flipH="false" flipV="false" rot="0">
+            <a:off x="1660006" y="2243142"/>
+            <a:ext cx="5445117" cy="5800717"/>
+          </a:xfrm>
+          <a:custGeom>
+            <a:avLst/>
+            <a:gdLst/>
+            <a:ahLst/>
+            <a:cxnLst/>
+            <a:rect r="r" b="b" t="t" l="l"/>
+            <a:pathLst>
+              <a:path h="5800717" w="5445117">
+                <a:moveTo>
+                  <a:pt x="0" y="0"/>
+                </a:moveTo>
+                <a:lnTo>
+                  <a:pt x="5445117" y="0"/>
+                </a:lnTo>
+                <a:lnTo>
+                  <a:pt x="5445117" y="5800716"/>
+                </a:lnTo>
+                <a:lnTo>
+                  <a:pt x="0" y="5800716"/>
+                </a:lnTo>
+                <a:lnTo>
+                  <a:pt x="0" y="0"/>
+                </a:lnTo>
+                <a:close/>
+              </a:path>
+            </a:pathLst>
+          </a:custGeom>
+          <a:blipFill>
+            <a:blip r:embed="rId2"/>
+            <a:stretch>
+              <a:fillRect l="0" t="0" r="0" b="0"/>
+            </a:stretch>
+          </a:blipFill>
+        </p:spPr>
+      </p:sp>
+      <p:sp>
+        <p:nvSpPr>
+          <p:cNvPr name="TextBox 3" id="3"/>
+          <p:cNvSpPr txBox="true"/>
+          <p:nvPr/>
+        </p:nvSpPr>
+        <p:spPr>
+          <a:xfrm rot="0">
+            <a:off x="581692" y="102832"/>
+            <a:ext cx="17544573" cy="1808841"/>
+          </a:xfrm>
+          <a:prstGeom prst="rect">
+            <a:avLst/>
+          </a:prstGeom>
+        </p:spPr>
+        <p:txBody>
+          <a:bodyPr anchor="t" rtlCol="false" tIns="0" lIns="0" bIns="0" rIns="0">
+            <a:spAutoFit/>
+          </a:bodyPr>
+          <a:lstStyle/>
+          <a:p>
+            <a:pPr algn="l">
+              <a:lnSpc>
+                <a:spcPts val="14750"/>
+              </a:lnSpc>
+            </a:pPr>
+            <a:r>
+              <a:rPr lang="en-US" sz="10535">
+                <a:solidFill>
+                  <a:srgbClr val="FFFFFF"/>
+                </a:solidFill>
+                <a:latin typeface="Anton"/>
+                <a:ea typeface="Anton"/>
+                <a:cs typeface="Anton"/>
+                <a:sym typeface="Anton"/>
+              </a:rPr>
+              <a:t>10</a:t>
+            </a:r>
+            <a:r>
+              <a:rPr lang="en-US" sz="10535">
+                <a:solidFill>
+                  <a:srgbClr val="FFFFFF"/>
+                </a:solidFill>
+                <a:latin typeface="Anton"/>
+                <a:ea typeface="Anton"/>
+                <a:cs typeface="Anton"/>
+                <a:sym typeface="Anton"/>
+              </a:rPr>
+              <a:t>. Publicador-Inscrito (Pub/Sub)</a:t>
+            </a:r>
+          </a:p>
+        </p:txBody>
+      </p:sp>
+      <p:sp>
+        <p:nvSpPr>
+          <p:cNvPr name="TextBox 4" id="4"/>
+          <p:cNvSpPr txBox="true"/>
+          <p:nvPr/>
+        </p:nvSpPr>
+        <p:spPr>
+          <a:xfrm rot="0">
+            <a:off x="14358195" y="2400719"/>
+            <a:ext cx="87106" cy="420567"/>
+          </a:xfrm>
+          <a:prstGeom prst="rect">
+            <a:avLst/>
+          </a:prstGeom>
+        </p:spPr>
+        <p:txBody>
+          <a:bodyPr anchor="t" rtlCol="false" tIns="0" lIns="0" bIns="0" rIns="0">
+            <a:spAutoFit/>
+          </a:bodyPr>
+          <a:lstStyle/>
+          <a:p>
+            <a:pPr algn="l">
+              <a:lnSpc>
+                <a:spcPts val="3499"/>
+              </a:lnSpc>
+            </a:pPr>
+            <a:r>
+              <a:rPr lang="en-US" b="true" sz="2499">
+                <a:solidFill>
+                  <a:srgbClr val="F5E8C7"/>
+                </a:solidFill>
+                <a:latin typeface="Montserrat Medium"/>
+                <a:ea typeface="Montserrat Medium"/>
+                <a:cs typeface="Montserrat Medium"/>
+                <a:sym typeface="Montserrat Medium"/>
+              </a:rPr>
+              <a:t> </a:t>
+            </a:r>
+          </a:p>
+        </p:txBody>
+      </p:sp>
+      <p:sp>
+        <p:nvSpPr>
+          <p:cNvPr name="TextBox 5" id="5"/>
+          <p:cNvSpPr txBox="true"/>
+          <p:nvPr/>
+        </p:nvSpPr>
+        <p:spPr>
+          <a:xfrm rot="0">
+            <a:off x="14101743" y="2838869"/>
+            <a:ext cx="87106" cy="420567"/>
+          </a:xfrm>
+          <a:prstGeom prst="rect">
+            <a:avLst/>
+          </a:prstGeom>
+        </p:spPr>
+        <p:txBody>
+          <a:bodyPr anchor="t" rtlCol="false" tIns="0" lIns="0" bIns="0" rIns="0">
+            <a:spAutoFit/>
+          </a:bodyPr>
+          <a:lstStyle/>
+          <a:p>
+            <a:pPr algn="l">
+              <a:lnSpc>
+                <a:spcPts val="3499"/>
+              </a:lnSpc>
+            </a:pPr>
+            <a:r>
+              <a:rPr lang="en-US" b="true" sz="2499">
+                <a:solidFill>
+                  <a:srgbClr val="F5E8C7"/>
+                </a:solidFill>
+                <a:latin typeface="Montserrat Medium"/>
+                <a:ea typeface="Montserrat Medium"/>
+                <a:cs typeface="Montserrat Medium"/>
+                <a:sym typeface="Montserrat Medium"/>
+              </a:rPr>
+              <a:t> </a:t>
+            </a:r>
+          </a:p>
+        </p:txBody>
+      </p:sp>
+      <p:sp>
+        <p:nvSpPr>
+          <p:cNvPr name="TextBox 6" id="6"/>
+          <p:cNvSpPr txBox="true"/>
+          <p:nvPr/>
+        </p:nvSpPr>
+        <p:spPr>
+          <a:xfrm rot="0">
+            <a:off x="10805655" y="2838869"/>
+            <a:ext cx="6453645" cy="1266831"/>
+          </a:xfrm>
+          <a:prstGeom prst="rect">
+            <a:avLst/>
+          </a:prstGeom>
+        </p:spPr>
+        <p:txBody>
+          <a:bodyPr anchor="t" rtlCol="false" tIns="0" lIns="0" bIns="0" rIns="0">
+            <a:spAutoFit/>
+          </a:bodyPr>
+          <a:lstStyle/>
+          <a:p>
+            <a:pPr algn="ctr">
+              <a:lnSpc>
+                <a:spcPts val="3449"/>
+              </a:lnSpc>
+            </a:pPr>
+            <a:r>
+              <a:rPr lang="en-US" b="true" sz="2499">
+                <a:solidFill>
+                  <a:srgbClr val="F5E8C7"/>
+                </a:solidFill>
+                <a:latin typeface="Montserrat Medium"/>
+                <a:ea typeface="Montserrat Medium"/>
+                <a:cs typeface="Montserrat Medium"/>
+                <a:sym typeface="Montserrat Medium"/>
+              </a:rPr>
+              <a:t>Ogarnização em diferentes niveis, desde a interface de usuário até o back-end</a:t>
+            </a:r>
+          </a:p>
+        </p:txBody>
+      </p:sp>
+      <p:sp>
+        <p:nvSpPr>
+          <p:cNvPr name="TextBox 7" id="7"/>
+          <p:cNvSpPr txBox="true"/>
+          <p:nvPr/>
+        </p:nvSpPr>
+        <p:spPr>
+          <a:xfrm rot="0">
+            <a:off x="10805655" y="5105400"/>
+            <a:ext cx="6453645" cy="1266831"/>
+          </a:xfrm>
+          <a:prstGeom prst="rect">
+            <a:avLst/>
+          </a:prstGeom>
+        </p:spPr>
+        <p:txBody>
+          <a:bodyPr anchor="t" rtlCol="false" tIns="0" lIns="0" bIns="0" rIns="0">
+            <a:spAutoFit/>
+          </a:bodyPr>
+          <a:lstStyle/>
+          <a:p>
+            <a:pPr algn="ctr">
+              <a:lnSpc>
+                <a:spcPts val="3449"/>
+              </a:lnSpc>
+            </a:pPr>
+            <a:r>
+              <a:rPr lang="en-US" b="true" sz="2499">
+                <a:solidFill>
+                  <a:srgbClr val="F5E8C7"/>
+                </a:solidFill>
+                <a:latin typeface="Montserrat Medium"/>
+                <a:ea typeface="Montserrat Medium"/>
+                <a:cs typeface="Montserrat Medium"/>
+                <a:sym typeface="Montserrat Medium"/>
+              </a:rPr>
+              <a:t>A organização em camadas permite uma manutenção e atualização do sistema facilitada </a:t>
+            </a:r>
+          </a:p>
+        </p:txBody>
+      </p:sp>
+      <p:grpSp>
+        <p:nvGrpSpPr>
+          <p:cNvPr name="Group 8" id="8"/>
+          <p:cNvGrpSpPr/>
+          <p:nvPr/>
+        </p:nvGrpSpPr>
+        <p:grpSpPr>
+          <a:xfrm rot="0">
+            <a:off x="7687682" y="7979743"/>
+            <a:ext cx="5719590" cy="1665748"/>
+            <a:chOff x="0" y="0"/>
+            <a:chExt cx="11500046" cy="3349233"/>
+          </a:xfrm>
+        </p:grpSpPr>
+        <p:sp>
+          <p:nvSpPr>
+            <p:cNvPr name="Freeform 9" id="9"/>
+            <p:cNvSpPr/>
+            <p:nvPr/>
+          </p:nvSpPr>
+          <p:spPr>
+            <a:xfrm flipH="false" flipV="false" rot="0">
+              <a:off x="0" y="0"/>
+              <a:ext cx="11499952" cy="3349175"/>
+            </a:xfrm>
+            <a:custGeom>
+              <a:avLst/>
+              <a:gdLst/>
+              <a:ahLst/>
+              <a:cxnLst/>
+              <a:rect r="r" b="b" t="t" l="l"/>
+              <a:pathLst>
+                <a:path h="3349175" w="11499952">
+                  <a:moveTo>
+                    <a:pt x="406152" y="0"/>
+                  </a:moveTo>
+                  <a:lnTo>
+                    <a:pt x="11093800" y="0"/>
+                  </a:lnTo>
+                  <a:cubicBezTo>
+                    <a:pt x="11318112" y="0"/>
+                    <a:pt x="11499952" y="181840"/>
+                    <a:pt x="11499952" y="406152"/>
+                  </a:cubicBezTo>
+                  <a:lnTo>
+                    <a:pt x="11499952" y="2943024"/>
+                  </a:lnTo>
+                  <a:cubicBezTo>
+                    <a:pt x="11499952" y="3167335"/>
+                    <a:pt x="11318112" y="3349175"/>
+                    <a:pt x="11093800" y="3349175"/>
+                  </a:cubicBezTo>
+                  <a:lnTo>
+                    <a:pt x="406152" y="3349175"/>
+                  </a:lnTo>
+                  <a:cubicBezTo>
+                    <a:pt x="181840" y="3349175"/>
+                    <a:pt x="0" y="3167335"/>
+                    <a:pt x="0" y="2943024"/>
+                  </a:cubicBezTo>
+                  <a:lnTo>
+                    <a:pt x="0" y="406152"/>
+                  </a:lnTo>
+                  <a:cubicBezTo>
+                    <a:pt x="0" y="181840"/>
+                    <a:pt x="181840" y="0"/>
+                    <a:pt x="406152" y="0"/>
+                  </a:cubicBezTo>
+                  <a:close/>
+                </a:path>
+              </a:pathLst>
+            </a:custGeom>
+            <a:solidFill>
+              <a:srgbClr val="FFFFFF"/>
+            </a:solidFill>
+          </p:spPr>
+        </p:sp>
+      </p:grpSp>
     </p:spTree>
   </p:cSld>
   <p:clrMapOvr>
@@ -6457,7 +8517,7 @@
         <p:spPr>
           <a:xfrm rot="0">
             <a:off x="4813373" y="689781"/>
-            <a:ext cx="8834304" cy="2730989"/>
+            <a:ext cx="8834304" cy="2910211"/>
           </a:xfrm>
           <a:prstGeom prst="rect">
             <a:avLst/>
@@ -6477,7 +8537,7 @@
             <a:r>
               <a:rPr lang="en-US" sz="13599">
                 <a:solidFill>
-                  <a:srgbClr val="F5E8C7"/>
+                  <a:srgbClr val="FFFFFF"/>
                 </a:solidFill>
                 <a:latin typeface="Anton"/>
                 <a:ea typeface="Anton"/>
@@ -6496,158 +8556,14 @@
             <a:r>
               <a:rPr lang="en-US" b="true" sz="2499">
                 <a:solidFill>
-                  <a:srgbClr val="F5E8C7"/>
+                  <a:srgbClr val="FFFFFF"/>
                 </a:solidFill>
                 <a:latin typeface="Montserrat Bold"/>
                 <a:ea typeface="Montserrat Bold"/>
                 <a:cs typeface="Montserrat Bold"/>
                 <a:sym typeface="Montserrat Bold"/>
               </a:rPr>
-              <a:t>The</a:t>
-            </a:r>
-            <a:r>
-              <a:rPr lang="en-US" b="true" sz="2499">
-                <a:solidFill>
-                  <a:srgbClr val="000000"/>
-                </a:solidFill>
-                <a:latin typeface="Montserrat Bold"/>
-                <a:ea typeface="Montserrat Bold"/>
-                <a:cs typeface="Montserrat Bold"/>
-                <a:sym typeface="Montserrat Bold"/>
-              </a:rPr>
-              <a:t> </a:t>
-            </a:r>
-            <a:r>
-              <a:rPr lang="en-US" b="true" sz="2499">
-                <a:solidFill>
-                  <a:srgbClr val="F5E8C7"/>
-                </a:solidFill>
-                <a:latin typeface="Montserrat Bold"/>
-                <a:ea typeface="Montserrat Bold"/>
-                <a:cs typeface="Montserrat Bold"/>
-                <a:sym typeface="Montserrat Bold"/>
-              </a:rPr>
-              <a:t>project</a:t>
-            </a:r>
-            <a:r>
-              <a:rPr lang="en-US" b="true" sz="2499">
-                <a:solidFill>
-                  <a:srgbClr val="000000"/>
-                </a:solidFill>
-                <a:latin typeface="Montserrat Bold"/>
-                <a:ea typeface="Montserrat Bold"/>
-                <a:cs typeface="Montserrat Bold"/>
-                <a:sym typeface="Montserrat Bold"/>
-              </a:rPr>
-              <a:t> </a:t>
-            </a:r>
-            <a:r>
-              <a:rPr lang="en-US" b="true" sz="2499">
-                <a:solidFill>
-                  <a:srgbClr val="F5E8C7"/>
-                </a:solidFill>
-                <a:latin typeface="Montserrat Bold"/>
-                <a:ea typeface="Montserrat Bold"/>
-                <a:cs typeface="Montserrat Bold"/>
-                <a:sym typeface="Montserrat Bold"/>
-              </a:rPr>
-              <a:t>follows</a:t>
-            </a:r>
-            <a:r>
-              <a:rPr lang="en-US" b="true" sz="2499">
-                <a:solidFill>
-                  <a:srgbClr val="000000"/>
-                </a:solidFill>
-                <a:latin typeface="Montserrat Bold"/>
-                <a:ea typeface="Montserrat Bold"/>
-                <a:cs typeface="Montserrat Bold"/>
-                <a:sym typeface="Montserrat Bold"/>
-              </a:rPr>
-              <a:t> </a:t>
-            </a:r>
-            <a:r>
-              <a:rPr lang="en-US" b="true" sz="2499">
-                <a:solidFill>
-                  <a:srgbClr val="F5E8C7"/>
-                </a:solidFill>
-                <a:latin typeface="Montserrat Bold"/>
-                <a:ea typeface="Montserrat Bold"/>
-                <a:cs typeface="Montserrat Bold"/>
-                <a:sym typeface="Montserrat Bold"/>
-              </a:rPr>
-              <a:t>a</a:t>
-            </a:r>
-            <a:r>
-              <a:rPr lang="en-US" b="true" sz="2499">
-                <a:solidFill>
-                  <a:srgbClr val="000000"/>
-                </a:solidFill>
-                <a:latin typeface="Montserrat Bold"/>
-                <a:ea typeface="Montserrat Bold"/>
-                <a:cs typeface="Montserrat Bold"/>
-                <a:sym typeface="Montserrat Bold"/>
-              </a:rPr>
-              <a:t> </a:t>
-            </a:r>
-            <a:r>
-              <a:rPr lang="en-US" b="true" sz="2499">
-                <a:solidFill>
-                  <a:srgbClr val="F5E8C7"/>
-                </a:solidFill>
-                <a:latin typeface="Montserrat Bold"/>
-                <a:ea typeface="Montserrat Bold"/>
-                <a:cs typeface="Montserrat Bold"/>
-                <a:sym typeface="Montserrat Bold"/>
-              </a:rPr>
-              <a:t>structured</a:t>
-            </a:r>
-            <a:r>
-              <a:rPr lang="en-US" b="true" sz="2499">
-                <a:solidFill>
-                  <a:srgbClr val="000000"/>
-                </a:solidFill>
-                <a:latin typeface="Montserrat Bold"/>
-                <a:ea typeface="Montserrat Bold"/>
-                <a:cs typeface="Montserrat Bold"/>
-                <a:sym typeface="Montserrat Bold"/>
-              </a:rPr>
-              <a:t> </a:t>
-            </a:r>
-            <a:r>
-              <a:rPr lang="en-US" b="true" sz="2499">
-                <a:solidFill>
-                  <a:srgbClr val="F5E8C7"/>
-                </a:solidFill>
-                <a:latin typeface="Montserrat Bold"/>
-                <a:ea typeface="Montserrat Bold"/>
-                <a:cs typeface="Montserrat Bold"/>
-                <a:sym typeface="Montserrat Bold"/>
-              </a:rPr>
-              <a:t>four-phase</a:t>
-            </a:r>
-            <a:r>
-              <a:rPr lang="en-US" b="true" sz="2499">
-                <a:solidFill>
-                  <a:srgbClr val="000000"/>
-                </a:solidFill>
-                <a:latin typeface="Montserrat Bold"/>
-                <a:ea typeface="Montserrat Bold"/>
-                <a:cs typeface="Montserrat Bold"/>
-                <a:sym typeface="Montserrat Bold"/>
-              </a:rPr>
-              <a:t> </a:t>
-            </a:r>
-            <a:r>
-              <a:rPr lang="en-US" b="true" sz="2499">
-                <a:solidFill>
-                  <a:srgbClr val="F5E8C7"/>
-                </a:solidFill>
-                <a:latin typeface="Montserrat Bold"/>
-                <a:ea typeface="Montserrat Bold"/>
-                <a:cs typeface="Montserrat Bold"/>
-                <a:sym typeface="Montserrat Bold"/>
-              </a:rPr>
-              <a:t>process:</a:t>
+              <a:t>The project follows a structured four-phase process:</a:t>
             </a:r>
           </a:p>
         </p:txBody>
@@ -10405,7 +12321,7 @@
             <a:r>
               <a:rPr lang="en-US" sz="13599">
                 <a:solidFill>
-                  <a:srgbClr val="F5E8C7"/>
+                  <a:srgbClr val="FFFFFF"/>
                 </a:solidFill>
                 <a:latin typeface="Anton"/>
                 <a:ea typeface="Anton"/>
@@ -10487,7 +12403,7 @@
             <a:r>
               <a:rPr lang="en-US" sz="2499">
                 <a:solidFill>
-                  <a:srgbClr val="F5E8C7"/>
+                  <a:srgbClr val="FFFFFF"/>
                 </a:solidFill>
                 <a:latin typeface="Montserrat"/>
                 <a:ea typeface="Montserrat"/>
@@ -10531,209 +12447,15 @@
           <a:chExt cx="0" cy="0"/>
         </a:xfrm>
       </p:grpSpPr>
-      <p:grpSp>
-        <p:nvGrpSpPr>
-          <p:cNvPr name="Group 2" id="2"/>
-          <p:cNvGrpSpPr/>
-          <p:nvPr/>
-        </p:nvGrpSpPr>
-        <p:grpSpPr>
-          <a:xfrm rot="0">
-            <a:off x="8729634" y="412052"/>
-            <a:ext cx="7749092" cy="2707815"/>
-            <a:chOff x="0" y="0"/>
-            <a:chExt cx="7749096" cy="2707818"/>
-          </a:xfrm>
-        </p:grpSpPr>
-        <p:sp>
-          <p:nvSpPr>
-            <p:cNvPr name="Freeform 3" id="3"/>
-            <p:cNvSpPr/>
-            <p:nvPr/>
-          </p:nvSpPr>
-          <p:spPr>
-            <a:xfrm flipH="false" flipV="false" rot="0">
-              <a:off x="63500" y="63500"/>
-              <a:ext cx="7621400" cy="2580773"/>
-            </a:xfrm>
-            <a:custGeom>
-              <a:avLst/>
-              <a:gdLst/>
-              <a:ahLst/>
-              <a:cxnLst/>
-              <a:rect r="r" b="b" t="t" l="l"/>
-              <a:pathLst>
-                <a:path h="2580773" w="7621400">
-                  <a:moveTo>
-                    <a:pt x="0" y="0"/>
-                  </a:moveTo>
-                  <a:lnTo>
-                    <a:pt x="7621400" y="0"/>
-                  </a:lnTo>
-                  <a:lnTo>
-                    <a:pt x="7621400" y="2580773"/>
-                  </a:lnTo>
-                  <a:lnTo>
-                    <a:pt x="0" y="2580773"/>
-                  </a:lnTo>
-                  <a:close/>
-                </a:path>
-              </a:pathLst>
-            </a:custGeom>
-            <a:solidFill>
-              <a:srgbClr val="F5E8C7"/>
-            </a:solidFill>
-          </p:spPr>
-        </p:sp>
-        <p:sp>
-          <p:nvSpPr>
-            <p:cNvPr name="Freeform 4" id="4"/>
-            <p:cNvSpPr/>
-            <p:nvPr/>
-          </p:nvSpPr>
-          <p:spPr>
-            <a:xfrm flipH="false" flipV="false" rot="0">
-              <a:off x="63500" y="63500"/>
-              <a:ext cx="7622035" cy="2580773"/>
-            </a:xfrm>
-            <a:custGeom>
-              <a:avLst/>
-              <a:gdLst/>
-              <a:ahLst/>
-              <a:cxnLst/>
-              <a:rect r="r" b="b" t="t" l="l"/>
-              <a:pathLst>
-                <a:path h="2580773" w="7622035">
-                  <a:moveTo>
-                    <a:pt x="0" y="2580773"/>
-                  </a:moveTo>
-                  <a:lnTo>
-                    <a:pt x="7622035" y="2580773"/>
-                  </a:lnTo>
-                  <a:lnTo>
-                    <a:pt x="7622035" y="0"/>
-                  </a:lnTo>
-                  <a:lnTo>
-                    <a:pt x="0" y="0"/>
-                  </a:lnTo>
-                  <a:close/>
-                </a:path>
-              </a:pathLst>
-            </a:custGeom>
-            <a:solidFill>
-              <a:srgbClr val="000000">
-                <a:alpha val="0"/>
-              </a:srgbClr>
-            </a:solidFill>
-          </p:spPr>
-        </p:sp>
-      </p:grpSp>
-      <p:grpSp>
-        <p:nvGrpSpPr>
-          <p:cNvPr name="Group 5" id="5"/>
-          <p:cNvGrpSpPr/>
-          <p:nvPr/>
-        </p:nvGrpSpPr>
-        <p:grpSpPr>
-          <a:xfrm rot="0">
-            <a:off x="10843117" y="6080036"/>
-            <a:ext cx="6950602" cy="3910174"/>
-            <a:chOff x="0" y="0"/>
-            <a:chExt cx="6950596" cy="3910178"/>
-          </a:xfrm>
-        </p:grpSpPr>
-        <p:sp>
-          <p:nvSpPr>
-            <p:cNvPr name="Freeform 6" id="6"/>
-            <p:cNvSpPr/>
-            <p:nvPr/>
-          </p:nvSpPr>
-          <p:spPr>
-            <a:xfrm flipH="false" flipV="false" rot="0">
-              <a:off x="63500" y="63500"/>
-              <a:ext cx="6822181" cy="3783205"/>
-            </a:xfrm>
-            <a:custGeom>
-              <a:avLst/>
-              <a:gdLst/>
-              <a:ahLst/>
-              <a:cxnLst/>
-              <a:rect r="r" b="b" t="t" l="l"/>
-              <a:pathLst>
-                <a:path h="3783205" w="6822181">
-                  <a:moveTo>
-                    <a:pt x="0" y="0"/>
-                  </a:moveTo>
-                  <a:lnTo>
-                    <a:pt x="0" y="3783205"/>
-                  </a:lnTo>
-                  <a:lnTo>
-                    <a:pt x="6822180" y="3783205"/>
-                  </a:lnTo>
-                  <a:lnTo>
-                    <a:pt x="6822180" y="0"/>
-                  </a:lnTo>
-                  <a:close/>
-                </a:path>
-              </a:pathLst>
-            </a:custGeom>
-            <a:solidFill>
-              <a:srgbClr val="F5E8C7"/>
-            </a:solidFill>
-          </p:spPr>
-        </p:sp>
-        <p:sp>
-          <p:nvSpPr>
-            <p:cNvPr name="Freeform 7" id="7"/>
-            <p:cNvSpPr/>
-            <p:nvPr/>
-          </p:nvSpPr>
-          <p:spPr>
-            <a:xfrm flipH="false" flipV="false" rot="0">
-              <a:off x="63500" y="63500"/>
-              <a:ext cx="6822181" cy="3783205"/>
-            </a:xfrm>
-            <a:custGeom>
-              <a:avLst/>
-              <a:gdLst/>
-              <a:ahLst/>
-              <a:cxnLst/>
-              <a:rect r="r" b="b" t="t" l="l"/>
-              <a:pathLst>
-                <a:path h="3783205" w="6822181">
-                  <a:moveTo>
-                    <a:pt x="0" y="3783205"/>
-                  </a:moveTo>
-                  <a:lnTo>
-                    <a:pt x="6822180" y="3783205"/>
-                  </a:lnTo>
-                  <a:lnTo>
-                    <a:pt x="6822180" y="0"/>
-                  </a:lnTo>
-                  <a:lnTo>
-                    <a:pt x="0" y="0"/>
-                  </a:lnTo>
-                  <a:close/>
-                </a:path>
-              </a:pathLst>
-            </a:custGeom>
-            <a:solidFill>
-              <a:srgbClr val="000000">
-                <a:alpha val="0"/>
-              </a:srgbClr>
-            </a:solidFill>
-          </p:spPr>
-        </p:sp>
-      </p:grpSp>
       <p:sp>
         <p:nvSpPr>
-          <p:cNvPr name="TextBox 8" id="8"/>
+          <p:cNvPr name="TextBox 2" id="2"/>
           <p:cNvSpPr txBox="true"/>
           <p:nvPr/>
         </p:nvSpPr>
         <p:spPr>
           <a:xfrm rot="0">
-            <a:off x="727167" y="413680"/>
+            <a:off x="784881" y="442537"/>
             <a:ext cx="6501346" cy="2438800"/>
           </a:xfrm>
           <a:prstGeom prst="rect">
@@ -10754,7 +12476,7 @@
             <a:r>
               <a:rPr lang="en-US" sz="13560">
                 <a:solidFill>
-                  <a:srgbClr val="F5E8C7"/>
+                  <a:srgbClr val="FFFFFF"/>
                 </a:solidFill>
                 <a:latin typeface="Anton"/>
                 <a:ea typeface="Anton"/>
@@ -10768,13 +12490,13 @@
       </p:sp>
       <p:sp>
         <p:nvSpPr>
-          <p:cNvPr name="TextBox 9" id="9"/>
+          <p:cNvPr name="TextBox 3" id="3"/>
           <p:cNvSpPr txBox="true"/>
           <p:nvPr/>
         </p:nvSpPr>
         <p:spPr>
           <a:xfrm rot="0">
-            <a:off x="1932651" y="3467338"/>
+            <a:off x="1990365" y="3496195"/>
             <a:ext cx="5587241" cy="1038196"/>
           </a:xfrm>
           <a:prstGeom prst="rect">
@@ -10795,7 +12517,7 @@
             <a:r>
               <a:rPr lang="en-US" b="true" sz="2988">
                 <a:solidFill>
-                  <a:srgbClr val="F5E8C7"/>
+                  <a:srgbClr val="FFFFFF"/>
                 </a:solidFill>
                 <a:latin typeface="Montserrat Bold"/>
                 <a:ea typeface="Montserrat Bold"/>
@@ -10814,7 +12536,7 @@
             <a:r>
               <a:rPr lang="en-US" b="true" sz="2988">
                 <a:solidFill>
-                  <a:srgbClr val="F5E8C7"/>
+                  <a:srgbClr val="FFFFFF"/>
                 </a:solidFill>
                 <a:latin typeface="Montserrat Bold"/>
                 <a:ea typeface="Montserrat Bold"/>
@@ -10828,13 +12550,13 @@
       </p:sp>
       <p:sp>
         <p:nvSpPr>
-          <p:cNvPr name="TextBox 10" id="10"/>
+          <p:cNvPr name="TextBox 4" id="4"/>
           <p:cNvSpPr txBox="true"/>
           <p:nvPr/>
         </p:nvSpPr>
         <p:spPr>
           <a:xfrm rot="0">
-            <a:off x="4355868" y="4761052"/>
+            <a:off x="4413583" y="4789909"/>
             <a:ext cx="132169" cy="618296"/>
           </a:xfrm>
           <a:prstGeom prst="rect">
@@ -10869,13 +12591,13 @@
       </p:sp>
       <p:sp>
         <p:nvSpPr>
-          <p:cNvPr name="TextBox 11" id="11"/>
+          <p:cNvPr name="TextBox 5" id="5"/>
           <p:cNvSpPr txBox="true"/>
           <p:nvPr/>
         </p:nvSpPr>
         <p:spPr>
           <a:xfrm rot="0">
-            <a:off x="1004516" y="4761052"/>
+            <a:off x="1062230" y="4789909"/>
             <a:ext cx="7480240" cy="618296"/>
           </a:xfrm>
           <a:prstGeom prst="rect">
@@ -10896,7 +12618,7 @@
             <a:r>
               <a:rPr lang="en-US" b="true" sz="3605">
                 <a:solidFill>
-                  <a:srgbClr val="F5E8C7"/>
+                  <a:srgbClr val="FFFFFF"/>
                 </a:solidFill>
                 <a:latin typeface="Montserrat Bold"/>
                 <a:ea typeface="Montserrat Bold"/>
@@ -10910,13 +12632,13 @@
       </p:sp>
       <p:sp>
         <p:nvSpPr>
-          <p:cNvPr name="TextBox 12" id="12"/>
+          <p:cNvPr name="TextBox 6" id="6"/>
           <p:cNvSpPr txBox="true"/>
           <p:nvPr/>
         </p:nvSpPr>
         <p:spPr>
           <a:xfrm rot="0">
-            <a:off x="655168" y="5403475"/>
+            <a:off x="712882" y="5432333"/>
             <a:ext cx="8193281" cy="3140354"/>
           </a:xfrm>
           <a:prstGeom prst="rect">
@@ -10937,7 +12659,7 @@
             <a:r>
               <a:rPr lang="en-US" b="true" sz="3605">
                 <a:solidFill>
-                  <a:srgbClr val="F5E8C7"/>
+                  <a:srgbClr val="FFFFFF"/>
                 </a:solidFill>
                 <a:latin typeface="Montserrat Bold"/>
                 <a:ea typeface="Montserrat Bold"/>
@@ -10949,57 +12671,202 @@
           </a:p>
         </p:txBody>
       </p:sp>
+      <p:grpSp>
+        <p:nvGrpSpPr>
+          <p:cNvPr name="Group 7" id="7"/>
+          <p:cNvGrpSpPr/>
+          <p:nvPr/>
+        </p:nvGrpSpPr>
+        <p:grpSpPr>
+          <a:xfrm rot="0">
+            <a:off x="9817206" y="5441959"/>
+            <a:ext cx="7785254" cy="2603968"/>
+            <a:chOff x="0" y="0"/>
+            <a:chExt cx="7759007" cy="2595198"/>
+          </a:xfrm>
+        </p:grpSpPr>
+        <p:sp>
+          <p:nvSpPr>
+            <p:cNvPr name="Freeform 8" id="8"/>
+            <p:cNvSpPr/>
+            <p:nvPr/>
+          </p:nvSpPr>
+          <p:spPr>
+            <a:xfrm flipH="false" flipV="false" rot="0">
+              <a:off x="0" y="0"/>
+              <a:ext cx="7758943" cy="2595153"/>
+            </a:xfrm>
+            <a:custGeom>
+              <a:avLst/>
+              <a:gdLst/>
+              <a:ahLst/>
+              <a:cxnLst/>
+              <a:rect r="r" b="b" t="t" l="l"/>
+              <a:pathLst>
+                <a:path h="2595153" w="7758943">
+                  <a:moveTo>
+                    <a:pt x="382309" y="0"/>
+                  </a:moveTo>
+                  <a:lnTo>
+                    <a:pt x="7376635" y="0"/>
+                  </a:lnTo>
+                  <a:cubicBezTo>
+                    <a:pt x="7478030" y="0"/>
+                    <a:pt x="7575271" y="40279"/>
+                    <a:pt x="7646968" y="111976"/>
+                  </a:cubicBezTo>
+                  <a:cubicBezTo>
+                    <a:pt x="7718665" y="183672"/>
+                    <a:pt x="7758943" y="280914"/>
+                    <a:pt x="7758943" y="382309"/>
+                  </a:cubicBezTo>
+                  <a:lnTo>
+                    <a:pt x="7758943" y="2212845"/>
+                  </a:lnTo>
+                  <a:cubicBezTo>
+                    <a:pt x="7758943" y="2423988"/>
+                    <a:pt x="7587778" y="2595153"/>
+                    <a:pt x="7376635" y="2595153"/>
+                  </a:cubicBezTo>
+                  <a:lnTo>
+                    <a:pt x="382309" y="2595153"/>
+                  </a:lnTo>
+                  <a:cubicBezTo>
+                    <a:pt x="171165" y="2595153"/>
+                    <a:pt x="0" y="2423988"/>
+                    <a:pt x="0" y="2212845"/>
+                  </a:cubicBezTo>
+                  <a:lnTo>
+                    <a:pt x="0" y="382309"/>
+                  </a:lnTo>
+                  <a:cubicBezTo>
+                    <a:pt x="0" y="171165"/>
+                    <a:pt x="171165" y="0"/>
+                    <a:pt x="382309" y="0"/>
+                  </a:cubicBezTo>
+                  <a:close/>
+                </a:path>
+              </a:pathLst>
+            </a:custGeom>
+            <a:solidFill>
+              <a:srgbClr val="FFFFFF"/>
+            </a:solidFill>
+            <a:ln cap="rnd">
+              <a:noFill/>
+              <a:prstDash val="solid"/>
+              <a:round/>
+            </a:ln>
+          </p:spPr>
+        </p:sp>
+      </p:grpSp>
+      <p:grpSp>
+        <p:nvGrpSpPr>
+          <p:cNvPr name="Group 9" id="9"/>
+          <p:cNvGrpSpPr/>
+          <p:nvPr/>
+        </p:nvGrpSpPr>
+        <p:grpSpPr>
+          <a:xfrm rot="0">
+            <a:off x="10103544" y="1790525"/>
+            <a:ext cx="6491225" cy="2159118"/>
+            <a:chOff x="0" y="0"/>
+            <a:chExt cx="7759007" cy="2580818"/>
+          </a:xfrm>
+        </p:grpSpPr>
+        <p:sp>
+          <p:nvSpPr>
+            <p:cNvPr name="Freeform 10" id="10"/>
+            <p:cNvSpPr/>
+            <p:nvPr/>
+          </p:nvSpPr>
+          <p:spPr>
+            <a:xfrm flipH="false" flipV="false" rot="0">
+              <a:off x="0" y="0"/>
+              <a:ext cx="7758943" cy="2580773"/>
+            </a:xfrm>
+            <a:custGeom>
+              <a:avLst/>
+              <a:gdLst/>
+              <a:ahLst/>
+              <a:cxnLst/>
+              <a:rect r="r" b="b" t="t" l="l"/>
+              <a:pathLst>
+                <a:path h="2580773" w="7758943">
+                  <a:moveTo>
+                    <a:pt x="458522" y="0"/>
+                  </a:moveTo>
+                  <a:lnTo>
+                    <a:pt x="7300421" y="0"/>
+                  </a:lnTo>
+                  <a:cubicBezTo>
+                    <a:pt x="7422029" y="0"/>
+                    <a:pt x="7538656" y="48308"/>
+                    <a:pt x="7624645" y="134298"/>
+                  </a:cubicBezTo>
+                  <a:cubicBezTo>
+                    <a:pt x="7710635" y="220288"/>
+                    <a:pt x="7758943" y="336914"/>
+                    <a:pt x="7758943" y="458522"/>
+                  </a:cubicBezTo>
+                  <a:lnTo>
+                    <a:pt x="7758943" y="2122251"/>
+                  </a:lnTo>
+                  <a:cubicBezTo>
+                    <a:pt x="7758943" y="2375486"/>
+                    <a:pt x="7553656" y="2580773"/>
+                    <a:pt x="7300421" y="2580773"/>
+                  </a:cubicBezTo>
+                  <a:lnTo>
+                    <a:pt x="458522" y="2580773"/>
+                  </a:lnTo>
+                  <a:cubicBezTo>
+                    <a:pt x="336914" y="2580773"/>
+                    <a:pt x="220288" y="2532465"/>
+                    <a:pt x="134298" y="2446475"/>
+                  </a:cubicBezTo>
+                  <a:cubicBezTo>
+                    <a:pt x="48308" y="2360486"/>
+                    <a:pt x="0" y="2243859"/>
+                    <a:pt x="0" y="2122251"/>
+                  </a:cubicBezTo>
+                  <a:lnTo>
+                    <a:pt x="0" y="458522"/>
+                  </a:lnTo>
+                  <a:cubicBezTo>
+                    <a:pt x="0" y="336914"/>
+                    <a:pt x="48308" y="220288"/>
+                    <a:pt x="134298" y="134298"/>
+                  </a:cubicBezTo>
+                  <a:cubicBezTo>
+                    <a:pt x="220288" y="48308"/>
+                    <a:pt x="336914" y="0"/>
+                    <a:pt x="458522" y="0"/>
+                  </a:cubicBezTo>
+                  <a:close/>
+                </a:path>
+              </a:pathLst>
+            </a:custGeom>
+            <a:solidFill>
+              <a:srgbClr val="FFFFFF"/>
+            </a:solidFill>
+            <a:ln cap="rnd">
+              <a:noFill/>
+              <a:prstDash val="solid"/>
+              <a:round/>
+            </a:ln>
+          </p:spPr>
+        </p:sp>
+      </p:grpSp>
       <p:sp>
         <p:nvSpPr>
-          <p:cNvPr name="TextBox 13" id="13"/>
+          <p:cNvPr name="TextBox 11" id="11"/>
           <p:cNvSpPr txBox="true"/>
           <p:nvPr/>
         </p:nvSpPr>
         <p:spPr>
           <a:xfrm rot="0">
-            <a:off x="9020813" y="612438"/>
-            <a:ext cx="7356100" cy="2210038"/>
-          </a:xfrm>
-          <a:prstGeom prst="rect">
-            <a:avLst/>
-          </a:prstGeom>
-        </p:spPr>
-        <p:txBody>
-          <a:bodyPr anchor="t" rtlCol="false" tIns="0" lIns="0" bIns="0" rIns="0">
-            <a:spAutoFit/>
-          </a:bodyPr>
-          <a:lstStyle/>
-          <a:p>
-            <a:pPr algn="l">
-              <a:lnSpc>
-                <a:spcPts val="4391"/>
-              </a:lnSpc>
-            </a:pPr>
-            <a:r>
-              <a:rPr lang="en-US" b="true" sz="3194">
-                <a:solidFill>
-                  <a:srgbClr val="1E3A8A"/>
-                </a:solidFill>
-                <a:latin typeface="Montserrat Bold"/>
-                <a:ea typeface="Montserrat Bold"/>
-                <a:cs typeface="Montserrat Bold"/>
-                <a:sym typeface="Montserrat Bold"/>
-              </a:rPr>
-              <a:t>O conceito de Arquitetura de Software surgiu nos anos 60 (com Dijkstra), mas se tornou popular nos anos 90.</a:t>
-            </a:r>
-          </a:p>
-        </p:txBody>
-      </p:sp>
-      <p:sp>
-        <p:nvSpPr>
-          <p:cNvPr name="TextBox 14" id="14"/>
-          <p:cNvSpPr txBox="true"/>
-          <p:nvPr/>
-        </p:nvSpPr>
-        <p:spPr>
-          <a:xfrm rot="0">
-            <a:off x="11546805" y="6349784"/>
-            <a:ext cx="5652373" cy="3316853"/>
+            <a:off x="10070341" y="2003306"/>
+            <a:ext cx="6341126" cy="1695456"/>
           </a:xfrm>
           <a:prstGeom prst="rect">
             <a:avLst/>
@@ -11013,20 +12880,91 @@
           <a:p>
             <a:pPr algn="ctr">
               <a:lnSpc>
-                <a:spcPts val="3751"/>
+                <a:spcPts val="3449"/>
               </a:lnSpc>
+              <a:spcBef>
+                <a:spcPct val="0"/>
+              </a:spcBef>
             </a:pPr>
             <a:r>
-              <a:rPr lang="en-US" b="true" sz="2691">
+              <a:rPr lang="en-US" b="true" sz="2499">
                 <a:solidFill>
-                  <a:srgbClr val="1E3A8A"/>
+                  <a:srgbClr val="47423E"/>
                 </a:solidFill>
                 <a:latin typeface="Montserrat Bold"/>
                 <a:ea typeface="Montserrat Bold"/>
                 <a:cs typeface="Montserrat Bold"/>
                 <a:sym typeface="Montserrat Bold"/>
               </a:rPr>
-              <a:t>Arquitetura de software é a forma como um sistema é organizado: quais são suas partes, como essas partes se conectam e interagem, e quais regras orientam a criação e as mudanças desse sistema.</a:t>
+              <a:t>O conc</a:t>
+            </a:r>
+            <a:r>
+              <a:rPr lang="en-US" b="true" sz="2499">
+                <a:solidFill>
+                  <a:srgbClr val="47423E"/>
+                </a:solidFill>
+                <a:latin typeface="Montserrat Bold"/>
+                <a:ea typeface="Montserrat Bold"/>
+                <a:cs typeface="Montserrat Bold"/>
+                <a:sym typeface="Montserrat Bold"/>
+              </a:rPr>
+              <a:t>eito de Arquitetura de Software surgiu nos anos 60 (com Dijkstra), mas se tornou popular nos anos 90.</a:t>
+            </a:r>
+          </a:p>
+        </p:txBody>
+      </p:sp>
+      <p:sp>
+        <p:nvSpPr>
+          <p:cNvPr name="TextBox 12" id="12"/>
+          <p:cNvSpPr txBox="true"/>
+          <p:nvPr/>
+        </p:nvSpPr>
+        <p:spPr>
+          <a:xfrm rot="0">
+            <a:off x="10070341" y="5662853"/>
+            <a:ext cx="7278985" cy="2124081"/>
+          </a:xfrm>
+          <a:prstGeom prst="rect">
+            <a:avLst/>
+          </a:prstGeom>
+        </p:spPr>
+        <p:txBody>
+          <a:bodyPr anchor="t" rtlCol="false" tIns="0" lIns="0" bIns="0" rIns="0">
+            <a:spAutoFit/>
+          </a:bodyPr>
+          <a:lstStyle/>
+          <a:p>
+            <a:pPr algn="ctr">
+              <a:lnSpc>
+                <a:spcPts val="3449"/>
+              </a:lnSpc>
+              <a:spcBef>
+                <a:spcPct val="0"/>
+              </a:spcBef>
+            </a:pPr>
+            <a:r>
+              <a:rPr lang="en-US" b="true" sz="2499">
+                <a:solidFill>
+                  <a:srgbClr val="47423E"/>
+                </a:solidFill>
+                <a:latin typeface="Montserrat Bold"/>
+                <a:ea typeface="Montserrat Bold"/>
+                <a:cs typeface="Montserrat Bold"/>
+                <a:sym typeface="Montserrat Bold"/>
+              </a:rPr>
+              <a:t>Arquit</a:t>
+            </a:r>
+            <a:r>
+              <a:rPr lang="en-US" b="true" sz="2499">
+                <a:solidFill>
+                  <a:srgbClr val="47423E"/>
+                </a:solidFill>
+                <a:latin typeface="Montserrat Bold"/>
+                <a:ea typeface="Montserrat Bold"/>
+                <a:cs typeface="Montserrat Bold"/>
+                <a:sym typeface="Montserrat Bold"/>
+              </a:rPr>
+              <a:t>etura de software é a forma como um sistema é organizado: quais são suas partes, como essas partes se conectam e interagem, e quais regras orientam a criação e as mudanças desse sistema.</a:t>
             </a:r>
           </a:p>
         </p:txBody>
@@ -11042,13 +12980,6 @@
 <file path=ppt/slides/slide20.xml><?xml version="1.0" encoding="utf-8"?>
 <p:sld xmlns:p="http://schemas.openxmlformats.org/presentationml/2006/main" xmlns:a="http://schemas.openxmlformats.org/drawingml/2006/main" xmlns:r="http://schemas.openxmlformats.org/officeDocument/2006/relationships">
   <p:cSld>
-    <p:bg>
-      <p:bgPr>
-        <a:solidFill>
-          <a:srgbClr val="F5E8C7"/>
-        </a:solidFill>
-      </p:bgPr>
-    </p:bg>
     <p:spTree>
       <p:nvGrpSpPr>
         <p:cNvPr id="1" name=""/>
@@ -14312,7 +16243,7 @@
         <p:spPr>
           <a:xfrm rot="0">
             <a:off x="1028700" y="718356"/>
-            <a:ext cx="14970871" cy="8367370"/>
+            <a:ext cx="14970871" cy="6531108"/>
           </a:xfrm>
           <a:prstGeom prst="rect">
             <a:avLst/>
@@ -14429,7 +16360,7 @@
 </file>
 
 <file path=ppt/slides/slide21.xml><?xml version="1.0" encoding="utf-8"?>
-<p:sld xmlns:p="http://schemas.openxmlformats.org/presentationml/2006/main" xmlns:a="http://schemas.openxmlformats.org/drawingml/2006/main" xmlns:r="http://schemas.openxmlformats.org/officeDocument/2006/relationships">
+<p:sld xmlns:p="http://schemas.openxmlformats.org/presentationml/2006/main" xmlns:a="http://schemas.openxmlformats.org/drawingml/2006/main">
   <p:cSld>
     <p:bg>
       <p:bgPr>
@@ -14454,2538 +16385,14 @@
       </p:grpSpPr>
       <p:sp>
         <p:nvSpPr>
-          <p:cNvPr name="Freeform 2" id="2"/>
-          <p:cNvSpPr/>
-          <p:nvPr/>
-        </p:nvSpPr>
-        <p:spPr>
-          <a:xfrm flipH="false" flipV="false" rot="0">
-            <a:off x="5953135" y="7225389"/>
-            <a:ext cx="3254359" cy="1531468"/>
-          </a:xfrm>
-          <a:custGeom>
-            <a:avLst/>
-            <a:gdLst/>
-            <a:ahLst/>
-            <a:cxnLst/>
-            <a:rect r="r" b="b" t="t" l="l"/>
-            <a:pathLst>
-              <a:path h="1531468" w="3254359">
-                <a:moveTo>
-                  <a:pt x="0" y="0"/>
-                </a:moveTo>
-                <a:lnTo>
-                  <a:pt x="3254359" y="0"/>
-                </a:lnTo>
-                <a:lnTo>
-                  <a:pt x="3254359" y="1531467"/>
-                </a:lnTo>
-                <a:lnTo>
-                  <a:pt x="0" y="1531467"/>
-                </a:lnTo>
-                <a:lnTo>
-                  <a:pt x="0" y="0"/>
-                </a:lnTo>
-                <a:close/>
-              </a:path>
-            </a:pathLst>
-          </a:custGeom>
-          <a:blipFill>
-            <a:blip r:embed="rId2">
-              <a:extLst>
-                <a:ext uri="{96DAC541-7B7A-43D3-8B79-37D633B846F1}">
-                  <asvg:svgBlip xmlns:asvg="http://schemas.microsoft.com/office/drawing/2016/SVG/main" r:embed="rId3"/>
-                </a:ext>
-              </a:extLst>
-            </a:blip>
-            <a:stretch>
-              <a:fillRect l="0" t="0" r="0" b="0"/>
-            </a:stretch>
-          </a:blipFill>
-        </p:spPr>
-      </p:sp>
-      <p:grpSp>
-        <p:nvGrpSpPr>
-          <p:cNvPr name="Group 3" id="3"/>
-          <p:cNvGrpSpPr/>
-          <p:nvPr/>
-        </p:nvGrpSpPr>
-        <p:grpSpPr>
-          <a:xfrm rot="0">
-            <a:off x="11233414" y="4109047"/>
-            <a:ext cx="2078298" cy="2269179"/>
-            <a:chOff x="0" y="0"/>
-            <a:chExt cx="2078291" cy="2269185"/>
-          </a:xfrm>
-        </p:grpSpPr>
-        <p:sp>
-          <p:nvSpPr>
-            <p:cNvPr name="Freeform 4" id="4"/>
-            <p:cNvSpPr/>
-            <p:nvPr/>
-          </p:nvSpPr>
-          <p:spPr>
-            <a:xfrm flipH="false" flipV="false" rot="0">
-              <a:off x="83312" y="274575"/>
-              <a:ext cx="1912363" cy="1912244"/>
-            </a:xfrm>
-            <a:custGeom>
-              <a:avLst/>
-              <a:gdLst/>
-              <a:ahLst/>
-              <a:cxnLst/>
-              <a:rect r="r" b="b" t="t" l="l"/>
-              <a:pathLst>
-                <a:path h="1912244" w="1912363">
-                  <a:moveTo>
-                    <a:pt x="956308" y="0"/>
-                  </a:moveTo>
-                  <a:cubicBezTo>
-                    <a:pt x="428243" y="0"/>
-                    <a:pt x="0" y="428118"/>
-                    <a:pt x="0" y="956185"/>
-                  </a:cubicBezTo>
-                  <a:cubicBezTo>
-                    <a:pt x="0" y="1139319"/>
-                    <a:pt x="51689" y="1310262"/>
-                    <a:pt x="140716" y="1455804"/>
-                  </a:cubicBezTo>
-                  <a:lnTo>
-                    <a:pt x="21590" y="1912243"/>
-                  </a:lnTo>
-                  <a:lnTo>
-                    <a:pt x="444118" y="1763399"/>
-                  </a:lnTo>
-                  <a:cubicBezTo>
-                    <a:pt x="592327" y="1857379"/>
-                    <a:pt x="767714" y="1912243"/>
-                    <a:pt x="956054" y="1912243"/>
-                  </a:cubicBezTo>
-                  <a:cubicBezTo>
-                    <a:pt x="1484120" y="1912243"/>
-                    <a:pt x="1912363" y="1484125"/>
-                    <a:pt x="1912363" y="956312"/>
-                  </a:cubicBezTo>
-                  <a:cubicBezTo>
-                    <a:pt x="1912363" y="428499"/>
-                    <a:pt x="1484374" y="127"/>
-                    <a:pt x="956308" y="127"/>
-                  </a:cubicBezTo>
-                  <a:close/>
-                </a:path>
-              </a:pathLst>
-            </a:custGeom>
-            <a:solidFill>
-              <a:srgbClr val="E2DAC4"/>
-            </a:solidFill>
-          </p:spPr>
-        </p:sp>
-        <p:sp>
-          <p:nvSpPr>
-            <p:cNvPr name="Freeform 5" id="5"/>
-            <p:cNvSpPr/>
-            <p:nvPr/>
-          </p:nvSpPr>
-          <p:spPr>
-            <a:xfrm flipH="false" flipV="false" rot="0">
-              <a:off x="64389" y="255906"/>
-              <a:ext cx="1950463" cy="1949836"/>
-            </a:xfrm>
-            <a:custGeom>
-              <a:avLst/>
-              <a:gdLst/>
-              <a:ahLst/>
-              <a:cxnLst/>
-              <a:rect r="r" b="b" t="t" l="l"/>
-              <a:pathLst>
-                <a:path h="1949836" w="1950463">
-                  <a:moveTo>
-                    <a:pt x="40767" y="1949835"/>
-                  </a:moveTo>
-                  <a:cubicBezTo>
-                    <a:pt x="36068" y="1949835"/>
-                    <a:pt x="31496" y="1948184"/>
-                    <a:pt x="27940" y="1944882"/>
-                  </a:cubicBezTo>
-                  <a:cubicBezTo>
-                    <a:pt x="22860" y="1940183"/>
-                    <a:pt x="20701" y="1932944"/>
-                    <a:pt x="22479" y="1926213"/>
-                  </a:cubicBezTo>
-                  <a:lnTo>
-                    <a:pt x="139573" y="1477521"/>
-                  </a:lnTo>
-                  <a:cubicBezTo>
-                    <a:pt x="48260" y="1325883"/>
-                    <a:pt x="0" y="1152273"/>
-                    <a:pt x="0" y="974854"/>
-                  </a:cubicBezTo>
-                  <a:cubicBezTo>
-                    <a:pt x="0" y="437262"/>
-                    <a:pt x="437387" y="0"/>
-                    <a:pt x="975231" y="0"/>
-                  </a:cubicBezTo>
-                  <a:cubicBezTo>
-                    <a:pt x="1513076" y="0"/>
-                    <a:pt x="1950463" y="437389"/>
-                    <a:pt x="1950463" y="974854"/>
-                  </a:cubicBezTo>
-                  <a:cubicBezTo>
-                    <a:pt x="1950463" y="1512319"/>
-                    <a:pt x="1513076" y="1949709"/>
-                    <a:pt x="975231" y="1949709"/>
-                  </a:cubicBezTo>
-                  <a:cubicBezTo>
-                    <a:pt x="792860" y="1949709"/>
-                    <a:pt x="615187" y="1899035"/>
-                    <a:pt x="460755" y="1802896"/>
-                  </a:cubicBezTo>
-                  <a:lnTo>
-                    <a:pt x="46990" y="1948820"/>
-                  </a:lnTo>
-                  <a:cubicBezTo>
-                    <a:pt x="44958" y="1949327"/>
-                    <a:pt x="42799" y="1949709"/>
-                    <a:pt x="40767" y="1949709"/>
-                  </a:cubicBezTo>
-                  <a:close/>
-                  <a:moveTo>
-                    <a:pt x="463295" y="1763018"/>
-                  </a:moveTo>
-                  <a:cubicBezTo>
-                    <a:pt x="466851" y="1763018"/>
-                    <a:pt x="470280" y="1763907"/>
-                    <a:pt x="473455" y="1766066"/>
-                  </a:cubicBezTo>
-                  <a:cubicBezTo>
-                    <a:pt x="623696" y="1861443"/>
-                    <a:pt x="797178" y="1911862"/>
-                    <a:pt x="975358" y="1911862"/>
-                  </a:cubicBezTo>
-                  <a:cubicBezTo>
-                    <a:pt x="1492247" y="1911862"/>
-                    <a:pt x="1912744" y="1491618"/>
-                    <a:pt x="1912744" y="974727"/>
-                  </a:cubicBezTo>
-                  <a:cubicBezTo>
-                    <a:pt x="1912744" y="457836"/>
-                    <a:pt x="1492375" y="37592"/>
-                    <a:pt x="975358" y="37592"/>
-                  </a:cubicBezTo>
-                  <a:cubicBezTo>
-                    <a:pt x="458342" y="37592"/>
-                    <a:pt x="37846" y="458090"/>
-                    <a:pt x="37846" y="974854"/>
-                  </a:cubicBezTo>
-                  <a:cubicBezTo>
-                    <a:pt x="37846" y="1148082"/>
-                    <a:pt x="85471" y="1317374"/>
-                    <a:pt x="176022" y="1464440"/>
-                  </a:cubicBezTo>
-                  <a:cubicBezTo>
-                    <a:pt x="178689" y="1468758"/>
-                    <a:pt x="179451" y="1474092"/>
-                    <a:pt x="178308" y="1479172"/>
-                  </a:cubicBezTo>
-                  <a:lnTo>
-                    <a:pt x="68199" y="1901194"/>
-                  </a:lnTo>
-                  <a:lnTo>
-                    <a:pt x="457072" y="1764288"/>
-                  </a:lnTo>
-                  <a:cubicBezTo>
-                    <a:pt x="458977" y="1763526"/>
-                    <a:pt x="461263" y="1763145"/>
-                    <a:pt x="463295" y="1763145"/>
-                  </a:cubicBezTo>
-                  <a:close/>
-                </a:path>
-              </a:pathLst>
-            </a:custGeom>
-            <a:solidFill>
-              <a:srgbClr val="48423D"/>
-            </a:solidFill>
-          </p:spPr>
-        </p:sp>
-        <p:sp>
-          <p:nvSpPr>
-            <p:cNvPr name="Freeform 6" id="6"/>
-            <p:cNvSpPr/>
-            <p:nvPr/>
-          </p:nvSpPr>
-          <p:spPr>
-            <a:xfrm flipH="false" flipV="false" rot="0">
-              <a:off x="884681" y="712726"/>
-              <a:ext cx="347217" cy="998730"/>
-            </a:xfrm>
-            <a:custGeom>
-              <a:avLst/>
-              <a:gdLst/>
-              <a:ahLst/>
-              <a:cxnLst/>
-              <a:rect r="r" b="b" t="t" l="l"/>
-              <a:pathLst>
-                <a:path h="998730" w="347217">
-                  <a:moveTo>
-                    <a:pt x="0" y="0"/>
-                  </a:moveTo>
-                  <a:lnTo>
-                    <a:pt x="347217" y="0"/>
-                  </a:lnTo>
-                  <a:lnTo>
-                    <a:pt x="347217" y="998730"/>
-                  </a:lnTo>
-                  <a:lnTo>
-                    <a:pt x="0" y="998730"/>
-                  </a:lnTo>
-                  <a:close/>
-                </a:path>
-              </a:pathLst>
-            </a:custGeom>
-            <a:solidFill>
-              <a:srgbClr val="597844"/>
-            </a:solidFill>
-          </p:spPr>
-        </p:sp>
-        <p:sp>
-          <p:nvSpPr>
-            <p:cNvPr name="Freeform 7" id="7"/>
-            <p:cNvSpPr/>
-            <p:nvPr/>
-          </p:nvSpPr>
-          <p:spPr>
-            <a:xfrm flipH="false" flipV="false" rot="0">
-              <a:off x="865758" y="693803"/>
-              <a:ext cx="385065" cy="1036577"/>
-            </a:xfrm>
-            <a:custGeom>
-              <a:avLst/>
-              <a:gdLst/>
-              <a:ahLst/>
-              <a:cxnLst/>
-              <a:rect r="r" b="b" t="t" l="l"/>
-              <a:pathLst>
-                <a:path h="1036577" w="385065">
-                  <a:moveTo>
-                    <a:pt x="366267" y="1036576"/>
-                  </a:moveTo>
-                  <a:lnTo>
-                    <a:pt x="18923" y="1036576"/>
-                  </a:lnTo>
-                  <a:cubicBezTo>
-                    <a:pt x="8509" y="1036576"/>
-                    <a:pt x="0" y="1028067"/>
-                    <a:pt x="0" y="1017653"/>
-                  </a:cubicBezTo>
-                  <a:lnTo>
-                    <a:pt x="0" y="18923"/>
-                  </a:lnTo>
-                  <a:cubicBezTo>
-                    <a:pt x="0" y="8509"/>
-                    <a:pt x="8509" y="0"/>
-                    <a:pt x="18923" y="0"/>
-                  </a:cubicBezTo>
-                  <a:lnTo>
-                    <a:pt x="366140" y="0"/>
-                  </a:lnTo>
-                  <a:cubicBezTo>
-                    <a:pt x="376554" y="0"/>
-                    <a:pt x="385063" y="8509"/>
-                    <a:pt x="385063" y="18923"/>
-                  </a:cubicBezTo>
-                  <a:lnTo>
-                    <a:pt x="385063" y="1017653"/>
-                  </a:lnTo>
-                  <a:cubicBezTo>
-                    <a:pt x="385190" y="1028067"/>
-                    <a:pt x="376681" y="1036576"/>
-                    <a:pt x="366394" y="1036576"/>
-                  </a:cubicBezTo>
-                  <a:close/>
-                  <a:moveTo>
-                    <a:pt x="37972" y="998730"/>
-                  </a:moveTo>
-                  <a:lnTo>
-                    <a:pt x="347217" y="998730"/>
-                  </a:lnTo>
-                  <a:lnTo>
-                    <a:pt x="347217" y="37846"/>
-                  </a:lnTo>
-                  <a:lnTo>
-                    <a:pt x="37846" y="37846"/>
-                  </a:lnTo>
-                  <a:lnTo>
-                    <a:pt x="37846" y="998730"/>
-                  </a:lnTo>
-                  <a:close/>
-                </a:path>
-              </a:pathLst>
-            </a:custGeom>
-            <a:solidFill>
-              <a:srgbClr val="48423D"/>
-            </a:solidFill>
-          </p:spPr>
-        </p:sp>
-        <p:sp>
-          <p:nvSpPr>
-            <p:cNvPr name="Freeform 8" id="8"/>
-            <p:cNvSpPr/>
-            <p:nvPr/>
-          </p:nvSpPr>
-          <p:spPr>
-            <a:xfrm flipH="false" flipV="false" rot="0">
-              <a:off x="1213102" y="1692533"/>
-              <a:ext cx="224790" cy="37846"/>
-            </a:xfrm>
-            <a:custGeom>
-              <a:avLst/>
-              <a:gdLst/>
-              <a:ahLst/>
-              <a:cxnLst/>
-              <a:rect r="r" b="b" t="t" l="l"/>
-              <a:pathLst>
-                <a:path h="37846" w="224790">
-                  <a:moveTo>
-                    <a:pt x="205867" y="37846"/>
-                  </a:moveTo>
-                  <a:lnTo>
-                    <a:pt x="18923" y="37846"/>
-                  </a:lnTo>
-                  <a:cubicBezTo>
-                    <a:pt x="8509" y="37846"/>
-                    <a:pt x="0" y="29337"/>
-                    <a:pt x="0" y="18923"/>
-                  </a:cubicBezTo>
-                  <a:cubicBezTo>
-                    <a:pt x="0" y="8509"/>
-                    <a:pt x="8509" y="0"/>
-                    <a:pt x="18923" y="0"/>
-                  </a:cubicBezTo>
-                  <a:lnTo>
-                    <a:pt x="205867" y="0"/>
-                  </a:lnTo>
-                  <a:cubicBezTo>
-                    <a:pt x="216281" y="0"/>
-                    <a:pt x="224790" y="8509"/>
-                    <a:pt x="224790" y="18923"/>
-                  </a:cubicBezTo>
-                  <a:cubicBezTo>
-                    <a:pt x="224790" y="29337"/>
-                    <a:pt x="216281" y="37846"/>
-                    <a:pt x="205867" y="37846"/>
-                  </a:cubicBezTo>
-                  <a:close/>
-                </a:path>
-              </a:pathLst>
-            </a:custGeom>
-            <a:solidFill>
-              <a:srgbClr val="48423D"/>
-            </a:solidFill>
-          </p:spPr>
-        </p:sp>
-        <p:sp>
-          <p:nvSpPr>
-            <p:cNvPr name="Freeform 9" id="9"/>
-            <p:cNvSpPr/>
-            <p:nvPr/>
-          </p:nvSpPr>
-          <p:spPr>
-            <a:xfrm flipH="false" flipV="false" rot="0">
-              <a:off x="657478" y="693803"/>
-              <a:ext cx="246126" cy="37846"/>
-            </a:xfrm>
-            <a:custGeom>
-              <a:avLst/>
-              <a:gdLst/>
-              <a:ahLst/>
-              <a:cxnLst/>
-              <a:rect r="r" b="b" t="t" l="l"/>
-              <a:pathLst>
-                <a:path h="37846" w="246126">
-                  <a:moveTo>
-                    <a:pt x="227203" y="37846"/>
-                  </a:moveTo>
-                  <a:lnTo>
-                    <a:pt x="18923" y="37846"/>
-                  </a:lnTo>
-                  <a:cubicBezTo>
-                    <a:pt x="8509" y="37846"/>
-                    <a:pt x="0" y="29337"/>
-                    <a:pt x="0" y="18923"/>
-                  </a:cubicBezTo>
-                  <a:cubicBezTo>
-                    <a:pt x="0" y="8509"/>
-                    <a:pt x="8509" y="0"/>
-                    <a:pt x="18923" y="0"/>
-                  </a:cubicBezTo>
-                  <a:lnTo>
-                    <a:pt x="227202" y="0"/>
-                  </a:lnTo>
-                  <a:cubicBezTo>
-                    <a:pt x="237616" y="0"/>
-                    <a:pt x="246126" y="8509"/>
-                    <a:pt x="246126" y="18923"/>
-                  </a:cubicBezTo>
-                  <a:cubicBezTo>
-                    <a:pt x="246126" y="29337"/>
-                    <a:pt x="237616" y="37846"/>
-                    <a:pt x="227202" y="37846"/>
-                  </a:cubicBezTo>
-                  <a:close/>
-                </a:path>
-              </a:pathLst>
-            </a:custGeom>
-            <a:solidFill>
-              <a:srgbClr val="48423D"/>
-            </a:solidFill>
-          </p:spPr>
-        </p:sp>
-        <p:sp>
-          <p:nvSpPr>
-            <p:cNvPr name="Freeform 10" id="10"/>
-            <p:cNvSpPr/>
-            <p:nvPr/>
-          </p:nvSpPr>
-          <p:spPr>
-            <a:xfrm flipH="false" flipV="false" rot="0">
-              <a:off x="871600" y="82423"/>
-              <a:ext cx="373633" cy="373635"/>
-            </a:xfrm>
-            <a:custGeom>
-              <a:avLst/>
-              <a:gdLst/>
-              <a:ahLst/>
-              <a:cxnLst/>
-              <a:rect r="r" b="b" t="t" l="l"/>
-              <a:pathLst>
-                <a:path h="373635" w="373633">
-                  <a:moveTo>
-                    <a:pt x="373633" y="186818"/>
-                  </a:moveTo>
-                  <a:cubicBezTo>
-                    <a:pt x="373633" y="199137"/>
-                    <a:pt x="372490" y="211202"/>
-                    <a:pt x="370077" y="223267"/>
-                  </a:cubicBezTo>
-                  <a:cubicBezTo>
-                    <a:pt x="367664" y="235332"/>
-                    <a:pt x="364108" y="247016"/>
-                    <a:pt x="359409" y="258319"/>
-                  </a:cubicBezTo>
-                  <a:cubicBezTo>
-                    <a:pt x="354710" y="269622"/>
-                    <a:pt x="348995" y="280417"/>
-                    <a:pt x="342137" y="290577"/>
-                  </a:cubicBezTo>
-                  <a:cubicBezTo>
-                    <a:pt x="335279" y="300737"/>
-                    <a:pt x="327532" y="310262"/>
-                    <a:pt x="318896" y="318898"/>
-                  </a:cubicBezTo>
-                  <a:cubicBezTo>
-                    <a:pt x="310260" y="327534"/>
-                    <a:pt x="300735" y="335281"/>
-                    <a:pt x="290575" y="342139"/>
-                  </a:cubicBezTo>
-                  <a:cubicBezTo>
-                    <a:pt x="280415" y="348997"/>
-                    <a:pt x="269620" y="354712"/>
-                    <a:pt x="258317" y="359411"/>
-                  </a:cubicBezTo>
-                  <a:cubicBezTo>
-                    <a:pt x="247014" y="364110"/>
-                    <a:pt x="235330" y="367666"/>
-                    <a:pt x="223265" y="370079"/>
-                  </a:cubicBezTo>
-                  <a:cubicBezTo>
-                    <a:pt x="211200" y="372492"/>
-                    <a:pt x="199008" y="373635"/>
-                    <a:pt x="186816" y="373635"/>
-                  </a:cubicBezTo>
-                  <a:cubicBezTo>
-                    <a:pt x="174624" y="373635"/>
-                    <a:pt x="162432" y="372492"/>
-                    <a:pt x="150367" y="370079"/>
-                  </a:cubicBezTo>
-                  <a:cubicBezTo>
-                    <a:pt x="138302" y="367666"/>
-                    <a:pt x="126618" y="364110"/>
-                    <a:pt x="115316" y="359411"/>
-                  </a:cubicBezTo>
-                  <a:cubicBezTo>
-                    <a:pt x="104012" y="354712"/>
-                    <a:pt x="93217" y="348997"/>
-                    <a:pt x="83058" y="342139"/>
-                  </a:cubicBezTo>
-                  <a:cubicBezTo>
-                    <a:pt x="72897" y="335281"/>
-                    <a:pt x="63372" y="327534"/>
-                    <a:pt x="54737" y="318898"/>
-                  </a:cubicBezTo>
-                  <a:cubicBezTo>
-                    <a:pt x="46101" y="310262"/>
-                    <a:pt x="38354" y="300737"/>
-                    <a:pt x="31496" y="290577"/>
-                  </a:cubicBezTo>
-                  <a:cubicBezTo>
-                    <a:pt x="24638" y="280417"/>
-                    <a:pt x="18923" y="269622"/>
-                    <a:pt x="14224" y="258319"/>
-                  </a:cubicBezTo>
-                  <a:cubicBezTo>
-                    <a:pt x="9525" y="247016"/>
-                    <a:pt x="5969" y="235332"/>
-                    <a:pt x="3556" y="223267"/>
-                  </a:cubicBezTo>
-                  <a:cubicBezTo>
-                    <a:pt x="1143" y="211202"/>
-                    <a:pt x="0" y="199137"/>
-                    <a:pt x="0" y="186818"/>
-                  </a:cubicBezTo>
-                  <a:cubicBezTo>
-                    <a:pt x="0" y="174499"/>
-                    <a:pt x="1143" y="162434"/>
-                    <a:pt x="3556" y="150369"/>
-                  </a:cubicBezTo>
-                  <a:cubicBezTo>
-                    <a:pt x="5969" y="138304"/>
-                    <a:pt x="9525" y="126620"/>
-                    <a:pt x="14224" y="115316"/>
-                  </a:cubicBezTo>
-                  <a:cubicBezTo>
-                    <a:pt x="18923" y="104013"/>
-                    <a:pt x="24638" y="93218"/>
-                    <a:pt x="31496" y="83058"/>
-                  </a:cubicBezTo>
-                  <a:cubicBezTo>
-                    <a:pt x="38354" y="72898"/>
-                    <a:pt x="46101" y="63373"/>
-                    <a:pt x="54737" y="54737"/>
-                  </a:cubicBezTo>
-                  <a:cubicBezTo>
-                    <a:pt x="63372" y="46101"/>
-                    <a:pt x="72897" y="38354"/>
-                    <a:pt x="83058" y="31496"/>
-                  </a:cubicBezTo>
-                  <a:cubicBezTo>
-                    <a:pt x="93217" y="24638"/>
-                    <a:pt x="104012" y="18923"/>
-                    <a:pt x="115316" y="14224"/>
-                  </a:cubicBezTo>
-                  <a:cubicBezTo>
-                    <a:pt x="126618" y="9525"/>
-                    <a:pt x="138302" y="5969"/>
-                    <a:pt x="150367" y="3556"/>
-                  </a:cubicBezTo>
-                  <a:cubicBezTo>
-                    <a:pt x="162432" y="1143"/>
-                    <a:pt x="174624" y="0"/>
-                    <a:pt x="186816" y="0"/>
-                  </a:cubicBezTo>
-                  <a:cubicBezTo>
-                    <a:pt x="199008" y="0"/>
-                    <a:pt x="211200" y="1143"/>
-                    <a:pt x="223265" y="3556"/>
-                  </a:cubicBezTo>
-                  <a:cubicBezTo>
-                    <a:pt x="235330" y="5969"/>
-                    <a:pt x="247014" y="9525"/>
-                    <a:pt x="258317" y="14224"/>
-                  </a:cubicBezTo>
-                  <a:cubicBezTo>
-                    <a:pt x="269620" y="18923"/>
-                    <a:pt x="280415" y="24638"/>
-                    <a:pt x="290575" y="31496"/>
-                  </a:cubicBezTo>
-                  <a:cubicBezTo>
-                    <a:pt x="300735" y="38354"/>
-                    <a:pt x="310260" y="46101"/>
-                    <a:pt x="318896" y="54737"/>
-                  </a:cubicBezTo>
-                  <a:cubicBezTo>
-                    <a:pt x="327532" y="63373"/>
-                    <a:pt x="335279" y="72898"/>
-                    <a:pt x="342137" y="83058"/>
-                  </a:cubicBezTo>
-                  <a:cubicBezTo>
-                    <a:pt x="348995" y="93218"/>
-                    <a:pt x="354710" y="104013"/>
-                    <a:pt x="359409" y="115316"/>
-                  </a:cubicBezTo>
-                  <a:cubicBezTo>
-                    <a:pt x="364108" y="126620"/>
-                    <a:pt x="367664" y="138304"/>
-                    <a:pt x="370077" y="150369"/>
-                  </a:cubicBezTo>
-                  <a:cubicBezTo>
-                    <a:pt x="372490" y="162434"/>
-                    <a:pt x="373633" y="174499"/>
-                    <a:pt x="373633" y="186818"/>
-                  </a:cubicBezTo>
-                  <a:close/>
-                </a:path>
-              </a:pathLst>
-            </a:custGeom>
-            <a:solidFill>
-              <a:srgbClr val="597844"/>
-            </a:solidFill>
-          </p:spPr>
-        </p:sp>
-        <p:sp>
-          <p:nvSpPr>
-            <p:cNvPr name="Freeform 11" id="11"/>
-            <p:cNvSpPr/>
-            <p:nvPr/>
-          </p:nvSpPr>
-          <p:spPr>
-            <a:xfrm flipH="false" flipV="false" rot="0">
-              <a:off x="852423" y="63500"/>
-              <a:ext cx="411733" cy="411608"/>
-            </a:xfrm>
-            <a:custGeom>
-              <a:avLst/>
-              <a:gdLst/>
-              <a:ahLst/>
-              <a:cxnLst/>
-              <a:rect r="r" b="b" t="t" l="l"/>
-              <a:pathLst>
-                <a:path h="411608" w="411733">
-                  <a:moveTo>
-                    <a:pt x="205866" y="411608"/>
-                  </a:moveTo>
-                  <a:cubicBezTo>
-                    <a:pt x="92328" y="411608"/>
-                    <a:pt x="0" y="319279"/>
-                    <a:pt x="0" y="205868"/>
-                  </a:cubicBezTo>
-                  <a:cubicBezTo>
-                    <a:pt x="0" y="92456"/>
-                    <a:pt x="92455" y="0"/>
-                    <a:pt x="205866" y="0"/>
-                  </a:cubicBezTo>
-                  <a:cubicBezTo>
-                    <a:pt x="319277" y="0"/>
-                    <a:pt x="411733" y="92329"/>
-                    <a:pt x="411733" y="205741"/>
-                  </a:cubicBezTo>
-                  <a:cubicBezTo>
-                    <a:pt x="411733" y="319152"/>
-                    <a:pt x="319404" y="411481"/>
-                    <a:pt x="205866" y="411481"/>
-                  </a:cubicBezTo>
-                  <a:close/>
-                  <a:moveTo>
-                    <a:pt x="205866" y="37719"/>
-                  </a:moveTo>
-                  <a:cubicBezTo>
-                    <a:pt x="113156" y="37719"/>
-                    <a:pt x="37846" y="113030"/>
-                    <a:pt x="37846" y="205741"/>
-                  </a:cubicBezTo>
-                  <a:cubicBezTo>
-                    <a:pt x="37846" y="298451"/>
-                    <a:pt x="113156" y="373762"/>
-                    <a:pt x="205866" y="373762"/>
-                  </a:cubicBezTo>
-                  <a:cubicBezTo>
-                    <a:pt x="298576" y="373762"/>
-                    <a:pt x="373887" y="298451"/>
-                    <a:pt x="373887" y="205741"/>
-                  </a:cubicBezTo>
-                  <a:cubicBezTo>
-                    <a:pt x="373887" y="113030"/>
-                    <a:pt x="298703" y="37846"/>
-                    <a:pt x="205866" y="37846"/>
-                  </a:cubicBezTo>
-                  <a:close/>
-                </a:path>
-              </a:pathLst>
-            </a:custGeom>
-            <a:solidFill>
-              <a:srgbClr val="48423D"/>
-            </a:solidFill>
-          </p:spPr>
-        </p:sp>
-        <p:sp>
-          <p:nvSpPr>
-            <p:cNvPr name="Freeform 12" id="12"/>
-            <p:cNvSpPr/>
-            <p:nvPr/>
-          </p:nvSpPr>
-          <p:spPr>
-            <a:xfrm flipH="false" flipV="false" rot="0">
-              <a:off x="63500" y="63500"/>
-              <a:ext cx="1949828" cy="2140463"/>
-            </a:xfrm>
-            <a:custGeom>
-              <a:avLst/>
-              <a:gdLst/>
-              <a:ahLst/>
-              <a:cxnLst/>
-              <a:rect r="r" b="b" t="t" l="l"/>
-              <a:pathLst>
-                <a:path h="2140463" w="1949828">
-                  <a:moveTo>
-                    <a:pt x="0" y="2140463"/>
-                  </a:moveTo>
-                  <a:lnTo>
-                    <a:pt x="1949828" y="2140463"/>
-                  </a:lnTo>
-                  <a:lnTo>
-                    <a:pt x="1949828" y="0"/>
-                  </a:lnTo>
-                  <a:lnTo>
-                    <a:pt x="0" y="0"/>
-                  </a:lnTo>
-                  <a:close/>
-                </a:path>
-              </a:pathLst>
-            </a:custGeom>
-            <a:solidFill>
-              <a:srgbClr val="000000">
-                <a:alpha val="0"/>
-              </a:srgbClr>
-            </a:solidFill>
-          </p:spPr>
-        </p:sp>
-      </p:grpSp>
-      <p:grpSp>
-        <p:nvGrpSpPr>
-          <p:cNvPr name="Group 13" id="13"/>
-          <p:cNvGrpSpPr/>
-          <p:nvPr/>
-        </p:nvGrpSpPr>
-        <p:grpSpPr>
-          <a:xfrm rot="0">
-            <a:off x="14540074" y="8064913"/>
-            <a:ext cx="2782795" cy="1256890"/>
-            <a:chOff x="0" y="0"/>
-            <a:chExt cx="2782799" cy="1256894"/>
-          </a:xfrm>
-        </p:grpSpPr>
-        <p:sp>
-          <p:nvSpPr>
-            <p:cNvPr name="Freeform 14" id="14"/>
-            <p:cNvSpPr/>
-            <p:nvPr/>
-          </p:nvSpPr>
-          <p:spPr>
-            <a:xfrm flipH="false" flipV="false" rot="0">
-              <a:off x="76708" y="78359"/>
-              <a:ext cx="2629285" cy="1100332"/>
-            </a:xfrm>
-            <a:custGeom>
-              <a:avLst/>
-              <a:gdLst/>
-              <a:ahLst/>
-              <a:cxnLst/>
-              <a:rect r="r" b="b" t="t" l="l"/>
-              <a:pathLst>
-                <a:path h="1100332" w="2629285">
-                  <a:moveTo>
-                    <a:pt x="2079247" y="1100332"/>
-                  </a:moveTo>
-                  <a:lnTo>
-                    <a:pt x="550038" y="1100332"/>
-                  </a:lnTo>
-                  <a:cubicBezTo>
-                    <a:pt x="246253" y="1100332"/>
-                    <a:pt x="0" y="853951"/>
-                    <a:pt x="0" y="550166"/>
-                  </a:cubicBezTo>
-                  <a:cubicBezTo>
-                    <a:pt x="0" y="246381"/>
-                    <a:pt x="246380" y="0"/>
-                    <a:pt x="550038" y="0"/>
-                  </a:cubicBezTo>
-                  <a:lnTo>
-                    <a:pt x="2079247" y="0"/>
-                  </a:lnTo>
-                  <a:cubicBezTo>
-                    <a:pt x="2383159" y="0"/>
-                    <a:pt x="2629285" y="246381"/>
-                    <a:pt x="2629285" y="550039"/>
-                  </a:cubicBezTo>
-                  <a:cubicBezTo>
-                    <a:pt x="2629285" y="853697"/>
-                    <a:pt x="2382905" y="1100205"/>
-                    <a:pt x="2079247" y="1100205"/>
-                  </a:cubicBezTo>
-                  <a:close/>
-                </a:path>
-              </a:pathLst>
-            </a:custGeom>
-            <a:solidFill>
-              <a:srgbClr val="F5E8C7"/>
-            </a:solidFill>
-          </p:spPr>
-        </p:sp>
-        <p:sp>
-          <p:nvSpPr>
-            <p:cNvPr name="Freeform 15" id="15"/>
-            <p:cNvSpPr/>
-            <p:nvPr/>
-          </p:nvSpPr>
-          <p:spPr>
-            <a:xfrm flipH="false" flipV="false" rot="0">
-              <a:off x="63500" y="65151"/>
-              <a:ext cx="2655701" cy="1126748"/>
-            </a:xfrm>
-            <a:custGeom>
-              <a:avLst/>
-              <a:gdLst/>
-              <a:ahLst/>
-              <a:cxnLst/>
-              <a:rect r="r" b="b" t="t" l="l"/>
-              <a:pathLst>
-                <a:path h="1126748" w="2655701">
-                  <a:moveTo>
-                    <a:pt x="2092455" y="1126748"/>
-                  </a:moveTo>
-                  <a:lnTo>
-                    <a:pt x="563246" y="1126748"/>
-                  </a:lnTo>
-                  <a:cubicBezTo>
-                    <a:pt x="252603" y="1126748"/>
-                    <a:pt x="0" y="874017"/>
-                    <a:pt x="0" y="563374"/>
-                  </a:cubicBezTo>
-                  <a:cubicBezTo>
-                    <a:pt x="0" y="252731"/>
-                    <a:pt x="252603" y="0"/>
-                    <a:pt x="563246" y="0"/>
-                  </a:cubicBezTo>
-                  <a:lnTo>
-                    <a:pt x="2092455" y="0"/>
-                  </a:lnTo>
-                  <a:cubicBezTo>
-                    <a:pt x="2403098" y="0"/>
-                    <a:pt x="2655701" y="252604"/>
-                    <a:pt x="2655701" y="563247"/>
-                  </a:cubicBezTo>
-                  <a:cubicBezTo>
-                    <a:pt x="2655701" y="873890"/>
-                    <a:pt x="2403098" y="1126621"/>
-                    <a:pt x="2092455" y="1126621"/>
-                  </a:cubicBezTo>
-                  <a:close/>
-                  <a:moveTo>
-                    <a:pt x="563246" y="26543"/>
-                  </a:moveTo>
-                  <a:cubicBezTo>
-                    <a:pt x="267208" y="26543"/>
-                    <a:pt x="26416" y="267336"/>
-                    <a:pt x="26416" y="563374"/>
-                  </a:cubicBezTo>
-                  <a:cubicBezTo>
-                    <a:pt x="26416" y="859412"/>
-                    <a:pt x="267208" y="1100332"/>
-                    <a:pt x="563246" y="1100332"/>
-                  </a:cubicBezTo>
-                  <a:lnTo>
-                    <a:pt x="2092455" y="1100332"/>
-                  </a:lnTo>
-                  <a:cubicBezTo>
-                    <a:pt x="2388493" y="1100332"/>
-                    <a:pt x="2629285" y="859412"/>
-                    <a:pt x="2629285" y="563374"/>
-                  </a:cubicBezTo>
-                  <a:cubicBezTo>
-                    <a:pt x="2629285" y="267336"/>
-                    <a:pt x="2388493" y="26543"/>
-                    <a:pt x="2092455" y="26543"/>
-                  </a:cubicBezTo>
-                  <a:lnTo>
-                    <a:pt x="563246" y="26543"/>
-                  </a:lnTo>
-                  <a:close/>
-                </a:path>
-              </a:pathLst>
-            </a:custGeom>
-            <a:solidFill>
-              <a:srgbClr val="48423D"/>
-            </a:solidFill>
-          </p:spPr>
-        </p:sp>
-        <p:sp>
-          <p:nvSpPr>
-            <p:cNvPr name="Freeform 16" id="16"/>
-            <p:cNvSpPr/>
-            <p:nvPr/>
-          </p:nvSpPr>
-          <p:spPr>
-            <a:xfrm flipH="false" flipV="false" rot="0">
-              <a:off x="76708" y="78359"/>
-              <a:ext cx="1133350" cy="1100332"/>
-            </a:xfrm>
-            <a:custGeom>
-              <a:avLst/>
-              <a:gdLst/>
-              <a:ahLst/>
-              <a:cxnLst/>
-              <a:rect r="r" b="b" t="t" l="l"/>
-              <a:pathLst>
-                <a:path h="1100332" w="1133350">
-                  <a:moveTo>
-                    <a:pt x="583566" y="1100332"/>
-                  </a:moveTo>
-                  <a:lnTo>
-                    <a:pt x="550165" y="1100332"/>
-                  </a:lnTo>
-                  <a:cubicBezTo>
-                    <a:pt x="246253" y="1100332"/>
-                    <a:pt x="0" y="853951"/>
-                    <a:pt x="0" y="550166"/>
-                  </a:cubicBezTo>
-                  <a:cubicBezTo>
-                    <a:pt x="0" y="246381"/>
-                    <a:pt x="246380" y="0"/>
-                    <a:pt x="550038" y="0"/>
-                  </a:cubicBezTo>
-                  <a:lnTo>
-                    <a:pt x="583312" y="0"/>
-                  </a:lnTo>
-                  <a:cubicBezTo>
-                    <a:pt x="887223" y="0"/>
-                    <a:pt x="1133350" y="246381"/>
-                    <a:pt x="1133350" y="550039"/>
-                  </a:cubicBezTo>
-                  <a:cubicBezTo>
-                    <a:pt x="1133350" y="853697"/>
-                    <a:pt x="887223" y="1100332"/>
-                    <a:pt x="583566" y="1100332"/>
-                  </a:cubicBezTo>
-                  <a:close/>
-                </a:path>
-              </a:pathLst>
-            </a:custGeom>
-            <a:solidFill>
-              <a:srgbClr val="E6E6E6"/>
-            </a:solidFill>
-          </p:spPr>
-        </p:sp>
-        <p:sp>
-          <p:nvSpPr>
-            <p:cNvPr name="Freeform 17" id="17"/>
-            <p:cNvSpPr/>
-            <p:nvPr/>
-          </p:nvSpPr>
-          <p:spPr>
-            <a:xfrm flipH="false" flipV="false" rot="0">
-              <a:off x="63500" y="65151"/>
-              <a:ext cx="1159766" cy="1126748"/>
-            </a:xfrm>
-            <a:custGeom>
-              <a:avLst/>
-              <a:gdLst/>
-              <a:ahLst/>
-              <a:cxnLst/>
-              <a:rect r="r" b="b" t="t" l="l"/>
-              <a:pathLst>
-                <a:path h="1126748" w="1159766">
-                  <a:moveTo>
-                    <a:pt x="596774" y="1126748"/>
-                  </a:moveTo>
-                  <a:lnTo>
-                    <a:pt x="563373" y="1126748"/>
-                  </a:lnTo>
-                  <a:cubicBezTo>
-                    <a:pt x="252730" y="1126748"/>
-                    <a:pt x="0" y="874017"/>
-                    <a:pt x="0" y="563374"/>
-                  </a:cubicBezTo>
-                  <a:cubicBezTo>
-                    <a:pt x="0" y="252731"/>
-                    <a:pt x="252603" y="0"/>
-                    <a:pt x="563246" y="0"/>
-                  </a:cubicBezTo>
-                  <a:lnTo>
-                    <a:pt x="596520" y="0"/>
-                  </a:lnTo>
-                  <a:cubicBezTo>
-                    <a:pt x="907162" y="0"/>
-                    <a:pt x="1159766" y="252604"/>
-                    <a:pt x="1159766" y="563247"/>
-                  </a:cubicBezTo>
-                  <a:cubicBezTo>
-                    <a:pt x="1159766" y="713743"/>
-                    <a:pt x="1101219" y="855221"/>
-                    <a:pt x="994920" y="961648"/>
-                  </a:cubicBezTo>
-                  <a:cubicBezTo>
-                    <a:pt x="888620" y="1068074"/>
-                    <a:pt x="747269" y="1126748"/>
-                    <a:pt x="596774" y="1126748"/>
-                  </a:cubicBezTo>
-                  <a:close/>
-                  <a:moveTo>
-                    <a:pt x="563246" y="26543"/>
-                  </a:moveTo>
-                  <a:cubicBezTo>
-                    <a:pt x="267208" y="26543"/>
-                    <a:pt x="26416" y="267336"/>
-                    <a:pt x="26416" y="563374"/>
-                  </a:cubicBezTo>
-                  <a:cubicBezTo>
-                    <a:pt x="26416" y="859412"/>
-                    <a:pt x="267335" y="1100332"/>
-                    <a:pt x="563373" y="1100332"/>
-                  </a:cubicBezTo>
-                  <a:lnTo>
-                    <a:pt x="596647" y="1100332"/>
-                  </a:lnTo>
-                  <a:cubicBezTo>
-                    <a:pt x="740030" y="1100332"/>
-                    <a:pt x="874777" y="1044452"/>
-                    <a:pt x="976251" y="943105"/>
-                  </a:cubicBezTo>
-                  <a:cubicBezTo>
-                    <a:pt x="1077724" y="841759"/>
-                    <a:pt x="1133477" y="706885"/>
-                    <a:pt x="1133477" y="563374"/>
-                  </a:cubicBezTo>
-                  <a:cubicBezTo>
-                    <a:pt x="1133477" y="267336"/>
-                    <a:pt x="892684" y="26543"/>
-                    <a:pt x="596647" y="26543"/>
-                  </a:cubicBezTo>
-                  <a:lnTo>
-                    <a:pt x="563246" y="26543"/>
-                  </a:lnTo>
-                  <a:close/>
-                </a:path>
-              </a:pathLst>
-            </a:custGeom>
-            <a:solidFill>
-              <a:srgbClr val="48423D"/>
-            </a:solidFill>
-          </p:spPr>
-        </p:sp>
-        <p:sp>
-          <p:nvSpPr>
-            <p:cNvPr name="Freeform 18" id="18"/>
-            <p:cNvSpPr/>
-            <p:nvPr/>
-          </p:nvSpPr>
-          <p:spPr>
-            <a:xfrm flipH="false" flipV="false" rot="0">
-              <a:off x="348814" y="315667"/>
-              <a:ext cx="612506" cy="612507"/>
-            </a:xfrm>
-            <a:custGeom>
-              <a:avLst/>
-              <a:gdLst/>
-              <a:ahLst/>
-              <a:cxnLst/>
-              <a:rect r="r" b="b" t="t" l="l"/>
-              <a:pathLst>
-                <a:path h="612507" w="612506">
-                  <a:moveTo>
-                    <a:pt x="560761" y="306254"/>
-                  </a:moveTo>
-                  <a:cubicBezTo>
-                    <a:pt x="704399" y="526092"/>
-                    <a:pt x="526090" y="704400"/>
-                    <a:pt x="306253" y="560763"/>
-                  </a:cubicBezTo>
-                  <a:cubicBezTo>
-                    <a:pt x="86416" y="704400"/>
-                    <a:pt x="-91893" y="526092"/>
-                    <a:pt x="51745" y="306254"/>
-                  </a:cubicBezTo>
-                  <a:cubicBezTo>
-                    <a:pt x="-91766" y="86416"/>
-                    <a:pt x="86416" y="-91892"/>
-                    <a:pt x="306253" y="51745"/>
-                  </a:cubicBezTo>
-                  <a:cubicBezTo>
-                    <a:pt x="526090" y="-91765"/>
-                    <a:pt x="704399" y="86416"/>
-                    <a:pt x="560761" y="306254"/>
-                  </a:cubicBezTo>
-                  <a:close/>
-                </a:path>
-              </a:pathLst>
-            </a:custGeom>
-            <a:solidFill>
-              <a:srgbClr val="48423D"/>
-            </a:solidFill>
-          </p:spPr>
-        </p:sp>
-        <p:sp>
-          <p:nvSpPr>
-            <p:cNvPr name="Freeform 19" id="19"/>
-            <p:cNvSpPr/>
-            <p:nvPr/>
-          </p:nvSpPr>
-          <p:spPr>
-            <a:xfrm flipH="false" flipV="false" rot="0">
-              <a:off x="1511556" y="615444"/>
-              <a:ext cx="790195" cy="26416"/>
-            </a:xfrm>
-            <a:custGeom>
-              <a:avLst/>
-              <a:gdLst/>
-              <a:ahLst/>
-              <a:cxnLst/>
-              <a:rect r="r" b="b" t="t" l="l"/>
-              <a:pathLst>
-                <a:path h="26416" w="790195">
-                  <a:moveTo>
-                    <a:pt x="776987" y="26416"/>
-                  </a:moveTo>
-                  <a:lnTo>
-                    <a:pt x="13208" y="26416"/>
-                  </a:lnTo>
-                  <a:cubicBezTo>
-                    <a:pt x="5969" y="26416"/>
-                    <a:pt x="0" y="20447"/>
-                    <a:pt x="0" y="13208"/>
-                  </a:cubicBezTo>
-                  <a:cubicBezTo>
-                    <a:pt x="0" y="5969"/>
-                    <a:pt x="5969" y="0"/>
-                    <a:pt x="13208" y="0"/>
-                  </a:cubicBezTo>
-                  <a:lnTo>
-                    <a:pt x="776987" y="0"/>
-                  </a:lnTo>
-                  <a:cubicBezTo>
-                    <a:pt x="784227" y="0"/>
-                    <a:pt x="790195" y="5969"/>
-                    <a:pt x="790195" y="13208"/>
-                  </a:cubicBezTo>
-                  <a:cubicBezTo>
-                    <a:pt x="790195" y="20447"/>
-                    <a:pt x="784227" y="26416"/>
-                    <a:pt x="776987" y="26416"/>
-                  </a:cubicBezTo>
-                  <a:close/>
-                </a:path>
-              </a:pathLst>
-            </a:custGeom>
-            <a:solidFill>
-              <a:srgbClr val="48423D"/>
-            </a:solidFill>
-          </p:spPr>
-        </p:sp>
-        <p:sp>
-          <p:nvSpPr>
-            <p:cNvPr name="Freeform 20" id="20"/>
-            <p:cNvSpPr/>
-            <p:nvPr/>
-          </p:nvSpPr>
-          <p:spPr>
-            <a:xfrm flipH="false" flipV="false" rot="0">
-              <a:off x="2096265" y="470918"/>
-              <a:ext cx="205616" cy="170943"/>
-            </a:xfrm>
-            <a:custGeom>
-              <a:avLst/>
-              <a:gdLst/>
-              <a:ahLst/>
-              <a:cxnLst/>
-              <a:rect r="r" b="b" t="t" l="l"/>
-              <a:pathLst>
-                <a:path h="170943" w="205616">
-                  <a:moveTo>
-                    <a:pt x="192278" y="170942"/>
-                  </a:moveTo>
-                  <a:cubicBezTo>
-                    <a:pt x="191643" y="170942"/>
-                    <a:pt x="191135" y="170942"/>
-                    <a:pt x="190500" y="170815"/>
-                  </a:cubicBezTo>
-                  <a:cubicBezTo>
-                    <a:pt x="188595" y="170561"/>
-                    <a:pt x="143129" y="164211"/>
-                    <a:pt x="97155" y="142367"/>
-                  </a:cubicBezTo>
-                  <a:cubicBezTo>
-                    <a:pt x="33528" y="112268"/>
-                    <a:pt x="0" y="67691"/>
-                    <a:pt x="0" y="13208"/>
-                  </a:cubicBezTo>
-                  <a:cubicBezTo>
-                    <a:pt x="0" y="5969"/>
-                    <a:pt x="5969" y="0"/>
-                    <a:pt x="13208" y="0"/>
-                  </a:cubicBezTo>
-                  <a:cubicBezTo>
-                    <a:pt x="20447" y="0"/>
-                    <a:pt x="26416" y="5969"/>
-                    <a:pt x="26416" y="13208"/>
-                  </a:cubicBezTo>
-                  <a:cubicBezTo>
-                    <a:pt x="26416" y="120269"/>
-                    <a:pt x="192405" y="144399"/>
-                    <a:pt x="194183" y="144526"/>
-                  </a:cubicBezTo>
-                  <a:cubicBezTo>
-                    <a:pt x="201422" y="145415"/>
-                    <a:pt x="206502" y="152146"/>
-                    <a:pt x="205486" y="159385"/>
-                  </a:cubicBezTo>
-                  <a:cubicBezTo>
-                    <a:pt x="204597" y="165989"/>
-                    <a:pt x="198883" y="170815"/>
-                    <a:pt x="192405" y="170815"/>
-                  </a:cubicBezTo>
-                  <a:close/>
-                </a:path>
-              </a:pathLst>
-            </a:custGeom>
-            <a:solidFill>
-              <a:srgbClr val="48423D"/>
-            </a:solidFill>
-          </p:spPr>
-        </p:sp>
-        <p:sp>
-          <p:nvSpPr>
-            <p:cNvPr name="Freeform 21" id="21"/>
-            <p:cNvSpPr/>
-            <p:nvPr/>
-          </p:nvSpPr>
-          <p:spPr>
-            <a:xfrm flipH="false" flipV="false" rot="0">
-              <a:off x="2096138" y="615214"/>
-              <a:ext cx="205489" cy="170919"/>
-            </a:xfrm>
-            <a:custGeom>
-              <a:avLst/>
-              <a:gdLst/>
-              <a:ahLst/>
-              <a:cxnLst/>
-              <a:rect r="r" b="b" t="t" l="l"/>
-              <a:pathLst>
-                <a:path h="170919" w="205489">
-                  <a:moveTo>
-                    <a:pt x="13208" y="170919"/>
-                  </a:moveTo>
-                  <a:cubicBezTo>
-                    <a:pt x="5969" y="170919"/>
-                    <a:pt x="0" y="164950"/>
-                    <a:pt x="0" y="157711"/>
-                  </a:cubicBezTo>
-                  <a:cubicBezTo>
-                    <a:pt x="0" y="103228"/>
-                    <a:pt x="33655" y="58650"/>
-                    <a:pt x="97155" y="28551"/>
-                  </a:cubicBezTo>
-                  <a:cubicBezTo>
-                    <a:pt x="143256" y="6707"/>
-                    <a:pt x="188595" y="357"/>
-                    <a:pt x="190500" y="103"/>
-                  </a:cubicBezTo>
-                  <a:cubicBezTo>
-                    <a:pt x="197739" y="-786"/>
-                    <a:pt x="204343" y="4167"/>
-                    <a:pt x="205360" y="11406"/>
-                  </a:cubicBezTo>
-                  <a:cubicBezTo>
-                    <a:pt x="206376" y="18645"/>
-                    <a:pt x="201295" y="25249"/>
-                    <a:pt x="194057" y="26265"/>
-                  </a:cubicBezTo>
-                  <a:cubicBezTo>
-                    <a:pt x="192405" y="26519"/>
-                    <a:pt x="26289" y="50776"/>
-                    <a:pt x="26289" y="157584"/>
-                  </a:cubicBezTo>
-                  <a:cubicBezTo>
-                    <a:pt x="26289" y="164950"/>
-                    <a:pt x="20320" y="170792"/>
-                    <a:pt x="13081" y="170792"/>
-                  </a:cubicBezTo>
-                  <a:close/>
-                </a:path>
-              </a:pathLst>
-            </a:custGeom>
-            <a:solidFill>
-              <a:srgbClr val="48423D"/>
-            </a:solidFill>
-          </p:spPr>
-        </p:sp>
-        <p:sp>
-          <p:nvSpPr>
-            <p:cNvPr name="Freeform 22" id="22"/>
-            <p:cNvSpPr/>
-            <p:nvPr/>
-          </p:nvSpPr>
-          <p:spPr>
-            <a:xfrm flipH="false" flipV="false" rot="0">
-              <a:off x="63500" y="63500"/>
-              <a:ext cx="2655701" cy="1129923"/>
-            </a:xfrm>
-            <a:custGeom>
-              <a:avLst/>
-              <a:gdLst/>
-              <a:ahLst/>
-              <a:cxnLst/>
-              <a:rect r="r" b="b" t="t" l="l"/>
-              <a:pathLst>
-                <a:path h="1129923" w="2655701">
-                  <a:moveTo>
-                    <a:pt x="0" y="1129923"/>
-                  </a:moveTo>
-                  <a:lnTo>
-                    <a:pt x="2655701" y="1129923"/>
-                  </a:lnTo>
-                  <a:lnTo>
-                    <a:pt x="2655701" y="0"/>
-                  </a:lnTo>
-                  <a:lnTo>
-                    <a:pt x="0" y="0"/>
-                  </a:lnTo>
-                  <a:close/>
-                </a:path>
-              </a:pathLst>
-            </a:custGeom>
-            <a:solidFill>
-              <a:srgbClr val="000000">
-                <a:alpha val="0"/>
-              </a:srgbClr>
-            </a:solidFill>
-          </p:spPr>
-        </p:sp>
-      </p:grpSp>
-      <p:grpSp>
-        <p:nvGrpSpPr>
-          <p:cNvPr name="Group 23" id="23"/>
-          <p:cNvGrpSpPr/>
-          <p:nvPr/>
-        </p:nvGrpSpPr>
-        <p:grpSpPr>
-          <a:xfrm rot="0">
-            <a:off x="14758016" y="965197"/>
-            <a:ext cx="2564787" cy="1350331"/>
-            <a:chOff x="0" y="0"/>
-            <a:chExt cx="2564790" cy="1350327"/>
-          </a:xfrm>
-        </p:grpSpPr>
-        <p:sp>
-          <p:nvSpPr>
-            <p:cNvPr name="Freeform 24" id="24"/>
-            <p:cNvSpPr/>
-            <p:nvPr/>
-          </p:nvSpPr>
-          <p:spPr>
-            <a:xfrm flipH="false" flipV="false" rot="0">
-              <a:off x="78486" y="82169"/>
-              <a:ext cx="1191769" cy="1191769"/>
-            </a:xfrm>
-            <a:custGeom>
-              <a:avLst/>
-              <a:gdLst/>
-              <a:ahLst/>
-              <a:cxnLst/>
-              <a:rect r="r" b="b" t="t" l="l"/>
-              <a:pathLst>
-                <a:path h="1191769" w="1191769">
-                  <a:moveTo>
-                    <a:pt x="1191769" y="595885"/>
-                  </a:moveTo>
-                  <a:cubicBezTo>
-                    <a:pt x="1191769" y="615443"/>
-                    <a:pt x="1190753" y="634874"/>
-                    <a:pt x="1188848" y="654305"/>
-                  </a:cubicBezTo>
-                  <a:cubicBezTo>
-                    <a:pt x="1186943" y="673736"/>
-                    <a:pt x="1184022" y="693040"/>
-                    <a:pt x="1180212" y="712090"/>
-                  </a:cubicBezTo>
-                  <a:cubicBezTo>
-                    <a:pt x="1176402" y="731140"/>
-                    <a:pt x="1171703" y="750190"/>
-                    <a:pt x="1165988" y="768859"/>
-                  </a:cubicBezTo>
-                  <a:cubicBezTo>
-                    <a:pt x="1160273" y="787528"/>
-                    <a:pt x="1153796" y="805816"/>
-                    <a:pt x="1146303" y="823850"/>
-                  </a:cubicBezTo>
-                  <a:cubicBezTo>
-                    <a:pt x="1138810" y="841884"/>
-                    <a:pt x="1130555" y="859537"/>
-                    <a:pt x="1121284" y="876682"/>
-                  </a:cubicBezTo>
-                  <a:cubicBezTo>
-                    <a:pt x="1112013" y="893827"/>
-                    <a:pt x="1102107" y="910591"/>
-                    <a:pt x="1091185" y="926847"/>
-                  </a:cubicBezTo>
-                  <a:cubicBezTo>
-                    <a:pt x="1080263" y="943103"/>
-                    <a:pt x="1068706" y="958724"/>
-                    <a:pt x="1056387" y="973837"/>
-                  </a:cubicBezTo>
-                  <a:cubicBezTo>
-                    <a:pt x="1044068" y="988950"/>
-                    <a:pt x="1030860" y="1003301"/>
-                    <a:pt x="1017144" y="1017144"/>
-                  </a:cubicBezTo>
-                  <a:cubicBezTo>
-                    <a:pt x="1003428" y="1030987"/>
-                    <a:pt x="988950" y="1044068"/>
-                    <a:pt x="973837" y="1056387"/>
-                  </a:cubicBezTo>
-                  <a:cubicBezTo>
-                    <a:pt x="958724" y="1068706"/>
-                    <a:pt x="943103" y="1080390"/>
-                    <a:pt x="926847" y="1091185"/>
-                  </a:cubicBezTo>
-                  <a:cubicBezTo>
-                    <a:pt x="910591" y="1101980"/>
-                    <a:pt x="893954" y="1112013"/>
-                    <a:pt x="876682" y="1121284"/>
-                  </a:cubicBezTo>
-                  <a:cubicBezTo>
-                    <a:pt x="859410" y="1130555"/>
-                    <a:pt x="841884" y="1138810"/>
-                    <a:pt x="823850" y="1146303"/>
-                  </a:cubicBezTo>
-                  <a:cubicBezTo>
-                    <a:pt x="805816" y="1153796"/>
-                    <a:pt x="787528" y="1160273"/>
-                    <a:pt x="768859" y="1165988"/>
-                  </a:cubicBezTo>
-                  <a:cubicBezTo>
-                    <a:pt x="750190" y="1171703"/>
-                    <a:pt x="731267" y="1176402"/>
-                    <a:pt x="712090" y="1180212"/>
-                  </a:cubicBezTo>
-                  <a:cubicBezTo>
-                    <a:pt x="692913" y="1184022"/>
-                    <a:pt x="673736" y="1186816"/>
-                    <a:pt x="654305" y="1188848"/>
-                  </a:cubicBezTo>
-                  <a:cubicBezTo>
-                    <a:pt x="634874" y="1190880"/>
-                    <a:pt x="615443" y="1191769"/>
-                    <a:pt x="595885" y="1191769"/>
-                  </a:cubicBezTo>
-                  <a:cubicBezTo>
-                    <a:pt x="576327" y="1191769"/>
-                    <a:pt x="556896" y="1190753"/>
-                    <a:pt x="537465" y="1188848"/>
-                  </a:cubicBezTo>
-                  <a:cubicBezTo>
-                    <a:pt x="518034" y="1186943"/>
-                    <a:pt x="498730" y="1184022"/>
-                    <a:pt x="479680" y="1180212"/>
-                  </a:cubicBezTo>
-                  <a:cubicBezTo>
-                    <a:pt x="460630" y="1176402"/>
-                    <a:pt x="441580" y="1171703"/>
-                    <a:pt x="422910" y="1165988"/>
-                  </a:cubicBezTo>
-                  <a:cubicBezTo>
-                    <a:pt x="404242" y="1160273"/>
-                    <a:pt x="385953" y="1153796"/>
-                    <a:pt x="367919" y="1146303"/>
-                  </a:cubicBezTo>
-                  <a:cubicBezTo>
-                    <a:pt x="349885" y="1138810"/>
-                    <a:pt x="332232" y="1130555"/>
-                    <a:pt x="315087" y="1121284"/>
-                  </a:cubicBezTo>
-                  <a:cubicBezTo>
-                    <a:pt x="297942" y="1112013"/>
-                    <a:pt x="281178" y="1102107"/>
-                    <a:pt x="264922" y="1091185"/>
-                  </a:cubicBezTo>
-                  <a:cubicBezTo>
-                    <a:pt x="248666" y="1080263"/>
-                    <a:pt x="233045" y="1068706"/>
-                    <a:pt x="217932" y="1056387"/>
-                  </a:cubicBezTo>
-                  <a:cubicBezTo>
-                    <a:pt x="202819" y="1044068"/>
-                    <a:pt x="188468" y="1030860"/>
-                    <a:pt x="174625" y="1017144"/>
-                  </a:cubicBezTo>
-                  <a:cubicBezTo>
-                    <a:pt x="160782" y="1003428"/>
-                    <a:pt x="147701" y="988950"/>
-                    <a:pt x="135382" y="973837"/>
-                  </a:cubicBezTo>
-                  <a:cubicBezTo>
-                    <a:pt x="123063" y="958724"/>
-                    <a:pt x="111379" y="943103"/>
-                    <a:pt x="100584" y="926847"/>
-                  </a:cubicBezTo>
-                  <a:cubicBezTo>
-                    <a:pt x="89789" y="910591"/>
-                    <a:pt x="79756" y="893954"/>
-                    <a:pt x="70485" y="876682"/>
-                  </a:cubicBezTo>
-                  <a:cubicBezTo>
-                    <a:pt x="61214" y="859410"/>
-                    <a:pt x="52959" y="841884"/>
-                    <a:pt x="45466" y="823850"/>
-                  </a:cubicBezTo>
-                  <a:cubicBezTo>
-                    <a:pt x="37973" y="805816"/>
-                    <a:pt x="31496" y="787528"/>
-                    <a:pt x="25781" y="768859"/>
-                  </a:cubicBezTo>
-                  <a:cubicBezTo>
-                    <a:pt x="20066" y="750190"/>
-                    <a:pt x="15367" y="731267"/>
-                    <a:pt x="11557" y="712090"/>
-                  </a:cubicBezTo>
-                  <a:cubicBezTo>
-                    <a:pt x="7747" y="692913"/>
-                    <a:pt x="4953" y="673736"/>
-                    <a:pt x="2921" y="654305"/>
-                  </a:cubicBezTo>
-                  <a:cubicBezTo>
-                    <a:pt x="889" y="634874"/>
-                    <a:pt x="0" y="615443"/>
-                    <a:pt x="0" y="595885"/>
-                  </a:cubicBezTo>
-                  <a:cubicBezTo>
-                    <a:pt x="0" y="576327"/>
-                    <a:pt x="1016" y="556896"/>
-                    <a:pt x="2921" y="537465"/>
-                  </a:cubicBezTo>
-                  <a:cubicBezTo>
-                    <a:pt x="4826" y="518034"/>
-                    <a:pt x="7747" y="498730"/>
-                    <a:pt x="11557" y="479680"/>
-                  </a:cubicBezTo>
-                  <a:cubicBezTo>
-                    <a:pt x="15367" y="460630"/>
-                    <a:pt x="20066" y="441580"/>
-                    <a:pt x="25781" y="422911"/>
-                  </a:cubicBezTo>
-                  <a:cubicBezTo>
-                    <a:pt x="31496" y="404241"/>
-                    <a:pt x="37973" y="385953"/>
-                    <a:pt x="45466" y="367919"/>
-                  </a:cubicBezTo>
-                  <a:cubicBezTo>
-                    <a:pt x="52959" y="349885"/>
-                    <a:pt x="61214" y="332232"/>
-                    <a:pt x="70485" y="315087"/>
-                  </a:cubicBezTo>
-                  <a:cubicBezTo>
-                    <a:pt x="79756" y="297942"/>
-                    <a:pt x="89662" y="281178"/>
-                    <a:pt x="100584" y="264922"/>
-                  </a:cubicBezTo>
-                  <a:cubicBezTo>
-                    <a:pt x="111506" y="248666"/>
-                    <a:pt x="123063" y="233045"/>
-                    <a:pt x="135382" y="217932"/>
-                  </a:cubicBezTo>
-                  <a:cubicBezTo>
-                    <a:pt x="147701" y="202819"/>
-                    <a:pt x="160909" y="188468"/>
-                    <a:pt x="174625" y="174625"/>
-                  </a:cubicBezTo>
-                  <a:cubicBezTo>
-                    <a:pt x="188341" y="160782"/>
-                    <a:pt x="202819" y="147701"/>
-                    <a:pt x="217932" y="135382"/>
-                  </a:cubicBezTo>
-                  <a:cubicBezTo>
-                    <a:pt x="233045" y="123063"/>
-                    <a:pt x="248666" y="111379"/>
-                    <a:pt x="264922" y="100584"/>
-                  </a:cubicBezTo>
-                  <a:cubicBezTo>
-                    <a:pt x="281178" y="89789"/>
-                    <a:pt x="297815" y="79756"/>
-                    <a:pt x="315087" y="70485"/>
-                  </a:cubicBezTo>
-                  <a:cubicBezTo>
-                    <a:pt x="332359" y="61214"/>
-                    <a:pt x="349885" y="52959"/>
-                    <a:pt x="367919" y="45466"/>
-                  </a:cubicBezTo>
-                  <a:cubicBezTo>
-                    <a:pt x="385953" y="37973"/>
-                    <a:pt x="404242" y="31496"/>
-                    <a:pt x="422910" y="25781"/>
-                  </a:cubicBezTo>
-                  <a:cubicBezTo>
-                    <a:pt x="441580" y="20066"/>
-                    <a:pt x="460503" y="15367"/>
-                    <a:pt x="479680" y="11557"/>
-                  </a:cubicBezTo>
-                  <a:cubicBezTo>
-                    <a:pt x="498857" y="7747"/>
-                    <a:pt x="518034" y="4953"/>
-                    <a:pt x="537465" y="2921"/>
-                  </a:cubicBezTo>
-                  <a:cubicBezTo>
-                    <a:pt x="556896" y="889"/>
-                    <a:pt x="576327" y="0"/>
-                    <a:pt x="595885" y="0"/>
-                  </a:cubicBezTo>
-                  <a:cubicBezTo>
-                    <a:pt x="615443" y="0"/>
-                    <a:pt x="634874" y="1016"/>
-                    <a:pt x="654305" y="2921"/>
-                  </a:cubicBezTo>
-                  <a:cubicBezTo>
-                    <a:pt x="673736" y="4826"/>
-                    <a:pt x="693040" y="7747"/>
-                    <a:pt x="712090" y="11557"/>
-                  </a:cubicBezTo>
-                  <a:cubicBezTo>
-                    <a:pt x="731140" y="15367"/>
-                    <a:pt x="750190" y="20066"/>
-                    <a:pt x="768859" y="25781"/>
-                  </a:cubicBezTo>
-                  <a:cubicBezTo>
-                    <a:pt x="787528" y="31496"/>
-                    <a:pt x="805816" y="37973"/>
-                    <a:pt x="823850" y="45466"/>
-                  </a:cubicBezTo>
-                  <a:cubicBezTo>
-                    <a:pt x="841884" y="52959"/>
-                    <a:pt x="859537" y="61214"/>
-                    <a:pt x="876682" y="70485"/>
-                  </a:cubicBezTo>
-                  <a:cubicBezTo>
-                    <a:pt x="893827" y="79756"/>
-                    <a:pt x="910591" y="89662"/>
-                    <a:pt x="926847" y="100584"/>
-                  </a:cubicBezTo>
-                  <a:cubicBezTo>
-                    <a:pt x="943103" y="111506"/>
-                    <a:pt x="958724" y="123063"/>
-                    <a:pt x="973837" y="135382"/>
-                  </a:cubicBezTo>
-                  <a:cubicBezTo>
-                    <a:pt x="988950" y="147701"/>
-                    <a:pt x="1003301" y="160909"/>
-                    <a:pt x="1017144" y="174625"/>
-                  </a:cubicBezTo>
-                  <a:cubicBezTo>
-                    <a:pt x="1030987" y="188341"/>
-                    <a:pt x="1044068" y="202819"/>
-                    <a:pt x="1056387" y="217932"/>
-                  </a:cubicBezTo>
-                  <a:cubicBezTo>
-                    <a:pt x="1068706" y="233045"/>
-                    <a:pt x="1080390" y="248666"/>
-                    <a:pt x="1091185" y="264922"/>
-                  </a:cubicBezTo>
-                  <a:cubicBezTo>
-                    <a:pt x="1101980" y="281178"/>
-                    <a:pt x="1112013" y="297815"/>
-                    <a:pt x="1121284" y="315087"/>
-                  </a:cubicBezTo>
-                  <a:cubicBezTo>
-                    <a:pt x="1130555" y="332359"/>
-                    <a:pt x="1138810" y="349885"/>
-                    <a:pt x="1146303" y="367919"/>
-                  </a:cubicBezTo>
-                  <a:cubicBezTo>
-                    <a:pt x="1153796" y="385953"/>
-                    <a:pt x="1160273" y="404241"/>
-                    <a:pt x="1165988" y="422911"/>
-                  </a:cubicBezTo>
-                  <a:cubicBezTo>
-                    <a:pt x="1171703" y="441580"/>
-                    <a:pt x="1176402" y="460503"/>
-                    <a:pt x="1180212" y="479680"/>
-                  </a:cubicBezTo>
-                  <a:cubicBezTo>
-                    <a:pt x="1184022" y="498857"/>
-                    <a:pt x="1186816" y="518034"/>
-                    <a:pt x="1188848" y="537465"/>
-                  </a:cubicBezTo>
-                  <a:cubicBezTo>
-                    <a:pt x="1190880" y="556896"/>
-                    <a:pt x="1191769" y="576327"/>
-                    <a:pt x="1191769" y="595885"/>
-                  </a:cubicBezTo>
-                  <a:close/>
-                </a:path>
-              </a:pathLst>
-            </a:custGeom>
-            <a:solidFill>
-              <a:srgbClr val="E2DAC4"/>
-            </a:solidFill>
-          </p:spPr>
-        </p:sp>
-        <p:sp>
-          <p:nvSpPr>
-            <p:cNvPr name="Freeform 25" id="25"/>
-            <p:cNvSpPr/>
-            <p:nvPr/>
-          </p:nvSpPr>
-          <p:spPr>
-            <a:xfrm flipH="false" flipV="false" rot="0">
-              <a:off x="66548" y="69977"/>
-              <a:ext cx="1216026" cy="1212724"/>
-            </a:xfrm>
-            <a:custGeom>
-              <a:avLst/>
-              <a:gdLst/>
-              <a:ahLst/>
-              <a:cxnLst/>
-              <a:rect r="r" b="b" t="t" l="l"/>
-              <a:pathLst>
-                <a:path h="1212724" w="1216026">
-                  <a:moveTo>
-                    <a:pt x="607950" y="24638"/>
-                  </a:moveTo>
-                  <a:cubicBezTo>
-                    <a:pt x="929641" y="24638"/>
-                    <a:pt x="1191388" y="286385"/>
-                    <a:pt x="1191388" y="608077"/>
-                  </a:cubicBezTo>
-                  <a:cubicBezTo>
-                    <a:pt x="1191388" y="929768"/>
-                    <a:pt x="929641" y="1191515"/>
-                    <a:pt x="607950" y="1191515"/>
-                  </a:cubicBezTo>
-                  <a:cubicBezTo>
-                    <a:pt x="286258" y="1191515"/>
-                    <a:pt x="24638" y="929895"/>
-                    <a:pt x="24638" y="608077"/>
-                  </a:cubicBezTo>
-                  <a:cubicBezTo>
-                    <a:pt x="24638" y="286258"/>
-                    <a:pt x="286385" y="24638"/>
-                    <a:pt x="607950" y="24638"/>
-                  </a:cubicBezTo>
-                  <a:close/>
-                  <a:moveTo>
-                    <a:pt x="607950" y="0"/>
-                  </a:moveTo>
-                  <a:cubicBezTo>
-                    <a:pt x="272669" y="0"/>
-                    <a:pt x="0" y="272923"/>
-                    <a:pt x="0" y="608077"/>
-                  </a:cubicBezTo>
-                  <a:cubicBezTo>
-                    <a:pt x="0" y="921513"/>
-                    <a:pt x="238379" y="1180339"/>
-                    <a:pt x="543434" y="1212724"/>
-                  </a:cubicBezTo>
-                  <a:lnTo>
-                    <a:pt x="672593" y="1212724"/>
-                  </a:lnTo>
-                  <a:cubicBezTo>
-                    <a:pt x="977647" y="1180339"/>
-                    <a:pt x="1216026" y="921640"/>
-                    <a:pt x="1216026" y="608077"/>
-                  </a:cubicBezTo>
-                  <a:cubicBezTo>
-                    <a:pt x="1216026" y="272796"/>
-                    <a:pt x="943357" y="0"/>
-                    <a:pt x="607950" y="0"/>
-                  </a:cubicBezTo>
-                  <a:close/>
-                </a:path>
-              </a:pathLst>
-            </a:custGeom>
-            <a:solidFill>
-              <a:srgbClr val="48423D"/>
-            </a:solidFill>
-          </p:spPr>
-        </p:sp>
-        <p:sp>
-          <p:nvSpPr>
-            <p:cNvPr name="Freeform 26" id="26"/>
-            <p:cNvSpPr/>
-            <p:nvPr/>
-          </p:nvSpPr>
-          <p:spPr>
-            <a:xfrm flipH="false" flipV="false" rot="0">
-              <a:off x="1293496" y="75692"/>
-              <a:ext cx="1191769" cy="1191769"/>
-            </a:xfrm>
-            <a:custGeom>
-              <a:avLst/>
-              <a:gdLst/>
-              <a:ahLst/>
-              <a:cxnLst/>
-              <a:rect r="r" b="b" t="t" l="l"/>
-              <a:pathLst>
-                <a:path h="1191769" w="1191769">
-                  <a:moveTo>
-                    <a:pt x="1191770" y="595885"/>
-                  </a:moveTo>
-                  <a:cubicBezTo>
-                    <a:pt x="1191770" y="615443"/>
-                    <a:pt x="1190754" y="634874"/>
-                    <a:pt x="1188849" y="654305"/>
-                  </a:cubicBezTo>
-                  <a:cubicBezTo>
-                    <a:pt x="1186944" y="673736"/>
-                    <a:pt x="1184023" y="693040"/>
-                    <a:pt x="1180213" y="712090"/>
-                  </a:cubicBezTo>
-                  <a:cubicBezTo>
-                    <a:pt x="1176403" y="731140"/>
-                    <a:pt x="1171704" y="750190"/>
-                    <a:pt x="1165989" y="768859"/>
-                  </a:cubicBezTo>
-                  <a:cubicBezTo>
-                    <a:pt x="1160274" y="787528"/>
-                    <a:pt x="1153797" y="805816"/>
-                    <a:pt x="1146304" y="823850"/>
-                  </a:cubicBezTo>
-                  <a:cubicBezTo>
-                    <a:pt x="1138811" y="841884"/>
-                    <a:pt x="1130556" y="859537"/>
-                    <a:pt x="1121285" y="876682"/>
-                  </a:cubicBezTo>
-                  <a:cubicBezTo>
-                    <a:pt x="1112014" y="893827"/>
-                    <a:pt x="1102108" y="910591"/>
-                    <a:pt x="1091186" y="926847"/>
-                  </a:cubicBezTo>
-                  <a:cubicBezTo>
-                    <a:pt x="1080264" y="943103"/>
-                    <a:pt x="1068707" y="958724"/>
-                    <a:pt x="1056388" y="973837"/>
-                  </a:cubicBezTo>
-                  <a:cubicBezTo>
-                    <a:pt x="1044068" y="988950"/>
-                    <a:pt x="1030861" y="1003301"/>
-                    <a:pt x="1017145" y="1017144"/>
-                  </a:cubicBezTo>
-                  <a:cubicBezTo>
-                    <a:pt x="1003429" y="1030987"/>
-                    <a:pt x="988951" y="1044068"/>
-                    <a:pt x="973838" y="1056387"/>
-                  </a:cubicBezTo>
-                  <a:cubicBezTo>
-                    <a:pt x="958724" y="1068706"/>
-                    <a:pt x="943103" y="1080390"/>
-                    <a:pt x="926847" y="1091185"/>
-                  </a:cubicBezTo>
-                  <a:cubicBezTo>
-                    <a:pt x="910591" y="1101980"/>
-                    <a:pt x="893954" y="1112013"/>
-                    <a:pt x="876682" y="1121284"/>
-                  </a:cubicBezTo>
-                  <a:cubicBezTo>
-                    <a:pt x="859410" y="1130555"/>
-                    <a:pt x="841884" y="1138810"/>
-                    <a:pt x="823850" y="1146303"/>
-                  </a:cubicBezTo>
-                  <a:cubicBezTo>
-                    <a:pt x="805816" y="1153796"/>
-                    <a:pt x="787528" y="1160273"/>
-                    <a:pt x="768859" y="1165988"/>
-                  </a:cubicBezTo>
-                  <a:cubicBezTo>
-                    <a:pt x="750190" y="1171703"/>
-                    <a:pt x="731267" y="1176402"/>
-                    <a:pt x="712090" y="1180212"/>
-                  </a:cubicBezTo>
-                  <a:cubicBezTo>
-                    <a:pt x="692913" y="1184022"/>
-                    <a:pt x="673736" y="1186816"/>
-                    <a:pt x="654305" y="1188848"/>
-                  </a:cubicBezTo>
-                  <a:cubicBezTo>
-                    <a:pt x="634874" y="1190880"/>
-                    <a:pt x="615443" y="1191769"/>
-                    <a:pt x="595885" y="1191769"/>
-                  </a:cubicBezTo>
-                  <a:cubicBezTo>
-                    <a:pt x="576327" y="1191769"/>
-                    <a:pt x="556896" y="1190753"/>
-                    <a:pt x="537465" y="1188848"/>
-                  </a:cubicBezTo>
-                  <a:cubicBezTo>
-                    <a:pt x="518034" y="1186943"/>
-                    <a:pt x="498730" y="1184022"/>
-                    <a:pt x="479680" y="1180212"/>
-                  </a:cubicBezTo>
-                  <a:cubicBezTo>
-                    <a:pt x="460630" y="1176402"/>
-                    <a:pt x="441580" y="1171703"/>
-                    <a:pt x="422911" y="1165988"/>
-                  </a:cubicBezTo>
-                  <a:cubicBezTo>
-                    <a:pt x="404242" y="1160273"/>
-                    <a:pt x="385954" y="1153796"/>
-                    <a:pt x="367920" y="1146303"/>
-                  </a:cubicBezTo>
-                  <a:cubicBezTo>
-                    <a:pt x="349886" y="1138810"/>
-                    <a:pt x="332233" y="1130555"/>
-                    <a:pt x="315088" y="1121284"/>
-                  </a:cubicBezTo>
-                  <a:cubicBezTo>
-                    <a:pt x="297943" y="1112013"/>
-                    <a:pt x="281179" y="1102107"/>
-                    <a:pt x="264923" y="1091185"/>
-                  </a:cubicBezTo>
-                  <a:cubicBezTo>
-                    <a:pt x="248667" y="1080263"/>
-                    <a:pt x="233046" y="1068706"/>
-                    <a:pt x="217933" y="1056387"/>
-                  </a:cubicBezTo>
-                  <a:cubicBezTo>
-                    <a:pt x="202820" y="1044068"/>
-                    <a:pt x="188469" y="1030860"/>
-                    <a:pt x="174626" y="1017144"/>
-                  </a:cubicBezTo>
-                  <a:cubicBezTo>
-                    <a:pt x="160783" y="1003428"/>
-                    <a:pt x="147702" y="988950"/>
-                    <a:pt x="135383" y="973837"/>
-                  </a:cubicBezTo>
-                  <a:cubicBezTo>
-                    <a:pt x="123064" y="958724"/>
-                    <a:pt x="111380" y="943103"/>
-                    <a:pt x="100585" y="926847"/>
-                  </a:cubicBezTo>
-                  <a:cubicBezTo>
-                    <a:pt x="89790" y="910591"/>
-                    <a:pt x="79757" y="893954"/>
-                    <a:pt x="70485" y="876682"/>
-                  </a:cubicBezTo>
-                  <a:cubicBezTo>
-                    <a:pt x="61215" y="859410"/>
-                    <a:pt x="52960" y="841884"/>
-                    <a:pt x="45466" y="823850"/>
-                  </a:cubicBezTo>
-                  <a:cubicBezTo>
-                    <a:pt x="37974" y="805816"/>
-                    <a:pt x="31496" y="787528"/>
-                    <a:pt x="25782" y="768859"/>
-                  </a:cubicBezTo>
-                  <a:cubicBezTo>
-                    <a:pt x="20066" y="750190"/>
-                    <a:pt x="15368" y="731267"/>
-                    <a:pt x="11557" y="712090"/>
-                  </a:cubicBezTo>
-                  <a:cubicBezTo>
-                    <a:pt x="7748" y="692913"/>
-                    <a:pt x="4953" y="673736"/>
-                    <a:pt x="2921" y="654305"/>
-                  </a:cubicBezTo>
-                  <a:cubicBezTo>
-                    <a:pt x="889" y="634874"/>
-                    <a:pt x="0" y="615443"/>
-                    <a:pt x="0" y="595885"/>
-                  </a:cubicBezTo>
-                  <a:cubicBezTo>
-                    <a:pt x="0" y="576327"/>
-                    <a:pt x="1016" y="556896"/>
-                    <a:pt x="2921" y="537465"/>
-                  </a:cubicBezTo>
-                  <a:cubicBezTo>
-                    <a:pt x="4826" y="518034"/>
-                    <a:pt x="7748" y="498730"/>
-                    <a:pt x="11557" y="479680"/>
-                  </a:cubicBezTo>
-                  <a:cubicBezTo>
-                    <a:pt x="15368" y="460630"/>
-                    <a:pt x="20066" y="441580"/>
-                    <a:pt x="25782" y="422911"/>
-                  </a:cubicBezTo>
-                  <a:cubicBezTo>
-                    <a:pt x="31496" y="404241"/>
-                    <a:pt x="37974" y="385954"/>
-                    <a:pt x="45466" y="367919"/>
-                  </a:cubicBezTo>
-                  <a:cubicBezTo>
-                    <a:pt x="52960" y="349885"/>
-                    <a:pt x="61215" y="332232"/>
-                    <a:pt x="70485" y="315087"/>
-                  </a:cubicBezTo>
-                  <a:cubicBezTo>
-                    <a:pt x="79757" y="297942"/>
-                    <a:pt x="89663" y="281178"/>
-                    <a:pt x="100585" y="264922"/>
-                  </a:cubicBezTo>
-                  <a:cubicBezTo>
-                    <a:pt x="111507" y="248666"/>
-                    <a:pt x="123064" y="233045"/>
-                    <a:pt x="135383" y="217932"/>
-                  </a:cubicBezTo>
-                  <a:cubicBezTo>
-                    <a:pt x="147702" y="202819"/>
-                    <a:pt x="160910" y="188468"/>
-                    <a:pt x="174626" y="174625"/>
-                  </a:cubicBezTo>
-                  <a:cubicBezTo>
-                    <a:pt x="188342" y="160782"/>
-                    <a:pt x="202820" y="147701"/>
-                    <a:pt x="217933" y="135382"/>
-                  </a:cubicBezTo>
-                  <a:cubicBezTo>
-                    <a:pt x="233046" y="123063"/>
-                    <a:pt x="248667" y="111379"/>
-                    <a:pt x="264923" y="100584"/>
-                  </a:cubicBezTo>
-                  <a:cubicBezTo>
-                    <a:pt x="281179" y="89789"/>
-                    <a:pt x="297816" y="79756"/>
-                    <a:pt x="315088" y="70485"/>
-                  </a:cubicBezTo>
-                  <a:cubicBezTo>
-                    <a:pt x="332360" y="61214"/>
-                    <a:pt x="349886" y="52959"/>
-                    <a:pt x="367920" y="45466"/>
-                  </a:cubicBezTo>
-                  <a:cubicBezTo>
-                    <a:pt x="385954" y="37973"/>
-                    <a:pt x="404242" y="31496"/>
-                    <a:pt x="422911" y="25781"/>
-                  </a:cubicBezTo>
-                  <a:cubicBezTo>
-                    <a:pt x="441580" y="20066"/>
-                    <a:pt x="460503" y="15367"/>
-                    <a:pt x="479680" y="11557"/>
-                  </a:cubicBezTo>
-                  <a:cubicBezTo>
-                    <a:pt x="498857" y="7747"/>
-                    <a:pt x="518034" y="4953"/>
-                    <a:pt x="537465" y="2921"/>
-                  </a:cubicBezTo>
-                  <a:cubicBezTo>
-                    <a:pt x="556896" y="889"/>
-                    <a:pt x="576327" y="0"/>
-                    <a:pt x="595885" y="0"/>
-                  </a:cubicBezTo>
-                  <a:cubicBezTo>
-                    <a:pt x="615443" y="0"/>
-                    <a:pt x="634874" y="1016"/>
-                    <a:pt x="654305" y="2921"/>
-                  </a:cubicBezTo>
-                  <a:cubicBezTo>
-                    <a:pt x="673736" y="4826"/>
-                    <a:pt x="693040" y="7747"/>
-                    <a:pt x="712090" y="11557"/>
-                  </a:cubicBezTo>
-                  <a:cubicBezTo>
-                    <a:pt x="731140" y="15367"/>
-                    <a:pt x="750190" y="20066"/>
-                    <a:pt x="768859" y="25781"/>
-                  </a:cubicBezTo>
-                  <a:cubicBezTo>
-                    <a:pt x="787528" y="31496"/>
-                    <a:pt x="805816" y="37973"/>
-                    <a:pt x="823850" y="45466"/>
-                  </a:cubicBezTo>
-                  <a:cubicBezTo>
-                    <a:pt x="841884" y="52959"/>
-                    <a:pt x="859537" y="61214"/>
-                    <a:pt x="876682" y="70485"/>
-                  </a:cubicBezTo>
-                  <a:cubicBezTo>
-                    <a:pt x="893827" y="79756"/>
-                    <a:pt x="910591" y="89662"/>
-                    <a:pt x="926847" y="100584"/>
-                  </a:cubicBezTo>
-                  <a:cubicBezTo>
-                    <a:pt x="943103" y="111506"/>
-                    <a:pt x="958724" y="123063"/>
-                    <a:pt x="973838" y="135382"/>
-                  </a:cubicBezTo>
-                  <a:cubicBezTo>
-                    <a:pt x="988951" y="147701"/>
-                    <a:pt x="1003302" y="160909"/>
-                    <a:pt x="1017145" y="174625"/>
-                  </a:cubicBezTo>
-                  <a:cubicBezTo>
-                    <a:pt x="1030988" y="188341"/>
-                    <a:pt x="1044068" y="202819"/>
-                    <a:pt x="1056388" y="217932"/>
-                  </a:cubicBezTo>
-                  <a:cubicBezTo>
-                    <a:pt x="1068707" y="233045"/>
-                    <a:pt x="1080390" y="248666"/>
-                    <a:pt x="1091186" y="264922"/>
-                  </a:cubicBezTo>
-                  <a:cubicBezTo>
-                    <a:pt x="1101981" y="281178"/>
-                    <a:pt x="1112014" y="297815"/>
-                    <a:pt x="1121285" y="315087"/>
-                  </a:cubicBezTo>
-                  <a:cubicBezTo>
-                    <a:pt x="1130556" y="332359"/>
-                    <a:pt x="1138811" y="349885"/>
-                    <a:pt x="1146304" y="367919"/>
-                  </a:cubicBezTo>
-                  <a:cubicBezTo>
-                    <a:pt x="1153797" y="385954"/>
-                    <a:pt x="1160274" y="404241"/>
-                    <a:pt x="1165989" y="422911"/>
-                  </a:cubicBezTo>
-                  <a:cubicBezTo>
-                    <a:pt x="1171704" y="441580"/>
-                    <a:pt x="1176403" y="460503"/>
-                    <a:pt x="1180213" y="479680"/>
-                  </a:cubicBezTo>
-                  <a:cubicBezTo>
-                    <a:pt x="1184023" y="498857"/>
-                    <a:pt x="1186817" y="518034"/>
-                    <a:pt x="1188849" y="537465"/>
-                  </a:cubicBezTo>
-                  <a:cubicBezTo>
-                    <a:pt x="1190881" y="556896"/>
-                    <a:pt x="1191770" y="576327"/>
-                    <a:pt x="1191770" y="595885"/>
-                  </a:cubicBezTo>
-                  <a:close/>
-                </a:path>
-              </a:pathLst>
-            </a:custGeom>
-            <a:solidFill>
-              <a:srgbClr val="E6E6E6"/>
-            </a:solidFill>
-          </p:spPr>
-        </p:sp>
-        <p:sp>
-          <p:nvSpPr>
-            <p:cNvPr name="Freeform 27" id="27"/>
-            <p:cNvSpPr/>
-            <p:nvPr/>
-          </p:nvSpPr>
-          <p:spPr>
-            <a:xfrm flipH="false" flipV="false" rot="0">
-              <a:off x="1281431" y="63500"/>
-              <a:ext cx="1216153" cy="1216153"/>
-            </a:xfrm>
-            <a:custGeom>
-              <a:avLst/>
-              <a:gdLst/>
-              <a:ahLst/>
-              <a:cxnLst/>
-              <a:rect r="r" b="b" t="t" l="l"/>
-              <a:pathLst>
-                <a:path h="1216153" w="1216153">
-                  <a:moveTo>
-                    <a:pt x="608077" y="1216026"/>
-                  </a:moveTo>
-                  <a:cubicBezTo>
-                    <a:pt x="272797" y="1216026"/>
-                    <a:pt x="0" y="943357"/>
-                    <a:pt x="0" y="607950"/>
-                  </a:cubicBezTo>
-                  <a:cubicBezTo>
-                    <a:pt x="0" y="272542"/>
-                    <a:pt x="272924" y="0"/>
-                    <a:pt x="608077" y="0"/>
-                  </a:cubicBezTo>
-                  <a:cubicBezTo>
-                    <a:pt x="943230" y="0"/>
-                    <a:pt x="1216154" y="272669"/>
-                    <a:pt x="1216154" y="608077"/>
-                  </a:cubicBezTo>
-                  <a:cubicBezTo>
-                    <a:pt x="1216154" y="943484"/>
-                    <a:pt x="943484" y="1216153"/>
-                    <a:pt x="608077" y="1216153"/>
-                  </a:cubicBezTo>
-                  <a:close/>
-                  <a:moveTo>
-                    <a:pt x="608077" y="24765"/>
-                  </a:moveTo>
-                  <a:cubicBezTo>
-                    <a:pt x="286386" y="24765"/>
-                    <a:pt x="24639" y="286512"/>
-                    <a:pt x="24639" y="608204"/>
-                  </a:cubicBezTo>
-                  <a:cubicBezTo>
-                    <a:pt x="24639" y="929895"/>
-                    <a:pt x="286386" y="1191642"/>
-                    <a:pt x="608077" y="1191642"/>
-                  </a:cubicBezTo>
-                  <a:cubicBezTo>
-                    <a:pt x="929768" y="1191642"/>
-                    <a:pt x="1191516" y="929895"/>
-                    <a:pt x="1191516" y="608204"/>
-                  </a:cubicBezTo>
-                  <a:cubicBezTo>
-                    <a:pt x="1191516" y="286512"/>
-                    <a:pt x="929895" y="24765"/>
-                    <a:pt x="608077" y="24765"/>
-                  </a:cubicBezTo>
-                  <a:close/>
-                </a:path>
-              </a:pathLst>
-            </a:custGeom>
-            <a:solidFill>
-              <a:srgbClr val="48423D"/>
-            </a:solidFill>
-          </p:spPr>
-        </p:sp>
-        <p:sp>
-          <p:nvSpPr>
-            <p:cNvPr name="Freeform 28" id="28"/>
-            <p:cNvSpPr/>
-            <p:nvPr/>
-          </p:nvSpPr>
-          <p:spPr>
-            <a:xfrm flipH="false" flipV="false" rot="0">
-              <a:off x="811912" y="646812"/>
-              <a:ext cx="155321" cy="324612"/>
-            </a:xfrm>
-            <a:custGeom>
-              <a:avLst/>
-              <a:gdLst/>
-              <a:ahLst/>
-              <a:cxnLst/>
-              <a:rect r="r" b="b" t="t" l="l"/>
-              <a:pathLst>
-                <a:path h="324612" w="155321">
-                  <a:moveTo>
-                    <a:pt x="0" y="0"/>
-                  </a:moveTo>
-                  <a:lnTo>
-                    <a:pt x="155321" y="0"/>
-                  </a:lnTo>
-                  <a:lnTo>
-                    <a:pt x="155321" y="324612"/>
-                  </a:lnTo>
-                  <a:lnTo>
-                    <a:pt x="0" y="324612"/>
-                  </a:lnTo>
-                  <a:close/>
-                </a:path>
-              </a:pathLst>
-            </a:custGeom>
-            <a:solidFill>
-              <a:srgbClr val="48423D"/>
-            </a:solidFill>
-          </p:spPr>
-        </p:sp>
-        <p:sp>
-          <p:nvSpPr>
-            <p:cNvPr name="Freeform 29" id="29"/>
-            <p:cNvSpPr/>
-            <p:nvPr/>
-          </p:nvSpPr>
-          <p:spPr>
-            <a:xfrm flipH="false" flipV="false" rot="0">
-              <a:off x="381762" y="384683"/>
-              <a:ext cx="324612" cy="155321"/>
-            </a:xfrm>
-            <a:custGeom>
-              <a:avLst/>
-              <a:gdLst/>
-              <a:ahLst/>
-              <a:cxnLst/>
-              <a:rect r="r" b="b" t="t" l="l"/>
-              <a:pathLst>
-                <a:path h="155321" w="324612">
-                  <a:moveTo>
-                    <a:pt x="324613" y="0"/>
-                  </a:moveTo>
-                  <a:lnTo>
-                    <a:pt x="324613" y="155322"/>
-                  </a:lnTo>
-                  <a:lnTo>
-                    <a:pt x="0" y="155322"/>
-                  </a:lnTo>
-                  <a:lnTo>
-                    <a:pt x="0" y="0"/>
-                  </a:lnTo>
-                  <a:close/>
-                </a:path>
-              </a:pathLst>
-            </a:custGeom>
-            <a:solidFill>
-              <a:srgbClr val="48423D"/>
-            </a:solidFill>
-          </p:spPr>
-        </p:sp>
-        <p:sp>
-          <p:nvSpPr>
-            <p:cNvPr name="Freeform 30" id="30"/>
-            <p:cNvSpPr/>
-            <p:nvPr/>
-          </p:nvSpPr>
-          <p:spPr>
-            <a:xfrm flipH="false" flipV="false" rot="0">
-              <a:off x="395224" y="540005"/>
-              <a:ext cx="416687" cy="416560"/>
-            </a:xfrm>
-            <a:custGeom>
-              <a:avLst/>
-              <a:gdLst/>
-              <a:ahLst/>
-              <a:cxnLst/>
-              <a:rect r="r" b="b" t="t" l="l"/>
-              <a:pathLst>
-                <a:path h="416560" w="416687">
-                  <a:moveTo>
-                    <a:pt x="306833" y="0"/>
-                  </a:moveTo>
-                  <a:lnTo>
-                    <a:pt x="416688" y="109855"/>
-                  </a:lnTo>
-                  <a:lnTo>
-                    <a:pt x="109856" y="416560"/>
-                  </a:lnTo>
-                  <a:lnTo>
-                    <a:pt x="0" y="306705"/>
-                  </a:lnTo>
-                  <a:close/>
-                </a:path>
-              </a:pathLst>
-            </a:custGeom>
-            <a:solidFill>
-              <a:srgbClr val="48423D"/>
-            </a:solidFill>
-          </p:spPr>
-        </p:sp>
-        <p:sp>
-          <p:nvSpPr>
-            <p:cNvPr name="Freeform 31" id="31"/>
-            <p:cNvSpPr/>
-            <p:nvPr/>
-          </p:nvSpPr>
-          <p:spPr>
-            <a:xfrm flipH="false" flipV="false" rot="0">
-              <a:off x="1603250" y="380619"/>
-              <a:ext cx="572771" cy="581915"/>
-            </a:xfrm>
-            <a:custGeom>
-              <a:avLst/>
-              <a:gdLst/>
-              <a:ahLst/>
-              <a:cxnLst/>
-              <a:rect r="r" b="b" t="t" l="l"/>
-              <a:pathLst>
-                <a:path h="581915" w="572771">
-                  <a:moveTo>
-                    <a:pt x="0" y="0"/>
-                  </a:moveTo>
-                  <a:lnTo>
-                    <a:pt x="0" y="166879"/>
-                  </a:lnTo>
-                  <a:lnTo>
-                    <a:pt x="299085" y="166879"/>
-                  </a:lnTo>
-                  <a:lnTo>
-                    <a:pt x="0" y="465964"/>
-                  </a:lnTo>
-                  <a:lnTo>
-                    <a:pt x="115951" y="581915"/>
-                  </a:lnTo>
-                  <a:lnTo>
-                    <a:pt x="572770" y="125096"/>
-                  </a:lnTo>
-                  <a:lnTo>
-                    <a:pt x="466090" y="0"/>
-                  </a:lnTo>
-                  <a:lnTo>
-                    <a:pt x="0" y="0"/>
-                  </a:lnTo>
-                  <a:close/>
-                </a:path>
-              </a:pathLst>
-            </a:custGeom>
-            <a:solidFill>
-              <a:srgbClr val="1E3A8A"/>
-            </a:solidFill>
-          </p:spPr>
-        </p:sp>
-        <p:sp>
-          <p:nvSpPr>
-            <p:cNvPr name="Freeform 32" id="32"/>
-            <p:cNvSpPr/>
-            <p:nvPr/>
-          </p:nvSpPr>
-          <p:spPr>
-            <a:xfrm flipH="false" flipV="false" rot="0">
-              <a:off x="2018286" y="663449"/>
-              <a:ext cx="157734" cy="299085"/>
-            </a:xfrm>
-            <a:custGeom>
-              <a:avLst/>
-              <a:gdLst/>
-              <a:ahLst/>
-              <a:cxnLst/>
-              <a:rect r="r" b="b" t="t" l="l"/>
-              <a:pathLst>
-                <a:path h="299085" w="157734">
-                  <a:moveTo>
-                    <a:pt x="0" y="0"/>
-                  </a:moveTo>
-                  <a:lnTo>
-                    <a:pt x="0" y="299085"/>
-                  </a:lnTo>
-                  <a:lnTo>
-                    <a:pt x="157734" y="299085"/>
-                  </a:lnTo>
-                  <a:lnTo>
-                    <a:pt x="157734" y="129794"/>
-                  </a:lnTo>
-                  <a:lnTo>
-                    <a:pt x="0" y="0"/>
-                  </a:lnTo>
-                  <a:close/>
-                </a:path>
-              </a:pathLst>
-            </a:custGeom>
-            <a:solidFill>
-              <a:srgbClr val="1E3A8A"/>
-            </a:solidFill>
-          </p:spPr>
-        </p:sp>
-        <p:sp>
-          <p:nvSpPr>
-            <p:cNvPr name="Freeform 33" id="33"/>
-            <p:cNvSpPr/>
-            <p:nvPr/>
-          </p:nvSpPr>
-          <p:spPr>
-            <a:xfrm flipH="false" flipV="false" rot="0">
-              <a:off x="63500" y="63500"/>
-              <a:ext cx="2437768" cy="1223265"/>
-            </a:xfrm>
-            <a:custGeom>
-              <a:avLst/>
-              <a:gdLst/>
-              <a:ahLst/>
-              <a:cxnLst/>
-              <a:rect r="r" b="b" t="t" l="l"/>
-              <a:pathLst>
-                <a:path h="1223265" w="2437768">
-                  <a:moveTo>
-                    <a:pt x="0" y="1223265"/>
-                  </a:moveTo>
-                  <a:lnTo>
-                    <a:pt x="2437768" y="1223265"/>
-                  </a:lnTo>
-                  <a:lnTo>
-                    <a:pt x="2437768" y="0"/>
-                  </a:lnTo>
-                  <a:lnTo>
-                    <a:pt x="0" y="0"/>
-                  </a:lnTo>
-                  <a:close/>
-                </a:path>
-              </a:pathLst>
-            </a:custGeom>
-            <a:solidFill>
-              <a:srgbClr val="000000">
-                <a:alpha val="0"/>
-              </a:srgbClr>
-            </a:solidFill>
-          </p:spPr>
-        </p:sp>
-      </p:grpSp>
-      <p:sp>
-        <p:nvSpPr>
-          <p:cNvPr name="TextBox 34" id="34"/>
+          <p:cNvPr name="TextBox 2" id="2"/>
           <p:cNvSpPr txBox="true"/>
           <p:nvPr/>
         </p:nvSpPr>
         <p:spPr>
           <a:xfrm rot="0">
-            <a:off x="1028700" y="1010041"/>
-            <a:ext cx="7758589" cy="8673103"/>
+            <a:off x="2335702" y="3082273"/>
+            <a:ext cx="13616597" cy="3145790"/>
           </a:xfrm>
           <a:prstGeom prst="rect">
             <a:avLst/>
@@ -16999,58 +16406,20 @@
           <a:p>
             <a:pPr algn="l">
               <a:lnSpc>
-                <a:spcPts val="3147"/>
+                <a:spcPts val="25180"/>
               </a:lnSpc>
             </a:pPr>
             <a:r>
-              <a:rPr lang="en-US" b="true" sz="2499">
+              <a:rPr lang="en-US" b="true" sz="20000">
                 <a:solidFill>
-                  <a:srgbClr val="F5E8C7"/>
+                  <a:srgbClr val="FFFFFF"/>
                 </a:solidFill>
-                <a:latin typeface="Montserrat Medium"/>
-                <a:ea typeface="Montserrat Medium"/>
-                <a:cs typeface="Montserrat Medium"/>
-                <a:sym typeface="Montserrat Medium"/>
+                <a:latin typeface="Montserrat Bold"/>
+                <a:ea typeface="Montserrat Bold"/>
+                <a:cs typeface="Montserrat Bold"/>
+                <a:sym typeface="Montserrat Bold"/>
               </a:rPr>
-              <a:t>THYNK UNLIMITED</a:t>
-            </a:r>
-          </a:p>
-          <a:p>
-            <a:pPr algn="l">
-              <a:lnSpc>
-                <a:spcPts val="32088"/>
-              </a:lnSpc>
-            </a:pPr>
-            <a:r>
-              <a:rPr lang="en-US" sz="25487">
-                <a:solidFill>
-                  <a:srgbClr val="F5E8C7"/>
-                </a:solidFill>
-                <a:latin typeface="Anton"/>
-                <a:ea typeface="Anton"/>
-                <a:cs typeface="Anton"/>
-                <a:sym typeface="Anton"/>
-              </a:rPr>
-              <a:t>THANK</a:t>
-            </a:r>
-          </a:p>
-          <a:p>
-            <a:pPr algn="l">
-              <a:lnSpc>
-                <a:spcPts val="32104"/>
-              </a:lnSpc>
-            </a:pPr>
-            <a:r>
-              <a:rPr lang="en-US" sz="25500">
-                <a:solidFill>
-                  <a:srgbClr val="F5E8C7"/>
-                </a:solidFill>
-                <a:latin typeface="Anton"/>
-                <a:ea typeface="Anton"/>
-                <a:cs typeface="Anton"/>
-                <a:sym typeface="Anton"/>
-              </a:rPr>
-              <a:t>YOU</a:t>
+              <a:t>Obrigado!</a:t>
             </a:r>
           </a:p>
         </p:txBody>
@@ -17386,7 +16755,7 @@
     <p:bg>
       <p:bgPr>
         <a:solidFill>
-          <a:srgbClr val="F5E8C7"/>
+          <a:srgbClr val="E6E6E6"/>
         </a:solidFill>
       </p:bgPr>
     </p:bg>
@@ -17631,13 +17000,6 @@
 <file path=ppt/slides/slide5.xml><?xml version="1.0" encoding="utf-8"?>
 <p:sld xmlns:p="http://schemas.openxmlformats.org/presentationml/2006/main" xmlns:a="http://schemas.openxmlformats.org/drawingml/2006/main" xmlns:r="http://schemas.openxmlformats.org/officeDocument/2006/relationships">
   <p:cSld>
-    <p:bg>
-      <p:bgPr>
-        <a:solidFill>
-          <a:srgbClr val="F5E8C7"/>
-        </a:solidFill>
-      </p:bgPr>
-    </p:bg>
     <p:spTree>
       <p:nvGrpSpPr>
         <p:cNvPr id="1" name=""/>
@@ -20551,7 +19913,7 @@
         </p:nvGrpSpPr>
         <p:grpSpPr>
           <a:xfrm rot="0">
-            <a:off x="1214285" y="500767"/>
+            <a:off x="1214437" y="766762"/>
             <a:ext cx="15859125" cy="8753475"/>
             <a:chOff x="0" y="0"/>
             <a:chExt cx="21145500" cy="11671300"/>
@@ -20644,10 +20006,10 @@
         </p:nvGrpSpPr>
         <p:grpSpPr>
           <a:xfrm rot="0">
-            <a:off x="9384344" y="540325"/>
-            <a:ext cx="7621457" cy="2580808"/>
+            <a:off x="11302105" y="5676516"/>
+            <a:ext cx="5354154" cy="1537889"/>
             <a:chOff x="0" y="0"/>
-            <a:chExt cx="7621460" cy="2580818"/>
+            <a:chExt cx="7621460" cy="2189141"/>
           </a:xfrm>
         </p:grpSpPr>
         <p:sp>
@@ -20659,7 +20021,7 @@
           <p:spPr>
             <a:xfrm flipH="false" flipV="false" rot="0">
               <a:off x="0" y="0"/>
-              <a:ext cx="7621398" cy="2580773"/>
+              <a:ext cx="7621398" cy="2189104"/>
             </a:xfrm>
             <a:custGeom>
               <a:avLst/>
@@ -20668,25 +20030,53 @@
               <a:cxnLst/>
               <a:rect r="r" b="b" t="t" l="l"/>
               <a:pathLst>
-                <a:path h="2580773" w="7621398">
+                <a:path h="2189104" w="7621398">
                   <a:moveTo>
-                    <a:pt x="0" y="0"/>
+                    <a:pt x="406756" y="0"/>
                   </a:moveTo>
                   <a:lnTo>
-                    <a:pt x="7621398" y="0"/>
-                  </a:lnTo>
-                  <a:lnTo>
-                    <a:pt x="7621398" y="2580773"/>
-                  </a:lnTo>
-                  <a:lnTo>
-                    <a:pt x="0" y="2580773"/>
-                  </a:lnTo>
+                    <a:pt x="7214643" y="0"/>
+                  </a:lnTo>
+                  <a:cubicBezTo>
+                    <a:pt x="7439288" y="0"/>
+                    <a:pt x="7621398" y="182111"/>
+                    <a:pt x="7621398" y="406756"/>
+                  </a:cubicBezTo>
+                  <a:lnTo>
+                    <a:pt x="7621398" y="1782348"/>
+                  </a:lnTo>
+                  <a:cubicBezTo>
+                    <a:pt x="7621398" y="1890226"/>
+                    <a:pt x="7578544" y="1993686"/>
+                    <a:pt x="7502262" y="2069968"/>
+                  </a:cubicBezTo>
+                  <a:cubicBezTo>
+                    <a:pt x="7425981" y="2146249"/>
+                    <a:pt x="7322521" y="2189104"/>
+                    <a:pt x="7214643" y="2189104"/>
+                  </a:cubicBezTo>
+                  <a:lnTo>
+                    <a:pt x="406756" y="2189104"/>
+                  </a:lnTo>
+                  <a:cubicBezTo>
+                    <a:pt x="182111" y="2189104"/>
+                    <a:pt x="0" y="2006993"/>
+                    <a:pt x="0" y="1782348"/>
+                  </a:cubicBezTo>
+                  <a:lnTo>
+                    <a:pt x="0" y="406756"/>
+                  </a:lnTo>
+                  <a:cubicBezTo>
+                    <a:pt x="0" y="182111"/>
+                    <a:pt x="182111" y="0"/>
+                    <a:pt x="406756" y="0"/>
+                  </a:cubicBezTo>
                   <a:close/>
                 </a:path>
               </a:pathLst>
             </a:custGeom>
             <a:solidFill>
-              <a:srgbClr val="F5E8C7"/>
+              <a:srgbClr val="FFFFFF"/>
             </a:solidFill>
           </p:spPr>
         </p:sp>
@@ -20699,10 +20089,10 @@
         </p:nvGrpSpPr>
         <p:grpSpPr>
           <a:xfrm rot="0">
-            <a:off x="1028700" y="2207466"/>
-            <a:ext cx="4457700" cy="5514975"/>
+            <a:off x="6658865" y="7719230"/>
+            <a:ext cx="6910792" cy="1752417"/>
             <a:chOff x="0" y="0"/>
-            <a:chExt cx="5943600" cy="7353300"/>
+            <a:chExt cx="8215893" cy="2083367"/>
           </a:xfrm>
         </p:grpSpPr>
         <p:sp>
@@ -20714,7 +20104,7 @@
           <p:spPr>
             <a:xfrm flipH="false" flipV="false" rot="0">
               <a:off x="0" y="0"/>
-              <a:ext cx="5943600" cy="7353300"/>
+              <a:ext cx="8215826" cy="2083331"/>
             </a:xfrm>
             <a:custGeom>
               <a:avLst/>
@@ -20723,32 +20113,64 @@
               <a:cxnLst/>
               <a:rect r="r" b="b" t="t" l="l"/>
               <a:pathLst>
-                <a:path h="7353300" w="5943600">
+                <a:path h="2083331" w="8215826">
                   <a:moveTo>
-                    <a:pt x="0" y="0"/>
+                    <a:pt x="336144" y="0"/>
                   </a:moveTo>
                   <a:lnTo>
-                    <a:pt x="5943600" y="0"/>
-                  </a:lnTo>
-                  <a:lnTo>
-                    <a:pt x="5943600" y="7353300"/>
-                  </a:lnTo>
-                  <a:lnTo>
-                    <a:pt x="0" y="7353300"/>
-                  </a:lnTo>
-                  <a:lnTo>
-                    <a:pt x="0" y="0"/>
-                  </a:lnTo>
+                    <a:pt x="7879682" y="0"/>
+                  </a:lnTo>
+                  <a:cubicBezTo>
+                    <a:pt x="8065329" y="0"/>
+                    <a:pt x="8215826" y="150497"/>
+                    <a:pt x="8215826" y="336144"/>
+                  </a:cubicBezTo>
+                  <a:lnTo>
+                    <a:pt x="8215826" y="1747187"/>
+                  </a:lnTo>
+                  <a:cubicBezTo>
+                    <a:pt x="8215826" y="1836338"/>
+                    <a:pt x="8180411" y="1921838"/>
+                    <a:pt x="8117371" y="1984877"/>
+                  </a:cubicBezTo>
+                  <a:cubicBezTo>
+                    <a:pt x="8054332" y="2047916"/>
+                    <a:pt x="7968833" y="2083331"/>
+                    <a:pt x="7879682" y="2083331"/>
+                  </a:cubicBezTo>
+                  <a:lnTo>
+                    <a:pt x="336144" y="2083331"/>
+                  </a:lnTo>
+                  <a:cubicBezTo>
+                    <a:pt x="246993" y="2083331"/>
+                    <a:pt x="161493" y="2047916"/>
+                    <a:pt x="98454" y="1984877"/>
+                  </a:cubicBezTo>
+                  <a:cubicBezTo>
+                    <a:pt x="35415" y="1921838"/>
+                    <a:pt x="0" y="1836338"/>
+                    <a:pt x="0" y="1747187"/>
+                  </a:cubicBezTo>
+                  <a:lnTo>
+                    <a:pt x="0" y="336144"/>
+                  </a:lnTo>
+                  <a:cubicBezTo>
+                    <a:pt x="0" y="246993"/>
+                    <a:pt x="35415" y="161493"/>
+                    <a:pt x="98454" y="98454"/>
+                  </a:cubicBezTo>
+                  <a:cubicBezTo>
+                    <a:pt x="161493" y="35415"/>
+                    <a:pt x="246993" y="0"/>
+                    <a:pt x="336144" y="0"/>
+                  </a:cubicBezTo>
                   <a:close/>
                 </a:path>
               </a:pathLst>
             </a:custGeom>
-            <a:blipFill>
-              <a:blip r:embed="rId2"/>
-              <a:stretch>
-                <a:fillRect l="0" t="-4848" r="0" b="-4823"/>
-              </a:stretch>
-            </a:blipFill>
+            <a:solidFill>
+              <a:srgbClr val="FFFFFF"/>
+            </a:solidFill>
           </p:spPr>
         </p:sp>
       </p:grpSp>
@@ -20760,10 +20182,10 @@
         </p:nvGrpSpPr>
         <p:grpSpPr>
           <a:xfrm rot="0">
-            <a:off x="9384344" y="540325"/>
-            <a:ext cx="7622096" cy="2580808"/>
+            <a:off x="5503031" y="5101902"/>
+            <a:ext cx="5301042" cy="2038555"/>
             <a:chOff x="0" y="0"/>
-            <a:chExt cx="7622096" cy="2580818"/>
+            <a:chExt cx="7399906" cy="2845697"/>
           </a:xfrm>
         </p:grpSpPr>
         <p:sp>
@@ -20775,7 +20197,7 @@
           <p:spPr>
             <a:xfrm flipH="false" flipV="false" rot="0">
               <a:off x="0" y="0"/>
-              <a:ext cx="7622036" cy="2580773"/>
+              <a:ext cx="7399845" cy="2845648"/>
             </a:xfrm>
             <a:custGeom>
               <a:avLst/>
@@ -20784,34 +20206,106 @@
               <a:cxnLst/>
               <a:rect r="r" b="b" t="t" l="l"/>
               <a:pathLst>
-                <a:path h="2580773" w="7622036">
+                <a:path h="2845648" w="7399845">
                   <a:moveTo>
-                    <a:pt x="0" y="2580773"/>
+                    <a:pt x="438220" y="0"/>
                   </a:moveTo>
                   <a:lnTo>
-                    <a:pt x="7622036" y="2580773"/>
-                  </a:lnTo>
-                  <a:lnTo>
-                    <a:pt x="7622036" y="0"/>
-                  </a:lnTo>
-                  <a:lnTo>
-                    <a:pt x="0" y="0"/>
-                  </a:lnTo>
+                    <a:pt x="6961625" y="0"/>
+                  </a:lnTo>
+                  <a:cubicBezTo>
+                    <a:pt x="7077849" y="0"/>
+                    <a:pt x="7189312" y="46169"/>
+                    <a:pt x="7271493" y="128352"/>
+                  </a:cubicBezTo>
+                  <a:cubicBezTo>
+                    <a:pt x="7353676" y="210534"/>
+                    <a:pt x="7399845" y="321997"/>
+                    <a:pt x="7399845" y="438220"/>
+                  </a:cubicBezTo>
+                  <a:lnTo>
+                    <a:pt x="7399845" y="2407429"/>
+                  </a:lnTo>
+                  <a:cubicBezTo>
+                    <a:pt x="7399845" y="2649451"/>
+                    <a:pt x="7203648" y="2845648"/>
+                    <a:pt x="6961625" y="2845648"/>
+                  </a:cubicBezTo>
+                  <a:lnTo>
+                    <a:pt x="438220" y="2845648"/>
+                  </a:lnTo>
+                  <a:cubicBezTo>
+                    <a:pt x="196198" y="2845648"/>
+                    <a:pt x="0" y="2649451"/>
+                    <a:pt x="0" y="2407429"/>
+                  </a:cubicBezTo>
+                  <a:lnTo>
+                    <a:pt x="0" y="438220"/>
+                  </a:lnTo>
+                  <a:cubicBezTo>
+                    <a:pt x="0" y="196198"/>
+                    <a:pt x="196198" y="0"/>
+                    <a:pt x="438220" y="0"/>
+                  </a:cubicBezTo>
                   <a:close/>
                 </a:path>
               </a:pathLst>
             </a:custGeom>
             <a:solidFill>
-              <a:srgbClr val="000000">
-                <a:alpha val="0"/>
-              </a:srgbClr>
+              <a:srgbClr val="FFFFFF"/>
             </a:solidFill>
           </p:spPr>
         </p:sp>
       </p:grpSp>
       <p:sp>
         <p:nvSpPr>
-          <p:cNvPr name="TextBox 8" id="8"/>
+          <p:cNvPr name="Freeform 8" id="8"/>
+          <p:cNvSpPr/>
+          <p:nvPr/>
+        </p:nvSpPr>
+        <p:spPr>
+          <a:xfrm flipH="false" flipV="false" rot="0">
+            <a:off x="798166" y="3060588"/>
+            <a:ext cx="4384606" cy="6121184"/>
+          </a:xfrm>
+          <a:custGeom>
+            <a:avLst/>
+            <a:gdLst/>
+            <a:ahLst/>
+            <a:cxnLst/>
+            <a:rect r="r" b="b" t="t" l="l"/>
+            <a:pathLst>
+              <a:path h="6121184" w="4384606">
+                <a:moveTo>
+                  <a:pt x="0" y="0"/>
+                </a:moveTo>
+                <a:lnTo>
+                  <a:pt x="4384606" y="0"/>
+                </a:lnTo>
+                <a:lnTo>
+                  <a:pt x="4384606" y="6121184"/>
+                </a:lnTo>
+                <a:lnTo>
+                  <a:pt x="0" y="6121184"/>
+                </a:lnTo>
+                <a:lnTo>
+                  <a:pt x="0" y="0"/>
+                </a:lnTo>
+                <a:close/>
+              </a:path>
+            </a:pathLst>
+          </a:custGeom>
+          <a:blipFill>
+            <a:blip r:embed="rId2"/>
+            <a:stretch>
+              <a:fillRect l="0" t="0" r="-185786" b="-10031"/>
+            </a:stretch>
+          </a:blipFill>
+        </p:spPr>
+      </p:sp>
+      <p:sp>
+        <p:nvSpPr>
+          <p:cNvPr name="TextBox 9" id="9"/>
           <p:cNvSpPr txBox="true"/>
           <p:nvPr/>
         </p:nvSpPr>
@@ -20838,7 +20332,7 @@
             <a:r>
               <a:rPr lang="en-US" sz="10535" spc="84">
                 <a:solidFill>
-                  <a:srgbClr val="F5E8C7"/>
+                  <a:srgbClr val="FFFFFF"/>
                 </a:solidFill>
                 <a:latin typeface="Anton"/>
                 <a:ea typeface="Anton"/>
@@ -20852,7 +20346,7 @@
       </p:sp>
       <p:sp>
         <p:nvSpPr>
-          <p:cNvPr name="TextBox 9" id="9"/>
+          <p:cNvPr name="TextBox 10" id="10"/>
           <p:cNvSpPr txBox="true"/>
           <p:nvPr/>
         </p:nvSpPr>
@@ -20893,14 +20387,14 @@
       </p:sp>
       <p:sp>
         <p:nvSpPr>
-          <p:cNvPr name="TextBox 10" id="10"/>
+          <p:cNvPr name="TextBox 11" id="11"/>
           <p:cNvSpPr txBox="true"/>
           <p:nvPr/>
         </p:nvSpPr>
         <p:spPr>
           <a:xfrm rot="0">
-            <a:off x="6151712" y="3785645"/>
-            <a:ext cx="5702113" cy="420567"/>
+            <a:off x="11548005" y="5781882"/>
+            <a:ext cx="4862354" cy="1289056"/>
           </a:xfrm>
           <a:prstGeom prst="rect">
             <a:avLst/>
@@ -20918,30 +20412,56 @@
               </a:lnSpc>
             </a:pPr>
             <a:r>
+              <a:rPr lang="en-US" sz="2499" b="true">
+                <a:solidFill>
+                  <a:srgbClr val="47423E"/>
+                </a:solidFill>
+                <a:latin typeface="Montserrat Bold"/>
+                <a:ea typeface="Montserrat Bold"/>
+                <a:cs typeface="Montserrat Bold"/>
+                <a:sym typeface="Montserrat Bold"/>
+              </a:rPr>
+              <a:t>Facilidade de gerenciamento</a:t>
+            </a:r>
+          </a:p>
+          <a:p>
+            <a:pPr algn="l">
+              <a:lnSpc>
+                <a:spcPts val="3499"/>
+              </a:lnSpc>
+            </a:pPr>
+          </a:p>
+          <a:p>
+            <a:pPr algn="l">
+              <a:lnSpc>
+                <a:spcPts val="3499"/>
+              </a:lnSpc>
+            </a:pPr>
+            <a:r>
               <a:rPr lang="en-US" b="true" sz="2499">
                 <a:solidFill>
-                  <a:srgbClr val="FFFFFF"/>
+                  <a:srgbClr val="47423E"/>
                 </a:solidFill>
-                <a:latin typeface="Montserrat Medium"/>
-                <a:ea typeface="Montserrat Medium"/>
-                <a:cs typeface="Montserrat Medium"/>
-                <a:sym typeface="Montserrat Medium"/>
+                <a:latin typeface="Montserrat Bold"/>
+                <a:ea typeface="Montserrat Bold"/>
+                <a:cs typeface="Montserrat Bold"/>
+                <a:sym typeface="Montserrat Bold"/>
               </a:rPr>
-              <a:t>FACILIDADE DE GERENCIAMENTO</a:t>
+              <a:t>Simples de implementar</a:t>
             </a:r>
           </a:p>
         </p:txBody>
       </p:sp>
       <p:sp>
         <p:nvSpPr>
-          <p:cNvPr name="TextBox 11" id="11"/>
+          <p:cNvPr name="TextBox 12" id="12"/>
           <p:cNvSpPr txBox="true"/>
           <p:nvPr/>
         </p:nvSpPr>
         <p:spPr>
           <a:xfrm rot="0">
-            <a:off x="6490135" y="4614739"/>
-            <a:ext cx="4673394" cy="420567"/>
+            <a:off x="5771838" y="5254402"/>
+            <a:ext cx="4763429" cy="1695456"/>
           </a:xfrm>
           <a:prstGeom prst="rect">
             <a:avLst/>
@@ -20955,34 +20475,60 @@
           <a:p>
             <a:pPr algn="l">
               <a:lnSpc>
-                <a:spcPts val="3499"/>
+                <a:spcPts val="3449"/>
+              </a:lnSpc>
+            </a:pPr>
+            <a:r>
+              <a:rPr lang="en-US" sz="2499" b="true">
+                <a:solidFill>
+                  <a:srgbClr val="47423E"/>
+                </a:solidFill>
+                <a:latin typeface="Montserrat Bold"/>
+                <a:ea typeface="Montserrat Bold"/>
+                <a:cs typeface="Montserrat Bold"/>
+                <a:sym typeface="Montserrat Bold"/>
+              </a:rPr>
+              <a:t>Falta de flexibilidade</a:t>
+            </a:r>
+          </a:p>
+          <a:p>
+            <a:pPr algn="l">
+              <a:lnSpc>
+                <a:spcPts val="3449"/>
+              </a:lnSpc>
+            </a:pPr>
+          </a:p>
+          <a:p>
+            <a:pPr algn="l">
+              <a:lnSpc>
+                <a:spcPts val="3449"/>
               </a:lnSpc>
             </a:pPr>
             <a:r>
               <a:rPr lang="en-US" b="true" sz="2499">
                 <a:solidFill>
-                  <a:srgbClr val="FFFFFF"/>
+                  <a:srgbClr val="47423E"/>
                 </a:solidFill>
-                <a:latin typeface="Montserrat Medium"/>
-                <a:ea typeface="Montserrat Medium"/>
-                <a:cs typeface="Montserrat Medium"/>
-                <a:sym typeface="Montserrat Medium"/>
+                <a:latin typeface="Montserrat Bold"/>
+                <a:ea typeface="Montserrat Bold"/>
+                <a:cs typeface="Montserrat Bold"/>
+                <a:sym typeface="Montserrat Bold"/>
               </a:rPr>
-              <a:t>SIMPLES DE IMPLEMENTAR,</a:t>
+              <a:t>Dificuldade em escalar ou modificar partes específicas</a:t>
             </a:r>
           </a:p>
         </p:txBody>
       </p:sp>
       <p:sp>
         <p:nvSpPr>
-          <p:cNvPr name="TextBox 12" id="12"/>
+          <p:cNvPr name="TextBox 13" id="13"/>
           <p:cNvSpPr txBox="true"/>
           <p:nvPr/>
         </p:nvSpPr>
         <p:spPr>
           <a:xfrm rot="0">
-            <a:off x="7228923" y="6485039"/>
-            <a:ext cx="4224938" cy="420567"/>
+            <a:off x="6810626" y="7942630"/>
+            <a:ext cx="6676302" cy="1266831"/>
           </a:xfrm>
           <a:prstGeom prst="rect">
             <a:avLst/>
@@ -20996,34 +20542,132 @@
           <a:p>
             <a:pPr algn="l">
               <a:lnSpc>
-                <a:spcPts val="3499"/>
+                <a:spcPts val="3449"/>
               </a:lnSpc>
             </a:pPr>
             <a:r>
               <a:rPr lang="en-US" b="true" sz="2499">
                 <a:solidFill>
-                  <a:srgbClr val="FFFFFF"/>
+                  <a:srgbClr val="47423E"/>
                 </a:solidFill>
-                <a:latin typeface="Montserrat Medium"/>
-                <a:ea typeface="Montserrat Medium"/>
-                <a:cs typeface="Montserrat Medium"/>
-                <a:sym typeface="Montserrat Medium"/>
+                <a:latin typeface="Montserrat Bold"/>
+                <a:ea typeface="Montserrat Bold"/>
+                <a:cs typeface="Montserrat Bold"/>
+                <a:sym typeface="Montserrat Bold"/>
               </a:rPr>
-              <a:t>FALTA DE FLEXIBILIDADE</a:t>
+              <a:t>“God-Class”, ou “Classe-Deus”, conceito que representa o código todo em um único arquivo</a:t>
             </a:r>
           </a:p>
         </p:txBody>
       </p:sp>
+      <p:grpSp>
+        <p:nvGrpSpPr>
+          <p:cNvPr name="Group 14" id="14"/>
+          <p:cNvGrpSpPr/>
+          <p:nvPr/>
+        </p:nvGrpSpPr>
+        <p:grpSpPr>
+          <a:xfrm rot="0">
+            <a:off x="6151712" y="2156735"/>
+            <a:ext cx="7325262" cy="2436537"/>
+            <a:chOff x="0" y="0"/>
+            <a:chExt cx="7759007" cy="2580818"/>
+          </a:xfrm>
+        </p:grpSpPr>
+        <p:sp>
+          <p:nvSpPr>
+            <p:cNvPr name="Freeform 15" id="15"/>
+            <p:cNvSpPr/>
+            <p:nvPr/>
+          </p:nvSpPr>
+          <p:spPr>
+            <a:xfrm flipH="false" flipV="false" rot="0">
+              <a:off x="0" y="0"/>
+              <a:ext cx="7758943" cy="2580773"/>
+            </a:xfrm>
+            <a:custGeom>
+              <a:avLst/>
+              <a:gdLst/>
+              <a:ahLst/>
+              <a:cxnLst/>
+              <a:rect r="r" b="b" t="t" l="l"/>
+              <a:pathLst>
+                <a:path h="2580773" w="7758943">
+                  <a:moveTo>
+                    <a:pt x="406316" y="0"/>
+                  </a:moveTo>
+                  <a:lnTo>
+                    <a:pt x="7352628" y="0"/>
+                  </a:lnTo>
+                  <a:cubicBezTo>
+                    <a:pt x="7460390" y="0"/>
+                    <a:pt x="7563738" y="42808"/>
+                    <a:pt x="7639936" y="119007"/>
+                  </a:cubicBezTo>
+                  <a:cubicBezTo>
+                    <a:pt x="7716135" y="195206"/>
+                    <a:pt x="7758943" y="298554"/>
+                    <a:pt x="7758943" y="406316"/>
+                  </a:cubicBezTo>
+                  <a:lnTo>
+                    <a:pt x="7758943" y="2174458"/>
+                  </a:lnTo>
+                  <a:cubicBezTo>
+                    <a:pt x="7758943" y="2398860"/>
+                    <a:pt x="7577030" y="2580773"/>
+                    <a:pt x="7352628" y="2580773"/>
+                  </a:cubicBezTo>
+                  <a:lnTo>
+                    <a:pt x="406316" y="2580773"/>
+                  </a:lnTo>
+                  <a:cubicBezTo>
+                    <a:pt x="298554" y="2580773"/>
+                    <a:pt x="195206" y="2537965"/>
+                    <a:pt x="119007" y="2461766"/>
+                  </a:cubicBezTo>
+                  <a:cubicBezTo>
+                    <a:pt x="42808" y="2385567"/>
+                    <a:pt x="0" y="2282219"/>
+                    <a:pt x="0" y="2174458"/>
+                  </a:cubicBezTo>
+                  <a:lnTo>
+                    <a:pt x="0" y="406316"/>
+                  </a:lnTo>
+                  <a:cubicBezTo>
+                    <a:pt x="0" y="298554"/>
+                    <a:pt x="42808" y="195206"/>
+                    <a:pt x="119007" y="119007"/>
+                  </a:cubicBezTo>
+                  <a:cubicBezTo>
+                    <a:pt x="195206" y="42808"/>
+                    <a:pt x="298554" y="0"/>
+                    <a:pt x="406316" y="0"/>
+                  </a:cubicBezTo>
+                  <a:close/>
+                </a:path>
+              </a:pathLst>
+            </a:custGeom>
+            <a:solidFill>
+              <a:srgbClr val="FFFFFF"/>
+            </a:solidFill>
+            <a:ln cap="rnd">
+              <a:noFill/>
+              <a:prstDash val="solid"/>
+              <a:round/>
+            </a:ln>
+          </p:spPr>
+        </p:sp>
+      </p:grpSp>
       <p:sp>
         <p:nvSpPr>
-          <p:cNvPr name="TextBox 13" id="13"/>
+          <p:cNvPr name="TextBox 16" id="16"/>
           <p:cNvSpPr txBox="true"/>
           <p:nvPr/>
         </p:nvSpPr>
         <p:spPr>
           <a:xfrm rot="0">
-            <a:off x="6813966" y="7271175"/>
-            <a:ext cx="5598490" cy="858717"/>
+            <a:off x="6283959" y="2508226"/>
+            <a:ext cx="7060768" cy="1695456"/>
           </a:xfrm>
           <a:prstGeom prst="rect">
             <a:avLst/>
@@ -21043,96 +20687,26 @@
             <a:r>
               <a:rPr lang="en-US" b="true" sz="2499">
                 <a:solidFill>
-                  <a:srgbClr val="FFFFFF"/>
-                </a:solidFill>
-                <a:latin typeface="Montserrat Medium"/>
-                <a:ea typeface="Montserrat Medium"/>
-                <a:cs typeface="Montserrat Medium"/>
-                <a:sym typeface="Montserrat Medium"/>
-              </a:rPr>
-              <a:t>DIFICULDADE EM ESCALAR OU MODIFICAR PARTES ESPECÍFICAS</a:t>
-            </a:r>
-          </a:p>
-        </p:txBody>
-      </p:sp>
-      <p:sp>
-        <p:nvSpPr>
-          <p:cNvPr name="TextBox 14" id="14"/>
-          <p:cNvSpPr txBox="true"/>
-          <p:nvPr/>
-        </p:nvSpPr>
-        <p:spPr>
-          <a:xfrm rot="0">
-            <a:off x="385667" y="8493547"/>
-            <a:ext cx="6762874" cy="1296867"/>
-          </a:xfrm>
-          <a:prstGeom prst="rect">
-            <a:avLst/>
-          </a:prstGeom>
-        </p:spPr>
-        <p:txBody>
-          <a:bodyPr anchor="t" rtlCol="false" tIns="0" lIns="0" bIns="0" rIns="0">
-            <a:spAutoFit/>
-          </a:bodyPr>
-          <a:lstStyle/>
-          <a:p>
-            <a:pPr algn="ctr">
-              <a:lnSpc>
-                <a:spcPts val="3449"/>
-              </a:lnSpc>
-            </a:pPr>
-            <a:r>
-              <a:rPr lang="en-US" b="true" sz="2499">
-                <a:solidFill>
-                  <a:srgbClr val="FFFFFF"/>
-                </a:solidFill>
-                <a:latin typeface="Montserrat Medium"/>
-                <a:ea typeface="Montserrat Medium"/>
-                <a:cs typeface="Montserrat Medium"/>
-                <a:sym typeface="Montserrat Medium"/>
-              </a:rPr>
-              <a:t>“GOD-CLASS”, OU “CLASSE-DEUS”, CONCEITO QUE REPRESENTA O CÓDIGO TODO EM UM ÚNICO ARQUIVO</a:t>
-            </a:r>
-          </a:p>
-        </p:txBody>
-      </p:sp>
-      <p:sp>
-        <p:nvSpPr>
-          <p:cNvPr name="TextBox 15" id="15"/>
-          <p:cNvSpPr txBox="true"/>
-          <p:nvPr/>
-        </p:nvSpPr>
-        <p:spPr>
-          <a:xfrm rot="0">
-            <a:off x="9726549" y="939889"/>
-            <a:ext cx="7060768" cy="1735017"/>
-          </a:xfrm>
-          <a:prstGeom prst="rect">
-            <a:avLst/>
-          </a:prstGeom>
-        </p:spPr>
-        <p:txBody>
-          <a:bodyPr anchor="t" rtlCol="false" tIns="0" lIns="0" bIns="0" rIns="0">
-            <a:spAutoFit/>
-          </a:bodyPr>
-          <a:lstStyle/>
-          <a:p>
-            <a:pPr algn="ctr">
-              <a:lnSpc>
-                <a:spcPts val="3449"/>
-              </a:lnSpc>
-            </a:pPr>
-            <a:r>
-              <a:rPr lang="en-US" b="true" sz="2499">
-                <a:solidFill>
-                  <a:srgbClr val="1E3A8A"/>
+                  <a:srgbClr val="47423E"/>
                 </a:solidFill>
                 <a:latin typeface="Montserrat Bold"/>
                 <a:ea typeface="Montserrat Bold"/>
                 <a:cs typeface="Montserrat Bold"/>
                 <a:sym typeface="Montserrat Bold"/>
               </a:rPr>
-              <a:t>a arquitetura monolítica foi a abordagem padrão, em que todas as funcionalidades do sistema eram integradas em um único bloco de código.</a:t>
+              <a:t>A</a:t>
+            </a:r>
+            <a:r>
+              <a:rPr lang="en-US" b="true" sz="2499">
+                <a:solidFill>
+                  <a:srgbClr val="47423E"/>
+                </a:solidFill>
+                <a:latin typeface="Montserrat Bold"/>
+                <a:ea typeface="Montserrat Bold"/>
+                <a:cs typeface="Montserrat Bold"/>
+                <a:sym typeface="Montserrat Bold"/>
+              </a:rPr>
+              <a:t> arquitetura monolítica foi a abordagem padrão, em que todas as funcionalidades do sistema eram integradas em um único bloco de código.</a:t>
             </a:r>
           </a:p>
         </p:txBody>
@@ -21169,30 +20743,76 @@
           <a:chExt cx="0" cy="0"/>
         </a:xfrm>
       </p:grpSpPr>
+      <p:sp>
+        <p:nvSpPr>
+          <p:cNvPr name="Freeform 2" id="2"/>
+          <p:cNvSpPr/>
+          <p:nvPr/>
+        </p:nvSpPr>
+        <p:spPr>
+          <a:xfrm flipH="false" flipV="false" rot="0">
+            <a:off x="232384" y="2797237"/>
+            <a:ext cx="7577524" cy="6461063"/>
+          </a:xfrm>
+          <a:custGeom>
+            <a:avLst/>
+            <a:gdLst/>
+            <a:ahLst/>
+            <a:cxnLst/>
+            <a:rect r="r" b="b" t="t" l="l"/>
+            <a:pathLst>
+              <a:path h="6461063" w="7577524">
+                <a:moveTo>
+                  <a:pt x="0" y="0"/>
+                </a:moveTo>
+                <a:lnTo>
+                  <a:pt x="7577524" y="0"/>
+                </a:lnTo>
+                <a:lnTo>
+                  <a:pt x="7577524" y="6461063"/>
+                </a:lnTo>
+                <a:lnTo>
+                  <a:pt x="0" y="6461063"/>
+                </a:lnTo>
+                <a:lnTo>
+                  <a:pt x="0" y="0"/>
+                </a:lnTo>
+                <a:close/>
+              </a:path>
+            </a:pathLst>
+          </a:custGeom>
+          <a:blipFill>
+            <a:blip r:embed="rId2"/>
+            <a:stretch>
+              <a:fillRect l="-58634" t="0" r="0" b="0"/>
+            </a:stretch>
+          </a:blipFill>
+        </p:spPr>
+      </p:sp>
       <p:grpSp>
         <p:nvGrpSpPr>
-          <p:cNvPr name="Group 2" id="2"/>
+          <p:cNvPr name="Group 3" id="3"/>
           <p:cNvGrpSpPr/>
           <p:nvPr/>
         </p:nvGrpSpPr>
         <p:grpSpPr>
           <a:xfrm rot="0">
-            <a:off x="1028700" y="2572217"/>
-            <a:ext cx="4418114" cy="5867400"/>
+            <a:off x="7968427" y="2290458"/>
+            <a:ext cx="5952045" cy="1329101"/>
             <a:chOff x="0" y="0"/>
-            <a:chExt cx="5890819" cy="7823200"/>
+            <a:chExt cx="9534890" cy="2129164"/>
           </a:xfrm>
         </p:grpSpPr>
         <p:sp>
           <p:nvSpPr>
-            <p:cNvPr name="Freeform 3" id="3"/>
+            <p:cNvPr name="Freeform 4" id="4"/>
             <p:cNvSpPr/>
             <p:nvPr/>
           </p:nvSpPr>
           <p:spPr>
             <a:xfrm flipH="false" flipV="false" rot="0">
               <a:off x="0" y="0"/>
-              <a:ext cx="5890768" cy="7823200"/>
+              <a:ext cx="9534813" cy="2129127"/>
             </a:xfrm>
             <a:custGeom>
               <a:avLst/>
@@ -21201,38 +20821,344 @@
               <a:cxnLst/>
               <a:rect r="r" b="b" t="t" l="l"/>
               <a:pathLst>
-                <a:path h="7823200" w="5890768">
+                <a:path h="2129127" w="9534813">
                   <a:moveTo>
-                    <a:pt x="0" y="0"/>
+                    <a:pt x="390290" y="0"/>
                   </a:moveTo>
                   <a:lnTo>
-                    <a:pt x="5890768" y="0"/>
-                  </a:lnTo>
-                  <a:lnTo>
-                    <a:pt x="5890768" y="7823200"/>
-                  </a:lnTo>
-                  <a:lnTo>
-                    <a:pt x="0" y="7823200"/>
-                  </a:lnTo>
-                  <a:lnTo>
-                    <a:pt x="0" y="0"/>
-                  </a:lnTo>
+                    <a:pt x="9144523" y="0"/>
+                  </a:lnTo>
+                  <a:cubicBezTo>
+                    <a:pt x="9360074" y="0"/>
+                    <a:pt x="9534813" y="174739"/>
+                    <a:pt x="9534813" y="390290"/>
+                  </a:cubicBezTo>
+                  <a:lnTo>
+                    <a:pt x="9534813" y="1738838"/>
+                  </a:lnTo>
+                  <a:cubicBezTo>
+                    <a:pt x="9534813" y="1842349"/>
+                    <a:pt x="9493693" y="1941621"/>
+                    <a:pt x="9420499" y="2014814"/>
+                  </a:cubicBezTo>
+                  <a:cubicBezTo>
+                    <a:pt x="9347306" y="2088008"/>
+                    <a:pt x="9248034" y="2129127"/>
+                    <a:pt x="9144523" y="2129127"/>
+                  </a:cubicBezTo>
+                  <a:lnTo>
+                    <a:pt x="390290" y="2129127"/>
+                  </a:lnTo>
+                  <a:cubicBezTo>
+                    <a:pt x="174739" y="2129127"/>
+                    <a:pt x="0" y="1954389"/>
+                    <a:pt x="0" y="1738838"/>
+                  </a:cubicBezTo>
+                  <a:lnTo>
+                    <a:pt x="0" y="390290"/>
+                  </a:lnTo>
+                  <a:cubicBezTo>
+                    <a:pt x="0" y="174739"/>
+                    <a:pt x="174739" y="0"/>
+                    <a:pt x="390290" y="0"/>
+                  </a:cubicBezTo>
                   <a:close/>
                 </a:path>
               </a:pathLst>
             </a:custGeom>
-            <a:blipFill>
-              <a:blip r:embed="rId2"/>
-              <a:stretch>
-                <a:fillRect l="-5639" t="0" r="0" b="0"/>
-              </a:stretch>
-            </a:blipFill>
+            <a:solidFill>
+              <a:srgbClr val="FFFFFF"/>
+            </a:solidFill>
+          </p:spPr>
+        </p:sp>
+      </p:grpSp>
+      <p:grpSp>
+        <p:nvGrpSpPr>
+          <p:cNvPr name="Group 5" id="5"/>
+          <p:cNvGrpSpPr/>
+          <p:nvPr/>
+        </p:nvGrpSpPr>
+        <p:grpSpPr>
+          <a:xfrm rot="0">
+            <a:off x="11911354" y="3784680"/>
+            <a:ext cx="6131244" cy="1555727"/>
+            <a:chOff x="0" y="0"/>
+            <a:chExt cx="9534890" cy="2419367"/>
+          </a:xfrm>
+        </p:grpSpPr>
+        <p:sp>
+          <p:nvSpPr>
+            <p:cNvPr name="Freeform 6" id="6"/>
+            <p:cNvSpPr/>
+            <p:nvPr/>
+          </p:nvSpPr>
+          <p:spPr>
+            <a:xfrm flipH="false" flipV="false" rot="0">
+              <a:off x="0" y="0"/>
+              <a:ext cx="9534813" cy="2419326"/>
+            </a:xfrm>
+            <a:custGeom>
+              <a:avLst/>
+              <a:gdLst/>
+              <a:ahLst/>
+              <a:cxnLst/>
+              <a:rect r="r" b="b" t="t" l="l"/>
+              <a:pathLst>
+                <a:path h="2419326" w="9534813">
+                  <a:moveTo>
+                    <a:pt x="378882" y="0"/>
+                  </a:moveTo>
+                  <a:lnTo>
+                    <a:pt x="9155930" y="0"/>
+                  </a:lnTo>
+                  <a:cubicBezTo>
+                    <a:pt x="9365181" y="0"/>
+                    <a:pt x="9534813" y="169631"/>
+                    <a:pt x="9534813" y="378882"/>
+                  </a:cubicBezTo>
+                  <a:lnTo>
+                    <a:pt x="9534813" y="2040443"/>
+                  </a:lnTo>
+                  <a:cubicBezTo>
+                    <a:pt x="9534813" y="2140929"/>
+                    <a:pt x="9494895" y="2237299"/>
+                    <a:pt x="9423840" y="2308353"/>
+                  </a:cubicBezTo>
+                  <a:cubicBezTo>
+                    <a:pt x="9352786" y="2379408"/>
+                    <a:pt x="9256416" y="2419326"/>
+                    <a:pt x="9155930" y="2419326"/>
+                  </a:cubicBezTo>
+                  <a:lnTo>
+                    <a:pt x="378882" y="2419326"/>
+                  </a:lnTo>
+                  <a:cubicBezTo>
+                    <a:pt x="278397" y="2419326"/>
+                    <a:pt x="182026" y="2379408"/>
+                    <a:pt x="110972" y="2308353"/>
+                  </a:cubicBezTo>
+                  <a:cubicBezTo>
+                    <a:pt x="39918" y="2237299"/>
+                    <a:pt x="0" y="2140929"/>
+                    <a:pt x="0" y="2040443"/>
+                  </a:cubicBezTo>
+                  <a:lnTo>
+                    <a:pt x="0" y="378882"/>
+                  </a:lnTo>
+                  <a:cubicBezTo>
+                    <a:pt x="0" y="278397"/>
+                    <a:pt x="39918" y="182026"/>
+                    <a:pt x="110972" y="110972"/>
+                  </a:cubicBezTo>
+                  <a:cubicBezTo>
+                    <a:pt x="182026" y="39918"/>
+                    <a:pt x="278397" y="0"/>
+                    <a:pt x="378882" y="0"/>
+                  </a:cubicBezTo>
+                  <a:close/>
+                </a:path>
+              </a:pathLst>
+            </a:custGeom>
+            <a:solidFill>
+              <a:srgbClr val="FFFFFF"/>
+            </a:solidFill>
+          </p:spPr>
+        </p:sp>
+      </p:grpSp>
+      <p:grpSp>
+        <p:nvGrpSpPr>
+          <p:cNvPr name="Group 7" id="7"/>
+          <p:cNvGrpSpPr/>
+          <p:nvPr/>
+        </p:nvGrpSpPr>
+        <p:grpSpPr>
+          <a:xfrm rot="0">
+            <a:off x="7968427" y="5673781"/>
+            <a:ext cx="6581317" cy="2008917"/>
+            <a:chOff x="0" y="0"/>
+            <a:chExt cx="10068810" cy="3073468"/>
+          </a:xfrm>
+        </p:grpSpPr>
+        <p:sp>
+          <p:nvSpPr>
+            <p:cNvPr name="Freeform 8" id="8"/>
+            <p:cNvSpPr/>
+            <p:nvPr/>
+          </p:nvSpPr>
+          <p:spPr>
+            <a:xfrm flipH="false" flipV="false" rot="0">
+              <a:off x="0" y="0"/>
+              <a:ext cx="10068728" cy="3073415"/>
+            </a:xfrm>
+            <a:custGeom>
+              <a:avLst/>
+              <a:gdLst/>
+              <a:ahLst/>
+              <a:cxnLst/>
+              <a:rect r="r" b="b" t="t" l="l"/>
+              <a:pathLst>
+                <a:path h="3073415" w="10068728">
+                  <a:moveTo>
+                    <a:pt x="352972" y="0"/>
+                  </a:moveTo>
+                  <a:lnTo>
+                    <a:pt x="9715756" y="0"/>
+                  </a:lnTo>
+                  <a:cubicBezTo>
+                    <a:pt x="9809370" y="0"/>
+                    <a:pt x="9899150" y="37188"/>
+                    <a:pt x="9965345" y="103383"/>
+                  </a:cubicBezTo>
+                  <a:cubicBezTo>
+                    <a:pt x="10031540" y="169578"/>
+                    <a:pt x="10068728" y="259358"/>
+                    <a:pt x="10068728" y="352972"/>
+                  </a:cubicBezTo>
+                  <a:lnTo>
+                    <a:pt x="10068728" y="2720443"/>
+                  </a:lnTo>
+                  <a:cubicBezTo>
+                    <a:pt x="10068728" y="2814057"/>
+                    <a:pt x="10031540" y="2903837"/>
+                    <a:pt x="9965345" y="2970032"/>
+                  </a:cubicBezTo>
+                  <a:cubicBezTo>
+                    <a:pt x="9899150" y="3036227"/>
+                    <a:pt x="9809370" y="3073415"/>
+                    <a:pt x="9715756" y="3073415"/>
+                  </a:cubicBezTo>
+                  <a:lnTo>
+                    <a:pt x="352972" y="3073415"/>
+                  </a:lnTo>
+                  <a:cubicBezTo>
+                    <a:pt x="259358" y="3073415"/>
+                    <a:pt x="169578" y="3036227"/>
+                    <a:pt x="103383" y="2970032"/>
+                  </a:cubicBezTo>
+                  <a:cubicBezTo>
+                    <a:pt x="37188" y="2903837"/>
+                    <a:pt x="0" y="2814057"/>
+                    <a:pt x="0" y="2720443"/>
+                  </a:cubicBezTo>
+                  <a:lnTo>
+                    <a:pt x="0" y="352972"/>
+                  </a:lnTo>
+                  <a:cubicBezTo>
+                    <a:pt x="0" y="259358"/>
+                    <a:pt x="37188" y="169578"/>
+                    <a:pt x="103383" y="103383"/>
+                  </a:cubicBezTo>
+                  <a:cubicBezTo>
+                    <a:pt x="169578" y="37188"/>
+                    <a:pt x="259358" y="0"/>
+                    <a:pt x="352972" y="0"/>
+                  </a:cubicBezTo>
+                  <a:close/>
+                </a:path>
+              </a:pathLst>
+            </a:custGeom>
+            <a:solidFill>
+              <a:srgbClr val="FFFFFF"/>
+            </a:solidFill>
+          </p:spPr>
+        </p:sp>
+      </p:grpSp>
+      <p:grpSp>
+        <p:nvGrpSpPr>
+          <p:cNvPr name="Group 9" id="9"/>
+          <p:cNvGrpSpPr/>
+          <p:nvPr/>
+        </p:nvGrpSpPr>
+        <p:grpSpPr>
+          <a:xfrm rot="0">
+            <a:off x="12035374" y="7842982"/>
+            <a:ext cx="5808273" cy="1499893"/>
+            <a:chOff x="0" y="0"/>
+            <a:chExt cx="8303855" cy="2144344"/>
+          </a:xfrm>
+        </p:grpSpPr>
+        <p:sp>
+          <p:nvSpPr>
+            <p:cNvPr name="Freeform 10" id="10"/>
+            <p:cNvSpPr/>
+            <p:nvPr/>
+          </p:nvSpPr>
+          <p:spPr>
+            <a:xfrm flipH="false" flipV="false" rot="0">
+              <a:off x="0" y="0"/>
+              <a:ext cx="8303787" cy="2144307"/>
+            </a:xfrm>
+            <a:custGeom>
+              <a:avLst/>
+              <a:gdLst/>
+              <a:ahLst/>
+              <a:cxnLst/>
+              <a:rect r="r" b="b" t="t" l="l"/>
+              <a:pathLst>
+                <a:path h="2144307" w="8303787">
+                  <a:moveTo>
+                    <a:pt x="399950" y="0"/>
+                  </a:moveTo>
+                  <a:lnTo>
+                    <a:pt x="7903837" y="0"/>
+                  </a:lnTo>
+                  <a:cubicBezTo>
+                    <a:pt x="8009910" y="0"/>
+                    <a:pt x="8111639" y="42138"/>
+                    <a:pt x="8186644" y="117143"/>
+                  </a:cubicBezTo>
+                  <a:cubicBezTo>
+                    <a:pt x="8261649" y="192148"/>
+                    <a:pt x="8303787" y="293877"/>
+                    <a:pt x="8303787" y="399950"/>
+                  </a:cubicBezTo>
+                  <a:lnTo>
+                    <a:pt x="8303787" y="1744357"/>
+                  </a:lnTo>
+                  <a:cubicBezTo>
+                    <a:pt x="8303787" y="1965243"/>
+                    <a:pt x="8124723" y="2144307"/>
+                    <a:pt x="7903837" y="2144307"/>
+                  </a:cubicBezTo>
+                  <a:lnTo>
+                    <a:pt x="399950" y="2144307"/>
+                  </a:lnTo>
+                  <a:cubicBezTo>
+                    <a:pt x="293877" y="2144307"/>
+                    <a:pt x="192148" y="2102169"/>
+                    <a:pt x="117143" y="2027164"/>
+                  </a:cubicBezTo>
+                  <a:cubicBezTo>
+                    <a:pt x="42138" y="1952159"/>
+                    <a:pt x="0" y="1850430"/>
+                    <a:pt x="0" y="1744357"/>
+                  </a:cubicBezTo>
+                  <a:lnTo>
+                    <a:pt x="0" y="399950"/>
+                  </a:lnTo>
+                  <a:cubicBezTo>
+                    <a:pt x="0" y="293877"/>
+                    <a:pt x="42138" y="192148"/>
+                    <a:pt x="117143" y="117143"/>
+                  </a:cubicBezTo>
+                  <a:cubicBezTo>
+                    <a:pt x="192148" y="42138"/>
+                    <a:pt x="293877" y="0"/>
+                    <a:pt x="399950" y="0"/>
+                  </a:cubicBezTo>
+                  <a:close/>
+                </a:path>
+              </a:pathLst>
+            </a:custGeom>
+            <a:solidFill>
+              <a:srgbClr val="FFFFFF"/>
+            </a:solidFill>
           </p:spPr>
         </p:sp>
       </p:grpSp>
       <p:sp>
         <p:nvSpPr>
-          <p:cNvPr name="TextBox 4" id="4"/>
+          <p:cNvPr name="TextBox 11" id="11"/>
           <p:cNvSpPr txBox="true"/>
           <p:nvPr/>
         </p:nvSpPr>
@@ -21259,7 +21185,7 @@
             <a:r>
               <a:rPr lang="en-US" sz="10535" spc="63">
                 <a:solidFill>
-                  <a:srgbClr val="F5E8C7"/>
+                  <a:srgbClr val="FFFFFF"/>
                 </a:solidFill>
                 <a:latin typeface="Anton"/>
                 <a:ea typeface="Anton"/>
@@ -21273,14 +21199,14 @@
       </p:sp>
       <p:sp>
         <p:nvSpPr>
-          <p:cNvPr name="TextBox 5" id="5"/>
+          <p:cNvPr name="TextBox 12" id="12"/>
           <p:cNvSpPr txBox="true"/>
           <p:nvPr/>
         </p:nvSpPr>
         <p:spPr>
           <a:xfrm rot="0">
-            <a:off x="10920565" y="7368807"/>
-            <a:ext cx="6052785" cy="1296867"/>
+            <a:off x="12059784" y="3913192"/>
+            <a:ext cx="5834383" cy="1266831"/>
           </a:xfrm>
           <a:prstGeom prst="rect">
             <a:avLst/>
@@ -21292,7 +21218,7 @@
           </a:bodyPr>
           <a:lstStyle/>
           <a:p>
-            <a:pPr algn="just">
+            <a:pPr algn="l">
               <a:lnSpc>
                 <a:spcPts val="3449"/>
               </a:lnSpc>
@@ -21300,28 +21226,28 @@
             <a:r>
               <a:rPr lang="en-US" b="true" sz="2499">
                 <a:solidFill>
-                  <a:srgbClr val="F5E8C7"/>
+                  <a:srgbClr val="47423E"/>
                 </a:solidFill>
-                <a:latin typeface="Montserrat Medium"/>
-                <a:ea typeface="Montserrat Medium"/>
-                <a:cs typeface="Montserrat Medium"/>
-                <a:sym typeface="Montserrat Medium"/>
+                <a:latin typeface="Montserrat Bold"/>
+                <a:ea typeface="Montserrat Bold"/>
+                <a:cs typeface="Montserrat Bold"/>
+                <a:sym typeface="Montserrat Bold"/>
               </a:rPr>
-              <a:t>EXTREMAMENTE ÚTIL EM GRANDES SISTEMAS SISTEMAS DE STREAMING ONLINE OU PLATAFORMAS DE CRM</a:t>
+              <a:t>Segmenta o sistema em serviços independentes que se comunicam entre si</a:t>
             </a:r>
           </a:p>
         </p:txBody>
       </p:sp>
       <p:sp>
         <p:nvSpPr>
-          <p:cNvPr name="TextBox 6" id="6"/>
+          <p:cNvPr name="TextBox 13" id="13"/>
           <p:cNvSpPr txBox="true"/>
           <p:nvPr/>
         </p:nvSpPr>
         <p:spPr>
           <a:xfrm rot="0">
-            <a:off x="11407692" y="2524973"/>
-            <a:ext cx="6152836" cy="1296867"/>
+            <a:off x="8099985" y="2495213"/>
+            <a:ext cx="5688929" cy="838206"/>
           </a:xfrm>
           <a:prstGeom prst="rect">
             <a:avLst/>
@@ -21333,7 +21259,7 @@
           </a:bodyPr>
           <a:lstStyle/>
           <a:p>
-            <a:pPr algn="ctr">
+            <a:pPr algn="l">
               <a:lnSpc>
                 <a:spcPts val="3449"/>
               </a:lnSpc>
@@ -21341,28 +21267,28 @@
             <a:r>
               <a:rPr lang="en-US" b="true" sz="2499">
                 <a:solidFill>
-                  <a:srgbClr val="F5E8C7"/>
+                  <a:srgbClr val="47423E"/>
                 </a:solidFill>
-                <a:latin typeface="Montserrat Medium"/>
-                <a:ea typeface="Montserrat Medium"/>
-                <a:cs typeface="Montserrat Medium"/>
-                <a:sym typeface="Montserrat Medium"/>
+                <a:latin typeface="Montserrat Bold"/>
+                <a:ea typeface="Montserrat Bold"/>
+                <a:cs typeface="Montserrat Bold"/>
+                <a:sym typeface="Montserrat Bold"/>
               </a:rPr>
-              <a:t>SEGMENTA O SISTEMA EM SERVIÇOS INDEPENDENTES QUE SE COMUNICAM ENTRE SI.</a:t>
+              <a:t>Ideal para sistemas que precisam evoluir rapidamente</a:t>
             </a:r>
           </a:p>
         </p:txBody>
       </p:sp>
       <p:sp>
         <p:nvSpPr>
-          <p:cNvPr name="TextBox 7" id="7"/>
+          <p:cNvPr name="TextBox 14" id="14"/>
           <p:cNvSpPr txBox="true"/>
           <p:nvPr/>
         </p:nvSpPr>
         <p:spPr>
           <a:xfrm rot="0">
-            <a:off x="11260388" y="609991"/>
-            <a:ext cx="6453645" cy="1296867"/>
+            <a:off x="8118812" y="5815460"/>
+            <a:ext cx="6430932" cy="1695456"/>
           </a:xfrm>
           <a:prstGeom prst="rect">
             <a:avLst/>
@@ -21374,7 +21300,7 @@
           </a:bodyPr>
           <a:lstStyle/>
           <a:p>
-            <a:pPr algn="ctr">
+            <a:pPr algn="l">
               <a:lnSpc>
                 <a:spcPts val="3449"/>
               </a:lnSpc>
@@ -21382,28 +21308,28 @@
             <a:r>
               <a:rPr lang="en-US" b="true" sz="2499">
                 <a:solidFill>
-                  <a:srgbClr val="F5E8C7"/>
+                  <a:srgbClr val="47423E"/>
                 </a:solidFill>
-                <a:latin typeface="Montserrat Medium"/>
-                <a:ea typeface="Montserrat Medium"/>
-                <a:cs typeface="Montserrat Medium"/>
-                <a:sym typeface="Montserrat Medium"/>
+                <a:latin typeface="Montserrat Bold"/>
+                <a:ea typeface="Montserrat Bold"/>
+                <a:cs typeface="Montserrat Bold"/>
+                <a:sym typeface="Montserrat Bold"/>
               </a:rPr>
-              <a:t>IDEAL PARA SISTEMAS QUE PRECISAM EVOLUIR RAPIDAMENTE POR NECESSIDADES DO MERCADO.</a:t>
+              <a:t>Permite uma escalabilidade granular (Cada serviço poder ser desenvolvido, implementado e escalado de forma independente)</a:t>
             </a:r>
           </a:p>
         </p:txBody>
       </p:sp>
       <p:sp>
         <p:nvSpPr>
-          <p:cNvPr name="TextBox 8" id="8"/>
+          <p:cNvPr name="TextBox 15" id="15"/>
           <p:cNvSpPr txBox="true"/>
           <p:nvPr/>
         </p:nvSpPr>
         <p:spPr>
           <a:xfrm rot="0">
-            <a:off x="10193112" y="4612910"/>
-            <a:ext cx="7891958" cy="1735017"/>
+            <a:off x="12185760" y="7911606"/>
+            <a:ext cx="5507502" cy="1266831"/>
           </a:xfrm>
           <a:prstGeom prst="rect">
             <a:avLst/>
@@ -21415,7 +21341,7 @@
           </a:bodyPr>
           <a:lstStyle/>
           <a:p>
-            <a:pPr algn="ctr">
+            <a:pPr algn="l">
               <a:lnSpc>
                 <a:spcPts val="3449"/>
               </a:lnSpc>
@@ -21423,14 +21349,14 @@
             <a:r>
               <a:rPr lang="en-US" b="true" sz="2499">
                 <a:solidFill>
-                  <a:srgbClr val="F5E8C7"/>
+                  <a:srgbClr val="47423E"/>
                 </a:solidFill>
-                <a:latin typeface="Montserrat Medium"/>
-                <a:ea typeface="Montserrat Medium"/>
-                <a:cs typeface="Montserrat Medium"/>
-                <a:sym typeface="Montserrat Medium"/>
+                <a:latin typeface="Montserrat Bold"/>
+                <a:ea typeface="Montserrat Bold"/>
+                <a:cs typeface="Montserrat Bold"/>
+                <a:sym typeface="Montserrat Bold"/>
               </a:rPr>
-              <a:t>PERMITE UMA ESCALABILIDADE GRANULAR, (ONDE CADA SERVIÇO PODE SER DESENVOLVIDO, IMPLEMENTADO E ESCALADO DE FORMA INDEPENDENTE.)</a:t>
+              <a:t>Extremamente útil em grandes sistemas de streaming online ou plataformas de CRM</a:t>
             </a:r>
           </a:p>
         </p:txBody>
@@ -21475,10 +21401,10 @@
         </p:nvGrpSpPr>
         <p:grpSpPr>
           <a:xfrm rot="0">
-            <a:off x="733101" y="3824021"/>
-            <a:ext cx="9277350" cy="3867150"/>
+            <a:off x="10135400" y="2813532"/>
+            <a:ext cx="5103867" cy="1280850"/>
             <a:chOff x="0" y="0"/>
-            <a:chExt cx="12369800" cy="5156200"/>
+            <a:chExt cx="11834609" cy="2969986"/>
           </a:xfrm>
         </p:grpSpPr>
         <p:sp>
@@ -21490,7 +21416,7 @@
           <p:spPr>
             <a:xfrm flipH="false" flipV="false" rot="0">
               <a:off x="0" y="0"/>
-              <a:ext cx="12369800" cy="5156200"/>
+              <a:ext cx="11834513" cy="2969935"/>
             </a:xfrm>
             <a:custGeom>
               <a:avLst/>
@@ -21499,38 +21425,448 @@
               <a:cxnLst/>
               <a:rect r="r" b="b" t="t" l="l"/>
               <a:pathLst>
-                <a:path h="5156200" w="12369800">
+                <a:path h="2969935" w="11834513">
                   <a:moveTo>
-                    <a:pt x="0" y="0"/>
+                    <a:pt x="455149" y="0"/>
                   </a:moveTo>
                   <a:lnTo>
-                    <a:pt x="12369800" y="0"/>
-                  </a:lnTo>
-                  <a:lnTo>
-                    <a:pt x="12369800" y="5156200"/>
-                  </a:lnTo>
-                  <a:lnTo>
-                    <a:pt x="0" y="5156200"/>
-                  </a:lnTo>
-                  <a:lnTo>
-                    <a:pt x="0" y="0"/>
-                  </a:lnTo>
+                    <a:pt x="11379364" y="0"/>
+                  </a:lnTo>
+                  <a:cubicBezTo>
+                    <a:pt x="11630736" y="0"/>
+                    <a:pt x="11834513" y="203777"/>
+                    <a:pt x="11834513" y="455149"/>
+                  </a:cubicBezTo>
+                  <a:lnTo>
+                    <a:pt x="11834513" y="2514786"/>
+                  </a:lnTo>
+                  <a:cubicBezTo>
+                    <a:pt x="11834513" y="2766158"/>
+                    <a:pt x="11630736" y="2969935"/>
+                    <a:pt x="11379364" y="2969935"/>
+                  </a:cubicBezTo>
+                  <a:lnTo>
+                    <a:pt x="455149" y="2969935"/>
+                  </a:lnTo>
+                  <a:cubicBezTo>
+                    <a:pt x="334436" y="2969935"/>
+                    <a:pt x="218667" y="2921982"/>
+                    <a:pt x="133310" y="2836625"/>
+                  </a:cubicBezTo>
+                  <a:cubicBezTo>
+                    <a:pt x="47953" y="2751268"/>
+                    <a:pt x="0" y="2635499"/>
+                    <a:pt x="0" y="2514786"/>
+                  </a:cubicBezTo>
+                  <a:lnTo>
+                    <a:pt x="0" y="455149"/>
+                  </a:lnTo>
+                  <a:cubicBezTo>
+                    <a:pt x="0" y="203777"/>
+                    <a:pt x="203777" y="0"/>
+                    <a:pt x="455149" y="0"/>
+                  </a:cubicBezTo>
                   <a:close/>
                 </a:path>
               </a:pathLst>
             </a:custGeom>
-            <a:blipFill>
-              <a:blip r:embed="rId2"/>
-              <a:stretch>
-                <a:fillRect l="0" t="0" r="0" b="-738"/>
-              </a:stretch>
-            </a:blipFill>
+            <a:solidFill>
+              <a:srgbClr val="FFFFFF"/>
+            </a:solidFill>
+          </p:spPr>
+        </p:sp>
+      </p:grpSp>
+      <p:grpSp>
+        <p:nvGrpSpPr>
+          <p:cNvPr name="Group 4" id="4"/>
+          <p:cNvGrpSpPr/>
+          <p:nvPr/>
+        </p:nvGrpSpPr>
+        <p:grpSpPr>
+          <a:xfrm rot="0">
+            <a:off x="12728502" y="1902043"/>
+            <a:ext cx="4708349" cy="728010"/>
+            <a:chOff x="0" y="0"/>
+            <a:chExt cx="10272353" cy="1588327"/>
+          </a:xfrm>
+        </p:grpSpPr>
+        <p:sp>
+          <p:nvSpPr>
+            <p:cNvPr name="Freeform 5" id="5"/>
+            <p:cNvSpPr/>
+            <p:nvPr/>
+          </p:nvSpPr>
+          <p:spPr>
+            <a:xfrm flipH="false" flipV="false" rot="0">
+              <a:off x="0" y="0"/>
+              <a:ext cx="10272269" cy="1588299"/>
+            </a:xfrm>
+            <a:custGeom>
+              <a:avLst/>
+              <a:gdLst/>
+              <a:ahLst/>
+              <a:cxnLst/>
+              <a:rect r="r" b="b" t="t" l="l"/>
+              <a:pathLst>
+                <a:path h="1588299" w="10272269">
+                  <a:moveTo>
+                    <a:pt x="493383" y="0"/>
+                  </a:moveTo>
+                  <a:lnTo>
+                    <a:pt x="9778886" y="0"/>
+                  </a:lnTo>
+                  <a:cubicBezTo>
+                    <a:pt x="10051374" y="0"/>
+                    <a:pt x="10272269" y="220895"/>
+                    <a:pt x="10272269" y="493383"/>
+                  </a:cubicBezTo>
+                  <a:lnTo>
+                    <a:pt x="10272269" y="1094916"/>
+                  </a:lnTo>
+                  <a:cubicBezTo>
+                    <a:pt x="10272269" y="1225769"/>
+                    <a:pt x="10220288" y="1351263"/>
+                    <a:pt x="10127761" y="1443791"/>
+                  </a:cubicBezTo>
+                  <a:cubicBezTo>
+                    <a:pt x="10035233" y="1536318"/>
+                    <a:pt x="9909739" y="1588299"/>
+                    <a:pt x="9778886" y="1588299"/>
+                  </a:cubicBezTo>
+                  <a:lnTo>
+                    <a:pt x="493383" y="1588299"/>
+                  </a:lnTo>
+                  <a:cubicBezTo>
+                    <a:pt x="220895" y="1588299"/>
+                    <a:pt x="0" y="1367404"/>
+                    <a:pt x="0" y="1094916"/>
+                  </a:cubicBezTo>
+                  <a:lnTo>
+                    <a:pt x="0" y="493383"/>
+                  </a:lnTo>
+                  <a:cubicBezTo>
+                    <a:pt x="0" y="220895"/>
+                    <a:pt x="220895" y="0"/>
+                    <a:pt x="493383" y="0"/>
+                  </a:cubicBezTo>
+                  <a:close/>
+                </a:path>
+              </a:pathLst>
+            </a:custGeom>
+            <a:solidFill>
+              <a:srgbClr val="FFFFFF"/>
+            </a:solidFill>
+          </p:spPr>
+        </p:sp>
+      </p:grpSp>
+      <p:grpSp>
+        <p:nvGrpSpPr>
+          <p:cNvPr name="Group 6" id="6"/>
+          <p:cNvGrpSpPr/>
+          <p:nvPr/>
+        </p:nvGrpSpPr>
+        <p:grpSpPr>
+          <a:xfrm rot="0">
+            <a:off x="2493444" y="8119681"/>
+            <a:ext cx="14049973" cy="1244617"/>
+            <a:chOff x="0" y="0"/>
+            <a:chExt cx="28249461" cy="2502487"/>
+          </a:xfrm>
+        </p:grpSpPr>
+        <p:sp>
+          <p:nvSpPr>
+            <p:cNvPr name="Freeform 7" id="7"/>
+            <p:cNvSpPr/>
+            <p:nvPr/>
+          </p:nvSpPr>
+          <p:spPr>
+            <a:xfrm flipH="false" flipV="false" rot="0">
+              <a:off x="0" y="0"/>
+              <a:ext cx="28249231" cy="2502444"/>
+            </a:xfrm>
+            <a:custGeom>
+              <a:avLst/>
+              <a:gdLst/>
+              <a:ahLst/>
+              <a:cxnLst/>
+              <a:rect r="r" b="b" t="t" l="l"/>
+              <a:pathLst>
+                <a:path h="2502444" w="28249231">
+                  <a:moveTo>
+                    <a:pt x="165340" y="0"/>
+                  </a:moveTo>
+                  <a:lnTo>
+                    <a:pt x="28083892" y="0"/>
+                  </a:lnTo>
+                  <a:cubicBezTo>
+                    <a:pt x="28175204" y="0"/>
+                    <a:pt x="28249231" y="74025"/>
+                    <a:pt x="28249231" y="165340"/>
+                  </a:cubicBezTo>
+                  <a:lnTo>
+                    <a:pt x="28249231" y="2337104"/>
+                  </a:lnTo>
+                  <a:cubicBezTo>
+                    <a:pt x="28249231" y="2428418"/>
+                    <a:pt x="28175204" y="2502444"/>
+                    <a:pt x="28083892" y="2502444"/>
+                  </a:cubicBezTo>
+                  <a:lnTo>
+                    <a:pt x="165340" y="2502444"/>
+                  </a:lnTo>
+                  <a:cubicBezTo>
+                    <a:pt x="121489" y="2502444"/>
+                    <a:pt x="79434" y="2485024"/>
+                    <a:pt x="48427" y="2454017"/>
+                  </a:cubicBezTo>
+                  <a:cubicBezTo>
+                    <a:pt x="17420" y="2423009"/>
+                    <a:pt x="0" y="2380955"/>
+                    <a:pt x="0" y="2337104"/>
+                  </a:cubicBezTo>
+                  <a:lnTo>
+                    <a:pt x="0" y="165340"/>
+                  </a:lnTo>
+                  <a:cubicBezTo>
+                    <a:pt x="0" y="74025"/>
+                    <a:pt x="74025" y="0"/>
+                    <a:pt x="165340" y="0"/>
+                  </a:cubicBezTo>
+                  <a:close/>
+                </a:path>
+              </a:pathLst>
+            </a:custGeom>
+            <a:solidFill>
+              <a:srgbClr val="FFFFFF"/>
+            </a:solidFill>
+          </p:spPr>
+        </p:sp>
+      </p:grpSp>
+      <p:grpSp>
+        <p:nvGrpSpPr>
+          <p:cNvPr name="Group 8" id="8"/>
+          <p:cNvGrpSpPr/>
+          <p:nvPr/>
+        </p:nvGrpSpPr>
+        <p:grpSpPr>
+          <a:xfrm rot="0">
+            <a:off x="12552815" y="4342032"/>
+            <a:ext cx="5641576" cy="1210153"/>
+            <a:chOff x="0" y="0"/>
+            <a:chExt cx="11958825" cy="2565250"/>
+          </a:xfrm>
+        </p:grpSpPr>
+        <p:sp>
+          <p:nvSpPr>
+            <p:cNvPr name="Freeform 9" id="9"/>
+            <p:cNvSpPr/>
+            <p:nvPr/>
+          </p:nvSpPr>
+          <p:spPr>
+            <a:xfrm flipH="false" flipV="false" rot="0">
+              <a:off x="0" y="0"/>
+              <a:ext cx="11958727" cy="2565206"/>
+            </a:xfrm>
+            <a:custGeom>
+              <a:avLst/>
+              <a:gdLst/>
+              <a:ahLst/>
+              <a:cxnLst/>
+              <a:rect r="r" b="b" t="t" l="l"/>
+              <a:pathLst>
+                <a:path h="2565206" w="11958727">
+                  <a:moveTo>
+                    <a:pt x="411768" y="0"/>
+                  </a:moveTo>
+                  <a:lnTo>
+                    <a:pt x="11546960" y="0"/>
+                  </a:lnTo>
+                  <a:cubicBezTo>
+                    <a:pt x="11774373" y="0"/>
+                    <a:pt x="11958727" y="184355"/>
+                    <a:pt x="11958727" y="411768"/>
+                  </a:cubicBezTo>
+                  <a:lnTo>
+                    <a:pt x="11958727" y="2153438"/>
+                  </a:lnTo>
+                  <a:cubicBezTo>
+                    <a:pt x="11958727" y="2380851"/>
+                    <a:pt x="11774373" y="2565206"/>
+                    <a:pt x="11546960" y="2565206"/>
+                  </a:cubicBezTo>
+                  <a:lnTo>
+                    <a:pt x="411768" y="2565206"/>
+                  </a:lnTo>
+                  <a:cubicBezTo>
+                    <a:pt x="184355" y="2565206"/>
+                    <a:pt x="0" y="2380851"/>
+                    <a:pt x="0" y="2153438"/>
+                  </a:cubicBezTo>
+                  <a:lnTo>
+                    <a:pt x="0" y="411768"/>
+                  </a:lnTo>
+                  <a:cubicBezTo>
+                    <a:pt x="0" y="184355"/>
+                    <a:pt x="184355" y="0"/>
+                    <a:pt x="411768" y="0"/>
+                  </a:cubicBezTo>
+                  <a:close/>
+                </a:path>
+              </a:pathLst>
+            </a:custGeom>
+            <a:solidFill>
+              <a:srgbClr val="FFFFFF"/>
+            </a:solidFill>
+          </p:spPr>
+        </p:sp>
+      </p:grpSp>
+      <p:grpSp>
+        <p:nvGrpSpPr>
+          <p:cNvPr name="Group 10" id="10"/>
+          <p:cNvGrpSpPr/>
+          <p:nvPr/>
+        </p:nvGrpSpPr>
+        <p:grpSpPr>
+          <a:xfrm rot="0">
+            <a:off x="10135400" y="5822440"/>
+            <a:ext cx="6830586" cy="1640016"/>
+            <a:chOff x="0" y="0"/>
+            <a:chExt cx="12718496" cy="3053707"/>
+          </a:xfrm>
+        </p:grpSpPr>
+        <p:sp>
+          <p:nvSpPr>
+            <p:cNvPr name="Freeform 11" id="11"/>
+            <p:cNvSpPr/>
+            <p:nvPr/>
+          </p:nvSpPr>
+          <p:spPr>
+            <a:xfrm flipH="false" flipV="false" rot="0">
+              <a:off x="0" y="0"/>
+              <a:ext cx="12718393" cy="3053654"/>
+            </a:xfrm>
+            <a:custGeom>
+              <a:avLst/>
+              <a:gdLst/>
+              <a:ahLst/>
+              <a:cxnLst/>
+              <a:rect r="r" b="b" t="t" l="l"/>
+              <a:pathLst>
+                <a:path h="3053654" w="12718393">
+                  <a:moveTo>
+                    <a:pt x="340091" y="0"/>
+                  </a:moveTo>
+                  <a:lnTo>
+                    <a:pt x="12378302" y="0"/>
+                  </a:lnTo>
+                  <a:cubicBezTo>
+                    <a:pt x="12468499" y="0"/>
+                    <a:pt x="12555003" y="35831"/>
+                    <a:pt x="12618782" y="99610"/>
+                  </a:cubicBezTo>
+                  <a:cubicBezTo>
+                    <a:pt x="12682562" y="163390"/>
+                    <a:pt x="12718393" y="249893"/>
+                    <a:pt x="12718393" y="340091"/>
+                  </a:cubicBezTo>
+                  <a:lnTo>
+                    <a:pt x="12718393" y="2713564"/>
+                  </a:lnTo>
+                  <a:cubicBezTo>
+                    <a:pt x="12718393" y="2803761"/>
+                    <a:pt x="12682562" y="2890265"/>
+                    <a:pt x="12618782" y="2954044"/>
+                  </a:cubicBezTo>
+                  <a:cubicBezTo>
+                    <a:pt x="12555003" y="3017824"/>
+                    <a:pt x="12468499" y="3053654"/>
+                    <a:pt x="12378302" y="3053654"/>
+                  </a:cubicBezTo>
+                  <a:lnTo>
+                    <a:pt x="340091" y="3053654"/>
+                  </a:lnTo>
+                  <a:cubicBezTo>
+                    <a:pt x="249893" y="3053654"/>
+                    <a:pt x="163390" y="3017824"/>
+                    <a:pt x="99610" y="2954044"/>
+                  </a:cubicBezTo>
+                  <a:cubicBezTo>
+                    <a:pt x="35831" y="2890265"/>
+                    <a:pt x="0" y="2803761"/>
+                    <a:pt x="0" y="2713564"/>
+                  </a:cubicBezTo>
+                  <a:lnTo>
+                    <a:pt x="0" y="340091"/>
+                  </a:lnTo>
+                  <a:cubicBezTo>
+                    <a:pt x="0" y="249893"/>
+                    <a:pt x="35831" y="163390"/>
+                    <a:pt x="99610" y="99610"/>
+                  </a:cubicBezTo>
+                  <a:cubicBezTo>
+                    <a:pt x="163390" y="35831"/>
+                    <a:pt x="249893" y="0"/>
+                    <a:pt x="340091" y="0"/>
+                  </a:cubicBezTo>
+                  <a:close/>
+                </a:path>
+              </a:pathLst>
+            </a:custGeom>
+            <a:solidFill>
+              <a:srgbClr val="FFFFFF"/>
+            </a:solidFill>
           </p:spPr>
         </p:sp>
       </p:grpSp>
       <p:sp>
         <p:nvSpPr>
-          <p:cNvPr name="TextBox 4" id="4"/>
+          <p:cNvPr name="Freeform 12" id="12"/>
+          <p:cNvSpPr/>
+          <p:nvPr/>
+        </p:nvSpPr>
+        <p:spPr>
+          <a:xfrm flipH="false" flipV="false" rot="0">
+            <a:off x="334751" y="3068203"/>
+            <a:ext cx="9537127" cy="4004137"/>
+          </a:xfrm>
+          <a:custGeom>
+            <a:avLst/>
+            <a:gdLst/>
+            <a:ahLst/>
+            <a:cxnLst/>
+            <a:rect r="r" b="b" t="t" l="l"/>
+            <a:pathLst>
+              <a:path h="4004137" w="9537127">
+                <a:moveTo>
+                  <a:pt x="0" y="0"/>
+                </a:moveTo>
+                <a:lnTo>
+                  <a:pt x="9537127" y="0"/>
+                </a:lnTo>
+                <a:lnTo>
+                  <a:pt x="9537127" y="4004137"/>
+                </a:lnTo>
+                <a:lnTo>
+                  <a:pt x="0" y="4004137"/>
+                </a:lnTo>
+                <a:lnTo>
+                  <a:pt x="0" y="0"/>
+                </a:lnTo>
+                <a:close/>
+              </a:path>
+            </a:pathLst>
+          </a:custGeom>
+          <a:blipFill>
+            <a:blip r:embed="rId2"/>
+            <a:stretch>
+              <a:fillRect l="0" t="0" r="0" b="0"/>
+            </a:stretch>
+          </a:blipFill>
+        </p:spPr>
+      </p:sp>
+      <p:sp>
+        <p:nvSpPr>
+          <p:cNvPr name="TextBox 13" id="13"/>
           <p:cNvSpPr txBox="true"/>
           <p:nvPr/>
         </p:nvSpPr>
@@ -21557,7 +21893,7 @@
             <a:r>
               <a:rPr lang="en-US" sz="10535">
                 <a:solidFill>
-                  <a:srgbClr val="F5E8C7"/>
+                  <a:srgbClr val="FFFFFF"/>
                 </a:solidFill>
                 <a:latin typeface="Anton"/>
                 <a:ea typeface="Anton"/>
@@ -21571,48 +21907,7 @@
       </p:sp>
       <p:sp>
         <p:nvSpPr>
-          <p:cNvPr name="TextBox 5" id="5"/>
-          <p:cNvSpPr txBox="true"/>
-          <p:nvPr/>
-        </p:nvSpPr>
-        <p:spPr>
-          <a:xfrm rot="0">
-            <a:off x="1373324" y="2205552"/>
-            <a:ext cx="5258829" cy="858717"/>
-          </a:xfrm>
-          <a:prstGeom prst="rect">
-            <a:avLst/>
-          </a:prstGeom>
-        </p:spPr>
-        <p:txBody>
-          <a:bodyPr anchor="t" rtlCol="false" tIns="0" lIns="0" bIns="0" rIns="0">
-            <a:spAutoFit/>
-          </a:bodyPr>
-          <a:lstStyle/>
-          <a:p>
-            <a:pPr algn="ctr">
-              <a:lnSpc>
-                <a:spcPts val="3499"/>
-              </a:lnSpc>
-            </a:pPr>
-            <a:r>
-              <a:rPr lang="en-US" b="true" sz="2499">
-                <a:solidFill>
-                  <a:srgbClr val="F5E8C7"/>
-                </a:solidFill>
-                <a:latin typeface="Montserrat Medium"/>
-                <a:ea typeface="Montserrat Medium"/>
-                <a:cs typeface="Montserrat Medium"/>
-                <a:sym typeface="Montserrat Medium"/>
-              </a:rPr>
-              <a:t>SEPARA A APLICAÇÃO EM TRÊS</a:t>
-            </a:r>
-          </a:p>
-        </p:txBody>
-      </p:sp>
-      <p:sp>
-        <p:nvSpPr>
-          <p:cNvPr name="TextBox 6" id="6"/>
+          <p:cNvPr name="TextBox 14" id="14"/>
           <p:cNvSpPr txBox="true"/>
           <p:nvPr/>
         </p:nvSpPr>
@@ -21653,7 +21948,7 @@
       </p:sp>
       <p:sp>
         <p:nvSpPr>
-          <p:cNvPr name="TextBox 7" id="7"/>
+          <p:cNvPr name="TextBox 15" id="15"/>
           <p:cNvSpPr txBox="true"/>
           <p:nvPr/>
         </p:nvSpPr>
@@ -21694,14 +21989,14 @@
       </p:sp>
       <p:sp>
         <p:nvSpPr>
-          <p:cNvPr name="TextBox 8" id="8"/>
+          <p:cNvPr name="TextBox 16" id="16"/>
           <p:cNvSpPr txBox="true"/>
           <p:nvPr/>
         </p:nvSpPr>
         <p:spPr>
           <a:xfrm rot="0">
-            <a:off x="12790313" y="2400719"/>
-            <a:ext cx="3566655" cy="420567"/>
+            <a:off x="10291990" y="2961326"/>
+            <a:ext cx="4790686" cy="850906"/>
           </a:xfrm>
           <a:prstGeom prst="rect">
             <a:avLst/>
@@ -21721,76 +22016,28 @@
             <a:r>
               <a:rPr lang="en-US" b="true" sz="2499">
                 <a:solidFill>
-                  <a:srgbClr val="F5E8C7"/>
+                  <a:srgbClr val="47423E"/>
                 </a:solidFill>
-                <a:latin typeface="Montserrat Medium"/>
-                <a:ea typeface="Montserrat Medium"/>
-                <a:cs typeface="Montserrat Medium"/>
-                <a:sym typeface="Montserrat Medium"/>
+                <a:latin typeface="Montserrat Bold"/>
+                <a:ea typeface="Montserrat Bold"/>
+                <a:cs typeface="Montserrat Bold"/>
+                <a:sym typeface="Montserrat Bold"/>
               </a:rPr>
-              <a:t>MODELO:</a:t>
-            </a:r>
-            <a:r>
-              <a:rPr lang="en-US" b="true" sz="2499">
-                <a:solidFill>
-                  <a:srgbClr val="000000"/>
-                </a:solidFill>
-                <a:latin typeface="Montserrat Medium"/>
-                <a:ea typeface="Montserrat Medium"/>
-                <a:cs typeface="Montserrat Medium"/>
-                <a:sym typeface="Montserrat Medium"/>
-              </a:rPr>
-              <a:t> </a:t>
-            </a:r>
-            <a:r>
-              <a:rPr lang="en-US" b="true" sz="2499">
-                <a:solidFill>
-                  <a:srgbClr val="F5E8C7"/>
-                </a:solidFill>
-                <a:latin typeface="Montserrat Medium"/>
-                <a:ea typeface="Montserrat Medium"/>
-                <a:cs typeface="Montserrat Medium"/>
-                <a:sym typeface="Montserrat Medium"/>
-              </a:rPr>
-              <a:t>CUIDA</a:t>
-            </a:r>
-            <a:r>
-              <a:rPr lang="en-US" b="true" sz="2499">
-                <a:solidFill>
-                  <a:srgbClr val="000000"/>
-                </a:solidFill>
-                <a:latin typeface="Montserrat Medium"/>
-                <a:ea typeface="Montserrat Medium"/>
-                <a:cs typeface="Montserrat Medium"/>
-                <a:sym typeface="Montserrat Medium"/>
-              </a:rPr>
-              <a:t> </a:t>
-            </a:r>
-            <a:r>
-              <a:rPr lang="en-US" b="true" sz="2499">
-                <a:solidFill>
-                  <a:srgbClr val="F5E8C7"/>
-                </a:solidFill>
-                <a:latin typeface="Montserrat Medium"/>
-                <a:ea typeface="Montserrat Medium"/>
-                <a:cs typeface="Montserrat Medium"/>
-                <a:sym typeface="Montserrat Medium"/>
-              </a:rPr>
-              <a:t>DAS</a:t>
+              <a:t>Modelo: cuida das regras de negócio</a:t>
             </a:r>
           </a:p>
         </p:txBody>
       </p:sp>
       <p:sp>
         <p:nvSpPr>
-          <p:cNvPr name="TextBox 9" id="9"/>
+          <p:cNvPr name="TextBox 17" id="17"/>
           <p:cNvSpPr txBox="true"/>
           <p:nvPr/>
         </p:nvSpPr>
         <p:spPr>
           <a:xfrm rot="0">
-            <a:off x="12753851" y="2838869"/>
-            <a:ext cx="3640807" cy="420567"/>
+            <a:off x="2673802" y="8310137"/>
+            <a:ext cx="13689258" cy="857250"/>
           </a:xfrm>
           <a:prstGeom prst="rect">
             <a:avLst/>
@@ -21804,82 +22051,34 @@
           <a:p>
             <a:pPr algn="l">
               <a:lnSpc>
-                <a:spcPts val="3499"/>
+                <a:spcPts val="3450"/>
               </a:lnSpc>
             </a:pPr>
             <a:r>
-              <a:rPr lang="en-US" b="true" sz="2499">
+              <a:rPr lang="en-US" b="true" sz="2500">
                 <a:solidFill>
-                  <a:srgbClr val="F5E8C7"/>
+                  <a:srgbClr val="47423E"/>
                 </a:solidFill>
-                <a:latin typeface="Montserrat Medium"/>
-                <a:ea typeface="Montserrat Medium"/>
-                <a:cs typeface="Montserrat Medium"/>
-                <a:sym typeface="Montserrat Medium"/>
+                <a:latin typeface="Montserrat Bold"/>
+                <a:ea typeface="Montserrat Bold"/>
+                <a:cs typeface="Montserrat Bold"/>
+                <a:sym typeface="Montserrat Bold"/>
               </a:rPr>
-              <a:t>REGRAS</a:t>
-            </a:r>
-            <a:r>
-              <a:rPr lang="en-US" b="true" sz="2499">
-                <a:solidFill>
-                  <a:srgbClr val="000000"/>
-                </a:solidFill>
-                <a:latin typeface="Montserrat Medium"/>
-                <a:ea typeface="Montserrat Medium"/>
-                <a:cs typeface="Montserrat Medium"/>
-                <a:sym typeface="Montserrat Medium"/>
-              </a:rPr>
-              <a:t> </a:t>
-            </a:r>
-            <a:r>
-              <a:rPr lang="en-US" b="true" sz="2499">
-                <a:solidFill>
-                  <a:srgbClr val="F5E8C7"/>
-                </a:solidFill>
-                <a:latin typeface="Montserrat Medium"/>
-                <a:ea typeface="Montserrat Medium"/>
-                <a:cs typeface="Montserrat Medium"/>
-                <a:sym typeface="Montserrat Medium"/>
-              </a:rPr>
-              <a:t>DE</a:t>
-            </a:r>
-            <a:r>
-              <a:rPr lang="en-US" b="true" sz="2499">
-                <a:solidFill>
-                  <a:srgbClr val="000000"/>
-                </a:solidFill>
-                <a:latin typeface="Montserrat Medium"/>
-                <a:ea typeface="Montserrat Medium"/>
-                <a:cs typeface="Montserrat Medium"/>
-                <a:sym typeface="Montserrat Medium"/>
-              </a:rPr>
-              <a:t> </a:t>
-            </a:r>
-            <a:r>
-              <a:rPr lang="en-US" b="true" sz="2499">
-                <a:solidFill>
-                  <a:srgbClr val="F5E8C7"/>
-                </a:solidFill>
-                <a:latin typeface="Montserrat Medium"/>
-                <a:ea typeface="Montserrat Medium"/>
-                <a:cs typeface="Montserrat Medium"/>
-                <a:sym typeface="Montserrat Medium"/>
-              </a:rPr>
-              <a:t>NEGÓCIO</a:t>
+              <a:t>Facilita a manutenção e evolução do software, permitindo que cada componente seja desenvolvido de forma independente</a:t>
             </a:r>
           </a:p>
         </p:txBody>
       </p:sp>
       <p:sp>
         <p:nvSpPr>
-          <p:cNvPr name="TextBox 10" id="10"/>
+          <p:cNvPr name="TextBox 18" id="18"/>
           <p:cNvSpPr txBox="true"/>
           <p:nvPr/>
         </p:nvSpPr>
         <p:spPr>
           <a:xfrm rot="0">
-            <a:off x="985657" y="8204140"/>
-            <a:ext cx="16039700" cy="1296867"/>
+            <a:off x="12787020" y="4497177"/>
+            <a:ext cx="5287466" cy="838206"/>
           </a:xfrm>
           <a:prstGeom prst="rect">
             <a:avLst/>
@@ -21891,7 +22090,7 @@
           </a:bodyPr>
           <a:lstStyle/>
           <a:p>
-            <a:pPr algn="ctr">
+            <a:pPr algn="l">
               <a:lnSpc>
                 <a:spcPts val="3449"/>
               </a:lnSpc>
@@ -21899,28 +22098,28 @@
             <a:r>
               <a:rPr lang="en-US" b="true" sz="2499">
                 <a:solidFill>
-                  <a:srgbClr val="F5E8C7"/>
+                  <a:srgbClr val="47423E"/>
                 </a:solidFill>
-                <a:latin typeface="Montserrat Medium"/>
-                <a:ea typeface="Montserrat Medium"/>
-                <a:cs typeface="Montserrat Medium"/>
-                <a:sym typeface="Montserrat Medium"/>
+                <a:latin typeface="Montserrat Bold"/>
+                <a:ea typeface="Montserrat Bold"/>
+                <a:cs typeface="Montserrat Bold"/>
+                <a:sym typeface="Montserrat Bold"/>
               </a:rPr>
-              <a:t>FACILITA A MANUTENÇÃO E EVOLUÇÃO DO SOFTWARE, PERMITINDO QUE CADA COMPONENTE SEJA DESENVOLVIDO DE FORMA INDEPENDENTE, MELHORANDO A MODULARIDADE E A REUTILIZAÇÃO DE CÓDIGO.</a:t>
+              <a:t>Visão: gerencia o que é mostrado ao usuário, interface</a:t>
             </a:r>
           </a:p>
         </p:txBody>
       </p:sp>
       <p:sp>
         <p:nvSpPr>
-          <p:cNvPr name="TextBox 11" id="11"/>
+          <p:cNvPr name="TextBox 19" id="19"/>
           <p:cNvSpPr txBox="true"/>
           <p:nvPr/>
         </p:nvSpPr>
         <p:spPr>
           <a:xfrm rot="0">
-            <a:off x="11069793" y="3893410"/>
-            <a:ext cx="6254182" cy="858717"/>
+            <a:off x="10398922" y="5968339"/>
+            <a:ext cx="6417842" cy="1266831"/>
           </a:xfrm>
           <a:prstGeom prst="rect">
             <a:avLst/>
@@ -21932,7 +22131,7 @@
           </a:bodyPr>
           <a:lstStyle/>
           <a:p>
-            <a:pPr algn="ctr">
+            <a:pPr algn="l">
               <a:lnSpc>
                 <a:spcPts val="3449"/>
               </a:lnSpc>
@@ -21940,28 +22139,28 @@
             <a:r>
               <a:rPr lang="en-US" b="true" sz="2499">
                 <a:solidFill>
-                  <a:srgbClr val="F5E8C7"/>
+                  <a:srgbClr val="47423E"/>
                 </a:solidFill>
-                <a:latin typeface="Montserrat Medium"/>
-                <a:ea typeface="Montserrat Medium"/>
-                <a:cs typeface="Montserrat Medium"/>
-                <a:sym typeface="Montserrat Medium"/>
+                <a:latin typeface="Montserrat Bold"/>
+                <a:ea typeface="Montserrat Bold"/>
+                <a:cs typeface="Montserrat Bold"/>
+                <a:sym typeface="Montserrat Bold"/>
               </a:rPr>
-              <a:t>VISÃO: GERENCIA O QUE É MOSTRADO AO USUÁRIO, INTERFACE</a:t>
+              <a:t>Controller: lida com a interação entre a visão e o modelo, respotas a interação do usuário com o sistema.</a:t>
             </a:r>
           </a:p>
         </p:txBody>
       </p:sp>
       <p:sp>
         <p:nvSpPr>
-          <p:cNvPr name="TextBox 12" id="12"/>
+          <p:cNvPr name="TextBox 20" id="20"/>
           <p:cNvSpPr txBox="true"/>
           <p:nvPr/>
         </p:nvSpPr>
         <p:spPr>
           <a:xfrm rot="0">
-            <a:off x="10338711" y="5382482"/>
-            <a:ext cx="7745273" cy="1296867"/>
+            <a:off x="12794244" y="2004279"/>
+            <a:ext cx="4576864" cy="422275"/>
           </a:xfrm>
           <a:prstGeom prst="rect">
             <a:avLst/>
@@ -21973,22 +22172,22 @@
           </a:bodyPr>
           <a:lstStyle/>
           <a:p>
-            <a:pPr algn="ctr">
+            <a:pPr algn="l">
               <a:lnSpc>
-                <a:spcPts val="3449"/>
+                <a:spcPts val="3500"/>
               </a:lnSpc>
             </a:pPr>
             <a:r>
-              <a:rPr lang="en-US" b="true" sz="2499">
+              <a:rPr lang="en-US" b="true" sz="2500">
                 <a:solidFill>
-                  <a:srgbClr val="F5E8C7"/>
+                  <a:srgbClr val="47423E"/>
                 </a:solidFill>
-                <a:latin typeface="Montserrat Medium"/>
-                <a:ea typeface="Montserrat Medium"/>
-                <a:cs typeface="Montserrat Medium"/>
-                <a:sym typeface="Montserrat Medium"/>
+                <a:latin typeface="Montserrat Bold"/>
+                <a:ea typeface="Montserrat Bold"/>
+                <a:cs typeface="Montserrat Bold"/>
+                <a:sym typeface="Montserrat Bold"/>
               </a:rPr>
-              <a:t>CONTROLLER: LIDA COM A INTERAÇÃO ENTRE A VISÃO E O MODELO, RESPOSTAS A INTERAÇÃO DO USUARIO COM O SISTEMA.</a:t>
+              <a:t>Separa a aplicação em três</a:t>
             </a:r>
           </a:p>
         </p:txBody>

--- a/Apresentacao.pptx
+++ b/Apresentacao.pptx
@@ -26,25 +26,31 @@
     <p:sldId id="274" r:id="rId24"/>
     <p:sldId id="275" r:id="rId25"/>
     <p:sldId id="276" r:id="rId26"/>
+    <p:sldId id="277" r:id="rId27"/>
+    <p:sldId id="278" r:id="rId28"/>
+    <p:sldId id="279" r:id="rId29"/>
+    <p:sldId id="280" r:id="rId30"/>
+    <p:sldId id="281" r:id="rId31"/>
+    <p:sldId id="282" r:id="rId32"/>
   </p:sldIdLst>
   <p:sldSz cx="18288000" cy="10287000"/>
   <p:notesSz cx="6858000" cy="9144000"/>
   <p:embeddedFontLst>
     <p:embeddedFont>
       <p:font typeface="Anton" charset="1" panose="00000500000000000000"/>
-      <p:regular r:id="rId27"/>
+      <p:regular r:id="rId33"/>
     </p:embeddedFont>
     <p:embeddedFont>
       <p:font typeface="Montserrat Bold" charset="1" panose="00000800000000000000"/>
-      <p:regular r:id="rId28"/>
+      <p:regular r:id="rId34"/>
     </p:embeddedFont>
     <p:embeddedFont>
       <p:font typeface="Montserrat" charset="1" panose="00000500000000000000"/>
-      <p:regular r:id="rId29"/>
+      <p:regular r:id="rId35"/>
     </p:embeddedFont>
     <p:embeddedFont>
       <p:font typeface="Montserrat Medium" charset="1" panose="00000600000000000000"/>
-      <p:regular r:id="rId30"/>
+      <p:regular r:id="rId36"/>
     </p:embeddedFont>
   </p:embeddedFontLst>
   <p:defaultTextStyle>
@@ -16360,6 +16366,474 @@
 </file>
 
 <file path=ppt/slides/slide21.xml><?xml version="1.0" encoding="utf-8"?>
+<p:sld xmlns:p="http://schemas.openxmlformats.org/presentationml/2006/main" xmlns:a="http://schemas.openxmlformats.org/drawingml/2006/main" xmlns:r="http://schemas.openxmlformats.org/officeDocument/2006/relationships">
+  <p:cSld>
+    <p:bg>
+      <p:bgPr>
+        <a:solidFill>
+          <a:srgbClr val="233D89"/>
+        </a:solidFill>
+      </p:bgPr>
+    </p:bg>
+    <p:spTree>
+      <p:nvGrpSpPr>
+        <p:cNvPr id="1" name=""/>
+        <p:cNvGrpSpPr/>
+        <p:nvPr/>
+      </p:nvGrpSpPr>
+      <p:grpSpPr>
+        <a:xfrm>
+          <a:off x="0" y="0"/>
+          <a:ext cx="0" cy="0"/>
+          <a:chOff x="0" y="0"/>
+          <a:chExt cx="0" cy="0"/>
+        </a:xfrm>
+      </p:grpSpPr>
+      <p:sp>
+        <p:nvSpPr>
+          <p:cNvPr name="Freeform 2" id="2"/>
+          <p:cNvSpPr/>
+          <p:nvPr/>
+        </p:nvSpPr>
+        <p:spPr>
+          <a:xfrm flipH="false" flipV="false" rot="0">
+            <a:off x="1243250" y="302848"/>
+            <a:ext cx="8148397" cy="9287962"/>
+          </a:xfrm>
+          <a:custGeom>
+            <a:avLst/>
+            <a:gdLst/>
+            <a:ahLst/>
+            <a:cxnLst/>
+            <a:rect r="r" b="b" t="t" l="l"/>
+            <a:pathLst>
+              <a:path h="9287962" w="8148397">
+                <a:moveTo>
+                  <a:pt x="0" y="0"/>
+                </a:moveTo>
+                <a:lnTo>
+                  <a:pt x="8148397" y="0"/>
+                </a:lnTo>
+                <a:lnTo>
+                  <a:pt x="8148397" y="9287962"/>
+                </a:lnTo>
+                <a:lnTo>
+                  <a:pt x="0" y="9287962"/>
+                </a:lnTo>
+                <a:lnTo>
+                  <a:pt x="0" y="0"/>
+                </a:lnTo>
+                <a:close/>
+              </a:path>
+            </a:pathLst>
+          </a:custGeom>
+          <a:blipFill>
+            <a:blip r:embed="rId2"/>
+            <a:stretch>
+              <a:fillRect l="0" t="0" r="0" b="0"/>
+            </a:stretch>
+          </a:blipFill>
+        </p:spPr>
+      </p:sp>
+    </p:spTree>
+  </p:cSld>
+  <p:clrMapOvr>
+    <a:masterClrMapping/>
+  </p:clrMapOvr>
+</p:sld>
+</file>
+
+<file path=ppt/slides/slide22.xml><?xml version="1.0" encoding="utf-8"?>
+<p:sld xmlns:p="http://schemas.openxmlformats.org/presentationml/2006/main" xmlns:a="http://schemas.openxmlformats.org/drawingml/2006/main" xmlns:r="http://schemas.openxmlformats.org/officeDocument/2006/relationships">
+  <p:cSld>
+    <p:bg>
+      <p:bgPr>
+        <a:solidFill>
+          <a:srgbClr val="233D89"/>
+        </a:solidFill>
+      </p:bgPr>
+    </p:bg>
+    <p:spTree>
+      <p:nvGrpSpPr>
+        <p:cNvPr id="1" name=""/>
+        <p:cNvGrpSpPr/>
+        <p:nvPr/>
+      </p:nvGrpSpPr>
+      <p:grpSpPr>
+        <a:xfrm>
+          <a:off x="0" y="0"/>
+          <a:ext cx="0" cy="0"/>
+          <a:chOff x="0" y="0"/>
+          <a:chExt cx="0" cy="0"/>
+        </a:xfrm>
+      </p:grpSpPr>
+      <p:sp>
+        <p:nvSpPr>
+          <p:cNvPr name="Freeform 2" id="2"/>
+          <p:cNvSpPr/>
+          <p:nvPr/>
+        </p:nvSpPr>
+        <p:spPr>
+          <a:xfrm flipH="false" flipV="false" rot="0">
+            <a:off x="1450288" y="461402"/>
+            <a:ext cx="9485850" cy="9017664"/>
+          </a:xfrm>
+          <a:custGeom>
+            <a:avLst/>
+            <a:gdLst/>
+            <a:ahLst/>
+            <a:cxnLst/>
+            <a:rect r="r" b="b" t="t" l="l"/>
+            <a:pathLst>
+              <a:path h="9017664" w="9485850">
+                <a:moveTo>
+                  <a:pt x="0" y="0"/>
+                </a:moveTo>
+                <a:lnTo>
+                  <a:pt x="9485850" y="0"/>
+                </a:lnTo>
+                <a:lnTo>
+                  <a:pt x="9485850" y="9017664"/>
+                </a:lnTo>
+                <a:lnTo>
+                  <a:pt x="0" y="9017664"/>
+                </a:lnTo>
+                <a:lnTo>
+                  <a:pt x="0" y="0"/>
+                </a:lnTo>
+                <a:close/>
+              </a:path>
+            </a:pathLst>
+          </a:custGeom>
+          <a:blipFill>
+            <a:blip r:embed="rId2"/>
+            <a:stretch>
+              <a:fillRect l="0" t="0" r="0" b="0"/>
+            </a:stretch>
+          </a:blipFill>
+        </p:spPr>
+      </p:sp>
+    </p:spTree>
+  </p:cSld>
+  <p:clrMapOvr>
+    <a:masterClrMapping/>
+  </p:clrMapOvr>
+</p:sld>
+</file>
+
+<file path=ppt/slides/slide23.xml><?xml version="1.0" encoding="utf-8"?>
+<p:sld xmlns:p="http://schemas.openxmlformats.org/presentationml/2006/main" xmlns:a="http://schemas.openxmlformats.org/drawingml/2006/main" xmlns:r="http://schemas.openxmlformats.org/officeDocument/2006/relationships">
+  <p:cSld>
+    <p:bg>
+      <p:bgPr>
+        <a:solidFill>
+          <a:srgbClr val="283D87"/>
+        </a:solidFill>
+      </p:bgPr>
+    </p:bg>
+    <p:spTree>
+      <p:nvGrpSpPr>
+        <p:cNvPr id="1" name=""/>
+        <p:cNvGrpSpPr/>
+        <p:nvPr/>
+      </p:nvGrpSpPr>
+      <p:grpSpPr>
+        <a:xfrm>
+          <a:off x="0" y="0"/>
+          <a:ext cx="0" cy="0"/>
+          <a:chOff x="0" y="0"/>
+          <a:chExt cx="0" cy="0"/>
+        </a:xfrm>
+      </p:grpSpPr>
+      <p:sp>
+        <p:nvSpPr>
+          <p:cNvPr name="Freeform 2" id="2"/>
+          <p:cNvSpPr/>
+          <p:nvPr/>
+        </p:nvSpPr>
+        <p:spPr>
+          <a:xfrm flipH="false" flipV="false" rot="0">
+            <a:off x="150912" y="2890385"/>
+            <a:ext cx="17986175" cy="4202955"/>
+          </a:xfrm>
+          <a:custGeom>
+            <a:avLst/>
+            <a:gdLst/>
+            <a:ahLst/>
+            <a:cxnLst/>
+            <a:rect r="r" b="b" t="t" l="l"/>
+            <a:pathLst>
+              <a:path h="4202955" w="17986175">
+                <a:moveTo>
+                  <a:pt x="0" y="0"/>
+                </a:moveTo>
+                <a:lnTo>
+                  <a:pt x="17986176" y="0"/>
+                </a:lnTo>
+                <a:lnTo>
+                  <a:pt x="17986176" y="4202956"/>
+                </a:lnTo>
+                <a:lnTo>
+                  <a:pt x="0" y="4202956"/>
+                </a:lnTo>
+                <a:lnTo>
+                  <a:pt x="0" y="0"/>
+                </a:lnTo>
+                <a:close/>
+              </a:path>
+            </a:pathLst>
+          </a:custGeom>
+          <a:blipFill>
+            <a:blip r:embed="rId2"/>
+            <a:stretch>
+              <a:fillRect l="0" t="0" r="0" b="0"/>
+            </a:stretch>
+          </a:blipFill>
+        </p:spPr>
+      </p:sp>
+    </p:spTree>
+  </p:cSld>
+  <p:clrMapOvr>
+    <a:masterClrMapping/>
+  </p:clrMapOvr>
+</p:sld>
+</file>
+
+<file path=ppt/slides/slide24.xml><?xml version="1.0" encoding="utf-8"?>
+<p:sld xmlns:p="http://schemas.openxmlformats.org/presentationml/2006/main" xmlns:a="http://schemas.openxmlformats.org/drawingml/2006/main" xmlns:r="http://schemas.openxmlformats.org/officeDocument/2006/relationships">
+  <p:cSld>
+    <p:bg>
+      <p:bgPr>
+        <a:solidFill>
+          <a:srgbClr val="283D87"/>
+        </a:solidFill>
+      </p:bgPr>
+    </p:bg>
+    <p:spTree>
+      <p:nvGrpSpPr>
+        <p:cNvPr id="1" name=""/>
+        <p:cNvGrpSpPr/>
+        <p:nvPr/>
+      </p:nvGrpSpPr>
+      <p:grpSpPr>
+        <a:xfrm>
+          <a:off x="0" y="0"/>
+          <a:ext cx="0" cy="0"/>
+          <a:chOff x="0" y="0"/>
+          <a:chExt cx="0" cy="0"/>
+        </a:xfrm>
+      </p:grpSpPr>
+      <p:sp>
+        <p:nvSpPr>
+          <p:cNvPr name="Freeform 2" id="2"/>
+          <p:cNvSpPr/>
+          <p:nvPr/>
+        </p:nvSpPr>
+        <p:spPr>
+          <a:xfrm flipH="false" flipV="false" rot="0">
+            <a:off x="241034" y="1970578"/>
+            <a:ext cx="17805932" cy="4874374"/>
+          </a:xfrm>
+          <a:custGeom>
+            <a:avLst/>
+            <a:gdLst/>
+            <a:ahLst/>
+            <a:cxnLst/>
+            <a:rect r="r" b="b" t="t" l="l"/>
+            <a:pathLst>
+              <a:path h="4874374" w="17805932">
+                <a:moveTo>
+                  <a:pt x="0" y="0"/>
+                </a:moveTo>
+                <a:lnTo>
+                  <a:pt x="17805932" y="0"/>
+                </a:lnTo>
+                <a:lnTo>
+                  <a:pt x="17805932" y="4874374"/>
+                </a:lnTo>
+                <a:lnTo>
+                  <a:pt x="0" y="4874374"/>
+                </a:lnTo>
+                <a:lnTo>
+                  <a:pt x="0" y="0"/>
+                </a:lnTo>
+                <a:close/>
+              </a:path>
+            </a:pathLst>
+          </a:custGeom>
+          <a:blipFill>
+            <a:blip r:embed="rId2"/>
+            <a:stretch>
+              <a:fillRect l="0" t="0" r="0" b="0"/>
+            </a:stretch>
+          </a:blipFill>
+        </p:spPr>
+      </p:sp>
+    </p:spTree>
+  </p:cSld>
+  <p:clrMapOvr>
+    <a:masterClrMapping/>
+  </p:clrMapOvr>
+</p:sld>
+</file>
+
+<file path=ppt/slides/slide25.xml><?xml version="1.0" encoding="utf-8"?>
+<p:sld xmlns:p="http://schemas.openxmlformats.org/presentationml/2006/main" xmlns:a="http://schemas.openxmlformats.org/drawingml/2006/main" xmlns:r="http://schemas.openxmlformats.org/officeDocument/2006/relationships">
+  <p:cSld>
+    <p:bg>
+      <p:bgPr>
+        <a:solidFill>
+          <a:srgbClr val="233D89"/>
+        </a:solidFill>
+      </p:bgPr>
+    </p:bg>
+    <p:spTree>
+      <p:nvGrpSpPr>
+        <p:cNvPr id="1" name=""/>
+        <p:cNvGrpSpPr/>
+        <p:nvPr/>
+      </p:nvGrpSpPr>
+      <p:grpSpPr>
+        <a:xfrm>
+          <a:off x="0" y="0"/>
+          <a:ext cx="0" cy="0"/>
+          <a:chOff x="0" y="0"/>
+          <a:chExt cx="0" cy="0"/>
+        </a:xfrm>
+      </p:grpSpPr>
+      <p:sp>
+        <p:nvSpPr>
+          <p:cNvPr name="Freeform 2" id="2"/>
+          <p:cNvSpPr/>
+          <p:nvPr/>
+        </p:nvSpPr>
+        <p:spPr>
+          <a:xfrm flipH="false" flipV="false" rot="0">
+            <a:off x="4528962" y="624966"/>
+            <a:ext cx="9832027" cy="9382626"/>
+          </a:xfrm>
+          <a:custGeom>
+            <a:avLst/>
+            <a:gdLst/>
+            <a:ahLst/>
+            <a:cxnLst/>
+            <a:rect r="r" b="b" t="t" l="l"/>
+            <a:pathLst>
+              <a:path h="9382626" w="9832027">
+                <a:moveTo>
+                  <a:pt x="0" y="0"/>
+                </a:moveTo>
+                <a:lnTo>
+                  <a:pt x="9832028" y="0"/>
+                </a:lnTo>
+                <a:lnTo>
+                  <a:pt x="9832028" y="9382626"/>
+                </a:lnTo>
+                <a:lnTo>
+                  <a:pt x="0" y="9382626"/>
+                </a:lnTo>
+                <a:lnTo>
+                  <a:pt x="0" y="0"/>
+                </a:lnTo>
+                <a:close/>
+              </a:path>
+            </a:pathLst>
+          </a:custGeom>
+          <a:blipFill>
+            <a:blip r:embed="rId2"/>
+            <a:stretch>
+              <a:fillRect l="0" t="0" r="0" b="0"/>
+            </a:stretch>
+          </a:blipFill>
+        </p:spPr>
+      </p:sp>
+    </p:spTree>
+  </p:cSld>
+  <p:clrMapOvr>
+    <a:masterClrMapping/>
+  </p:clrMapOvr>
+</p:sld>
+</file>
+
+<file path=ppt/slides/slide26.xml><?xml version="1.0" encoding="utf-8"?>
+<p:sld xmlns:p="http://schemas.openxmlformats.org/presentationml/2006/main" xmlns:a="http://schemas.openxmlformats.org/drawingml/2006/main" xmlns:r="http://schemas.openxmlformats.org/officeDocument/2006/relationships">
+  <p:cSld>
+    <p:bg>
+      <p:bgPr>
+        <a:solidFill>
+          <a:srgbClr val="233D89"/>
+        </a:solidFill>
+      </p:bgPr>
+    </p:bg>
+    <p:spTree>
+      <p:nvGrpSpPr>
+        <p:cNvPr id="1" name=""/>
+        <p:cNvGrpSpPr/>
+        <p:nvPr/>
+      </p:nvGrpSpPr>
+      <p:grpSpPr>
+        <a:xfrm>
+          <a:off x="0" y="0"/>
+          <a:ext cx="0" cy="0"/>
+          <a:chOff x="0" y="0"/>
+          <a:chExt cx="0" cy="0"/>
+        </a:xfrm>
+      </p:grpSpPr>
+      <p:sp>
+        <p:nvSpPr>
+          <p:cNvPr name="Freeform 2" id="2"/>
+          <p:cNvSpPr/>
+          <p:nvPr/>
+        </p:nvSpPr>
+        <p:spPr>
+          <a:xfrm flipH="false" flipV="false" rot="0">
+            <a:off x="4644143" y="509748"/>
+            <a:ext cx="9623518" cy="9267504"/>
+          </a:xfrm>
+          <a:custGeom>
+            <a:avLst/>
+            <a:gdLst/>
+            <a:ahLst/>
+            <a:cxnLst/>
+            <a:rect r="r" b="b" t="t" l="l"/>
+            <a:pathLst>
+              <a:path h="9267504" w="9623518">
+                <a:moveTo>
+                  <a:pt x="0" y="0"/>
+                </a:moveTo>
+                <a:lnTo>
+                  <a:pt x="9623518" y="0"/>
+                </a:lnTo>
+                <a:lnTo>
+                  <a:pt x="9623518" y="9267504"/>
+                </a:lnTo>
+                <a:lnTo>
+                  <a:pt x="0" y="9267504"/>
+                </a:lnTo>
+                <a:lnTo>
+                  <a:pt x="0" y="0"/>
+                </a:lnTo>
+                <a:close/>
+              </a:path>
+            </a:pathLst>
+          </a:custGeom>
+          <a:blipFill>
+            <a:blip r:embed="rId2"/>
+            <a:stretch>
+              <a:fillRect l="0" t="0" r="0" b="0"/>
+            </a:stretch>
+          </a:blipFill>
+        </p:spPr>
+      </p:sp>
+    </p:spTree>
+  </p:cSld>
+  <p:clrMapOvr>
+    <a:masterClrMapping/>
+  </p:clrMapOvr>
+</p:sld>
+</file>
+
+<file path=ppt/slides/slide27.xml><?xml version="1.0" encoding="utf-8"?>
 <p:sld xmlns:p="http://schemas.openxmlformats.org/presentationml/2006/main" xmlns:a="http://schemas.openxmlformats.org/drawingml/2006/main">
   <p:cSld>
     <p:bg>

--- a/Apresentacao.pptx
+++ b/Apresentacao.pptx
@@ -30,25 +30,39 @@
     <p:sldId id="278" r:id="rId28"/>
     <p:sldId id="279" r:id="rId29"/>
     <p:sldId id="280" r:id="rId30"/>
+    <p:sldId id="281" r:id="rId31"/>
+    <p:sldId id="282" r:id="rId32"/>
+    <p:sldId id="283" r:id="rId33"/>
+    <p:sldId id="284" r:id="rId34"/>
+    <p:sldId id="285" r:id="rId35"/>
+    <p:sldId id="286" r:id="rId36"/>
+    <p:sldId id="287" r:id="rId37"/>
+    <p:sldId id="288" r:id="rId38"/>
+    <p:sldId id="289" r:id="rId39"/>
+    <p:sldId id="290" r:id="rId40"/>
+    <p:sldId id="291" r:id="rId41"/>
+    <p:sldId id="292" r:id="rId42"/>
+    <p:sldId id="293" r:id="rId43"/>
+    <p:sldId id="294" r:id="rId44"/>
   </p:sldIdLst>
   <p:sldSz cx="18288000" cy="10287000"/>
   <p:notesSz cx="6858000" cy="9144000"/>
   <p:embeddedFontLst>
     <p:embeddedFont>
       <p:font typeface="Anton" charset="1" panose="00000500000000000000"/>
-      <p:regular r:id="rId31"/>
+      <p:regular r:id="rId45"/>
     </p:embeddedFont>
     <p:embeddedFont>
       <p:font typeface="Montserrat Bold" charset="1" panose="00000800000000000000"/>
-      <p:regular r:id="rId32"/>
+      <p:regular r:id="rId46"/>
     </p:embeddedFont>
     <p:embeddedFont>
       <p:font typeface="Montserrat" charset="1" panose="00000500000000000000"/>
-      <p:regular r:id="rId33"/>
+      <p:regular r:id="rId47"/>
     </p:embeddedFont>
     <p:embeddedFont>
       <p:font typeface="Montserrat Medium" charset="1" panose="00000600000000000000"/>
-      <p:regular r:id="rId34"/>
+      <p:regular r:id="rId48"/>
     </p:embeddedFont>
   </p:embeddedFontLst>
   <p:defaultTextStyle>
@@ -13698,8 +13712,8 @@
         </p:nvSpPr>
         <p:spPr>
           <a:xfrm flipH="false" flipV="false" rot="0">
-            <a:off x="1243250" y="302848"/>
-            <a:ext cx="8148397" cy="9287962"/>
+            <a:off x="266228" y="2227353"/>
+            <a:ext cx="17755545" cy="5149108"/>
           </a:xfrm>
           <a:custGeom>
             <a:avLst/>
@@ -13708,18 +13722,18 @@
             <a:cxnLst/>
             <a:rect r="r" b="b" t="t" l="l"/>
             <a:pathLst>
-              <a:path h="9287962" w="8148397">
+              <a:path h="5149108" w="17755545">
                 <a:moveTo>
                   <a:pt x="0" y="0"/>
                 </a:moveTo>
                 <a:lnTo>
-                  <a:pt x="8148397" y="0"/>
+                  <a:pt x="17755544" y="0"/>
                 </a:lnTo>
                 <a:lnTo>
-                  <a:pt x="8148397" y="9287962"/>
+                  <a:pt x="17755544" y="5149108"/>
                 </a:lnTo>
                 <a:lnTo>
-                  <a:pt x="0" y="9287962"/>
+                  <a:pt x="0" y="5149108"/>
                 </a:lnTo>
                 <a:lnTo>
                   <a:pt x="0" y="0"/>
@@ -13736,6 +13750,236 @@
           </a:blipFill>
         </p:spPr>
       </p:sp>
+      <p:grpSp>
+        <p:nvGrpSpPr>
+          <p:cNvPr name="Group 3" id="3"/>
+          <p:cNvGrpSpPr/>
+          <p:nvPr/>
+        </p:nvGrpSpPr>
+        <p:grpSpPr>
+          <a:xfrm rot="0">
+            <a:off x="621952" y="3823778"/>
+            <a:ext cx="16960349" cy="3086100"/>
+            <a:chOff x="0" y="0"/>
+            <a:chExt cx="4466923" cy="812800"/>
+          </a:xfrm>
+        </p:grpSpPr>
+        <p:sp>
+          <p:nvSpPr>
+            <p:cNvPr name="Freeform 4" id="4"/>
+            <p:cNvSpPr/>
+            <p:nvPr/>
+          </p:nvSpPr>
+          <p:spPr>
+            <a:xfrm flipH="false" flipV="false" rot="0">
+              <a:off x="0" y="0"/>
+              <a:ext cx="4466923" cy="812800"/>
+            </a:xfrm>
+            <a:custGeom>
+              <a:avLst/>
+              <a:gdLst/>
+              <a:ahLst/>
+              <a:cxnLst/>
+              <a:rect r="r" b="b" t="t" l="l"/>
+              <a:pathLst>
+                <a:path h="812800" w="4466923">
+                  <a:moveTo>
+                    <a:pt x="7760" y="0"/>
+                  </a:moveTo>
+                  <a:lnTo>
+                    <a:pt x="4459163" y="0"/>
+                  </a:lnTo>
+                  <a:cubicBezTo>
+                    <a:pt x="4461221" y="0"/>
+                    <a:pt x="4463195" y="818"/>
+                    <a:pt x="4464650" y="2273"/>
+                  </a:cubicBezTo>
+                  <a:cubicBezTo>
+                    <a:pt x="4466106" y="3728"/>
+                    <a:pt x="4466923" y="5702"/>
+                    <a:pt x="4466923" y="7760"/>
+                  </a:cubicBezTo>
+                  <a:lnTo>
+                    <a:pt x="4466923" y="805040"/>
+                  </a:lnTo>
+                  <a:cubicBezTo>
+                    <a:pt x="4466923" y="807098"/>
+                    <a:pt x="4466106" y="809072"/>
+                    <a:pt x="4464650" y="810527"/>
+                  </a:cubicBezTo>
+                  <a:cubicBezTo>
+                    <a:pt x="4463195" y="811982"/>
+                    <a:pt x="4461221" y="812800"/>
+                    <a:pt x="4459163" y="812800"/>
+                  </a:cubicBezTo>
+                  <a:lnTo>
+                    <a:pt x="7760" y="812800"/>
+                  </a:lnTo>
+                  <a:cubicBezTo>
+                    <a:pt x="5702" y="812800"/>
+                    <a:pt x="3728" y="811982"/>
+                    <a:pt x="2273" y="810527"/>
+                  </a:cubicBezTo>
+                  <a:cubicBezTo>
+                    <a:pt x="818" y="809072"/>
+                    <a:pt x="0" y="807098"/>
+                    <a:pt x="0" y="805040"/>
+                  </a:cubicBezTo>
+                  <a:lnTo>
+                    <a:pt x="0" y="7760"/>
+                  </a:lnTo>
+                  <a:cubicBezTo>
+                    <a:pt x="0" y="5702"/>
+                    <a:pt x="818" y="3728"/>
+                    <a:pt x="2273" y="2273"/>
+                  </a:cubicBezTo>
+                  <a:cubicBezTo>
+                    <a:pt x="3728" y="818"/>
+                    <a:pt x="5702" y="0"/>
+                    <a:pt x="7760" y="0"/>
+                  </a:cubicBezTo>
+                  <a:close/>
+                </a:path>
+              </a:pathLst>
+            </a:custGeom>
+            <a:solidFill>
+              <a:srgbClr val="233D89"/>
+            </a:solidFill>
+          </p:spPr>
+        </p:sp>
+        <p:sp>
+          <p:nvSpPr>
+            <p:cNvPr name="TextBox 5" id="5"/>
+            <p:cNvSpPr txBox="true"/>
+            <p:nvPr/>
+          </p:nvSpPr>
+          <p:spPr>
+            <a:xfrm>
+              <a:off x="0" y="-38100"/>
+              <a:ext cx="4466923" cy="850900"/>
+            </a:xfrm>
+            <a:prstGeom prst="rect">
+              <a:avLst/>
+            </a:prstGeom>
+          </p:spPr>
+          <p:txBody>
+            <a:bodyPr anchor="ctr" rtlCol="false" tIns="50800" lIns="50800" bIns="50800" rIns="50800"/>
+            <a:lstStyle/>
+            <a:p>
+              <a:pPr algn="ctr">
+                <a:lnSpc>
+                  <a:spcPts val="3449"/>
+                </a:lnSpc>
+              </a:pPr>
+            </a:p>
+          </p:txBody>
+        </p:sp>
+      </p:grpSp>
+      <p:grpSp>
+        <p:nvGrpSpPr>
+          <p:cNvPr name="Group 6" id="6"/>
+          <p:cNvGrpSpPr/>
+          <p:nvPr/>
+        </p:nvGrpSpPr>
+        <p:grpSpPr>
+          <a:xfrm rot="0">
+            <a:off x="7027534" y="2929328"/>
+            <a:ext cx="10776956" cy="3086100"/>
+            <a:chOff x="0" y="0"/>
+            <a:chExt cx="2838375" cy="812800"/>
+          </a:xfrm>
+        </p:grpSpPr>
+        <p:sp>
+          <p:nvSpPr>
+            <p:cNvPr name="Freeform 7" id="7"/>
+            <p:cNvSpPr/>
+            <p:nvPr/>
+          </p:nvSpPr>
+          <p:spPr>
+            <a:xfrm flipH="false" flipV="false" rot="0">
+              <a:off x="0" y="0"/>
+              <a:ext cx="2838375" cy="812800"/>
+            </a:xfrm>
+            <a:custGeom>
+              <a:avLst/>
+              <a:gdLst/>
+              <a:ahLst/>
+              <a:cxnLst/>
+              <a:rect r="r" b="b" t="t" l="l"/>
+              <a:pathLst>
+                <a:path h="812800" w="2838375">
+                  <a:moveTo>
+                    <a:pt x="12212" y="0"/>
+                  </a:moveTo>
+                  <a:lnTo>
+                    <a:pt x="2826163" y="0"/>
+                  </a:lnTo>
+                  <a:cubicBezTo>
+                    <a:pt x="2832908" y="0"/>
+                    <a:pt x="2838375" y="5468"/>
+                    <a:pt x="2838375" y="12212"/>
+                  </a:cubicBezTo>
+                  <a:lnTo>
+                    <a:pt x="2838375" y="800588"/>
+                  </a:lnTo>
+                  <a:cubicBezTo>
+                    <a:pt x="2838375" y="807332"/>
+                    <a:pt x="2832908" y="812800"/>
+                    <a:pt x="2826163" y="812800"/>
+                  </a:cubicBezTo>
+                  <a:lnTo>
+                    <a:pt x="12212" y="812800"/>
+                  </a:lnTo>
+                  <a:cubicBezTo>
+                    <a:pt x="5468" y="812800"/>
+                    <a:pt x="0" y="807332"/>
+                    <a:pt x="0" y="800588"/>
+                  </a:cubicBezTo>
+                  <a:lnTo>
+                    <a:pt x="0" y="12212"/>
+                  </a:lnTo>
+                  <a:cubicBezTo>
+                    <a:pt x="0" y="5468"/>
+                    <a:pt x="5468" y="0"/>
+                    <a:pt x="12212" y="0"/>
+                  </a:cubicBezTo>
+                  <a:close/>
+                </a:path>
+              </a:pathLst>
+            </a:custGeom>
+            <a:solidFill>
+              <a:srgbClr val="233D89"/>
+            </a:solidFill>
+          </p:spPr>
+        </p:sp>
+        <p:sp>
+          <p:nvSpPr>
+            <p:cNvPr name="TextBox 8" id="8"/>
+            <p:cNvSpPr txBox="true"/>
+            <p:nvPr/>
+          </p:nvSpPr>
+          <p:spPr>
+            <a:xfrm>
+              <a:off x="0" y="-38100"/>
+              <a:ext cx="2838375" cy="850900"/>
+            </a:xfrm>
+            <a:prstGeom prst="rect">
+              <a:avLst/>
+            </a:prstGeom>
+          </p:spPr>
+          <p:txBody>
+            <a:bodyPr anchor="ctr" rtlCol="false" tIns="50800" lIns="50800" bIns="50800" rIns="50800"/>
+            <a:lstStyle/>
+            <a:p>
+              <a:pPr algn="ctr">
+                <a:lnSpc>
+                  <a:spcPts val="3449"/>
+                </a:lnSpc>
+              </a:pPr>
+            </a:p>
+          </p:txBody>
+        </p:sp>
+      </p:grpSp>
     </p:spTree>
   </p:cSld>
   <p:clrMapOvr>
@@ -14330,8 +14574,8 @@
         </p:nvSpPr>
         <p:spPr>
           <a:xfrm flipH="false" flipV="false" rot="0">
-            <a:off x="1450288" y="461402"/>
-            <a:ext cx="9485850" cy="9017664"/>
+            <a:off x="266228" y="2227353"/>
+            <a:ext cx="17755545" cy="5149108"/>
           </a:xfrm>
           <a:custGeom>
             <a:avLst/>
@@ -14340,18 +14584,18 @@
             <a:cxnLst/>
             <a:rect r="r" b="b" t="t" l="l"/>
             <a:pathLst>
-              <a:path h="9017664" w="9485850">
+              <a:path h="5149108" w="17755545">
                 <a:moveTo>
                   <a:pt x="0" y="0"/>
                 </a:moveTo>
                 <a:lnTo>
-                  <a:pt x="9485850" y="0"/>
+                  <a:pt x="17755544" y="0"/>
                 </a:lnTo>
                 <a:lnTo>
-                  <a:pt x="9485850" y="9017664"/>
+                  <a:pt x="17755544" y="5149108"/>
                 </a:lnTo>
                 <a:lnTo>
-                  <a:pt x="0" y="9017664"/>
+                  <a:pt x="0" y="5149108"/>
                 </a:lnTo>
                 <a:lnTo>
                   <a:pt x="0" y="0"/>
@@ -14368,6 +14612,256 @@
           </a:blipFill>
         </p:spPr>
       </p:sp>
+      <p:grpSp>
+        <p:nvGrpSpPr>
+          <p:cNvPr name="Group 3" id="3"/>
+          <p:cNvGrpSpPr/>
+          <p:nvPr/>
+        </p:nvGrpSpPr>
+        <p:grpSpPr>
+          <a:xfrm rot="0">
+            <a:off x="621952" y="3823778"/>
+            <a:ext cx="16960349" cy="3086100"/>
+            <a:chOff x="0" y="0"/>
+            <a:chExt cx="4466923" cy="812800"/>
+          </a:xfrm>
+        </p:grpSpPr>
+        <p:sp>
+          <p:nvSpPr>
+            <p:cNvPr name="Freeform 4" id="4"/>
+            <p:cNvSpPr/>
+            <p:nvPr/>
+          </p:nvSpPr>
+          <p:spPr>
+            <a:xfrm flipH="false" flipV="false" rot="0">
+              <a:off x="0" y="0"/>
+              <a:ext cx="4466923" cy="812800"/>
+            </a:xfrm>
+            <a:custGeom>
+              <a:avLst/>
+              <a:gdLst/>
+              <a:ahLst/>
+              <a:cxnLst/>
+              <a:rect r="r" b="b" t="t" l="l"/>
+              <a:pathLst>
+                <a:path h="812800" w="4466923">
+                  <a:moveTo>
+                    <a:pt x="7760" y="0"/>
+                  </a:moveTo>
+                  <a:lnTo>
+                    <a:pt x="4459163" y="0"/>
+                  </a:lnTo>
+                  <a:cubicBezTo>
+                    <a:pt x="4461221" y="0"/>
+                    <a:pt x="4463195" y="818"/>
+                    <a:pt x="4464650" y="2273"/>
+                  </a:cubicBezTo>
+                  <a:cubicBezTo>
+                    <a:pt x="4466106" y="3728"/>
+                    <a:pt x="4466923" y="5702"/>
+                    <a:pt x="4466923" y="7760"/>
+                  </a:cubicBezTo>
+                  <a:lnTo>
+                    <a:pt x="4466923" y="805040"/>
+                  </a:lnTo>
+                  <a:cubicBezTo>
+                    <a:pt x="4466923" y="807098"/>
+                    <a:pt x="4466106" y="809072"/>
+                    <a:pt x="4464650" y="810527"/>
+                  </a:cubicBezTo>
+                  <a:cubicBezTo>
+                    <a:pt x="4463195" y="811982"/>
+                    <a:pt x="4461221" y="812800"/>
+                    <a:pt x="4459163" y="812800"/>
+                  </a:cubicBezTo>
+                  <a:lnTo>
+                    <a:pt x="7760" y="812800"/>
+                  </a:lnTo>
+                  <a:cubicBezTo>
+                    <a:pt x="5702" y="812800"/>
+                    <a:pt x="3728" y="811982"/>
+                    <a:pt x="2273" y="810527"/>
+                  </a:cubicBezTo>
+                  <a:cubicBezTo>
+                    <a:pt x="818" y="809072"/>
+                    <a:pt x="0" y="807098"/>
+                    <a:pt x="0" y="805040"/>
+                  </a:cubicBezTo>
+                  <a:lnTo>
+                    <a:pt x="0" y="7760"/>
+                  </a:lnTo>
+                  <a:cubicBezTo>
+                    <a:pt x="0" y="5702"/>
+                    <a:pt x="818" y="3728"/>
+                    <a:pt x="2273" y="2273"/>
+                  </a:cubicBezTo>
+                  <a:cubicBezTo>
+                    <a:pt x="3728" y="818"/>
+                    <a:pt x="5702" y="0"/>
+                    <a:pt x="7760" y="0"/>
+                  </a:cubicBezTo>
+                  <a:close/>
+                </a:path>
+              </a:pathLst>
+            </a:custGeom>
+            <a:solidFill>
+              <a:srgbClr val="233D89"/>
+            </a:solidFill>
+          </p:spPr>
+        </p:sp>
+        <p:sp>
+          <p:nvSpPr>
+            <p:cNvPr name="TextBox 5" id="5"/>
+            <p:cNvSpPr txBox="true"/>
+            <p:nvPr/>
+          </p:nvSpPr>
+          <p:spPr>
+            <a:xfrm>
+              <a:off x="0" y="-38100"/>
+              <a:ext cx="4466923" cy="850900"/>
+            </a:xfrm>
+            <a:prstGeom prst="rect">
+              <a:avLst/>
+            </a:prstGeom>
+          </p:spPr>
+          <p:txBody>
+            <a:bodyPr anchor="ctr" rtlCol="false" tIns="50800" lIns="50800" bIns="50800" rIns="50800"/>
+            <a:lstStyle/>
+            <a:p>
+              <a:pPr algn="ctr">
+                <a:lnSpc>
+                  <a:spcPts val="3449"/>
+                </a:lnSpc>
+              </a:pPr>
+            </a:p>
+          </p:txBody>
+        </p:sp>
+      </p:grpSp>
+      <p:grpSp>
+        <p:nvGrpSpPr>
+          <p:cNvPr name="Group 6" id="6"/>
+          <p:cNvGrpSpPr/>
+          <p:nvPr/>
+        </p:nvGrpSpPr>
+        <p:grpSpPr>
+          <a:xfrm rot="0">
+            <a:off x="11563883" y="2957244"/>
+            <a:ext cx="6324355" cy="3086100"/>
+            <a:chOff x="0" y="0"/>
+            <a:chExt cx="1665674" cy="812800"/>
+          </a:xfrm>
+        </p:grpSpPr>
+        <p:sp>
+          <p:nvSpPr>
+            <p:cNvPr name="Freeform 7" id="7"/>
+            <p:cNvSpPr/>
+            <p:nvPr/>
+          </p:nvSpPr>
+          <p:spPr>
+            <a:xfrm flipH="false" flipV="false" rot="0">
+              <a:off x="0" y="0"/>
+              <a:ext cx="1665674" cy="812800"/>
+            </a:xfrm>
+            <a:custGeom>
+              <a:avLst/>
+              <a:gdLst/>
+              <a:ahLst/>
+              <a:cxnLst/>
+              <a:rect r="r" b="b" t="t" l="l"/>
+              <a:pathLst>
+                <a:path h="812800" w="1665674">
+                  <a:moveTo>
+                    <a:pt x="20810" y="0"/>
+                  </a:moveTo>
+                  <a:lnTo>
+                    <a:pt x="1644863" y="0"/>
+                  </a:lnTo>
+                  <a:cubicBezTo>
+                    <a:pt x="1650383" y="0"/>
+                    <a:pt x="1655676" y="2193"/>
+                    <a:pt x="1659579" y="6095"/>
+                  </a:cubicBezTo>
+                  <a:cubicBezTo>
+                    <a:pt x="1663481" y="9998"/>
+                    <a:pt x="1665674" y="15291"/>
+                    <a:pt x="1665674" y="20810"/>
+                  </a:cubicBezTo>
+                  <a:lnTo>
+                    <a:pt x="1665674" y="791990"/>
+                  </a:lnTo>
+                  <a:cubicBezTo>
+                    <a:pt x="1665674" y="797509"/>
+                    <a:pt x="1663481" y="802802"/>
+                    <a:pt x="1659579" y="806705"/>
+                  </a:cubicBezTo>
+                  <a:cubicBezTo>
+                    <a:pt x="1655676" y="810607"/>
+                    <a:pt x="1650383" y="812800"/>
+                    <a:pt x="1644863" y="812800"/>
+                  </a:cubicBezTo>
+                  <a:lnTo>
+                    <a:pt x="20810" y="812800"/>
+                  </a:lnTo>
+                  <a:cubicBezTo>
+                    <a:pt x="15291" y="812800"/>
+                    <a:pt x="9998" y="810607"/>
+                    <a:pt x="6095" y="806705"/>
+                  </a:cubicBezTo>
+                  <a:cubicBezTo>
+                    <a:pt x="2193" y="802802"/>
+                    <a:pt x="0" y="797509"/>
+                    <a:pt x="0" y="791990"/>
+                  </a:cubicBezTo>
+                  <a:lnTo>
+                    <a:pt x="0" y="20810"/>
+                  </a:lnTo>
+                  <a:cubicBezTo>
+                    <a:pt x="0" y="15291"/>
+                    <a:pt x="2193" y="9998"/>
+                    <a:pt x="6095" y="6095"/>
+                  </a:cubicBezTo>
+                  <a:cubicBezTo>
+                    <a:pt x="9998" y="2193"/>
+                    <a:pt x="15291" y="0"/>
+                    <a:pt x="20810" y="0"/>
+                  </a:cubicBezTo>
+                  <a:close/>
+                </a:path>
+              </a:pathLst>
+            </a:custGeom>
+            <a:solidFill>
+              <a:srgbClr val="233D89"/>
+            </a:solidFill>
+          </p:spPr>
+        </p:sp>
+        <p:sp>
+          <p:nvSpPr>
+            <p:cNvPr name="TextBox 8" id="8"/>
+            <p:cNvSpPr txBox="true"/>
+            <p:nvPr/>
+          </p:nvSpPr>
+          <p:spPr>
+            <a:xfrm>
+              <a:off x="0" y="-38100"/>
+              <a:ext cx="1665674" cy="850900"/>
+            </a:xfrm>
+            <a:prstGeom prst="rect">
+              <a:avLst/>
+            </a:prstGeom>
+          </p:spPr>
+          <p:txBody>
+            <a:bodyPr anchor="ctr" rtlCol="false" tIns="50800" lIns="50800" bIns="50800" rIns="50800"/>
+            <a:lstStyle/>
+            <a:p>
+              <a:pPr algn="ctr">
+                <a:lnSpc>
+                  <a:spcPts val="3449"/>
+                </a:lnSpc>
+              </a:pPr>
+            </a:p>
+          </p:txBody>
+        </p:sp>
+      </p:grpSp>
     </p:spTree>
   </p:cSld>
   <p:clrMapOvr>
@@ -14382,7 +14876,7 @@
     <p:bg>
       <p:bgPr>
         <a:solidFill>
-          <a:srgbClr val="283D87"/>
+          <a:srgbClr val="233D89"/>
         </a:solidFill>
       </p:bgPr>
     </p:bg>
@@ -14408,8 +14902,8 @@
         </p:nvSpPr>
         <p:spPr>
           <a:xfrm flipH="false" flipV="false" rot="0">
-            <a:off x="150912" y="2890385"/>
-            <a:ext cx="17986175" cy="4202955"/>
+            <a:off x="266228" y="2227353"/>
+            <a:ext cx="17755545" cy="5149108"/>
           </a:xfrm>
           <a:custGeom>
             <a:avLst/>
@@ -14418,18 +14912,18 @@
             <a:cxnLst/>
             <a:rect r="r" b="b" t="t" l="l"/>
             <a:pathLst>
-              <a:path h="4202955" w="17986175">
+              <a:path h="5149108" w="17755545">
                 <a:moveTo>
                   <a:pt x="0" y="0"/>
                 </a:moveTo>
                 <a:lnTo>
-                  <a:pt x="17986176" y="0"/>
+                  <a:pt x="17755544" y="0"/>
                 </a:lnTo>
                 <a:lnTo>
-                  <a:pt x="17986176" y="4202956"/>
+                  <a:pt x="17755544" y="5149108"/>
                 </a:lnTo>
                 <a:lnTo>
-                  <a:pt x="0" y="4202956"/>
+                  <a:pt x="0" y="5149108"/>
                 </a:lnTo>
                 <a:lnTo>
                   <a:pt x="0" y="0"/>
@@ -14446,6 +14940,256 @@
           </a:blipFill>
         </p:spPr>
       </p:sp>
+      <p:grpSp>
+        <p:nvGrpSpPr>
+          <p:cNvPr name="Group 3" id="3"/>
+          <p:cNvGrpSpPr/>
+          <p:nvPr/>
+        </p:nvGrpSpPr>
+        <p:grpSpPr>
+          <a:xfrm rot="0">
+            <a:off x="663826" y="4577510"/>
+            <a:ext cx="16960349" cy="3086100"/>
+            <a:chOff x="0" y="0"/>
+            <a:chExt cx="4466923" cy="812800"/>
+          </a:xfrm>
+        </p:grpSpPr>
+        <p:sp>
+          <p:nvSpPr>
+            <p:cNvPr name="Freeform 4" id="4"/>
+            <p:cNvSpPr/>
+            <p:nvPr/>
+          </p:nvSpPr>
+          <p:spPr>
+            <a:xfrm flipH="false" flipV="false" rot="0">
+              <a:off x="0" y="0"/>
+              <a:ext cx="4466923" cy="812800"/>
+            </a:xfrm>
+            <a:custGeom>
+              <a:avLst/>
+              <a:gdLst/>
+              <a:ahLst/>
+              <a:cxnLst/>
+              <a:rect r="r" b="b" t="t" l="l"/>
+              <a:pathLst>
+                <a:path h="812800" w="4466923">
+                  <a:moveTo>
+                    <a:pt x="7760" y="0"/>
+                  </a:moveTo>
+                  <a:lnTo>
+                    <a:pt x="4459163" y="0"/>
+                  </a:lnTo>
+                  <a:cubicBezTo>
+                    <a:pt x="4461221" y="0"/>
+                    <a:pt x="4463195" y="818"/>
+                    <a:pt x="4464650" y="2273"/>
+                  </a:cubicBezTo>
+                  <a:cubicBezTo>
+                    <a:pt x="4466106" y="3728"/>
+                    <a:pt x="4466923" y="5702"/>
+                    <a:pt x="4466923" y="7760"/>
+                  </a:cubicBezTo>
+                  <a:lnTo>
+                    <a:pt x="4466923" y="805040"/>
+                  </a:lnTo>
+                  <a:cubicBezTo>
+                    <a:pt x="4466923" y="807098"/>
+                    <a:pt x="4466106" y="809072"/>
+                    <a:pt x="4464650" y="810527"/>
+                  </a:cubicBezTo>
+                  <a:cubicBezTo>
+                    <a:pt x="4463195" y="811982"/>
+                    <a:pt x="4461221" y="812800"/>
+                    <a:pt x="4459163" y="812800"/>
+                  </a:cubicBezTo>
+                  <a:lnTo>
+                    <a:pt x="7760" y="812800"/>
+                  </a:lnTo>
+                  <a:cubicBezTo>
+                    <a:pt x="5702" y="812800"/>
+                    <a:pt x="3728" y="811982"/>
+                    <a:pt x="2273" y="810527"/>
+                  </a:cubicBezTo>
+                  <a:cubicBezTo>
+                    <a:pt x="818" y="809072"/>
+                    <a:pt x="0" y="807098"/>
+                    <a:pt x="0" y="805040"/>
+                  </a:cubicBezTo>
+                  <a:lnTo>
+                    <a:pt x="0" y="7760"/>
+                  </a:lnTo>
+                  <a:cubicBezTo>
+                    <a:pt x="0" y="5702"/>
+                    <a:pt x="818" y="3728"/>
+                    <a:pt x="2273" y="2273"/>
+                  </a:cubicBezTo>
+                  <a:cubicBezTo>
+                    <a:pt x="3728" y="818"/>
+                    <a:pt x="5702" y="0"/>
+                    <a:pt x="7760" y="0"/>
+                  </a:cubicBezTo>
+                  <a:close/>
+                </a:path>
+              </a:pathLst>
+            </a:custGeom>
+            <a:solidFill>
+              <a:srgbClr val="233D89"/>
+            </a:solidFill>
+          </p:spPr>
+        </p:sp>
+        <p:sp>
+          <p:nvSpPr>
+            <p:cNvPr name="TextBox 5" id="5"/>
+            <p:cNvSpPr txBox="true"/>
+            <p:nvPr/>
+          </p:nvSpPr>
+          <p:spPr>
+            <a:xfrm>
+              <a:off x="0" y="-38100"/>
+              <a:ext cx="4466923" cy="850900"/>
+            </a:xfrm>
+            <a:prstGeom prst="rect">
+              <a:avLst/>
+            </a:prstGeom>
+          </p:spPr>
+          <p:txBody>
+            <a:bodyPr anchor="ctr" rtlCol="false" tIns="50800" lIns="50800" bIns="50800" rIns="50800"/>
+            <a:lstStyle/>
+            <a:p>
+              <a:pPr algn="ctr">
+                <a:lnSpc>
+                  <a:spcPts val="3449"/>
+                </a:lnSpc>
+              </a:pPr>
+            </a:p>
+          </p:txBody>
+        </p:sp>
+      </p:grpSp>
+      <p:grpSp>
+        <p:nvGrpSpPr>
+          <p:cNvPr name="Group 6" id="6"/>
+          <p:cNvGrpSpPr/>
+          <p:nvPr/>
+        </p:nvGrpSpPr>
+        <p:grpSpPr>
+          <a:xfrm rot="0">
+            <a:off x="1327651" y="3921484"/>
+            <a:ext cx="16960349" cy="3086100"/>
+            <a:chOff x="0" y="0"/>
+            <a:chExt cx="4466923" cy="812800"/>
+          </a:xfrm>
+        </p:grpSpPr>
+        <p:sp>
+          <p:nvSpPr>
+            <p:cNvPr name="Freeform 7" id="7"/>
+            <p:cNvSpPr/>
+            <p:nvPr/>
+          </p:nvSpPr>
+          <p:spPr>
+            <a:xfrm flipH="false" flipV="false" rot="0">
+              <a:off x="0" y="0"/>
+              <a:ext cx="4466923" cy="812800"/>
+            </a:xfrm>
+            <a:custGeom>
+              <a:avLst/>
+              <a:gdLst/>
+              <a:ahLst/>
+              <a:cxnLst/>
+              <a:rect r="r" b="b" t="t" l="l"/>
+              <a:pathLst>
+                <a:path h="812800" w="4466923">
+                  <a:moveTo>
+                    <a:pt x="7760" y="0"/>
+                  </a:moveTo>
+                  <a:lnTo>
+                    <a:pt x="4459163" y="0"/>
+                  </a:lnTo>
+                  <a:cubicBezTo>
+                    <a:pt x="4461221" y="0"/>
+                    <a:pt x="4463195" y="818"/>
+                    <a:pt x="4464650" y="2273"/>
+                  </a:cubicBezTo>
+                  <a:cubicBezTo>
+                    <a:pt x="4466106" y="3728"/>
+                    <a:pt x="4466923" y="5702"/>
+                    <a:pt x="4466923" y="7760"/>
+                  </a:cubicBezTo>
+                  <a:lnTo>
+                    <a:pt x="4466923" y="805040"/>
+                  </a:lnTo>
+                  <a:cubicBezTo>
+                    <a:pt x="4466923" y="807098"/>
+                    <a:pt x="4466106" y="809072"/>
+                    <a:pt x="4464650" y="810527"/>
+                  </a:cubicBezTo>
+                  <a:cubicBezTo>
+                    <a:pt x="4463195" y="811982"/>
+                    <a:pt x="4461221" y="812800"/>
+                    <a:pt x="4459163" y="812800"/>
+                  </a:cubicBezTo>
+                  <a:lnTo>
+                    <a:pt x="7760" y="812800"/>
+                  </a:lnTo>
+                  <a:cubicBezTo>
+                    <a:pt x="5702" y="812800"/>
+                    <a:pt x="3728" y="811982"/>
+                    <a:pt x="2273" y="810527"/>
+                  </a:cubicBezTo>
+                  <a:cubicBezTo>
+                    <a:pt x="818" y="809072"/>
+                    <a:pt x="0" y="807098"/>
+                    <a:pt x="0" y="805040"/>
+                  </a:cubicBezTo>
+                  <a:lnTo>
+                    <a:pt x="0" y="7760"/>
+                  </a:lnTo>
+                  <a:cubicBezTo>
+                    <a:pt x="0" y="5702"/>
+                    <a:pt x="818" y="3728"/>
+                    <a:pt x="2273" y="2273"/>
+                  </a:cubicBezTo>
+                  <a:cubicBezTo>
+                    <a:pt x="3728" y="818"/>
+                    <a:pt x="5702" y="0"/>
+                    <a:pt x="7760" y="0"/>
+                  </a:cubicBezTo>
+                  <a:close/>
+                </a:path>
+              </a:pathLst>
+            </a:custGeom>
+            <a:solidFill>
+              <a:srgbClr val="233D89"/>
+            </a:solidFill>
+          </p:spPr>
+        </p:sp>
+        <p:sp>
+          <p:nvSpPr>
+            <p:cNvPr name="TextBox 8" id="8"/>
+            <p:cNvSpPr txBox="true"/>
+            <p:nvPr/>
+          </p:nvSpPr>
+          <p:spPr>
+            <a:xfrm>
+              <a:off x="0" y="-38100"/>
+              <a:ext cx="4466923" cy="850900"/>
+            </a:xfrm>
+            <a:prstGeom prst="rect">
+              <a:avLst/>
+            </a:prstGeom>
+          </p:spPr>
+          <p:txBody>
+            <a:bodyPr anchor="ctr" rtlCol="false" tIns="50800" lIns="50800" bIns="50800" rIns="50800"/>
+            <a:lstStyle/>
+            <a:p>
+              <a:pPr algn="ctr">
+                <a:lnSpc>
+                  <a:spcPts val="3449"/>
+                </a:lnSpc>
+              </a:pPr>
+            </a:p>
+          </p:txBody>
+        </p:sp>
+      </p:grpSp>
     </p:spTree>
   </p:cSld>
   <p:clrMapOvr>
@@ -14460,7 +15204,7 @@
     <p:bg>
       <p:bgPr>
         <a:solidFill>
-          <a:srgbClr val="283D87"/>
+          <a:srgbClr val="233D89"/>
         </a:solidFill>
       </p:bgPr>
     </p:bg>
@@ -14486,8 +15230,8 @@
         </p:nvSpPr>
         <p:spPr>
           <a:xfrm flipH="false" flipV="false" rot="0">
-            <a:off x="241034" y="1970578"/>
-            <a:ext cx="17805932" cy="4874374"/>
+            <a:off x="266228" y="2227353"/>
+            <a:ext cx="17755545" cy="5149108"/>
           </a:xfrm>
           <a:custGeom>
             <a:avLst/>
@@ -14496,18 +15240,18 @@
             <a:cxnLst/>
             <a:rect r="r" b="b" t="t" l="l"/>
             <a:pathLst>
-              <a:path h="4874374" w="17805932">
+              <a:path h="5149108" w="17755545">
                 <a:moveTo>
                   <a:pt x="0" y="0"/>
                 </a:moveTo>
                 <a:lnTo>
-                  <a:pt x="17805932" y="0"/>
+                  <a:pt x="17755544" y="0"/>
                 </a:lnTo>
                 <a:lnTo>
-                  <a:pt x="17805932" y="4874374"/>
+                  <a:pt x="17755544" y="5149108"/>
                 </a:lnTo>
                 <a:lnTo>
-                  <a:pt x="0" y="4874374"/>
+                  <a:pt x="0" y="5149108"/>
                 </a:lnTo>
                 <a:lnTo>
                   <a:pt x="0" y="0"/>
@@ -14524,6 +15268,256 @@
           </a:blipFill>
         </p:spPr>
       </p:sp>
+      <p:grpSp>
+        <p:nvGrpSpPr>
+          <p:cNvPr name="Group 3" id="3"/>
+          <p:cNvGrpSpPr/>
+          <p:nvPr/>
+        </p:nvGrpSpPr>
+        <p:grpSpPr>
+          <a:xfrm rot="0">
+            <a:off x="663826" y="4577510"/>
+            <a:ext cx="16960349" cy="3086100"/>
+            <a:chOff x="0" y="0"/>
+            <a:chExt cx="4466923" cy="812800"/>
+          </a:xfrm>
+        </p:grpSpPr>
+        <p:sp>
+          <p:nvSpPr>
+            <p:cNvPr name="Freeform 4" id="4"/>
+            <p:cNvSpPr/>
+            <p:nvPr/>
+          </p:nvSpPr>
+          <p:spPr>
+            <a:xfrm flipH="false" flipV="false" rot="0">
+              <a:off x="0" y="0"/>
+              <a:ext cx="4466923" cy="812800"/>
+            </a:xfrm>
+            <a:custGeom>
+              <a:avLst/>
+              <a:gdLst/>
+              <a:ahLst/>
+              <a:cxnLst/>
+              <a:rect r="r" b="b" t="t" l="l"/>
+              <a:pathLst>
+                <a:path h="812800" w="4466923">
+                  <a:moveTo>
+                    <a:pt x="7760" y="0"/>
+                  </a:moveTo>
+                  <a:lnTo>
+                    <a:pt x="4459163" y="0"/>
+                  </a:lnTo>
+                  <a:cubicBezTo>
+                    <a:pt x="4461221" y="0"/>
+                    <a:pt x="4463195" y="818"/>
+                    <a:pt x="4464650" y="2273"/>
+                  </a:cubicBezTo>
+                  <a:cubicBezTo>
+                    <a:pt x="4466106" y="3728"/>
+                    <a:pt x="4466923" y="5702"/>
+                    <a:pt x="4466923" y="7760"/>
+                  </a:cubicBezTo>
+                  <a:lnTo>
+                    <a:pt x="4466923" y="805040"/>
+                  </a:lnTo>
+                  <a:cubicBezTo>
+                    <a:pt x="4466923" y="807098"/>
+                    <a:pt x="4466106" y="809072"/>
+                    <a:pt x="4464650" y="810527"/>
+                  </a:cubicBezTo>
+                  <a:cubicBezTo>
+                    <a:pt x="4463195" y="811982"/>
+                    <a:pt x="4461221" y="812800"/>
+                    <a:pt x="4459163" y="812800"/>
+                  </a:cubicBezTo>
+                  <a:lnTo>
+                    <a:pt x="7760" y="812800"/>
+                  </a:lnTo>
+                  <a:cubicBezTo>
+                    <a:pt x="5702" y="812800"/>
+                    <a:pt x="3728" y="811982"/>
+                    <a:pt x="2273" y="810527"/>
+                  </a:cubicBezTo>
+                  <a:cubicBezTo>
+                    <a:pt x="818" y="809072"/>
+                    <a:pt x="0" y="807098"/>
+                    <a:pt x="0" y="805040"/>
+                  </a:cubicBezTo>
+                  <a:lnTo>
+                    <a:pt x="0" y="7760"/>
+                  </a:lnTo>
+                  <a:cubicBezTo>
+                    <a:pt x="0" y="5702"/>
+                    <a:pt x="818" y="3728"/>
+                    <a:pt x="2273" y="2273"/>
+                  </a:cubicBezTo>
+                  <a:cubicBezTo>
+                    <a:pt x="3728" y="818"/>
+                    <a:pt x="5702" y="0"/>
+                    <a:pt x="7760" y="0"/>
+                  </a:cubicBezTo>
+                  <a:close/>
+                </a:path>
+              </a:pathLst>
+            </a:custGeom>
+            <a:solidFill>
+              <a:srgbClr val="233D89"/>
+            </a:solidFill>
+          </p:spPr>
+        </p:sp>
+        <p:sp>
+          <p:nvSpPr>
+            <p:cNvPr name="TextBox 5" id="5"/>
+            <p:cNvSpPr txBox="true"/>
+            <p:nvPr/>
+          </p:nvSpPr>
+          <p:spPr>
+            <a:xfrm>
+              <a:off x="0" y="-38100"/>
+              <a:ext cx="4466923" cy="850900"/>
+            </a:xfrm>
+            <a:prstGeom prst="rect">
+              <a:avLst/>
+            </a:prstGeom>
+          </p:spPr>
+          <p:txBody>
+            <a:bodyPr anchor="ctr" rtlCol="false" tIns="50800" lIns="50800" bIns="50800" rIns="50800"/>
+            <a:lstStyle/>
+            <a:p>
+              <a:pPr algn="ctr">
+                <a:lnSpc>
+                  <a:spcPts val="3449"/>
+                </a:lnSpc>
+              </a:pPr>
+            </a:p>
+          </p:txBody>
+        </p:sp>
+      </p:grpSp>
+      <p:grpSp>
+        <p:nvGrpSpPr>
+          <p:cNvPr name="Group 6" id="6"/>
+          <p:cNvGrpSpPr/>
+          <p:nvPr/>
+        </p:nvGrpSpPr>
+        <p:grpSpPr>
+          <a:xfrm rot="0">
+            <a:off x="5646830" y="3865652"/>
+            <a:ext cx="16960349" cy="3086100"/>
+            <a:chOff x="0" y="0"/>
+            <a:chExt cx="4466923" cy="812800"/>
+          </a:xfrm>
+        </p:grpSpPr>
+        <p:sp>
+          <p:nvSpPr>
+            <p:cNvPr name="Freeform 7" id="7"/>
+            <p:cNvSpPr/>
+            <p:nvPr/>
+          </p:nvSpPr>
+          <p:spPr>
+            <a:xfrm flipH="false" flipV="false" rot="0">
+              <a:off x="0" y="0"/>
+              <a:ext cx="4466923" cy="812800"/>
+            </a:xfrm>
+            <a:custGeom>
+              <a:avLst/>
+              <a:gdLst/>
+              <a:ahLst/>
+              <a:cxnLst/>
+              <a:rect r="r" b="b" t="t" l="l"/>
+              <a:pathLst>
+                <a:path h="812800" w="4466923">
+                  <a:moveTo>
+                    <a:pt x="7760" y="0"/>
+                  </a:moveTo>
+                  <a:lnTo>
+                    <a:pt x="4459163" y="0"/>
+                  </a:lnTo>
+                  <a:cubicBezTo>
+                    <a:pt x="4461221" y="0"/>
+                    <a:pt x="4463195" y="818"/>
+                    <a:pt x="4464650" y="2273"/>
+                  </a:cubicBezTo>
+                  <a:cubicBezTo>
+                    <a:pt x="4466106" y="3728"/>
+                    <a:pt x="4466923" y="5702"/>
+                    <a:pt x="4466923" y="7760"/>
+                  </a:cubicBezTo>
+                  <a:lnTo>
+                    <a:pt x="4466923" y="805040"/>
+                  </a:lnTo>
+                  <a:cubicBezTo>
+                    <a:pt x="4466923" y="807098"/>
+                    <a:pt x="4466106" y="809072"/>
+                    <a:pt x="4464650" y="810527"/>
+                  </a:cubicBezTo>
+                  <a:cubicBezTo>
+                    <a:pt x="4463195" y="811982"/>
+                    <a:pt x="4461221" y="812800"/>
+                    <a:pt x="4459163" y="812800"/>
+                  </a:cubicBezTo>
+                  <a:lnTo>
+                    <a:pt x="7760" y="812800"/>
+                  </a:lnTo>
+                  <a:cubicBezTo>
+                    <a:pt x="5702" y="812800"/>
+                    <a:pt x="3728" y="811982"/>
+                    <a:pt x="2273" y="810527"/>
+                  </a:cubicBezTo>
+                  <a:cubicBezTo>
+                    <a:pt x="818" y="809072"/>
+                    <a:pt x="0" y="807098"/>
+                    <a:pt x="0" y="805040"/>
+                  </a:cubicBezTo>
+                  <a:lnTo>
+                    <a:pt x="0" y="7760"/>
+                  </a:lnTo>
+                  <a:cubicBezTo>
+                    <a:pt x="0" y="5702"/>
+                    <a:pt x="818" y="3728"/>
+                    <a:pt x="2273" y="2273"/>
+                  </a:cubicBezTo>
+                  <a:cubicBezTo>
+                    <a:pt x="3728" y="818"/>
+                    <a:pt x="5702" y="0"/>
+                    <a:pt x="7760" y="0"/>
+                  </a:cubicBezTo>
+                  <a:close/>
+                </a:path>
+              </a:pathLst>
+            </a:custGeom>
+            <a:solidFill>
+              <a:srgbClr val="233D89"/>
+            </a:solidFill>
+          </p:spPr>
+        </p:sp>
+        <p:sp>
+          <p:nvSpPr>
+            <p:cNvPr name="TextBox 8" id="8"/>
+            <p:cNvSpPr txBox="true"/>
+            <p:nvPr/>
+          </p:nvSpPr>
+          <p:spPr>
+            <a:xfrm>
+              <a:off x="0" y="-38100"/>
+              <a:ext cx="4466923" cy="850900"/>
+            </a:xfrm>
+            <a:prstGeom prst="rect">
+              <a:avLst/>
+            </a:prstGeom>
+          </p:spPr>
+          <p:txBody>
+            <a:bodyPr anchor="ctr" rtlCol="false" tIns="50800" lIns="50800" bIns="50800" rIns="50800"/>
+            <a:lstStyle/>
+            <a:p>
+              <a:pPr algn="ctr">
+                <a:lnSpc>
+                  <a:spcPts val="3449"/>
+                </a:lnSpc>
+              </a:pPr>
+            </a:p>
+          </p:txBody>
+        </p:sp>
+      </p:grpSp>
     </p:spTree>
   </p:cSld>
   <p:clrMapOvr>
@@ -14564,8 +15558,8 @@
         </p:nvSpPr>
         <p:spPr>
           <a:xfrm flipH="false" flipV="false" rot="0">
-            <a:off x="4528962" y="624966"/>
-            <a:ext cx="9832027" cy="9382626"/>
+            <a:off x="266228" y="2227353"/>
+            <a:ext cx="17755545" cy="5149108"/>
           </a:xfrm>
           <a:custGeom>
             <a:avLst/>
@@ -14574,18 +15568,18 @@
             <a:cxnLst/>
             <a:rect r="r" b="b" t="t" l="l"/>
             <a:pathLst>
-              <a:path h="9382626" w="9832027">
+              <a:path h="5149108" w="17755545">
                 <a:moveTo>
                   <a:pt x="0" y="0"/>
                 </a:moveTo>
                 <a:lnTo>
-                  <a:pt x="9832028" y="0"/>
+                  <a:pt x="17755544" y="0"/>
                 </a:lnTo>
                 <a:lnTo>
-                  <a:pt x="9832028" y="9382626"/>
+                  <a:pt x="17755544" y="5149108"/>
                 </a:lnTo>
                 <a:lnTo>
-                  <a:pt x="0" y="9382626"/>
+                  <a:pt x="0" y="5149108"/>
                 </a:lnTo>
                 <a:lnTo>
                   <a:pt x="0" y="0"/>
@@ -14602,6 +15596,236 @@
           </a:blipFill>
         </p:spPr>
       </p:sp>
+      <p:grpSp>
+        <p:nvGrpSpPr>
+          <p:cNvPr name="Group 3" id="3"/>
+          <p:cNvGrpSpPr/>
+          <p:nvPr/>
+        </p:nvGrpSpPr>
+        <p:grpSpPr>
+          <a:xfrm rot="0">
+            <a:off x="761532" y="4717090"/>
+            <a:ext cx="16960349" cy="3086100"/>
+            <a:chOff x="0" y="0"/>
+            <a:chExt cx="4466923" cy="812800"/>
+          </a:xfrm>
+        </p:grpSpPr>
+        <p:sp>
+          <p:nvSpPr>
+            <p:cNvPr name="Freeform 4" id="4"/>
+            <p:cNvSpPr/>
+            <p:nvPr/>
+          </p:nvSpPr>
+          <p:spPr>
+            <a:xfrm flipH="false" flipV="false" rot="0">
+              <a:off x="0" y="0"/>
+              <a:ext cx="4466923" cy="812800"/>
+            </a:xfrm>
+            <a:custGeom>
+              <a:avLst/>
+              <a:gdLst/>
+              <a:ahLst/>
+              <a:cxnLst/>
+              <a:rect r="r" b="b" t="t" l="l"/>
+              <a:pathLst>
+                <a:path h="812800" w="4466923">
+                  <a:moveTo>
+                    <a:pt x="7760" y="0"/>
+                  </a:moveTo>
+                  <a:lnTo>
+                    <a:pt x="4459163" y="0"/>
+                  </a:lnTo>
+                  <a:cubicBezTo>
+                    <a:pt x="4461221" y="0"/>
+                    <a:pt x="4463195" y="818"/>
+                    <a:pt x="4464650" y="2273"/>
+                  </a:cubicBezTo>
+                  <a:cubicBezTo>
+                    <a:pt x="4466106" y="3728"/>
+                    <a:pt x="4466923" y="5702"/>
+                    <a:pt x="4466923" y="7760"/>
+                  </a:cubicBezTo>
+                  <a:lnTo>
+                    <a:pt x="4466923" y="805040"/>
+                  </a:lnTo>
+                  <a:cubicBezTo>
+                    <a:pt x="4466923" y="807098"/>
+                    <a:pt x="4466106" y="809072"/>
+                    <a:pt x="4464650" y="810527"/>
+                  </a:cubicBezTo>
+                  <a:cubicBezTo>
+                    <a:pt x="4463195" y="811982"/>
+                    <a:pt x="4461221" y="812800"/>
+                    <a:pt x="4459163" y="812800"/>
+                  </a:cubicBezTo>
+                  <a:lnTo>
+                    <a:pt x="7760" y="812800"/>
+                  </a:lnTo>
+                  <a:cubicBezTo>
+                    <a:pt x="5702" y="812800"/>
+                    <a:pt x="3728" y="811982"/>
+                    <a:pt x="2273" y="810527"/>
+                  </a:cubicBezTo>
+                  <a:cubicBezTo>
+                    <a:pt x="818" y="809072"/>
+                    <a:pt x="0" y="807098"/>
+                    <a:pt x="0" y="805040"/>
+                  </a:cubicBezTo>
+                  <a:lnTo>
+                    <a:pt x="0" y="7760"/>
+                  </a:lnTo>
+                  <a:cubicBezTo>
+                    <a:pt x="0" y="5702"/>
+                    <a:pt x="818" y="3728"/>
+                    <a:pt x="2273" y="2273"/>
+                  </a:cubicBezTo>
+                  <a:cubicBezTo>
+                    <a:pt x="3728" y="818"/>
+                    <a:pt x="5702" y="0"/>
+                    <a:pt x="7760" y="0"/>
+                  </a:cubicBezTo>
+                  <a:close/>
+                </a:path>
+              </a:pathLst>
+            </a:custGeom>
+            <a:solidFill>
+              <a:srgbClr val="233D89"/>
+            </a:solidFill>
+          </p:spPr>
+        </p:sp>
+        <p:sp>
+          <p:nvSpPr>
+            <p:cNvPr name="TextBox 5" id="5"/>
+            <p:cNvSpPr txBox="true"/>
+            <p:nvPr/>
+          </p:nvSpPr>
+          <p:spPr>
+            <a:xfrm>
+              <a:off x="0" y="-38100"/>
+              <a:ext cx="4466923" cy="850900"/>
+            </a:xfrm>
+            <a:prstGeom prst="rect">
+              <a:avLst/>
+            </a:prstGeom>
+          </p:spPr>
+          <p:txBody>
+            <a:bodyPr anchor="ctr" rtlCol="false" tIns="50800" lIns="50800" bIns="50800" rIns="50800"/>
+            <a:lstStyle/>
+            <a:p>
+              <a:pPr algn="ctr">
+                <a:lnSpc>
+                  <a:spcPts val="3449"/>
+                </a:lnSpc>
+              </a:pPr>
+            </a:p>
+          </p:txBody>
+        </p:sp>
+      </p:grpSp>
+      <p:grpSp>
+        <p:nvGrpSpPr>
+          <p:cNvPr name="Group 6" id="6"/>
+          <p:cNvGrpSpPr/>
+          <p:nvPr/>
+        </p:nvGrpSpPr>
+        <p:grpSpPr>
+          <a:xfrm rot="0">
+            <a:off x="11662727" y="3823778"/>
+            <a:ext cx="5919573" cy="3086100"/>
+            <a:chOff x="0" y="0"/>
+            <a:chExt cx="1559065" cy="812800"/>
+          </a:xfrm>
+        </p:grpSpPr>
+        <p:sp>
+          <p:nvSpPr>
+            <p:cNvPr name="Freeform 7" id="7"/>
+            <p:cNvSpPr/>
+            <p:nvPr/>
+          </p:nvSpPr>
+          <p:spPr>
+            <a:xfrm flipH="false" flipV="false" rot="0">
+              <a:off x="0" y="0"/>
+              <a:ext cx="1559065" cy="812800"/>
+            </a:xfrm>
+            <a:custGeom>
+              <a:avLst/>
+              <a:gdLst/>
+              <a:ahLst/>
+              <a:cxnLst/>
+              <a:rect r="r" b="b" t="t" l="l"/>
+              <a:pathLst>
+                <a:path h="812800" w="1559065">
+                  <a:moveTo>
+                    <a:pt x="22233" y="0"/>
+                  </a:moveTo>
+                  <a:lnTo>
+                    <a:pt x="1536831" y="0"/>
+                  </a:lnTo>
+                  <a:cubicBezTo>
+                    <a:pt x="1549110" y="0"/>
+                    <a:pt x="1559065" y="9954"/>
+                    <a:pt x="1559065" y="22233"/>
+                  </a:cubicBezTo>
+                  <a:lnTo>
+                    <a:pt x="1559065" y="790567"/>
+                  </a:lnTo>
+                  <a:cubicBezTo>
+                    <a:pt x="1559065" y="802846"/>
+                    <a:pt x="1549110" y="812800"/>
+                    <a:pt x="1536831" y="812800"/>
+                  </a:cubicBezTo>
+                  <a:lnTo>
+                    <a:pt x="22233" y="812800"/>
+                  </a:lnTo>
+                  <a:cubicBezTo>
+                    <a:pt x="9954" y="812800"/>
+                    <a:pt x="0" y="802846"/>
+                    <a:pt x="0" y="790567"/>
+                  </a:cubicBezTo>
+                  <a:lnTo>
+                    <a:pt x="0" y="22233"/>
+                  </a:lnTo>
+                  <a:cubicBezTo>
+                    <a:pt x="0" y="9954"/>
+                    <a:pt x="9954" y="0"/>
+                    <a:pt x="22233" y="0"/>
+                  </a:cubicBezTo>
+                  <a:close/>
+                </a:path>
+              </a:pathLst>
+            </a:custGeom>
+            <a:solidFill>
+              <a:srgbClr val="233D89"/>
+            </a:solidFill>
+          </p:spPr>
+        </p:sp>
+        <p:sp>
+          <p:nvSpPr>
+            <p:cNvPr name="TextBox 8" id="8"/>
+            <p:cNvSpPr txBox="true"/>
+            <p:nvPr/>
+          </p:nvSpPr>
+          <p:spPr>
+            <a:xfrm>
+              <a:off x="0" y="-38100"/>
+              <a:ext cx="1559065" cy="850900"/>
+            </a:xfrm>
+            <a:prstGeom prst="rect">
+              <a:avLst/>
+            </a:prstGeom>
+          </p:spPr>
+          <p:txBody>
+            <a:bodyPr anchor="ctr" rtlCol="false" tIns="50800" lIns="50800" bIns="50800" rIns="50800"/>
+            <a:lstStyle/>
+            <a:p>
+              <a:pPr algn="ctr">
+                <a:lnSpc>
+                  <a:spcPts val="3449"/>
+                </a:lnSpc>
+              </a:pPr>
+            </a:p>
+          </p:txBody>
+        </p:sp>
+      </p:grpSp>
     </p:spTree>
   </p:cSld>
   <p:clrMapOvr>
@@ -14642,8 +15866,8 @@
         </p:nvSpPr>
         <p:spPr>
           <a:xfrm flipH="false" flipV="false" rot="0">
-            <a:off x="4644143" y="509748"/>
-            <a:ext cx="9623518" cy="9267504"/>
+            <a:off x="266228" y="2227353"/>
+            <a:ext cx="17755545" cy="5149108"/>
           </a:xfrm>
           <a:custGeom>
             <a:avLst/>
@@ -14652,18 +15876,18 @@
             <a:cxnLst/>
             <a:rect r="r" b="b" t="t" l="l"/>
             <a:pathLst>
-              <a:path h="9267504" w="9623518">
+              <a:path h="5149108" w="17755545">
                 <a:moveTo>
                   <a:pt x="0" y="0"/>
                 </a:moveTo>
                 <a:lnTo>
-                  <a:pt x="9623518" y="0"/>
+                  <a:pt x="17755544" y="0"/>
                 </a:lnTo>
                 <a:lnTo>
-                  <a:pt x="9623518" y="9267504"/>
+                  <a:pt x="17755544" y="5149108"/>
                 </a:lnTo>
                 <a:lnTo>
-                  <a:pt x="0" y="9267504"/>
+                  <a:pt x="0" y="5149108"/>
                 </a:lnTo>
                 <a:lnTo>
                   <a:pt x="0" y="0"/>
@@ -14680,6 +15904,131 @@
           </a:blipFill>
         </p:spPr>
       </p:sp>
+      <p:grpSp>
+        <p:nvGrpSpPr>
+          <p:cNvPr name="Group 3" id="3"/>
+          <p:cNvGrpSpPr/>
+          <p:nvPr/>
+        </p:nvGrpSpPr>
+        <p:grpSpPr>
+          <a:xfrm rot="0">
+            <a:off x="859238" y="4661258"/>
+            <a:ext cx="16960349" cy="3086100"/>
+            <a:chOff x="0" y="0"/>
+            <a:chExt cx="4466923" cy="812800"/>
+          </a:xfrm>
+        </p:grpSpPr>
+        <p:sp>
+          <p:nvSpPr>
+            <p:cNvPr name="Freeform 4" id="4"/>
+            <p:cNvSpPr/>
+            <p:nvPr/>
+          </p:nvSpPr>
+          <p:spPr>
+            <a:xfrm flipH="false" flipV="false" rot="0">
+              <a:off x="0" y="0"/>
+              <a:ext cx="4466923" cy="812800"/>
+            </a:xfrm>
+            <a:custGeom>
+              <a:avLst/>
+              <a:gdLst/>
+              <a:ahLst/>
+              <a:cxnLst/>
+              <a:rect r="r" b="b" t="t" l="l"/>
+              <a:pathLst>
+                <a:path h="812800" w="4466923">
+                  <a:moveTo>
+                    <a:pt x="7760" y="0"/>
+                  </a:moveTo>
+                  <a:lnTo>
+                    <a:pt x="4459163" y="0"/>
+                  </a:lnTo>
+                  <a:cubicBezTo>
+                    <a:pt x="4461221" y="0"/>
+                    <a:pt x="4463195" y="818"/>
+                    <a:pt x="4464650" y="2273"/>
+                  </a:cubicBezTo>
+                  <a:cubicBezTo>
+                    <a:pt x="4466106" y="3728"/>
+                    <a:pt x="4466923" y="5702"/>
+                    <a:pt x="4466923" y="7760"/>
+                  </a:cubicBezTo>
+                  <a:lnTo>
+                    <a:pt x="4466923" y="805040"/>
+                  </a:lnTo>
+                  <a:cubicBezTo>
+                    <a:pt x="4466923" y="807098"/>
+                    <a:pt x="4466106" y="809072"/>
+                    <a:pt x="4464650" y="810527"/>
+                  </a:cubicBezTo>
+                  <a:cubicBezTo>
+                    <a:pt x="4463195" y="811982"/>
+                    <a:pt x="4461221" y="812800"/>
+                    <a:pt x="4459163" y="812800"/>
+                  </a:cubicBezTo>
+                  <a:lnTo>
+                    <a:pt x="7760" y="812800"/>
+                  </a:lnTo>
+                  <a:cubicBezTo>
+                    <a:pt x="5702" y="812800"/>
+                    <a:pt x="3728" y="811982"/>
+                    <a:pt x="2273" y="810527"/>
+                  </a:cubicBezTo>
+                  <a:cubicBezTo>
+                    <a:pt x="818" y="809072"/>
+                    <a:pt x="0" y="807098"/>
+                    <a:pt x="0" y="805040"/>
+                  </a:cubicBezTo>
+                  <a:lnTo>
+                    <a:pt x="0" y="7760"/>
+                  </a:lnTo>
+                  <a:cubicBezTo>
+                    <a:pt x="0" y="5702"/>
+                    <a:pt x="818" y="3728"/>
+                    <a:pt x="2273" y="2273"/>
+                  </a:cubicBezTo>
+                  <a:cubicBezTo>
+                    <a:pt x="3728" y="818"/>
+                    <a:pt x="5702" y="0"/>
+                    <a:pt x="7760" y="0"/>
+                  </a:cubicBezTo>
+                  <a:close/>
+                </a:path>
+              </a:pathLst>
+            </a:custGeom>
+            <a:solidFill>
+              <a:srgbClr val="233D89"/>
+            </a:solidFill>
+          </p:spPr>
+        </p:sp>
+        <p:sp>
+          <p:nvSpPr>
+            <p:cNvPr name="TextBox 5" id="5"/>
+            <p:cNvSpPr txBox="true"/>
+            <p:nvPr/>
+          </p:nvSpPr>
+          <p:spPr>
+            <a:xfrm>
+              <a:off x="0" y="-38100"/>
+              <a:ext cx="4466923" cy="850900"/>
+            </a:xfrm>
+            <a:prstGeom prst="rect">
+              <a:avLst/>
+            </a:prstGeom>
+          </p:spPr>
+          <p:txBody>
+            <a:bodyPr anchor="ctr" rtlCol="false" tIns="50800" lIns="50800" bIns="50800" rIns="50800"/>
+            <a:lstStyle/>
+            <a:p>
+              <a:pPr algn="ctr">
+                <a:lnSpc>
+                  <a:spcPts val="3449"/>
+                </a:lnSpc>
+              </a:pPr>
+            </a:p>
+          </p:txBody>
+        </p:sp>
+      </p:grpSp>
     </p:spTree>
   </p:cSld>
   <p:clrMapOvr>
@@ -14689,12 +16038,12 @@
 </file>
 
 <file path=ppt/slides/slide25.xml><?xml version="1.0" encoding="utf-8"?>
-<p:sld xmlns:p="http://schemas.openxmlformats.org/presentationml/2006/main" xmlns:a="http://schemas.openxmlformats.org/drawingml/2006/main">
+<p:sld xmlns:p="http://schemas.openxmlformats.org/presentationml/2006/main" xmlns:a="http://schemas.openxmlformats.org/drawingml/2006/main" xmlns:r="http://schemas.openxmlformats.org/officeDocument/2006/relationships">
   <p:cSld>
     <p:bg>
       <p:bgPr>
         <a:solidFill>
-          <a:srgbClr val="1E3A8A"/>
+          <a:srgbClr val="233D89"/>
         </a:solidFill>
       </p:bgPr>
     </p:bg>
@@ -14714,45 +16063,1432 @@
       </p:grpSpPr>
       <p:sp>
         <p:nvSpPr>
-          <p:cNvPr name="TextBox 2" id="2"/>
-          <p:cNvSpPr txBox="true"/>
+          <p:cNvPr name="Freeform 2" id="2"/>
+          <p:cNvSpPr/>
           <p:nvPr/>
         </p:nvSpPr>
         <p:spPr>
+          <a:xfrm flipH="false" flipV="false" rot="0">
+            <a:off x="266228" y="2227353"/>
+            <a:ext cx="17755545" cy="5149108"/>
+          </a:xfrm>
+          <a:custGeom>
+            <a:avLst/>
+            <a:gdLst/>
+            <a:ahLst/>
+            <a:cxnLst/>
+            <a:rect r="r" b="b" t="t" l="l"/>
+            <a:pathLst>
+              <a:path h="5149108" w="17755545">
+                <a:moveTo>
+                  <a:pt x="0" y="0"/>
+                </a:moveTo>
+                <a:lnTo>
+                  <a:pt x="17755544" y="0"/>
+                </a:lnTo>
+                <a:lnTo>
+                  <a:pt x="17755544" y="5149108"/>
+                </a:lnTo>
+                <a:lnTo>
+                  <a:pt x="0" y="5149108"/>
+                </a:lnTo>
+                <a:lnTo>
+                  <a:pt x="0" y="0"/>
+                </a:lnTo>
+                <a:close/>
+              </a:path>
+            </a:pathLst>
+          </a:custGeom>
+          <a:blipFill>
+            <a:blip r:embed="rId2"/>
+            <a:stretch>
+              <a:fillRect l="0" t="0" r="0" b="0"/>
+            </a:stretch>
+          </a:blipFill>
+        </p:spPr>
+      </p:sp>
+      <p:grpSp>
+        <p:nvGrpSpPr>
+          <p:cNvPr name="Group 3" id="3"/>
+          <p:cNvGrpSpPr/>
+          <p:nvPr/>
+        </p:nvGrpSpPr>
+        <p:grpSpPr>
           <a:xfrm rot="0">
-            <a:off x="2335702" y="3082273"/>
-            <a:ext cx="13616597" cy="3145790"/>
+            <a:off x="775490" y="5442906"/>
+            <a:ext cx="16960349" cy="3086100"/>
+            <a:chOff x="0" y="0"/>
+            <a:chExt cx="4466923" cy="812800"/>
           </a:xfrm>
-          <a:prstGeom prst="rect">
+        </p:grpSpPr>
+        <p:sp>
+          <p:nvSpPr>
+            <p:cNvPr name="Freeform 4" id="4"/>
+            <p:cNvSpPr/>
+            <p:nvPr/>
+          </p:nvSpPr>
+          <p:spPr>
+            <a:xfrm flipH="false" flipV="false" rot="0">
+              <a:off x="0" y="0"/>
+              <a:ext cx="4466923" cy="812800"/>
+            </a:xfrm>
+            <a:custGeom>
+              <a:avLst/>
+              <a:gdLst/>
+              <a:ahLst/>
+              <a:cxnLst/>
+              <a:rect r="r" b="b" t="t" l="l"/>
+              <a:pathLst>
+                <a:path h="812800" w="4466923">
+                  <a:moveTo>
+                    <a:pt x="7760" y="0"/>
+                  </a:moveTo>
+                  <a:lnTo>
+                    <a:pt x="4459163" y="0"/>
+                  </a:lnTo>
+                  <a:cubicBezTo>
+                    <a:pt x="4461221" y="0"/>
+                    <a:pt x="4463195" y="818"/>
+                    <a:pt x="4464650" y="2273"/>
+                  </a:cubicBezTo>
+                  <a:cubicBezTo>
+                    <a:pt x="4466106" y="3728"/>
+                    <a:pt x="4466923" y="5702"/>
+                    <a:pt x="4466923" y="7760"/>
+                  </a:cubicBezTo>
+                  <a:lnTo>
+                    <a:pt x="4466923" y="805040"/>
+                  </a:lnTo>
+                  <a:cubicBezTo>
+                    <a:pt x="4466923" y="807098"/>
+                    <a:pt x="4466106" y="809072"/>
+                    <a:pt x="4464650" y="810527"/>
+                  </a:cubicBezTo>
+                  <a:cubicBezTo>
+                    <a:pt x="4463195" y="811982"/>
+                    <a:pt x="4461221" y="812800"/>
+                    <a:pt x="4459163" y="812800"/>
+                  </a:cubicBezTo>
+                  <a:lnTo>
+                    <a:pt x="7760" y="812800"/>
+                  </a:lnTo>
+                  <a:cubicBezTo>
+                    <a:pt x="5702" y="812800"/>
+                    <a:pt x="3728" y="811982"/>
+                    <a:pt x="2273" y="810527"/>
+                  </a:cubicBezTo>
+                  <a:cubicBezTo>
+                    <a:pt x="818" y="809072"/>
+                    <a:pt x="0" y="807098"/>
+                    <a:pt x="0" y="805040"/>
+                  </a:cubicBezTo>
+                  <a:lnTo>
+                    <a:pt x="0" y="7760"/>
+                  </a:lnTo>
+                  <a:cubicBezTo>
+                    <a:pt x="0" y="5702"/>
+                    <a:pt x="818" y="3728"/>
+                    <a:pt x="2273" y="2273"/>
+                  </a:cubicBezTo>
+                  <a:cubicBezTo>
+                    <a:pt x="3728" y="818"/>
+                    <a:pt x="5702" y="0"/>
+                    <a:pt x="7760" y="0"/>
+                  </a:cubicBezTo>
+                  <a:close/>
+                </a:path>
+              </a:pathLst>
+            </a:custGeom>
+            <a:solidFill>
+              <a:srgbClr val="233D89"/>
+            </a:solidFill>
+          </p:spPr>
+        </p:sp>
+        <p:sp>
+          <p:nvSpPr>
+            <p:cNvPr name="TextBox 5" id="5"/>
+            <p:cNvSpPr txBox="true"/>
+            <p:nvPr/>
+          </p:nvSpPr>
+          <p:spPr>
+            <a:xfrm>
+              <a:off x="0" y="-38100"/>
+              <a:ext cx="4466923" cy="850900"/>
+            </a:xfrm>
+            <a:prstGeom prst="rect">
+              <a:avLst/>
+            </a:prstGeom>
+          </p:spPr>
+          <p:txBody>
+            <a:bodyPr anchor="ctr" rtlCol="false" tIns="50800" lIns="50800" bIns="50800" rIns="50800"/>
+            <a:lstStyle/>
+            <a:p>
+              <a:pPr algn="ctr">
+                <a:lnSpc>
+                  <a:spcPts val="3449"/>
+                </a:lnSpc>
+              </a:pPr>
+            </a:p>
+          </p:txBody>
+        </p:sp>
+      </p:grpSp>
+      <p:grpSp>
+        <p:nvGrpSpPr>
+          <p:cNvPr name="Group 6" id="6"/>
+          <p:cNvGrpSpPr/>
+          <p:nvPr/>
+        </p:nvGrpSpPr>
+        <p:grpSpPr>
+          <a:xfrm rot="0">
+            <a:off x="6692542" y="4606495"/>
+            <a:ext cx="10330300" cy="3086100"/>
+            <a:chOff x="0" y="0"/>
+            <a:chExt cx="2720738" cy="812800"/>
+          </a:xfrm>
+        </p:grpSpPr>
+        <p:sp>
+          <p:nvSpPr>
+            <p:cNvPr name="Freeform 7" id="7"/>
+            <p:cNvSpPr/>
+            <p:nvPr/>
+          </p:nvSpPr>
+          <p:spPr>
+            <a:xfrm flipH="false" flipV="false" rot="0">
+              <a:off x="0" y="0"/>
+              <a:ext cx="2720738" cy="812800"/>
+            </a:xfrm>
+            <a:custGeom>
+              <a:avLst/>
+              <a:gdLst/>
+              <a:ahLst/>
+              <a:cxnLst/>
+              <a:rect r="r" b="b" t="t" l="l"/>
+              <a:pathLst>
+                <a:path h="812800" w="2720738">
+                  <a:moveTo>
+                    <a:pt x="12740" y="0"/>
+                  </a:moveTo>
+                  <a:lnTo>
+                    <a:pt x="2707997" y="0"/>
+                  </a:lnTo>
+                  <a:cubicBezTo>
+                    <a:pt x="2715034" y="0"/>
+                    <a:pt x="2720738" y="5704"/>
+                    <a:pt x="2720738" y="12740"/>
+                  </a:cubicBezTo>
+                  <a:lnTo>
+                    <a:pt x="2720738" y="800060"/>
+                  </a:lnTo>
+                  <a:cubicBezTo>
+                    <a:pt x="2720738" y="803439"/>
+                    <a:pt x="2719395" y="806679"/>
+                    <a:pt x="2717006" y="809068"/>
+                  </a:cubicBezTo>
+                  <a:cubicBezTo>
+                    <a:pt x="2714617" y="811458"/>
+                    <a:pt x="2711376" y="812800"/>
+                    <a:pt x="2707997" y="812800"/>
+                  </a:cubicBezTo>
+                  <a:lnTo>
+                    <a:pt x="12740" y="812800"/>
+                  </a:lnTo>
+                  <a:cubicBezTo>
+                    <a:pt x="5704" y="812800"/>
+                    <a:pt x="0" y="807096"/>
+                    <a:pt x="0" y="800060"/>
+                  </a:cubicBezTo>
+                  <a:lnTo>
+                    <a:pt x="0" y="12740"/>
+                  </a:lnTo>
+                  <a:cubicBezTo>
+                    <a:pt x="0" y="5704"/>
+                    <a:pt x="5704" y="0"/>
+                    <a:pt x="12740" y="0"/>
+                  </a:cubicBezTo>
+                  <a:close/>
+                </a:path>
+              </a:pathLst>
+            </a:custGeom>
+            <a:solidFill>
+              <a:srgbClr val="233D89"/>
+            </a:solidFill>
+          </p:spPr>
+        </p:sp>
+        <p:sp>
+          <p:nvSpPr>
+            <p:cNvPr name="TextBox 8" id="8"/>
+            <p:cNvSpPr txBox="true"/>
+            <p:nvPr/>
+          </p:nvSpPr>
+          <p:spPr>
+            <a:xfrm>
+              <a:off x="0" y="-38100"/>
+              <a:ext cx="2720738" cy="850900"/>
+            </a:xfrm>
+            <a:prstGeom prst="rect">
+              <a:avLst/>
+            </a:prstGeom>
+          </p:spPr>
+          <p:txBody>
+            <a:bodyPr anchor="ctr" rtlCol="false" tIns="50800" lIns="50800" bIns="50800" rIns="50800"/>
+            <a:lstStyle/>
+            <a:p>
+              <a:pPr algn="ctr">
+                <a:lnSpc>
+                  <a:spcPts val="3449"/>
+                </a:lnSpc>
+              </a:pPr>
+            </a:p>
+          </p:txBody>
+        </p:sp>
+      </p:grpSp>
+    </p:spTree>
+  </p:cSld>
+  <p:clrMapOvr>
+    <a:masterClrMapping/>
+  </p:clrMapOvr>
+</p:sld>
+</file>
+
+<file path=ppt/slides/slide26.xml><?xml version="1.0" encoding="utf-8"?>
+<p:sld xmlns:p="http://schemas.openxmlformats.org/presentationml/2006/main" xmlns:a="http://schemas.openxmlformats.org/drawingml/2006/main" xmlns:r="http://schemas.openxmlformats.org/officeDocument/2006/relationships">
+  <p:cSld>
+    <p:bg>
+      <p:bgPr>
+        <a:solidFill>
+          <a:srgbClr val="233D89"/>
+        </a:solidFill>
+      </p:bgPr>
+    </p:bg>
+    <p:spTree>
+      <p:nvGrpSpPr>
+        <p:cNvPr id="1" name=""/>
+        <p:cNvGrpSpPr/>
+        <p:nvPr/>
+      </p:nvGrpSpPr>
+      <p:grpSpPr>
+        <a:xfrm>
+          <a:off x="0" y="0"/>
+          <a:ext cx="0" cy="0"/>
+          <a:chOff x="0" y="0"/>
+          <a:chExt cx="0" cy="0"/>
+        </a:xfrm>
+      </p:grpSpPr>
+      <p:sp>
+        <p:nvSpPr>
+          <p:cNvPr name="Freeform 2" id="2"/>
+          <p:cNvSpPr/>
+          <p:nvPr/>
+        </p:nvSpPr>
+        <p:spPr>
+          <a:xfrm flipH="false" flipV="false" rot="0">
+            <a:off x="266228" y="2227353"/>
+            <a:ext cx="17755545" cy="5149108"/>
+          </a:xfrm>
+          <a:custGeom>
             <a:avLst/>
-          </a:prstGeom>
+            <a:gdLst/>
+            <a:ahLst/>
+            <a:cxnLst/>
+            <a:rect r="r" b="b" t="t" l="l"/>
+            <a:pathLst>
+              <a:path h="5149108" w="17755545">
+                <a:moveTo>
+                  <a:pt x="0" y="0"/>
+                </a:moveTo>
+                <a:lnTo>
+                  <a:pt x="17755544" y="0"/>
+                </a:lnTo>
+                <a:lnTo>
+                  <a:pt x="17755544" y="5149108"/>
+                </a:lnTo>
+                <a:lnTo>
+                  <a:pt x="0" y="5149108"/>
+                </a:lnTo>
+                <a:lnTo>
+                  <a:pt x="0" y="0"/>
+                </a:lnTo>
+                <a:close/>
+              </a:path>
+            </a:pathLst>
+          </a:custGeom>
+          <a:blipFill>
+            <a:blip r:embed="rId2"/>
+            <a:stretch>
+              <a:fillRect l="0" t="0" r="0" b="0"/>
+            </a:stretch>
+          </a:blipFill>
         </p:spPr>
-        <p:txBody>
-          <a:bodyPr anchor="t" rtlCol="false" tIns="0" lIns="0" bIns="0" rIns="0">
-            <a:spAutoFit/>
-          </a:bodyPr>
-          <a:lstStyle/>
-          <a:p>
-            <a:pPr algn="l">
-              <a:lnSpc>
-                <a:spcPts val="25180"/>
-              </a:lnSpc>
-            </a:pPr>
-            <a:r>
-              <a:rPr lang="en-US" b="true" sz="20000">
-                <a:solidFill>
-                  <a:srgbClr val="FFFFFF"/>
-                </a:solidFill>
-                <a:latin typeface="Montserrat Bold"/>
-                <a:ea typeface="Montserrat Bold"/>
-                <a:cs typeface="Montserrat Bold"/>
-                <a:sym typeface="Montserrat Bold"/>
-              </a:rPr>
-              <a:t>Obrigado!</a:t>
-            </a:r>
-          </a:p>
-        </p:txBody>
       </p:sp>
+      <p:grpSp>
+        <p:nvGrpSpPr>
+          <p:cNvPr name="Group 3" id="3"/>
+          <p:cNvGrpSpPr/>
+          <p:nvPr/>
+        </p:nvGrpSpPr>
+        <p:grpSpPr>
+          <a:xfrm rot="0">
+            <a:off x="775490" y="5442906"/>
+            <a:ext cx="16960349" cy="3086100"/>
+            <a:chOff x="0" y="0"/>
+            <a:chExt cx="4466923" cy="812800"/>
+          </a:xfrm>
+        </p:grpSpPr>
+        <p:sp>
+          <p:nvSpPr>
+            <p:cNvPr name="Freeform 4" id="4"/>
+            <p:cNvSpPr/>
+            <p:nvPr/>
+          </p:nvSpPr>
+          <p:spPr>
+            <a:xfrm flipH="false" flipV="false" rot="0">
+              <a:off x="0" y="0"/>
+              <a:ext cx="4466923" cy="812800"/>
+            </a:xfrm>
+            <a:custGeom>
+              <a:avLst/>
+              <a:gdLst/>
+              <a:ahLst/>
+              <a:cxnLst/>
+              <a:rect r="r" b="b" t="t" l="l"/>
+              <a:pathLst>
+                <a:path h="812800" w="4466923">
+                  <a:moveTo>
+                    <a:pt x="7760" y="0"/>
+                  </a:moveTo>
+                  <a:lnTo>
+                    <a:pt x="4459163" y="0"/>
+                  </a:lnTo>
+                  <a:cubicBezTo>
+                    <a:pt x="4461221" y="0"/>
+                    <a:pt x="4463195" y="818"/>
+                    <a:pt x="4464650" y="2273"/>
+                  </a:cubicBezTo>
+                  <a:cubicBezTo>
+                    <a:pt x="4466106" y="3728"/>
+                    <a:pt x="4466923" y="5702"/>
+                    <a:pt x="4466923" y="7760"/>
+                  </a:cubicBezTo>
+                  <a:lnTo>
+                    <a:pt x="4466923" y="805040"/>
+                  </a:lnTo>
+                  <a:cubicBezTo>
+                    <a:pt x="4466923" y="807098"/>
+                    <a:pt x="4466106" y="809072"/>
+                    <a:pt x="4464650" y="810527"/>
+                  </a:cubicBezTo>
+                  <a:cubicBezTo>
+                    <a:pt x="4463195" y="811982"/>
+                    <a:pt x="4461221" y="812800"/>
+                    <a:pt x="4459163" y="812800"/>
+                  </a:cubicBezTo>
+                  <a:lnTo>
+                    <a:pt x="7760" y="812800"/>
+                  </a:lnTo>
+                  <a:cubicBezTo>
+                    <a:pt x="5702" y="812800"/>
+                    <a:pt x="3728" y="811982"/>
+                    <a:pt x="2273" y="810527"/>
+                  </a:cubicBezTo>
+                  <a:cubicBezTo>
+                    <a:pt x="818" y="809072"/>
+                    <a:pt x="0" y="807098"/>
+                    <a:pt x="0" y="805040"/>
+                  </a:cubicBezTo>
+                  <a:lnTo>
+                    <a:pt x="0" y="7760"/>
+                  </a:lnTo>
+                  <a:cubicBezTo>
+                    <a:pt x="0" y="5702"/>
+                    <a:pt x="818" y="3728"/>
+                    <a:pt x="2273" y="2273"/>
+                  </a:cubicBezTo>
+                  <a:cubicBezTo>
+                    <a:pt x="3728" y="818"/>
+                    <a:pt x="5702" y="0"/>
+                    <a:pt x="7760" y="0"/>
+                  </a:cubicBezTo>
+                  <a:close/>
+                </a:path>
+              </a:pathLst>
+            </a:custGeom>
+            <a:solidFill>
+              <a:srgbClr val="233D89"/>
+            </a:solidFill>
+          </p:spPr>
+        </p:sp>
+        <p:sp>
+          <p:nvSpPr>
+            <p:cNvPr name="TextBox 5" id="5"/>
+            <p:cNvSpPr txBox="true"/>
+            <p:nvPr/>
+          </p:nvSpPr>
+          <p:spPr>
+            <a:xfrm>
+              <a:off x="0" y="-38100"/>
+              <a:ext cx="4466923" cy="850900"/>
+            </a:xfrm>
+            <a:prstGeom prst="rect">
+              <a:avLst/>
+            </a:prstGeom>
+          </p:spPr>
+          <p:txBody>
+            <a:bodyPr anchor="ctr" rtlCol="false" tIns="50800" lIns="50800" bIns="50800" rIns="50800"/>
+            <a:lstStyle/>
+            <a:p>
+              <a:pPr algn="ctr">
+                <a:lnSpc>
+                  <a:spcPts val="3449"/>
+                </a:lnSpc>
+              </a:pPr>
+            </a:p>
+          </p:txBody>
+        </p:sp>
+      </p:grpSp>
+      <p:grpSp>
+        <p:nvGrpSpPr>
+          <p:cNvPr name="Group 6" id="6"/>
+          <p:cNvGrpSpPr/>
+          <p:nvPr/>
+        </p:nvGrpSpPr>
+        <p:grpSpPr>
+          <a:xfrm rot="0">
+            <a:off x="11410345" y="4606495"/>
+            <a:ext cx="5612497" cy="3086100"/>
+            <a:chOff x="0" y="0"/>
+            <a:chExt cx="1478189" cy="812800"/>
+          </a:xfrm>
+        </p:grpSpPr>
+        <p:sp>
+          <p:nvSpPr>
+            <p:cNvPr name="Freeform 7" id="7"/>
+            <p:cNvSpPr/>
+            <p:nvPr/>
+          </p:nvSpPr>
+          <p:spPr>
+            <a:xfrm flipH="false" flipV="false" rot="0">
+              <a:off x="0" y="0"/>
+              <a:ext cx="1478189" cy="812800"/>
+            </a:xfrm>
+            <a:custGeom>
+              <a:avLst/>
+              <a:gdLst/>
+              <a:ahLst/>
+              <a:cxnLst/>
+              <a:rect r="r" b="b" t="t" l="l"/>
+              <a:pathLst>
+                <a:path h="812800" w="1478189">
+                  <a:moveTo>
+                    <a:pt x="23450" y="0"/>
+                  </a:moveTo>
+                  <a:lnTo>
+                    <a:pt x="1454739" y="0"/>
+                  </a:lnTo>
+                  <a:cubicBezTo>
+                    <a:pt x="1460958" y="0"/>
+                    <a:pt x="1466923" y="2471"/>
+                    <a:pt x="1471320" y="6868"/>
+                  </a:cubicBezTo>
+                  <a:cubicBezTo>
+                    <a:pt x="1475718" y="11266"/>
+                    <a:pt x="1478189" y="17231"/>
+                    <a:pt x="1478189" y="23450"/>
+                  </a:cubicBezTo>
+                  <a:lnTo>
+                    <a:pt x="1478189" y="789350"/>
+                  </a:lnTo>
+                  <a:cubicBezTo>
+                    <a:pt x="1478189" y="795569"/>
+                    <a:pt x="1475718" y="801534"/>
+                    <a:pt x="1471320" y="805932"/>
+                  </a:cubicBezTo>
+                  <a:cubicBezTo>
+                    <a:pt x="1466923" y="810329"/>
+                    <a:pt x="1460958" y="812800"/>
+                    <a:pt x="1454739" y="812800"/>
+                  </a:cubicBezTo>
+                  <a:lnTo>
+                    <a:pt x="23450" y="812800"/>
+                  </a:lnTo>
+                  <a:cubicBezTo>
+                    <a:pt x="17231" y="812800"/>
+                    <a:pt x="11266" y="810329"/>
+                    <a:pt x="6868" y="805932"/>
+                  </a:cubicBezTo>
+                  <a:cubicBezTo>
+                    <a:pt x="2471" y="801534"/>
+                    <a:pt x="0" y="795569"/>
+                    <a:pt x="0" y="789350"/>
+                  </a:cubicBezTo>
+                  <a:lnTo>
+                    <a:pt x="0" y="23450"/>
+                  </a:lnTo>
+                  <a:cubicBezTo>
+                    <a:pt x="0" y="17231"/>
+                    <a:pt x="2471" y="11266"/>
+                    <a:pt x="6868" y="6868"/>
+                  </a:cubicBezTo>
+                  <a:cubicBezTo>
+                    <a:pt x="11266" y="2471"/>
+                    <a:pt x="17231" y="0"/>
+                    <a:pt x="23450" y="0"/>
+                  </a:cubicBezTo>
+                  <a:close/>
+                </a:path>
+              </a:pathLst>
+            </a:custGeom>
+            <a:solidFill>
+              <a:srgbClr val="233D89"/>
+            </a:solidFill>
+          </p:spPr>
+        </p:sp>
+        <p:sp>
+          <p:nvSpPr>
+            <p:cNvPr name="TextBox 8" id="8"/>
+            <p:cNvSpPr txBox="true"/>
+            <p:nvPr/>
+          </p:nvSpPr>
+          <p:spPr>
+            <a:xfrm>
+              <a:off x="0" y="-38100"/>
+              <a:ext cx="1478189" cy="850900"/>
+            </a:xfrm>
+            <a:prstGeom prst="rect">
+              <a:avLst/>
+            </a:prstGeom>
+          </p:spPr>
+          <p:txBody>
+            <a:bodyPr anchor="ctr" rtlCol="false" tIns="50800" lIns="50800" bIns="50800" rIns="50800"/>
+            <a:lstStyle/>
+            <a:p>
+              <a:pPr algn="ctr">
+                <a:lnSpc>
+                  <a:spcPts val="3449"/>
+                </a:lnSpc>
+              </a:pPr>
+            </a:p>
+          </p:txBody>
+        </p:sp>
+      </p:grpSp>
+    </p:spTree>
+  </p:cSld>
+  <p:clrMapOvr>
+    <a:masterClrMapping/>
+  </p:clrMapOvr>
+</p:sld>
+</file>
+
+<file path=ppt/slides/slide27.xml><?xml version="1.0" encoding="utf-8"?>
+<p:sld xmlns:p="http://schemas.openxmlformats.org/presentationml/2006/main" xmlns:a="http://schemas.openxmlformats.org/drawingml/2006/main" xmlns:r="http://schemas.openxmlformats.org/officeDocument/2006/relationships">
+  <p:cSld>
+    <p:bg>
+      <p:bgPr>
+        <a:solidFill>
+          <a:srgbClr val="233D89"/>
+        </a:solidFill>
+      </p:bgPr>
+    </p:bg>
+    <p:spTree>
+      <p:nvGrpSpPr>
+        <p:cNvPr id="1" name=""/>
+        <p:cNvGrpSpPr/>
+        <p:nvPr/>
+      </p:nvGrpSpPr>
+      <p:grpSpPr>
+        <a:xfrm>
+          <a:off x="0" y="0"/>
+          <a:ext cx="0" cy="0"/>
+          <a:chOff x="0" y="0"/>
+          <a:chExt cx="0" cy="0"/>
+        </a:xfrm>
+      </p:grpSpPr>
+      <p:sp>
+        <p:nvSpPr>
+          <p:cNvPr name="Freeform 2" id="2"/>
+          <p:cNvSpPr/>
+          <p:nvPr/>
+        </p:nvSpPr>
+        <p:spPr>
+          <a:xfrm flipH="false" flipV="false" rot="0">
+            <a:off x="266228" y="2227353"/>
+            <a:ext cx="17755545" cy="5149108"/>
+          </a:xfrm>
+          <a:custGeom>
+            <a:avLst/>
+            <a:gdLst/>
+            <a:ahLst/>
+            <a:cxnLst/>
+            <a:rect r="r" b="b" t="t" l="l"/>
+            <a:pathLst>
+              <a:path h="5149108" w="17755545">
+                <a:moveTo>
+                  <a:pt x="0" y="0"/>
+                </a:moveTo>
+                <a:lnTo>
+                  <a:pt x="17755544" y="0"/>
+                </a:lnTo>
+                <a:lnTo>
+                  <a:pt x="17755544" y="5149108"/>
+                </a:lnTo>
+                <a:lnTo>
+                  <a:pt x="0" y="5149108"/>
+                </a:lnTo>
+                <a:lnTo>
+                  <a:pt x="0" y="0"/>
+                </a:lnTo>
+                <a:close/>
+              </a:path>
+            </a:pathLst>
+          </a:custGeom>
+          <a:blipFill>
+            <a:blip r:embed="rId2"/>
+            <a:stretch>
+              <a:fillRect l="0" t="0" r="0" b="0"/>
+            </a:stretch>
+          </a:blipFill>
+        </p:spPr>
+      </p:sp>
+      <p:grpSp>
+        <p:nvGrpSpPr>
+          <p:cNvPr name="Group 3" id="3"/>
+          <p:cNvGrpSpPr/>
+          <p:nvPr/>
+        </p:nvGrpSpPr>
+        <p:grpSpPr>
+          <a:xfrm rot="0">
+            <a:off x="775490" y="5442906"/>
+            <a:ext cx="16960349" cy="3086100"/>
+            <a:chOff x="0" y="0"/>
+            <a:chExt cx="4466923" cy="812800"/>
+          </a:xfrm>
+        </p:grpSpPr>
+        <p:sp>
+          <p:nvSpPr>
+            <p:cNvPr name="Freeform 4" id="4"/>
+            <p:cNvSpPr/>
+            <p:nvPr/>
+          </p:nvSpPr>
+          <p:spPr>
+            <a:xfrm flipH="false" flipV="false" rot="0">
+              <a:off x="0" y="0"/>
+              <a:ext cx="4466923" cy="812800"/>
+            </a:xfrm>
+            <a:custGeom>
+              <a:avLst/>
+              <a:gdLst/>
+              <a:ahLst/>
+              <a:cxnLst/>
+              <a:rect r="r" b="b" t="t" l="l"/>
+              <a:pathLst>
+                <a:path h="812800" w="4466923">
+                  <a:moveTo>
+                    <a:pt x="7760" y="0"/>
+                  </a:moveTo>
+                  <a:lnTo>
+                    <a:pt x="4459163" y="0"/>
+                  </a:lnTo>
+                  <a:cubicBezTo>
+                    <a:pt x="4461221" y="0"/>
+                    <a:pt x="4463195" y="818"/>
+                    <a:pt x="4464650" y="2273"/>
+                  </a:cubicBezTo>
+                  <a:cubicBezTo>
+                    <a:pt x="4466106" y="3728"/>
+                    <a:pt x="4466923" y="5702"/>
+                    <a:pt x="4466923" y="7760"/>
+                  </a:cubicBezTo>
+                  <a:lnTo>
+                    <a:pt x="4466923" y="805040"/>
+                  </a:lnTo>
+                  <a:cubicBezTo>
+                    <a:pt x="4466923" y="807098"/>
+                    <a:pt x="4466106" y="809072"/>
+                    <a:pt x="4464650" y="810527"/>
+                  </a:cubicBezTo>
+                  <a:cubicBezTo>
+                    <a:pt x="4463195" y="811982"/>
+                    <a:pt x="4461221" y="812800"/>
+                    <a:pt x="4459163" y="812800"/>
+                  </a:cubicBezTo>
+                  <a:lnTo>
+                    <a:pt x="7760" y="812800"/>
+                  </a:lnTo>
+                  <a:cubicBezTo>
+                    <a:pt x="5702" y="812800"/>
+                    <a:pt x="3728" y="811982"/>
+                    <a:pt x="2273" y="810527"/>
+                  </a:cubicBezTo>
+                  <a:cubicBezTo>
+                    <a:pt x="818" y="809072"/>
+                    <a:pt x="0" y="807098"/>
+                    <a:pt x="0" y="805040"/>
+                  </a:cubicBezTo>
+                  <a:lnTo>
+                    <a:pt x="0" y="7760"/>
+                  </a:lnTo>
+                  <a:cubicBezTo>
+                    <a:pt x="0" y="5702"/>
+                    <a:pt x="818" y="3728"/>
+                    <a:pt x="2273" y="2273"/>
+                  </a:cubicBezTo>
+                  <a:cubicBezTo>
+                    <a:pt x="3728" y="818"/>
+                    <a:pt x="5702" y="0"/>
+                    <a:pt x="7760" y="0"/>
+                  </a:cubicBezTo>
+                  <a:close/>
+                </a:path>
+              </a:pathLst>
+            </a:custGeom>
+            <a:solidFill>
+              <a:srgbClr val="233D89"/>
+            </a:solidFill>
+          </p:spPr>
+        </p:sp>
+        <p:sp>
+          <p:nvSpPr>
+            <p:cNvPr name="TextBox 5" id="5"/>
+            <p:cNvSpPr txBox="true"/>
+            <p:nvPr/>
+          </p:nvSpPr>
+          <p:spPr>
+            <a:xfrm>
+              <a:off x="0" y="-38100"/>
+              <a:ext cx="4466923" cy="850900"/>
+            </a:xfrm>
+            <a:prstGeom prst="rect">
+              <a:avLst/>
+            </a:prstGeom>
+          </p:spPr>
+          <p:txBody>
+            <a:bodyPr anchor="ctr" rtlCol="false" tIns="50800" lIns="50800" bIns="50800" rIns="50800"/>
+            <a:lstStyle/>
+            <a:p>
+              <a:pPr algn="ctr">
+                <a:lnSpc>
+                  <a:spcPts val="3449"/>
+                </a:lnSpc>
+              </a:pPr>
+            </a:p>
+          </p:txBody>
+        </p:sp>
+      </p:grpSp>
+    </p:spTree>
+  </p:cSld>
+  <p:clrMapOvr>
+    <a:masterClrMapping/>
+  </p:clrMapOvr>
+</p:sld>
+</file>
+
+<file path=ppt/slides/slide28.xml><?xml version="1.0" encoding="utf-8"?>
+<p:sld xmlns:p="http://schemas.openxmlformats.org/presentationml/2006/main" xmlns:a="http://schemas.openxmlformats.org/drawingml/2006/main" xmlns:r="http://schemas.openxmlformats.org/officeDocument/2006/relationships">
+  <p:cSld>
+    <p:bg>
+      <p:bgPr>
+        <a:solidFill>
+          <a:srgbClr val="233D89"/>
+        </a:solidFill>
+      </p:bgPr>
+    </p:bg>
+    <p:spTree>
+      <p:nvGrpSpPr>
+        <p:cNvPr id="1" name=""/>
+        <p:cNvGrpSpPr/>
+        <p:nvPr/>
+      </p:nvGrpSpPr>
+      <p:grpSpPr>
+        <a:xfrm>
+          <a:off x="0" y="0"/>
+          <a:ext cx="0" cy="0"/>
+          <a:chOff x="0" y="0"/>
+          <a:chExt cx="0" cy="0"/>
+        </a:xfrm>
+      </p:grpSpPr>
+      <p:sp>
+        <p:nvSpPr>
+          <p:cNvPr name="Freeform 2" id="2"/>
+          <p:cNvSpPr/>
+          <p:nvPr/>
+        </p:nvSpPr>
+        <p:spPr>
+          <a:xfrm flipH="false" flipV="false" rot="0">
+            <a:off x="266228" y="2227353"/>
+            <a:ext cx="17755545" cy="5149108"/>
+          </a:xfrm>
+          <a:custGeom>
+            <a:avLst/>
+            <a:gdLst/>
+            <a:ahLst/>
+            <a:cxnLst/>
+            <a:rect r="r" b="b" t="t" l="l"/>
+            <a:pathLst>
+              <a:path h="5149108" w="17755545">
+                <a:moveTo>
+                  <a:pt x="0" y="0"/>
+                </a:moveTo>
+                <a:lnTo>
+                  <a:pt x="17755544" y="0"/>
+                </a:lnTo>
+                <a:lnTo>
+                  <a:pt x="17755544" y="5149108"/>
+                </a:lnTo>
+                <a:lnTo>
+                  <a:pt x="0" y="5149108"/>
+                </a:lnTo>
+                <a:lnTo>
+                  <a:pt x="0" y="0"/>
+                </a:lnTo>
+                <a:close/>
+              </a:path>
+            </a:pathLst>
+          </a:custGeom>
+          <a:blipFill>
+            <a:blip r:embed="rId2"/>
+            <a:stretch>
+              <a:fillRect l="0" t="0" r="0" b="0"/>
+            </a:stretch>
+          </a:blipFill>
+        </p:spPr>
+      </p:sp>
+      <p:grpSp>
+        <p:nvGrpSpPr>
+          <p:cNvPr name="Group 3" id="3"/>
+          <p:cNvGrpSpPr/>
+          <p:nvPr/>
+        </p:nvGrpSpPr>
+        <p:grpSpPr>
+          <a:xfrm rot="0">
+            <a:off x="621952" y="6126847"/>
+            <a:ext cx="5905615" cy="1425098"/>
+            <a:chOff x="0" y="0"/>
+            <a:chExt cx="1555388" cy="375335"/>
+          </a:xfrm>
+        </p:grpSpPr>
+        <p:sp>
+          <p:nvSpPr>
+            <p:cNvPr name="Freeform 4" id="4"/>
+            <p:cNvSpPr/>
+            <p:nvPr/>
+          </p:nvSpPr>
+          <p:spPr>
+            <a:xfrm flipH="false" flipV="false" rot="0">
+              <a:off x="0" y="0"/>
+              <a:ext cx="1555388" cy="375335"/>
+            </a:xfrm>
+            <a:custGeom>
+              <a:avLst/>
+              <a:gdLst/>
+              <a:ahLst/>
+              <a:cxnLst/>
+              <a:rect r="r" b="b" t="t" l="l"/>
+              <a:pathLst>
+                <a:path h="375335" w="1555388">
+                  <a:moveTo>
+                    <a:pt x="22286" y="0"/>
+                  </a:moveTo>
+                  <a:lnTo>
+                    <a:pt x="1533102" y="0"/>
+                  </a:lnTo>
+                  <a:cubicBezTo>
+                    <a:pt x="1539013" y="0"/>
+                    <a:pt x="1544682" y="2348"/>
+                    <a:pt x="1548861" y="6527"/>
+                  </a:cubicBezTo>
+                  <a:cubicBezTo>
+                    <a:pt x="1553040" y="10707"/>
+                    <a:pt x="1555388" y="16375"/>
+                    <a:pt x="1555388" y="22286"/>
+                  </a:cubicBezTo>
+                  <a:lnTo>
+                    <a:pt x="1555388" y="353049"/>
+                  </a:lnTo>
+                  <a:cubicBezTo>
+                    <a:pt x="1555388" y="365357"/>
+                    <a:pt x="1545411" y="375335"/>
+                    <a:pt x="1533102" y="375335"/>
+                  </a:cubicBezTo>
+                  <a:lnTo>
+                    <a:pt x="22286" y="375335"/>
+                  </a:lnTo>
+                  <a:cubicBezTo>
+                    <a:pt x="16375" y="375335"/>
+                    <a:pt x="10707" y="372987"/>
+                    <a:pt x="6527" y="368807"/>
+                  </a:cubicBezTo>
+                  <a:cubicBezTo>
+                    <a:pt x="2348" y="364628"/>
+                    <a:pt x="0" y="358959"/>
+                    <a:pt x="0" y="353049"/>
+                  </a:cubicBezTo>
+                  <a:lnTo>
+                    <a:pt x="0" y="22286"/>
+                  </a:lnTo>
+                  <a:cubicBezTo>
+                    <a:pt x="0" y="9978"/>
+                    <a:pt x="9978" y="0"/>
+                    <a:pt x="22286" y="0"/>
+                  </a:cubicBezTo>
+                  <a:close/>
+                </a:path>
+              </a:pathLst>
+            </a:custGeom>
+            <a:solidFill>
+              <a:srgbClr val="233D89"/>
+            </a:solidFill>
+          </p:spPr>
+        </p:sp>
+        <p:sp>
+          <p:nvSpPr>
+            <p:cNvPr name="TextBox 5" id="5"/>
+            <p:cNvSpPr txBox="true"/>
+            <p:nvPr/>
+          </p:nvSpPr>
+          <p:spPr>
+            <a:xfrm>
+              <a:off x="0" y="-38100"/>
+              <a:ext cx="1555388" cy="413435"/>
+            </a:xfrm>
+            <a:prstGeom prst="rect">
+              <a:avLst/>
+            </a:prstGeom>
+          </p:spPr>
+          <p:txBody>
+            <a:bodyPr anchor="ctr" rtlCol="false" tIns="50800" lIns="50800" bIns="50800" rIns="50800"/>
+            <a:lstStyle/>
+            <a:p>
+              <a:pPr algn="ctr">
+                <a:lnSpc>
+                  <a:spcPts val="3449"/>
+                </a:lnSpc>
+              </a:pPr>
+            </a:p>
+          </p:txBody>
+        </p:sp>
+      </p:grpSp>
+      <p:grpSp>
+        <p:nvGrpSpPr>
+          <p:cNvPr name="Group 6" id="6"/>
+          <p:cNvGrpSpPr/>
+          <p:nvPr/>
+        </p:nvGrpSpPr>
+        <p:grpSpPr>
+          <a:xfrm rot="0">
+            <a:off x="6441298" y="5246356"/>
+            <a:ext cx="10400090" cy="1425098"/>
+            <a:chOff x="0" y="0"/>
+            <a:chExt cx="2739118" cy="375335"/>
+          </a:xfrm>
+        </p:grpSpPr>
+        <p:sp>
+          <p:nvSpPr>
+            <p:cNvPr name="Freeform 7" id="7"/>
+            <p:cNvSpPr/>
+            <p:nvPr/>
+          </p:nvSpPr>
+          <p:spPr>
+            <a:xfrm flipH="false" flipV="false" rot="0">
+              <a:off x="0" y="0"/>
+              <a:ext cx="2739118" cy="375335"/>
+            </a:xfrm>
+            <a:custGeom>
+              <a:avLst/>
+              <a:gdLst/>
+              <a:ahLst/>
+              <a:cxnLst/>
+              <a:rect r="r" b="b" t="t" l="l"/>
+              <a:pathLst>
+                <a:path h="375335" w="2739118">
+                  <a:moveTo>
+                    <a:pt x="12655" y="0"/>
+                  </a:moveTo>
+                  <a:lnTo>
+                    <a:pt x="2726463" y="0"/>
+                  </a:lnTo>
+                  <a:cubicBezTo>
+                    <a:pt x="2733453" y="0"/>
+                    <a:pt x="2739118" y="5666"/>
+                    <a:pt x="2739118" y="12655"/>
+                  </a:cubicBezTo>
+                  <a:lnTo>
+                    <a:pt x="2739118" y="362680"/>
+                  </a:lnTo>
+                  <a:cubicBezTo>
+                    <a:pt x="2739118" y="366036"/>
+                    <a:pt x="2737785" y="369255"/>
+                    <a:pt x="2735412" y="371628"/>
+                  </a:cubicBezTo>
+                  <a:cubicBezTo>
+                    <a:pt x="2733039" y="374001"/>
+                    <a:pt x="2729820" y="375335"/>
+                    <a:pt x="2726463" y="375335"/>
+                  </a:cubicBezTo>
+                  <a:lnTo>
+                    <a:pt x="12655" y="375335"/>
+                  </a:lnTo>
+                  <a:cubicBezTo>
+                    <a:pt x="9299" y="375335"/>
+                    <a:pt x="6080" y="374001"/>
+                    <a:pt x="3707" y="371628"/>
+                  </a:cubicBezTo>
+                  <a:cubicBezTo>
+                    <a:pt x="1333" y="369255"/>
+                    <a:pt x="0" y="366036"/>
+                    <a:pt x="0" y="362680"/>
+                  </a:cubicBezTo>
+                  <a:lnTo>
+                    <a:pt x="0" y="12655"/>
+                  </a:lnTo>
+                  <a:cubicBezTo>
+                    <a:pt x="0" y="9299"/>
+                    <a:pt x="1333" y="6080"/>
+                    <a:pt x="3707" y="3707"/>
+                  </a:cubicBezTo>
+                  <a:cubicBezTo>
+                    <a:pt x="6080" y="1333"/>
+                    <a:pt x="9299" y="0"/>
+                    <a:pt x="12655" y="0"/>
+                  </a:cubicBezTo>
+                  <a:close/>
+                </a:path>
+              </a:pathLst>
+            </a:custGeom>
+            <a:solidFill>
+              <a:srgbClr val="233D89"/>
+            </a:solidFill>
+          </p:spPr>
+        </p:sp>
+        <p:sp>
+          <p:nvSpPr>
+            <p:cNvPr name="TextBox 8" id="8"/>
+            <p:cNvSpPr txBox="true"/>
+            <p:nvPr/>
+          </p:nvSpPr>
+          <p:spPr>
+            <a:xfrm>
+              <a:off x="0" y="-38100"/>
+              <a:ext cx="2739118" cy="413435"/>
+            </a:xfrm>
+            <a:prstGeom prst="rect">
+              <a:avLst/>
+            </a:prstGeom>
+          </p:spPr>
+          <p:txBody>
+            <a:bodyPr anchor="ctr" rtlCol="false" tIns="50800" lIns="50800" bIns="50800" rIns="50800"/>
+            <a:lstStyle/>
+            <a:p>
+              <a:pPr algn="ctr">
+                <a:lnSpc>
+                  <a:spcPts val="3449"/>
+                </a:lnSpc>
+              </a:pPr>
+            </a:p>
+          </p:txBody>
+        </p:sp>
+      </p:grpSp>
+    </p:spTree>
+  </p:cSld>
+  <p:clrMapOvr>
+    <a:masterClrMapping/>
+  </p:clrMapOvr>
+</p:sld>
+</file>
+
+<file path=ppt/slides/slide29.xml><?xml version="1.0" encoding="utf-8"?>
+<p:sld xmlns:p="http://schemas.openxmlformats.org/presentationml/2006/main" xmlns:a="http://schemas.openxmlformats.org/drawingml/2006/main" xmlns:r="http://schemas.openxmlformats.org/officeDocument/2006/relationships">
+  <p:cSld>
+    <p:bg>
+      <p:bgPr>
+        <a:solidFill>
+          <a:srgbClr val="233D89"/>
+        </a:solidFill>
+      </p:bgPr>
+    </p:bg>
+    <p:spTree>
+      <p:nvGrpSpPr>
+        <p:cNvPr id="1" name=""/>
+        <p:cNvGrpSpPr/>
+        <p:nvPr/>
+      </p:nvGrpSpPr>
+      <p:grpSpPr>
+        <a:xfrm>
+          <a:off x="0" y="0"/>
+          <a:ext cx="0" cy="0"/>
+          <a:chOff x="0" y="0"/>
+          <a:chExt cx="0" cy="0"/>
+        </a:xfrm>
+      </p:grpSpPr>
+      <p:sp>
+        <p:nvSpPr>
+          <p:cNvPr name="Freeform 2" id="2"/>
+          <p:cNvSpPr/>
+          <p:nvPr/>
+        </p:nvSpPr>
+        <p:spPr>
+          <a:xfrm flipH="false" flipV="false" rot="0">
+            <a:off x="266228" y="2227353"/>
+            <a:ext cx="17755545" cy="5149108"/>
+          </a:xfrm>
+          <a:custGeom>
+            <a:avLst/>
+            <a:gdLst/>
+            <a:ahLst/>
+            <a:cxnLst/>
+            <a:rect r="r" b="b" t="t" l="l"/>
+            <a:pathLst>
+              <a:path h="5149108" w="17755545">
+                <a:moveTo>
+                  <a:pt x="0" y="0"/>
+                </a:moveTo>
+                <a:lnTo>
+                  <a:pt x="17755544" y="0"/>
+                </a:lnTo>
+                <a:lnTo>
+                  <a:pt x="17755544" y="5149108"/>
+                </a:lnTo>
+                <a:lnTo>
+                  <a:pt x="0" y="5149108"/>
+                </a:lnTo>
+                <a:lnTo>
+                  <a:pt x="0" y="0"/>
+                </a:lnTo>
+                <a:close/>
+              </a:path>
+            </a:pathLst>
+          </a:custGeom>
+          <a:blipFill>
+            <a:blip r:embed="rId2"/>
+            <a:stretch>
+              <a:fillRect l="0" t="0" r="0" b="0"/>
+            </a:stretch>
+          </a:blipFill>
+        </p:spPr>
+      </p:sp>
+      <p:grpSp>
+        <p:nvGrpSpPr>
+          <p:cNvPr name="Group 3" id="3"/>
+          <p:cNvGrpSpPr/>
+          <p:nvPr/>
+        </p:nvGrpSpPr>
+        <p:grpSpPr>
+          <a:xfrm rot="0">
+            <a:off x="621952" y="6126847"/>
+            <a:ext cx="5905615" cy="1425098"/>
+            <a:chOff x="0" y="0"/>
+            <a:chExt cx="1555388" cy="375335"/>
+          </a:xfrm>
+        </p:grpSpPr>
+        <p:sp>
+          <p:nvSpPr>
+            <p:cNvPr name="Freeform 4" id="4"/>
+            <p:cNvSpPr/>
+            <p:nvPr/>
+          </p:nvSpPr>
+          <p:spPr>
+            <a:xfrm flipH="false" flipV="false" rot="0">
+              <a:off x="0" y="0"/>
+              <a:ext cx="1555388" cy="375335"/>
+            </a:xfrm>
+            <a:custGeom>
+              <a:avLst/>
+              <a:gdLst/>
+              <a:ahLst/>
+              <a:cxnLst/>
+              <a:rect r="r" b="b" t="t" l="l"/>
+              <a:pathLst>
+                <a:path h="375335" w="1555388">
+                  <a:moveTo>
+                    <a:pt x="22286" y="0"/>
+                  </a:moveTo>
+                  <a:lnTo>
+                    <a:pt x="1533102" y="0"/>
+                  </a:lnTo>
+                  <a:cubicBezTo>
+                    <a:pt x="1539013" y="0"/>
+                    <a:pt x="1544682" y="2348"/>
+                    <a:pt x="1548861" y="6527"/>
+                  </a:cubicBezTo>
+                  <a:cubicBezTo>
+                    <a:pt x="1553040" y="10707"/>
+                    <a:pt x="1555388" y="16375"/>
+                    <a:pt x="1555388" y="22286"/>
+                  </a:cubicBezTo>
+                  <a:lnTo>
+                    <a:pt x="1555388" y="353049"/>
+                  </a:lnTo>
+                  <a:cubicBezTo>
+                    <a:pt x="1555388" y="365357"/>
+                    <a:pt x="1545411" y="375335"/>
+                    <a:pt x="1533102" y="375335"/>
+                  </a:cubicBezTo>
+                  <a:lnTo>
+                    <a:pt x="22286" y="375335"/>
+                  </a:lnTo>
+                  <a:cubicBezTo>
+                    <a:pt x="16375" y="375335"/>
+                    <a:pt x="10707" y="372987"/>
+                    <a:pt x="6527" y="368807"/>
+                  </a:cubicBezTo>
+                  <a:cubicBezTo>
+                    <a:pt x="2348" y="364628"/>
+                    <a:pt x="0" y="358959"/>
+                    <a:pt x="0" y="353049"/>
+                  </a:cubicBezTo>
+                  <a:lnTo>
+                    <a:pt x="0" y="22286"/>
+                  </a:lnTo>
+                  <a:cubicBezTo>
+                    <a:pt x="0" y="9978"/>
+                    <a:pt x="9978" y="0"/>
+                    <a:pt x="22286" y="0"/>
+                  </a:cubicBezTo>
+                  <a:close/>
+                </a:path>
+              </a:pathLst>
+            </a:custGeom>
+            <a:solidFill>
+              <a:srgbClr val="233D89"/>
+            </a:solidFill>
+          </p:spPr>
+        </p:sp>
+        <p:sp>
+          <p:nvSpPr>
+            <p:cNvPr name="TextBox 5" id="5"/>
+            <p:cNvSpPr txBox="true"/>
+            <p:nvPr/>
+          </p:nvSpPr>
+          <p:spPr>
+            <a:xfrm>
+              <a:off x="0" y="-38100"/>
+              <a:ext cx="1555388" cy="413435"/>
+            </a:xfrm>
+            <a:prstGeom prst="rect">
+              <a:avLst/>
+            </a:prstGeom>
+          </p:spPr>
+          <p:txBody>
+            <a:bodyPr anchor="ctr" rtlCol="false" tIns="50800" lIns="50800" bIns="50800" rIns="50800"/>
+            <a:lstStyle/>
+            <a:p>
+              <a:pPr algn="ctr">
+                <a:lnSpc>
+                  <a:spcPts val="3449"/>
+                </a:lnSpc>
+              </a:pPr>
+            </a:p>
+          </p:txBody>
+        </p:sp>
+      </p:grpSp>
+      <p:grpSp>
+        <p:nvGrpSpPr>
+          <p:cNvPr name="Group 6" id="6"/>
+          <p:cNvGrpSpPr/>
+          <p:nvPr/>
+        </p:nvGrpSpPr>
+        <p:grpSpPr>
+          <a:xfrm rot="0">
+            <a:off x="12261783" y="5246356"/>
+            <a:ext cx="4579606" cy="1425098"/>
+            <a:chOff x="0" y="0"/>
+            <a:chExt cx="1206151" cy="375335"/>
+          </a:xfrm>
+        </p:grpSpPr>
+        <p:sp>
+          <p:nvSpPr>
+            <p:cNvPr name="Freeform 7" id="7"/>
+            <p:cNvSpPr/>
+            <p:nvPr/>
+          </p:nvSpPr>
+          <p:spPr>
+            <a:xfrm flipH="false" flipV="false" rot="0">
+              <a:off x="0" y="0"/>
+              <a:ext cx="1206151" cy="375335"/>
+            </a:xfrm>
+            <a:custGeom>
+              <a:avLst/>
+              <a:gdLst/>
+              <a:ahLst/>
+              <a:cxnLst/>
+              <a:rect r="r" b="b" t="t" l="l"/>
+              <a:pathLst>
+                <a:path h="375335" w="1206151">
+                  <a:moveTo>
+                    <a:pt x="28739" y="0"/>
+                  </a:moveTo>
+                  <a:lnTo>
+                    <a:pt x="1177412" y="0"/>
+                  </a:lnTo>
+                  <a:cubicBezTo>
+                    <a:pt x="1193284" y="0"/>
+                    <a:pt x="1206151" y="12867"/>
+                    <a:pt x="1206151" y="28739"/>
+                  </a:cubicBezTo>
+                  <a:lnTo>
+                    <a:pt x="1206151" y="346596"/>
+                  </a:lnTo>
+                  <a:cubicBezTo>
+                    <a:pt x="1206151" y="362468"/>
+                    <a:pt x="1193284" y="375335"/>
+                    <a:pt x="1177412" y="375335"/>
+                  </a:cubicBezTo>
+                  <a:lnTo>
+                    <a:pt x="28739" y="375335"/>
+                  </a:lnTo>
+                  <a:cubicBezTo>
+                    <a:pt x="21117" y="375335"/>
+                    <a:pt x="13807" y="372307"/>
+                    <a:pt x="8417" y="366917"/>
+                  </a:cubicBezTo>
+                  <a:cubicBezTo>
+                    <a:pt x="3028" y="361528"/>
+                    <a:pt x="0" y="354218"/>
+                    <a:pt x="0" y="346596"/>
+                  </a:cubicBezTo>
+                  <a:lnTo>
+                    <a:pt x="0" y="28739"/>
+                  </a:lnTo>
+                  <a:cubicBezTo>
+                    <a:pt x="0" y="12867"/>
+                    <a:pt x="12867" y="0"/>
+                    <a:pt x="28739" y="0"/>
+                  </a:cubicBezTo>
+                  <a:close/>
+                </a:path>
+              </a:pathLst>
+            </a:custGeom>
+            <a:solidFill>
+              <a:srgbClr val="233D89"/>
+            </a:solidFill>
+          </p:spPr>
+        </p:sp>
+        <p:sp>
+          <p:nvSpPr>
+            <p:cNvPr name="TextBox 8" id="8"/>
+            <p:cNvSpPr txBox="true"/>
+            <p:nvPr/>
+          </p:nvSpPr>
+          <p:spPr>
+            <a:xfrm>
+              <a:off x="0" y="-38100"/>
+              <a:ext cx="1206151" cy="413435"/>
+            </a:xfrm>
+            <a:prstGeom prst="rect">
+              <a:avLst/>
+            </a:prstGeom>
+          </p:spPr>
+          <p:txBody>
+            <a:bodyPr anchor="ctr" rtlCol="false" tIns="50800" lIns="50800" bIns="50800" rIns="50800"/>
+            <a:lstStyle/>
+            <a:p>
+              <a:pPr algn="ctr">
+                <a:lnSpc>
+                  <a:spcPts val="3449"/>
+                </a:lnSpc>
+              </a:pPr>
+            </a:p>
+          </p:txBody>
+        </p:sp>
+      </p:grpSp>
     </p:spTree>
   </p:cSld>
   <p:clrMapOvr>
@@ -15066,6 +17802,891 @@
                 <a:sym typeface="Montserrat Bold"/>
               </a:rPr>
               <a:t>Desempenho; Segurança; Escalabilidade.</a:t>
+            </a:r>
+          </a:p>
+        </p:txBody>
+      </p:sp>
+    </p:spTree>
+  </p:cSld>
+  <p:clrMapOvr>
+    <a:masterClrMapping/>
+  </p:clrMapOvr>
+</p:sld>
+</file>
+
+<file path=ppt/slides/slide30.xml><?xml version="1.0" encoding="utf-8"?>
+<p:sld xmlns:p="http://schemas.openxmlformats.org/presentationml/2006/main" xmlns:a="http://schemas.openxmlformats.org/drawingml/2006/main" xmlns:r="http://schemas.openxmlformats.org/officeDocument/2006/relationships">
+  <p:cSld>
+    <p:bg>
+      <p:bgPr>
+        <a:solidFill>
+          <a:srgbClr val="233D89"/>
+        </a:solidFill>
+      </p:bgPr>
+    </p:bg>
+    <p:spTree>
+      <p:nvGrpSpPr>
+        <p:cNvPr id="1" name=""/>
+        <p:cNvGrpSpPr/>
+        <p:nvPr/>
+      </p:nvGrpSpPr>
+      <p:grpSpPr>
+        <a:xfrm>
+          <a:off x="0" y="0"/>
+          <a:ext cx="0" cy="0"/>
+          <a:chOff x="0" y="0"/>
+          <a:chExt cx="0" cy="0"/>
+        </a:xfrm>
+      </p:grpSpPr>
+      <p:sp>
+        <p:nvSpPr>
+          <p:cNvPr name="Freeform 2" id="2"/>
+          <p:cNvSpPr/>
+          <p:nvPr/>
+        </p:nvSpPr>
+        <p:spPr>
+          <a:xfrm flipH="false" flipV="false" rot="0">
+            <a:off x="266228" y="2227353"/>
+            <a:ext cx="17755545" cy="5149108"/>
+          </a:xfrm>
+          <a:custGeom>
+            <a:avLst/>
+            <a:gdLst/>
+            <a:ahLst/>
+            <a:cxnLst/>
+            <a:rect r="r" b="b" t="t" l="l"/>
+            <a:pathLst>
+              <a:path h="5149108" w="17755545">
+                <a:moveTo>
+                  <a:pt x="0" y="0"/>
+                </a:moveTo>
+                <a:lnTo>
+                  <a:pt x="17755544" y="0"/>
+                </a:lnTo>
+                <a:lnTo>
+                  <a:pt x="17755544" y="5149108"/>
+                </a:lnTo>
+                <a:lnTo>
+                  <a:pt x="0" y="5149108"/>
+                </a:lnTo>
+                <a:lnTo>
+                  <a:pt x="0" y="0"/>
+                </a:lnTo>
+                <a:close/>
+              </a:path>
+            </a:pathLst>
+          </a:custGeom>
+          <a:blipFill>
+            <a:blip r:embed="rId2"/>
+            <a:stretch>
+              <a:fillRect l="0" t="0" r="0" b="0"/>
+            </a:stretch>
+          </a:blipFill>
+        </p:spPr>
+      </p:sp>
+      <p:grpSp>
+        <p:nvGrpSpPr>
+          <p:cNvPr name="Group 3" id="3"/>
+          <p:cNvGrpSpPr/>
+          <p:nvPr/>
+        </p:nvGrpSpPr>
+        <p:grpSpPr>
+          <a:xfrm rot="0">
+            <a:off x="621952" y="6126847"/>
+            <a:ext cx="5905615" cy="1425098"/>
+            <a:chOff x="0" y="0"/>
+            <a:chExt cx="1555388" cy="375335"/>
+          </a:xfrm>
+        </p:grpSpPr>
+        <p:sp>
+          <p:nvSpPr>
+            <p:cNvPr name="Freeform 4" id="4"/>
+            <p:cNvSpPr/>
+            <p:nvPr/>
+          </p:nvSpPr>
+          <p:spPr>
+            <a:xfrm flipH="false" flipV="false" rot="0">
+              <a:off x="0" y="0"/>
+              <a:ext cx="1555388" cy="375335"/>
+            </a:xfrm>
+            <a:custGeom>
+              <a:avLst/>
+              <a:gdLst/>
+              <a:ahLst/>
+              <a:cxnLst/>
+              <a:rect r="r" b="b" t="t" l="l"/>
+              <a:pathLst>
+                <a:path h="375335" w="1555388">
+                  <a:moveTo>
+                    <a:pt x="22286" y="0"/>
+                  </a:moveTo>
+                  <a:lnTo>
+                    <a:pt x="1533102" y="0"/>
+                  </a:lnTo>
+                  <a:cubicBezTo>
+                    <a:pt x="1539013" y="0"/>
+                    <a:pt x="1544682" y="2348"/>
+                    <a:pt x="1548861" y="6527"/>
+                  </a:cubicBezTo>
+                  <a:cubicBezTo>
+                    <a:pt x="1553040" y="10707"/>
+                    <a:pt x="1555388" y="16375"/>
+                    <a:pt x="1555388" y="22286"/>
+                  </a:cubicBezTo>
+                  <a:lnTo>
+                    <a:pt x="1555388" y="353049"/>
+                  </a:lnTo>
+                  <a:cubicBezTo>
+                    <a:pt x="1555388" y="365357"/>
+                    <a:pt x="1545411" y="375335"/>
+                    <a:pt x="1533102" y="375335"/>
+                  </a:cubicBezTo>
+                  <a:lnTo>
+                    <a:pt x="22286" y="375335"/>
+                  </a:lnTo>
+                  <a:cubicBezTo>
+                    <a:pt x="16375" y="375335"/>
+                    <a:pt x="10707" y="372987"/>
+                    <a:pt x="6527" y="368807"/>
+                  </a:cubicBezTo>
+                  <a:cubicBezTo>
+                    <a:pt x="2348" y="364628"/>
+                    <a:pt x="0" y="358959"/>
+                    <a:pt x="0" y="353049"/>
+                  </a:cubicBezTo>
+                  <a:lnTo>
+                    <a:pt x="0" y="22286"/>
+                  </a:lnTo>
+                  <a:cubicBezTo>
+                    <a:pt x="0" y="9978"/>
+                    <a:pt x="9978" y="0"/>
+                    <a:pt x="22286" y="0"/>
+                  </a:cubicBezTo>
+                  <a:close/>
+                </a:path>
+              </a:pathLst>
+            </a:custGeom>
+            <a:solidFill>
+              <a:srgbClr val="233D89"/>
+            </a:solidFill>
+          </p:spPr>
+        </p:sp>
+        <p:sp>
+          <p:nvSpPr>
+            <p:cNvPr name="TextBox 5" id="5"/>
+            <p:cNvSpPr txBox="true"/>
+            <p:nvPr/>
+          </p:nvSpPr>
+          <p:spPr>
+            <a:xfrm>
+              <a:off x="0" y="-38100"/>
+              <a:ext cx="1555388" cy="413435"/>
+            </a:xfrm>
+            <a:prstGeom prst="rect">
+              <a:avLst/>
+            </a:prstGeom>
+          </p:spPr>
+          <p:txBody>
+            <a:bodyPr anchor="ctr" rtlCol="false" tIns="50800" lIns="50800" bIns="50800" rIns="50800"/>
+            <a:lstStyle/>
+            <a:p>
+              <a:pPr algn="ctr">
+                <a:lnSpc>
+                  <a:spcPts val="3449"/>
+                </a:lnSpc>
+              </a:pPr>
+            </a:p>
+          </p:txBody>
+        </p:sp>
+      </p:grpSp>
+    </p:spTree>
+  </p:cSld>
+  <p:clrMapOvr>
+    <a:masterClrMapping/>
+  </p:clrMapOvr>
+</p:sld>
+</file>
+
+<file path=ppt/slides/slide31.xml><?xml version="1.0" encoding="utf-8"?>
+<p:sld xmlns:p="http://schemas.openxmlformats.org/presentationml/2006/main" xmlns:a="http://schemas.openxmlformats.org/drawingml/2006/main" xmlns:r="http://schemas.openxmlformats.org/officeDocument/2006/relationships">
+  <p:cSld>
+    <p:bg>
+      <p:bgPr>
+        <a:solidFill>
+          <a:srgbClr val="233D89"/>
+        </a:solidFill>
+      </p:bgPr>
+    </p:bg>
+    <p:spTree>
+      <p:nvGrpSpPr>
+        <p:cNvPr id="1" name=""/>
+        <p:cNvGrpSpPr/>
+        <p:nvPr/>
+      </p:nvGrpSpPr>
+      <p:grpSpPr>
+        <a:xfrm>
+          <a:off x="0" y="0"/>
+          <a:ext cx="0" cy="0"/>
+          <a:chOff x="0" y="0"/>
+          <a:chExt cx="0" cy="0"/>
+        </a:xfrm>
+      </p:grpSpPr>
+      <p:sp>
+        <p:nvSpPr>
+          <p:cNvPr name="Freeform 2" id="2"/>
+          <p:cNvSpPr/>
+          <p:nvPr/>
+        </p:nvSpPr>
+        <p:spPr>
+          <a:xfrm flipH="false" flipV="false" rot="0">
+            <a:off x="266228" y="2227353"/>
+            <a:ext cx="17755545" cy="5149108"/>
+          </a:xfrm>
+          <a:custGeom>
+            <a:avLst/>
+            <a:gdLst/>
+            <a:ahLst/>
+            <a:cxnLst/>
+            <a:rect r="r" b="b" t="t" l="l"/>
+            <a:pathLst>
+              <a:path h="5149108" w="17755545">
+                <a:moveTo>
+                  <a:pt x="0" y="0"/>
+                </a:moveTo>
+                <a:lnTo>
+                  <a:pt x="17755544" y="0"/>
+                </a:lnTo>
+                <a:lnTo>
+                  <a:pt x="17755544" y="5149108"/>
+                </a:lnTo>
+                <a:lnTo>
+                  <a:pt x="0" y="5149108"/>
+                </a:lnTo>
+                <a:lnTo>
+                  <a:pt x="0" y="0"/>
+                </a:lnTo>
+                <a:close/>
+              </a:path>
+            </a:pathLst>
+          </a:custGeom>
+          <a:blipFill>
+            <a:blip r:embed="rId2"/>
+            <a:stretch>
+              <a:fillRect l="0" t="0" r="0" b="0"/>
+            </a:stretch>
+          </a:blipFill>
+        </p:spPr>
+      </p:sp>
+    </p:spTree>
+  </p:cSld>
+  <p:clrMapOvr>
+    <a:masterClrMapping/>
+  </p:clrMapOvr>
+</p:sld>
+</file>
+
+<file path=ppt/slides/slide32.xml><?xml version="1.0" encoding="utf-8"?>
+<p:sld xmlns:p="http://schemas.openxmlformats.org/presentationml/2006/main" xmlns:a="http://schemas.openxmlformats.org/drawingml/2006/main">
+  <p:cSld>
+    <p:bg>
+      <p:bgPr>
+        <a:solidFill>
+          <a:srgbClr val="1E3A8A"/>
+        </a:solidFill>
+      </p:bgPr>
+    </p:bg>
+    <p:spTree>
+      <p:nvGrpSpPr>
+        <p:cNvPr id="1" name=""/>
+        <p:cNvGrpSpPr/>
+        <p:nvPr/>
+      </p:nvGrpSpPr>
+      <p:grpSpPr>
+        <a:xfrm>
+          <a:off x="0" y="0"/>
+          <a:ext cx="0" cy="0"/>
+          <a:chOff x="0" y="0"/>
+          <a:chExt cx="0" cy="0"/>
+        </a:xfrm>
+      </p:grpSpPr>
+      <p:sp>
+        <p:nvSpPr>
+          <p:cNvPr name="TextBox 2" id="2"/>
+          <p:cNvSpPr txBox="true"/>
+          <p:nvPr/>
+        </p:nvSpPr>
+        <p:spPr>
+          <a:xfrm rot="0">
+            <a:off x="6199548" y="4333452"/>
+            <a:ext cx="5888905" cy="1572470"/>
+          </a:xfrm>
+          <a:prstGeom prst="rect">
+            <a:avLst/>
+          </a:prstGeom>
+        </p:spPr>
+        <p:txBody>
+          <a:bodyPr anchor="t" rtlCol="false" tIns="0" lIns="0" bIns="0" rIns="0">
+            <a:spAutoFit/>
+          </a:bodyPr>
+          <a:lstStyle/>
+          <a:p>
+            <a:pPr algn="ctr">
+              <a:lnSpc>
+                <a:spcPts val="12661"/>
+              </a:lnSpc>
+            </a:pPr>
+            <a:r>
+              <a:rPr lang="en-US" b="true" sz="10056">
+                <a:solidFill>
+                  <a:srgbClr val="FFFFFF"/>
+                </a:solidFill>
+                <a:latin typeface="Montserrat Bold"/>
+                <a:ea typeface="Montserrat Bold"/>
+                <a:cs typeface="Montserrat Bold"/>
+                <a:sym typeface="Montserrat Bold"/>
+              </a:rPr>
+              <a:t>Gabarito</a:t>
+            </a:r>
+          </a:p>
+        </p:txBody>
+      </p:sp>
+    </p:spTree>
+  </p:cSld>
+  <p:clrMapOvr>
+    <a:masterClrMapping/>
+  </p:clrMapOvr>
+</p:sld>
+</file>
+
+<file path=ppt/slides/slide33.xml><?xml version="1.0" encoding="utf-8"?>
+<p:sld xmlns:p="http://schemas.openxmlformats.org/presentationml/2006/main" xmlns:a="http://schemas.openxmlformats.org/drawingml/2006/main" xmlns:r="http://schemas.openxmlformats.org/officeDocument/2006/relationships">
+  <p:cSld>
+    <p:bg>
+      <p:bgPr>
+        <a:solidFill>
+          <a:srgbClr val="233D89"/>
+        </a:solidFill>
+      </p:bgPr>
+    </p:bg>
+    <p:spTree>
+      <p:nvGrpSpPr>
+        <p:cNvPr id="1" name=""/>
+        <p:cNvGrpSpPr/>
+        <p:nvPr/>
+      </p:nvGrpSpPr>
+      <p:grpSpPr>
+        <a:xfrm>
+          <a:off x="0" y="0"/>
+          <a:ext cx="0" cy="0"/>
+          <a:chOff x="0" y="0"/>
+          <a:chExt cx="0" cy="0"/>
+        </a:xfrm>
+      </p:grpSpPr>
+      <p:sp>
+        <p:nvSpPr>
+          <p:cNvPr name="Freeform 2" id="2"/>
+          <p:cNvSpPr/>
+          <p:nvPr/>
+        </p:nvSpPr>
+        <p:spPr>
+          <a:xfrm flipH="false" flipV="false" rot="0">
+            <a:off x="1243250" y="302848"/>
+            <a:ext cx="8148397" cy="9287962"/>
+          </a:xfrm>
+          <a:custGeom>
+            <a:avLst/>
+            <a:gdLst/>
+            <a:ahLst/>
+            <a:cxnLst/>
+            <a:rect r="r" b="b" t="t" l="l"/>
+            <a:pathLst>
+              <a:path h="9287962" w="8148397">
+                <a:moveTo>
+                  <a:pt x="0" y="0"/>
+                </a:moveTo>
+                <a:lnTo>
+                  <a:pt x="8148397" y="0"/>
+                </a:lnTo>
+                <a:lnTo>
+                  <a:pt x="8148397" y="9287962"/>
+                </a:lnTo>
+                <a:lnTo>
+                  <a:pt x="0" y="9287962"/>
+                </a:lnTo>
+                <a:lnTo>
+                  <a:pt x="0" y="0"/>
+                </a:lnTo>
+                <a:close/>
+              </a:path>
+            </a:pathLst>
+          </a:custGeom>
+          <a:blipFill>
+            <a:blip r:embed="rId2"/>
+            <a:stretch>
+              <a:fillRect l="0" t="0" r="0" b="0"/>
+            </a:stretch>
+          </a:blipFill>
+        </p:spPr>
+      </p:sp>
+    </p:spTree>
+  </p:cSld>
+  <p:clrMapOvr>
+    <a:masterClrMapping/>
+  </p:clrMapOvr>
+</p:sld>
+</file>
+
+<file path=ppt/slides/slide34.xml><?xml version="1.0" encoding="utf-8"?>
+<p:sld xmlns:p="http://schemas.openxmlformats.org/presentationml/2006/main" xmlns:a="http://schemas.openxmlformats.org/drawingml/2006/main" xmlns:r="http://schemas.openxmlformats.org/officeDocument/2006/relationships">
+  <p:cSld>
+    <p:bg>
+      <p:bgPr>
+        <a:solidFill>
+          <a:srgbClr val="233D89"/>
+        </a:solidFill>
+      </p:bgPr>
+    </p:bg>
+    <p:spTree>
+      <p:nvGrpSpPr>
+        <p:cNvPr id="1" name=""/>
+        <p:cNvGrpSpPr/>
+        <p:nvPr/>
+      </p:nvGrpSpPr>
+      <p:grpSpPr>
+        <a:xfrm>
+          <a:off x="0" y="0"/>
+          <a:ext cx="0" cy="0"/>
+          <a:chOff x="0" y="0"/>
+          <a:chExt cx="0" cy="0"/>
+        </a:xfrm>
+      </p:grpSpPr>
+      <p:sp>
+        <p:nvSpPr>
+          <p:cNvPr name="Freeform 2" id="2"/>
+          <p:cNvSpPr/>
+          <p:nvPr/>
+        </p:nvSpPr>
+        <p:spPr>
+          <a:xfrm flipH="false" flipV="false" rot="0">
+            <a:off x="1450288" y="461402"/>
+            <a:ext cx="9485850" cy="9017664"/>
+          </a:xfrm>
+          <a:custGeom>
+            <a:avLst/>
+            <a:gdLst/>
+            <a:ahLst/>
+            <a:cxnLst/>
+            <a:rect r="r" b="b" t="t" l="l"/>
+            <a:pathLst>
+              <a:path h="9017664" w="9485850">
+                <a:moveTo>
+                  <a:pt x="0" y="0"/>
+                </a:moveTo>
+                <a:lnTo>
+                  <a:pt x="9485850" y="0"/>
+                </a:lnTo>
+                <a:lnTo>
+                  <a:pt x="9485850" y="9017664"/>
+                </a:lnTo>
+                <a:lnTo>
+                  <a:pt x="0" y="9017664"/>
+                </a:lnTo>
+                <a:lnTo>
+                  <a:pt x="0" y="0"/>
+                </a:lnTo>
+                <a:close/>
+              </a:path>
+            </a:pathLst>
+          </a:custGeom>
+          <a:blipFill>
+            <a:blip r:embed="rId2"/>
+            <a:stretch>
+              <a:fillRect l="0" t="0" r="0" b="0"/>
+            </a:stretch>
+          </a:blipFill>
+        </p:spPr>
+      </p:sp>
+    </p:spTree>
+  </p:cSld>
+  <p:clrMapOvr>
+    <a:masterClrMapping/>
+  </p:clrMapOvr>
+</p:sld>
+</file>
+
+<file path=ppt/slides/slide35.xml><?xml version="1.0" encoding="utf-8"?>
+<p:sld xmlns:p="http://schemas.openxmlformats.org/presentationml/2006/main" xmlns:a="http://schemas.openxmlformats.org/drawingml/2006/main" xmlns:r="http://schemas.openxmlformats.org/officeDocument/2006/relationships">
+  <p:cSld>
+    <p:bg>
+      <p:bgPr>
+        <a:solidFill>
+          <a:srgbClr val="283D87"/>
+        </a:solidFill>
+      </p:bgPr>
+    </p:bg>
+    <p:spTree>
+      <p:nvGrpSpPr>
+        <p:cNvPr id="1" name=""/>
+        <p:cNvGrpSpPr/>
+        <p:nvPr/>
+      </p:nvGrpSpPr>
+      <p:grpSpPr>
+        <a:xfrm>
+          <a:off x="0" y="0"/>
+          <a:ext cx="0" cy="0"/>
+          <a:chOff x="0" y="0"/>
+          <a:chExt cx="0" cy="0"/>
+        </a:xfrm>
+      </p:grpSpPr>
+      <p:sp>
+        <p:nvSpPr>
+          <p:cNvPr name="Freeform 2" id="2"/>
+          <p:cNvSpPr/>
+          <p:nvPr/>
+        </p:nvSpPr>
+        <p:spPr>
+          <a:xfrm flipH="false" flipV="false" rot="0">
+            <a:off x="150912" y="2890385"/>
+            <a:ext cx="17986175" cy="4202955"/>
+          </a:xfrm>
+          <a:custGeom>
+            <a:avLst/>
+            <a:gdLst/>
+            <a:ahLst/>
+            <a:cxnLst/>
+            <a:rect r="r" b="b" t="t" l="l"/>
+            <a:pathLst>
+              <a:path h="4202955" w="17986175">
+                <a:moveTo>
+                  <a:pt x="0" y="0"/>
+                </a:moveTo>
+                <a:lnTo>
+                  <a:pt x="17986176" y="0"/>
+                </a:lnTo>
+                <a:lnTo>
+                  <a:pt x="17986176" y="4202956"/>
+                </a:lnTo>
+                <a:lnTo>
+                  <a:pt x="0" y="4202956"/>
+                </a:lnTo>
+                <a:lnTo>
+                  <a:pt x="0" y="0"/>
+                </a:lnTo>
+                <a:close/>
+              </a:path>
+            </a:pathLst>
+          </a:custGeom>
+          <a:blipFill>
+            <a:blip r:embed="rId2"/>
+            <a:stretch>
+              <a:fillRect l="0" t="0" r="0" b="0"/>
+            </a:stretch>
+          </a:blipFill>
+        </p:spPr>
+      </p:sp>
+    </p:spTree>
+  </p:cSld>
+  <p:clrMapOvr>
+    <a:masterClrMapping/>
+  </p:clrMapOvr>
+</p:sld>
+</file>
+
+<file path=ppt/slides/slide36.xml><?xml version="1.0" encoding="utf-8"?>
+<p:sld xmlns:p="http://schemas.openxmlformats.org/presentationml/2006/main" xmlns:a="http://schemas.openxmlformats.org/drawingml/2006/main" xmlns:r="http://schemas.openxmlformats.org/officeDocument/2006/relationships">
+  <p:cSld>
+    <p:bg>
+      <p:bgPr>
+        <a:solidFill>
+          <a:srgbClr val="283D87"/>
+        </a:solidFill>
+      </p:bgPr>
+    </p:bg>
+    <p:spTree>
+      <p:nvGrpSpPr>
+        <p:cNvPr id="1" name=""/>
+        <p:cNvGrpSpPr/>
+        <p:nvPr/>
+      </p:nvGrpSpPr>
+      <p:grpSpPr>
+        <a:xfrm>
+          <a:off x="0" y="0"/>
+          <a:ext cx="0" cy="0"/>
+          <a:chOff x="0" y="0"/>
+          <a:chExt cx="0" cy="0"/>
+        </a:xfrm>
+      </p:grpSpPr>
+      <p:sp>
+        <p:nvSpPr>
+          <p:cNvPr name="Freeform 2" id="2"/>
+          <p:cNvSpPr/>
+          <p:nvPr/>
+        </p:nvSpPr>
+        <p:spPr>
+          <a:xfrm flipH="false" flipV="false" rot="0">
+            <a:off x="241034" y="1970578"/>
+            <a:ext cx="17805932" cy="4874374"/>
+          </a:xfrm>
+          <a:custGeom>
+            <a:avLst/>
+            <a:gdLst/>
+            <a:ahLst/>
+            <a:cxnLst/>
+            <a:rect r="r" b="b" t="t" l="l"/>
+            <a:pathLst>
+              <a:path h="4874374" w="17805932">
+                <a:moveTo>
+                  <a:pt x="0" y="0"/>
+                </a:moveTo>
+                <a:lnTo>
+                  <a:pt x="17805932" y="0"/>
+                </a:lnTo>
+                <a:lnTo>
+                  <a:pt x="17805932" y="4874374"/>
+                </a:lnTo>
+                <a:lnTo>
+                  <a:pt x="0" y="4874374"/>
+                </a:lnTo>
+                <a:lnTo>
+                  <a:pt x="0" y="0"/>
+                </a:lnTo>
+                <a:close/>
+              </a:path>
+            </a:pathLst>
+          </a:custGeom>
+          <a:blipFill>
+            <a:blip r:embed="rId2"/>
+            <a:stretch>
+              <a:fillRect l="0" t="0" r="0" b="0"/>
+            </a:stretch>
+          </a:blipFill>
+        </p:spPr>
+      </p:sp>
+    </p:spTree>
+  </p:cSld>
+  <p:clrMapOvr>
+    <a:masterClrMapping/>
+  </p:clrMapOvr>
+</p:sld>
+</file>
+
+<file path=ppt/slides/slide37.xml><?xml version="1.0" encoding="utf-8"?>
+<p:sld xmlns:p="http://schemas.openxmlformats.org/presentationml/2006/main" xmlns:a="http://schemas.openxmlformats.org/drawingml/2006/main" xmlns:r="http://schemas.openxmlformats.org/officeDocument/2006/relationships">
+  <p:cSld>
+    <p:bg>
+      <p:bgPr>
+        <a:solidFill>
+          <a:srgbClr val="233D89"/>
+        </a:solidFill>
+      </p:bgPr>
+    </p:bg>
+    <p:spTree>
+      <p:nvGrpSpPr>
+        <p:cNvPr id="1" name=""/>
+        <p:cNvGrpSpPr/>
+        <p:nvPr/>
+      </p:nvGrpSpPr>
+      <p:grpSpPr>
+        <a:xfrm>
+          <a:off x="0" y="0"/>
+          <a:ext cx="0" cy="0"/>
+          <a:chOff x="0" y="0"/>
+          <a:chExt cx="0" cy="0"/>
+        </a:xfrm>
+      </p:grpSpPr>
+      <p:sp>
+        <p:nvSpPr>
+          <p:cNvPr name="Freeform 2" id="2"/>
+          <p:cNvSpPr/>
+          <p:nvPr/>
+        </p:nvSpPr>
+        <p:spPr>
+          <a:xfrm flipH="false" flipV="false" rot="0">
+            <a:off x="4528962" y="624966"/>
+            <a:ext cx="9832027" cy="9382626"/>
+          </a:xfrm>
+          <a:custGeom>
+            <a:avLst/>
+            <a:gdLst/>
+            <a:ahLst/>
+            <a:cxnLst/>
+            <a:rect r="r" b="b" t="t" l="l"/>
+            <a:pathLst>
+              <a:path h="9382626" w="9832027">
+                <a:moveTo>
+                  <a:pt x="0" y="0"/>
+                </a:moveTo>
+                <a:lnTo>
+                  <a:pt x="9832028" y="0"/>
+                </a:lnTo>
+                <a:lnTo>
+                  <a:pt x="9832028" y="9382626"/>
+                </a:lnTo>
+                <a:lnTo>
+                  <a:pt x="0" y="9382626"/>
+                </a:lnTo>
+                <a:lnTo>
+                  <a:pt x="0" y="0"/>
+                </a:lnTo>
+                <a:close/>
+              </a:path>
+            </a:pathLst>
+          </a:custGeom>
+          <a:blipFill>
+            <a:blip r:embed="rId2"/>
+            <a:stretch>
+              <a:fillRect l="0" t="0" r="0" b="0"/>
+            </a:stretch>
+          </a:blipFill>
+        </p:spPr>
+      </p:sp>
+    </p:spTree>
+  </p:cSld>
+  <p:clrMapOvr>
+    <a:masterClrMapping/>
+  </p:clrMapOvr>
+</p:sld>
+</file>
+
+<file path=ppt/slides/slide38.xml><?xml version="1.0" encoding="utf-8"?>
+<p:sld xmlns:p="http://schemas.openxmlformats.org/presentationml/2006/main" xmlns:a="http://schemas.openxmlformats.org/drawingml/2006/main" xmlns:r="http://schemas.openxmlformats.org/officeDocument/2006/relationships">
+  <p:cSld>
+    <p:bg>
+      <p:bgPr>
+        <a:solidFill>
+          <a:srgbClr val="233D89"/>
+        </a:solidFill>
+      </p:bgPr>
+    </p:bg>
+    <p:spTree>
+      <p:nvGrpSpPr>
+        <p:cNvPr id="1" name=""/>
+        <p:cNvGrpSpPr/>
+        <p:nvPr/>
+      </p:nvGrpSpPr>
+      <p:grpSpPr>
+        <a:xfrm>
+          <a:off x="0" y="0"/>
+          <a:ext cx="0" cy="0"/>
+          <a:chOff x="0" y="0"/>
+          <a:chExt cx="0" cy="0"/>
+        </a:xfrm>
+      </p:grpSpPr>
+      <p:sp>
+        <p:nvSpPr>
+          <p:cNvPr name="Freeform 2" id="2"/>
+          <p:cNvSpPr/>
+          <p:nvPr/>
+        </p:nvSpPr>
+        <p:spPr>
+          <a:xfrm flipH="false" flipV="false" rot="0">
+            <a:off x="4644143" y="509748"/>
+            <a:ext cx="9623518" cy="9267504"/>
+          </a:xfrm>
+          <a:custGeom>
+            <a:avLst/>
+            <a:gdLst/>
+            <a:ahLst/>
+            <a:cxnLst/>
+            <a:rect r="r" b="b" t="t" l="l"/>
+            <a:pathLst>
+              <a:path h="9267504" w="9623518">
+                <a:moveTo>
+                  <a:pt x="0" y="0"/>
+                </a:moveTo>
+                <a:lnTo>
+                  <a:pt x="9623518" y="0"/>
+                </a:lnTo>
+                <a:lnTo>
+                  <a:pt x="9623518" y="9267504"/>
+                </a:lnTo>
+                <a:lnTo>
+                  <a:pt x="0" y="9267504"/>
+                </a:lnTo>
+                <a:lnTo>
+                  <a:pt x="0" y="0"/>
+                </a:lnTo>
+                <a:close/>
+              </a:path>
+            </a:pathLst>
+          </a:custGeom>
+          <a:blipFill>
+            <a:blip r:embed="rId2"/>
+            <a:stretch>
+              <a:fillRect l="0" t="0" r="0" b="0"/>
+            </a:stretch>
+          </a:blipFill>
+        </p:spPr>
+      </p:sp>
+    </p:spTree>
+  </p:cSld>
+  <p:clrMapOvr>
+    <a:masterClrMapping/>
+  </p:clrMapOvr>
+</p:sld>
+</file>
+
+<file path=ppt/slides/slide39.xml><?xml version="1.0" encoding="utf-8"?>
+<p:sld xmlns:p="http://schemas.openxmlformats.org/presentationml/2006/main" xmlns:a="http://schemas.openxmlformats.org/drawingml/2006/main">
+  <p:cSld>
+    <p:bg>
+      <p:bgPr>
+        <a:solidFill>
+          <a:srgbClr val="1E3A8A"/>
+        </a:solidFill>
+      </p:bgPr>
+    </p:bg>
+    <p:spTree>
+      <p:nvGrpSpPr>
+        <p:cNvPr id="1" name=""/>
+        <p:cNvGrpSpPr/>
+        <p:nvPr/>
+      </p:nvGrpSpPr>
+      <p:grpSpPr>
+        <a:xfrm>
+          <a:off x="0" y="0"/>
+          <a:ext cx="0" cy="0"/>
+          <a:chOff x="0" y="0"/>
+          <a:chExt cx="0" cy="0"/>
+        </a:xfrm>
+      </p:grpSpPr>
+      <p:sp>
+        <p:nvSpPr>
+          <p:cNvPr name="TextBox 2" id="2"/>
+          <p:cNvSpPr txBox="true"/>
+          <p:nvPr/>
+        </p:nvSpPr>
+        <p:spPr>
+          <a:xfrm rot="0">
+            <a:off x="2335702" y="3518218"/>
+            <a:ext cx="13616597" cy="3145790"/>
+          </a:xfrm>
+          <a:prstGeom prst="rect">
+            <a:avLst/>
+          </a:prstGeom>
+        </p:spPr>
+        <p:txBody>
+          <a:bodyPr anchor="t" rtlCol="false" tIns="0" lIns="0" bIns="0" rIns="0">
+            <a:spAutoFit/>
+          </a:bodyPr>
+          <a:lstStyle/>
+          <a:p>
+            <a:pPr algn="l">
+              <a:lnSpc>
+                <a:spcPts val="25180"/>
+              </a:lnSpc>
+            </a:pPr>
+            <a:r>
+              <a:rPr lang="en-US" b="true" sz="20000">
+                <a:solidFill>
+                  <a:srgbClr val="FFFFFF"/>
+                </a:solidFill>
+                <a:latin typeface="Montserrat Bold"/>
+                <a:ea typeface="Montserrat Bold"/>
+                <a:cs typeface="Montserrat Bold"/>
+                <a:sym typeface="Montserrat Bold"/>
+              </a:rPr>
+              <a:t>Obrigado!</a:t>
             </a:r>
           </a:p>
         </p:txBody>

--- a/Apresentacao.pptx
+++ b/Apresentacao.pptx
@@ -3868,7 +3868,7 @@
         </p:nvGrpSpPr>
         <p:grpSpPr>
           <a:xfrm rot="0">
-            <a:off x="9484765" y="2821286"/>
+            <a:off x="9484765" y="2202608"/>
             <a:ext cx="8196855" cy="1348723"/>
             <a:chOff x="0" y="0"/>
             <a:chExt cx="11500046" cy="1892241"/>
@@ -4086,7 +4086,7 @@
         </p:nvSpPr>
         <p:spPr>
           <a:xfrm rot="0">
-            <a:off x="9730890" y="3030103"/>
+            <a:off x="9730890" y="2411424"/>
             <a:ext cx="7835486" cy="838206"/>
           </a:xfrm>
           <a:prstGeom prst="rect">
@@ -4146,7 +4146,7 @@
         </p:nvGrpSpPr>
         <p:grpSpPr>
           <a:xfrm rot="0">
-            <a:off x="10634694" y="4922664"/>
+            <a:off x="9605268" y="6835843"/>
             <a:ext cx="6931682" cy="2465362"/>
             <a:chOff x="0" y="0"/>
             <a:chExt cx="9725030" cy="3458872"/>
@@ -4244,7 +4244,7 @@
         </p:nvSpPr>
         <p:spPr>
           <a:xfrm rot="0">
-            <a:off x="10874921" y="5105400"/>
+            <a:off x="9845494" y="7018579"/>
             <a:ext cx="6453645" cy="2124081"/>
           </a:xfrm>
           <a:prstGeom prst="rect">
@@ -4273,6 +4273,145 @@
                 <a:sym typeface="Montserrat Bold"/>
               </a:rPr>
               <a:t>Mais comum em aplicações web e empresariais. O servidor centraliza a lógica de negócios e dados, enquanto os clientes executam a interface do usúario</a:t>
+            </a:r>
+          </a:p>
+        </p:txBody>
+      </p:sp>
+      <p:grpSp>
+        <p:nvGrpSpPr>
+          <p:cNvPr name="Group 12" id="12"/>
+          <p:cNvGrpSpPr/>
+          <p:nvPr/>
+        </p:nvGrpSpPr>
+        <p:grpSpPr>
+          <a:xfrm rot="0">
+            <a:off x="10327618" y="4075205"/>
+            <a:ext cx="6931682" cy="2465362"/>
+            <a:chOff x="0" y="0"/>
+            <a:chExt cx="9725030" cy="3458872"/>
+          </a:xfrm>
+        </p:grpSpPr>
+        <p:sp>
+          <p:nvSpPr>
+            <p:cNvPr name="Freeform 13" id="13"/>
+            <p:cNvSpPr/>
+            <p:nvPr/>
+          </p:nvSpPr>
+          <p:spPr>
+            <a:xfrm flipH="false" flipV="false" rot="0">
+              <a:off x="0" y="0"/>
+              <a:ext cx="9724951" cy="3458813"/>
+            </a:xfrm>
+            <a:custGeom>
+              <a:avLst/>
+              <a:gdLst/>
+              <a:ahLst/>
+              <a:cxnLst/>
+              <a:rect r="r" b="b" t="t" l="l"/>
+              <a:pathLst>
+                <a:path h="3458813" w="9724951">
+                  <a:moveTo>
+                    <a:pt x="335131" y="0"/>
+                  </a:moveTo>
+                  <a:lnTo>
+                    <a:pt x="9389820" y="0"/>
+                  </a:lnTo>
+                  <a:cubicBezTo>
+                    <a:pt x="9478702" y="0"/>
+                    <a:pt x="9563944" y="35308"/>
+                    <a:pt x="9626793" y="98158"/>
+                  </a:cubicBezTo>
+                  <a:cubicBezTo>
+                    <a:pt x="9689642" y="161007"/>
+                    <a:pt x="9724951" y="246249"/>
+                    <a:pt x="9724951" y="335131"/>
+                  </a:cubicBezTo>
+                  <a:lnTo>
+                    <a:pt x="9724951" y="3123682"/>
+                  </a:lnTo>
+                  <a:cubicBezTo>
+                    <a:pt x="9724951" y="3212564"/>
+                    <a:pt x="9689642" y="3297806"/>
+                    <a:pt x="9626793" y="3360655"/>
+                  </a:cubicBezTo>
+                  <a:cubicBezTo>
+                    <a:pt x="9563944" y="3423505"/>
+                    <a:pt x="9478702" y="3458813"/>
+                    <a:pt x="9389820" y="3458813"/>
+                  </a:cubicBezTo>
+                  <a:lnTo>
+                    <a:pt x="335131" y="3458813"/>
+                  </a:lnTo>
+                  <a:cubicBezTo>
+                    <a:pt x="246249" y="3458813"/>
+                    <a:pt x="161007" y="3423505"/>
+                    <a:pt x="98158" y="3360655"/>
+                  </a:cubicBezTo>
+                  <a:cubicBezTo>
+                    <a:pt x="35308" y="3297806"/>
+                    <a:pt x="0" y="3212564"/>
+                    <a:pt x="0" y="3123682"/>
+                  </a:cubicBezTo>
+                  <a:lnTo>
+                    <a:pt x="0" y="335131"/>
+                  </a:lnTo>
+                  <a:cubicBezTo>
+                    <a:pt x="0" y="246249"/>
+                    <a:pt x="35308" y="161007"/>
+                    <a:pt x="98158" y="98158"/>
+                  </a:cubicBezTo>
+                  <a:cubicBezTo>
+                    <a:pt x="161007" y="35308"/>
+                    <a:pt x="246249" y="0"/>
+                    <a:pt x="335131" y="0"/>
+                  </a:cubicBezTo>
+                  <a:close/>
+                </a:path>
+              </a:pathLst>
+            </a:custGeom>
+            <a:solidFill>
+              <a:srgbClr val="FFFFFF"/>
+            </a:solidFill>
+          </p:spPr>
+        </p:sp>
+      </p:grpSp>
+      <p:sp>
+        <p:nvSpPr>
+          <p:cNvPr name="TextBox 14" id="14"/>
+          <p:cNvSpPr txBox="true"/>
+          <p:nvPr/>
+        </p:nvSpPr>
+        <p:spPr>
+          <a:xfrm rot="0">
+            <a:off x="10573743" y="4226796"/>
+            <a:ext cx="6453645" cy="2124081"/>
+          </a:xfrm>
+          <a:prstGeom prst="rect">
+            <a:avLst/>
+          </a:prstGeom>
+        </p:spPr>
+        <p:txBody>
+          <a:bodyPr anchor="t" rtlCol="false" tIns="0" lIns="0" bIns="0" rIns="0">
+            <a:spAutoFit/>
+          </a:bodyPr>
+          <a:lstStyle/>
+          <a:p>
+            <a:pPr algn="just">
+              <a:lnSpc>
+                <a:spcPts val="3449"/>
+              </a:lnSpc>
+            </a:pPr>
+            <a:r>
+              <a:rPr lang="en-US" b="true" sz="2499">
+                <a:solidFill>
+                  <a:srgbClr val="47423E"/>
+                </a:solidFill>
+                <a:latin typeface="Montserrat Bold"/>
+                <a:ea typeface="Montserrat Bold"/>
+                <a:cs typeface="Montserrat Bold"/>
+                <a:sym typeface="Montserrat Bold"/>
+              </a:rPr>
+              <a:t>Esse modelo funcionava bem para realizar atualizações mais simples em dados e se precisasse exibir informações. Enquanto até cálculos, ficam mais difíceis de implementar</a:t>
             </a:r>
           </a:p>
         </p:txBody>
@@ -4317,10 +4456,10 @@
         </p:nvGrpSpPr>
         <p:grpSpPr>
           <a:xfrm rot="0">
-            <a:off x="579563" y="7556485"/>
-            <a:ext cx="6152288" cy="1665748"/>
+            <a:off x="11306346" y="2876969"/>
+            <a:ext cx="6277910" cy="1705040"/>
             <a:chOff x="0" y="0"/>
-            <a:chExt cx="12370046" cy="3349233"/>
+            <a:chExt cx="12622627" cy="3428235"/>
           </a:xfrm>
         </p:grpSpPr>
         <p:sp>
@@ -4332,7 +4471,7 @@
           <p:spPr>
             <a:xfrm flipH="false" flipV="false" rot="0">
               <a:off x="0" y="0"/>
-              <a:ext cx="12369946" cy="3349175"/>
+              <a:ext cx="12622524" cy="3428176"/>
             </a:xfrm>
             <a:custGeom>
               <a:avLst/>
@@ -4341,61 +4480,46 @@
               <a:cxnLst/>
               <a:rect r="r" b="b" t="t" l="l"/>
               <a:pathLst>
-                <a:path h="3349175" w="12369946">
+                <a:path h="3428176" w="12622524">
                   <a:moveTo>
-                    <a:pt x="377586" y="0"/>
+                    <a:pt x="370031" y="0"/>
                   </a:moveTo>
                   <a:lnTo>
-                    <a:pt x="11992359" y="0"/>
-                  </a:lnTo>
-                  <a:cubicBezTo>
-                    <a:pt x="12092501" y="0"/>
-                    <a:pt x="12188542" y="39781"/>
-                    <a:pt x="12259353" y="110593"/>
-                  </a:cubicBezTo>
-                  <a:cubicBezTo>
-                    <a:pt x="12330164" y="181404"/>
-                    <a:pt x="12369946" y="277444"/>
-                    <a:pt x="12369946" y="377586"/>
-                  </a:cubicBezTo>
-                  <a:lnTo>
-                    <a:pt x="12369946" y="2971589"/>
-                  </a:lnTo>
-                  <a:cubicBezTo>
-                    <a:pt x="12369946" y="3071731"/>
-                    <a:pt x="12330164" y="3167772"/>
-                    <a:pt x="12259353" y="3238583"/>
-                  </a:cubicBezTo>
-                  <a:cubicBezTo>
-                    <a:pt x="12188542" y="3309394"/>
-                    <a:pt x="12092501" y="3349175"/>
-                    <a:pt x="11992359" y="3349175"/>
-                  </a:cubicBezTo>
-                  <a:lnTo>
-                    <a:pt x="377586" y="3349175"/>
-                  </a:lnTo>
-                  <a:cubicBezTo>
-                    <a:pt x="277444" y="3349175"/>
-                    <a:pt x="181404" y="3309394"/>
-                    <a:pt x="110593" y="3238583"/>
-                  </a:cubicBezTo>
-                  <a:cubicBezTo>
-                    <a:pt x="39781" y="3167772"/>
-                    <a:pt x="0" y="3071731"/>
-                    <a:pt x="0" y="2971589"/>
-                  </a:cubicBezTo>
-                  <a:lnTo>
-                    <a:pt x="0" y="377586"/>
-                  </a:lnTo>
-                  <a:cubicBezTo>
-                    <a:pt x="0" y="277444"/>
-                    <a:pt x="39781" y="181404"/>
-                    <a:pt x="110593" y="110593"/>
-                  </a:cubicBezTo>
-                  <a:cubicBezTo>
-                    <a:pt x="181404" y="39781"/>
-                    <a:pt x="277444" y="0"/>
-                    <a:pt x="377586" y="0"/>
+                    <a:pt x="12252493" y="0"/>
+                  </a:lnTo>
+                  <a:cubicBezTo>
+                    <a:pt x="12456856" y="0"/>
+                    <a:pt x="12622524" y="165668"/>
+                    <a:pt x="12622524" y="370031"/>
+                  </a:cubicBezTo>
+                  <a:lnTo>
+                    <a:pt x="12622524" y="3058145"/>
+                  </a:lnTo>
+                  <a:cubicBezTo>
+                    <a:pt x="12622524" y="3156284"/>
+                    <a:pt x="12583539" y="3250402"/>
+                    <a:pt x="12514145" y="3319797"/>
+                  </a:cubicBezTo>
+                  <a:cubicBezTo>
+                    <a:pt x="12444750" y="3389191"/>
+                    <a:pt x="12350631" y="3428176"/>
+                    <a:pt x="12252493" y="3428176"/>
+                  </a:cubicBezTo>
+                  <a:lnTo>
+                    <a:pt x="370031" y="3428176"/>
+                  </a:lnTo>
+                  <a:cubicBezTo>
+                    <a:pt x="165668" y="3428176"/>
+                    <a:pt x="0" y="3262507"/>
+                    <a:pt x="0" y="3058145"/>
+                  </a:cubicBezTo>
+                  <a:lnTo>
+                    <a:pt x="0" y="370031"/>
+                  </a:lnTo>
+                  <a:cubicBezTo>
+                    <a:pt x="0" y="165668"/>
+                    <a:pt x="165668" y="0"/>
+                    <a:pt x="370031" y="0"/>
                   </a:cubicBezTo>
                   <a:close/>
                 </a:path>
@@ -4415,8 +4539,8 @@
         </p:nvSpPr>
         <p:spPr>
           <a:xfrm flipH="false" flipV="false" rot="0">
-            <a:off x="453941" y="2055481"/>
-            <a:ext cx="11749268" cy="4801244"/>
+            <a:off x="356435" y="2876969"/>
+            <a:ext cx="10357693" cy="4232588"/>
           </a:xfrm>
           <a:custGeom>
             <a:avLst/>
@@ -4425,18 +4549,18 @@
             <a:cxnLst/>
             <a:rect r="r" b="b" t="t" l="l"/>
             <a:pathLst>
-              <a:path h="4801244" w="11749268">
+              <a:path h="4232588" w="10357693">
                 <a:moveTo>
                   <a:pt x="0" y="0"/>
                 </a:moveTo>
                 <a:lnTo>
-                  <a:pt x="11749269" y="0"/>
+                  <a:pt x="10357693" y="0"/>
                 </a:lnTo>
                 <a:lnTo>
-                  <a:pt x="11749269" y="4801244"/>
+                  <a:pt x="10357693" y="4232588"/>
                 </a:lnTo>
                 <a:lnTo>
-                  <a:pt x="0" y="4801244"/>
+                  <a:pt x="0" y="4232588"/>
                 </a:lnTo>
                 <a:lnTo>
                   <a:pt x="0" y="0"/>
@@ -4596,7 +4720,7 @@
         </p:nvSpPr>
         <p:spPr>
           <a:xfrm rot="0">
-            <a:off x="688667" y="7704588"/>
+            <a:off x="11541072" y="3025072"/>
             <a:ext cx="5934079" cy="1266831"/>
           </a:xfrm>
           <a:prstGeom prst="rect">
@@ -4637,10 +4761,10 @@
         </p:nvGrpSpPr>
         <p:grpSpPr>
           <a:xfrm rot="0">
-            <a:off x="7625268" y="7560016"/>
-            <a:ext cx="7942031" cy="1313267"/>
+            <a:off x="11700910" y="5457757"/>
+            <a:ext cx="5401675" cy="1704091"/>
             <a:chOff x="0" y="0"/>
-            <a:chExt cx="15968578" cy="2640519"/>
+            <a:chExt cx="10860834" cy="3426328"/>
           </a:xfrm>
         </p:grpSpPr>
         <p:sp>
@@ -4652,7 +4776,7 @@
           <p:spPr>
             <a:xfrm flipH="false" flipV="false" rot="0">
               <a:off x="0" y="0"/>
-              <a:ext cx="15968449" cy="2640473"/>
+              <a:ext cx="10860746" cy="3426269"/>
             </a:xfrm>
             <a:custGeom>
               <a:avLst/>
@@ -4661,61 +4785,41 @@
               <a:cxnLst/>
               <a:rect r="r" b="b" t="t" l="l"/>
               <a:pathLst>
-                <a:path h="2640473" w="15968449">
+                <a:path h="3426269" w="10860746">
                   <a:moveTo>
-                    <a:pt x="292497" y="0"/>
+                    <a:pt x="430056" y="0"/>
                   </a:moveTo>
                   <a:lnTo>
-                    <a:pt x="15675952" y="0"/>
-                  </a:lnTo>
-                  <a:cubicBezTo>
-                    <a:pt x="15753527" y="0"/>
-                    <a:pt x="15827924" y="30817"/>
-                    <a:pt x="15882778" y="85670"/>
-                  </a:cubicBezTo>
-                  <a:cubicBezTo>
-                    <a:pt x="15937632" y="140524"/>
-                    <a:pt x="15968449" y="214922"/>
-                    <a:pt x="15968449" y="292497"/>
-                  </a:cubicBezTo>
-                  <a:lnTo>
-                    <a:pt x="15968449" y="2347976"/>
-                  </a:lnTo>
-                  <a:cubicBezTo>
-                    <a:pt x="15968449" y="2425551"/>
-                    <a:pt x="15937632" y="2499949"/>
-                    <a:pt x="15882778" y="2554803"/>
-                  </a:cubicBezTo>
-                  <a:cubicBezTo>
-                    <a:pt x="15827924" y="2609657"/>
-                    <a:pt x="15753527" y="2640473"/>
-                    <a:pt x="15675952" y="2640473"/>
-                  </a:cubicBezTo>
-                  <a:lnTo>
-                    <a:pt x="292497" y="2640473"/>
-                  </a:lnTo>
-                  <a:cubicBezTo>
-                    <a:pt x="214922" y="2640473"/>
-                    <a:pt x="140524" y="2609657"/>
-                    <a:pt x="85670" y="2554803"/>
-                  </a:cubicBezTo>
-                  <a:cubicBezTo>
-                    <a:pt x="30817" y="2499949"/>
-                    <a:pt x="0" y="2425551"/>
-                    <a:pt x="0" y="2347976"/>
-                  </a:cubicBezTo>
-                  <a:lnTo>
-                    <a:pt x="0" y="292497"/>
-                  </a:lnTo>
-                  <a:cubicBezTo>
-                    <a:pt x="0" y="214922"/>
-                    <a:pt x="30817" y="140524"/>
-                    <a:pt x="85670" y="85670"/>
-                  </a:cubicBezTo>
-                  <a:cubicBezTo>
-                    <a:pt x="140524" y="30817"/>
-                    <a:pt x="214922" y="0"/>
-                    <a:pt x="292497" y="0"/>
+                    <a:pt x="10430690" y="0"/>
+                  </a:lnTo>
+                  <a:cubicBezTo>
+                    <a:pt x="10668203" y="0"/>
+                    <a:pt x="10860746" y="192542"/>
+                    <a:pt x="10860746" y="430056"/>
+                  </a:cubicBezTo>
+                  <a:lnTo>
+                    <a:pt x="10860746" y="2996214"/>
+                  </a:lnTo>
+                  <a:cubicBezTo>
+                    <a:pt x="10860746" y="3233727"/>
+                    <a:pt x="10668203" y="3426269"/>
+                    <a:pt x="10430690" y="3426269"/>
+                  </a:cubicBezTo>
+                  <a:lnTo>
+                    <a:pt x="430056" y="3426269"/>
+                  </a:lnTo>
+                  <a:cubicBezTo>
+                    <a:pt x="192542" y="3426269"/>
+                    <a:pt x="0" y="3233727"/>
+                    <a:pt x="0" y="2996214"/>
+                  </a:cubicBezTo>
+                  <a:lnTo>
+                    <a:pt x="0" y="430056"/>
+                  </a:lnTo>
+                  <a:cubicBezTo>
+                    <a:pt x="0" y="192542"/>
+                    <a:pt x="192542" y="0"/>
+                    <a:pt x="430056" y="0"/>
                   </a:cubicBezTo>
                   <a:close/>
                 </a:path>
@@ -4735,8 +4839,8 @@
         </p:nvSpPr>
         <p:spPr>
           <a:xfrm rot="0">
-            <a:off x="7734372" y="7704557"/>
-            <a:ext cx="7654032" cy="838206"/>
+            <a:off x="11893762" y="5657337"/>
+            <a:ext cx="5015971" cy="1266831"/>
           </a:xfrm>
           <a:prstGeom prst="rect">
             <a:avLst/>
@@ -4764,6 +4868,145 @@
                 <a:sym typeface="Montserrat Bold"/>
               </a:rPr>
               <a:t>Frequentemente utilizada em processamento de dados e pipelines de ETL</a:t>
+            </a:r>
+          </a:p>
+        </p:txBody>
+      </p:sp>
+      <p:grpSp>
+        <p:nvGrpSpPr>
+          <p:cNvPr name="Group 12" id="12"/>
+          <p:cNvGrpSpPr/>
+          <p:nvPr/>
+        </p:nvGrpSpPr>
+        <p:grpSpPr>
+          <a:xfrm rot="0">
+            <a:off x="5285537" y="7799916"/>
+            <a:ext cx="9476058" cy="1704091"/>
+            <a:chOff x="0" y="0"/>
+            <a:chExt cx="19052957" cy="3426328"/>
+          </a:xfrm>
+        </p:grpSpPr>
+        <p:sp>
+          <p:nvSpPr>
+            <p:cNvPr name="Freeform 13" id="13"/>
+            <p:cNvSpPr/>
+            <p:nvPr/>
+          </p:nvSpPr>
+          <p:spPr>
+            <a:xfrm flipH="false" flipV="false" rot="0">
+              <a:off x="0" y="0"/>
+              <a:ext cx="19052803" cy="3426269"/>
+            </a:xfrm>
+            <a:custGeom>
+              <a:avLst/>
+              <a:gdLst/>
+              <a:ahLst/>
+              <a:cxnLst/>
+              <a:rect r="r" b="b" t="t" l="l"/>
+              <a:pathLst>
+                <a:path h="3426269" w="19052803">
+                  <a:moveTo>
+                    <a:pt x="245146" y="0"/>
+                  </a:moveTo>
+                  <a:lnTo>
+                    <a:pt x="18807657" y="0"/>
+                  </a:lnTo>
+                  <a:cubicBezTo>
+                    <a:pt x="18872673" y="0"/>
+                    <a:pt x="18935027" y="25828"/>
+                    <a:pt x="18981001" y="71802"/>
+                  </a:cubicBezTo>
+                  <a:cubicBezTo>
+                    <a:pt x="19026975" y="117776"/>
+                    <a:pt x="19052803" y="180129"/>
+                    <a:pt x="19052803" y="245146"/>
+                  </a:cubicBezTo>
+                  <a:lnTo>
+                    <a:pt x="19052803" y="3181123"/>
+                  </a:lnTo>
+                  <a:cubicBezTo>
+                    <a:pt x="19052803" y="3246140"/>
+                    <a:pt x="19026975" y="3308494"/>
+                    <a:pt x="18981001" y="3354467"/>
+                  </a:cubicBezTo>
+                  <a:cubicBezTo>
+                    <a:pt x="18935027" y="3400441"/>
+                    <a:pt x="18872673" y="3426269"/>
+                    <a:pt x="18807657" y="3426269"/>
+                  </a:cubicBezTo>
+                  <a:lnTo>
+                    <a:pt x="245146" y="3426269"/>
+                  </a:lnTo>
+                  <a:cubicBezTo>
+                    <a:pt x="180129" y="3426269"/>
+                    <a:pt x="117776" y="3400441"/>
+                    <a:pt x="71802" y="3354467"/>
+                  </a:cubicBezTo>
+                  <a:cubicBezTo>
+                    <a:pt x="25828" y="3308494"/>
+                    <a:pt x="0" y="3246140"/>
+                    <a:pt x="0" y="3181123"/>
+                  </a:cubicBezTo>
+                  <a:lnTo>
+                    <a:pt x="0" y="245146"/>
+                  </a:lnTo>
+                  <a:cubicBezTo>
+                    <a:pt x="0" y="180129"/>
+                    <a:pt x="25828" y="117776"/>
+                    <a:pt x="71802" y="71802"/>
+                  </a:cubicBezTo>
+                  <a:cubicBezTo>
+                    <a:pt x="117776" y="25828"/>
+                    <a:pt x="180129" y="0"/>
+                    <a:pt x="245146" y="0"/>
+                  </a:cubicBezTo>
+                  <a:close/>
+                </a:path>
+              </a:pathLst>
+            </a:custGeom>
+            <a:solidFill>
+              <a:srgbClr val="FFFFFF"/>
+            </a:solidFill>
+          </p:spPr>
+        </p:sp>
+      </p:grpSp>
+      <p:sp>
+        <p:nvSpPr>
+          <p:cNvPr name="TextBox 14" id="14"/>
+          <p:cNvSpPr txBox="true"/>
+          <p:nvPr/>
+        </p:nvSpPr>
+        <p:spPr>
+          <a:xfrm rot="0">
+            <a:off x="5681780" y="7999496"/>
+            <a:ext cx="8794676" cy="1266831"/>
+          </a:xfrm>
+          <a:prstGeom prst="rect">
+            <a:avLst/>
+          </a:prstGeom>
+        </p:spPr>
+        <p:txBody>
+          <a:bodyPr anchor="t" rtlCol="false" tIns="0" lIns="0" bIns="0" rIns="0">
+            <a:spAutoFit/>
+          </a:bodyPr>
+          <a:lstStyle/>
+          <a:p>
+            <a:pPr algn="just">
+              <a:lnSpc>
+                <a:spcPts val="3449"/>
+              </a:lnSpc>
+            </a:pPr>
+            <a:r>
+              <a:rPr lang="en-US" b="true" sz="2499">
+                <a:solidFill>
+                  <a:srgbClr val="47423E"/>
+                </a:solidFill>
+                <a:latin typeface="Montserrat Bold"/>
+                <a:ea typeface="Montserrat Bold"/>
+                <a:cs typeface="Montserrat Bold"/>
+                <a:sym typeface="Montserrat Bold"/>
+              </a:rPr>
+              <a:t>Cada componente é independente, pode ser modificado ou substituído sem afetar outros filtros. O que facilita a manutenção  e evolução do sistema</a:t>
             </a:r>
           </a:p>
         </p:txBody>
@@ -4808,7 +5051,7 @@
         </p:nvSpPr>
         <p:spPr>
           <a:xfrm flipH="false" flipV="false" rot="0">
-            <a:off x="235596" y="2630053"/>
+            <a:off x="111664" y="2135572"/>
             <a:ext cx="9354889" cy="5262125"/>
           </a:xfrm>
           <a:custGeom>
@@ -4826,10 +5069,10 @@
                   <a:pt x="9354889" y="0"/>
                 </a:lnTo>
                 <a:lnTo>
-                  <a:pt x="9354889" y="5262124"/>
+                  <a:pt x="9354889" y="5262125"/>
                 </a:lnTo>
                 <a:lnTo>
-                  <a:pt x="0" y="5262124"/>
+                  <a:pt x="0" y="5262125"/>
                 </a:lnTo>
                 <a:lnTo>
                   <a:pt x="0" y="0"/>
@@ -4907,7 +5150,7 @@
         </p:nvGrpSpPr>
         <p:grpSpPr>
           <a:xfrm rot="0">
-            <a:off x="10615363" y="2777956"/>
+            <a:off x="10252455" y="2606752"/>
             <a:ext cx="7352676" cy="1651790"/>
             <a:chOff x="0" y="0"/>
             <a:chExt cx="14783596" cy="3321168"/>
@@ -5067,7 +5310,7 @@
         </p:nvSpPr>
         <p:spPr>
           <a:xfrm rot="0">
-            <a:off x="10805655" y="2951386"/>
+            <a:off x="10442747" y="2780182"/>
             <a:ext cx="6998007" cy="1266831"/>
           </a:xfrm>
           <a:prstGeom prst="rect">
@@ -5108,7 +5351,7 @@
         </p:nvGrpSpPr>
         <p:grpSpPr>
           <a:xfrm rot="0">
-            <a:off x="10615363" y="4953621"/>
+            <a:off x="10279371" y="4885575"/>
             <a:ext cx="7352676" cy="1972824"/>
             <a:chOff x="0" y="0"/>
             <a:chExt cx="14783596" cy="3966655"/>
@@ -5186,7 +5429,7 @@
         </p:nvSpPr>
         <p:spPr>
           <a:xfrm rot="0">
-            <a:off x="10849107" y="5073255"/>
+            <a:off x="10513115" y="5005209"/>
             <a:ext cx="6885188" cy="1695456"/>
           </a:xfrm>
           <a:prstGeom prst="rect">
@@ -5215,6 +5458,125 @@
                 <a:sym typeface="Montserrat Bold"/>
               </a:rPr>
               <a:t>Mais comum em sistemas distribuídos, especialmente em ambientes que necessitam de alta escalabilidade e resistência</a:t>
+            </a:r>
+          </a:p>
+        </p:txBody>
+      </p:sp>
+      <p:grpSp>
+        <p:nvGrpSpPr>
+          <p:cNvPr name="Group 12" id="12"/>
+          <p:cNvGrpSpPr/>
+          <p:nvPr/>
+        </p:nvGrpSpPr>
+        <p:grpSpPr>
+          <a:xfrm rot="0">
+            <a:off x="3088478" y="7626297"/>
+            <a:ext cx="14708538" cy="2270927"/>
+            <a:chOff x="0" y="0"/>
+            <a:chExt cx="29573599" cy="4566036"/>
+          </a:xfrm>
+        </p:grpSpPr>
+        <p:sp>
+          <p:nvSpPr>
+            <p:cNvPr name="Freeform 13" id="13"/>
+            <p:cNvSpPr/>
+            <p:nvPr/>
+          </p:nvSpPr>
+          <p:spPr>
+            <a:xfrm flipH="false" flipV="false" rot="0">
+              <a:off x="0" y="0"/>
+              <a:ext cx="29573358" cy="4565957"/>
+            </a:xfrm>
+            <a:custGeom>
+              <a:avLst/>
+              <a:gdLst/>
+              <a:ahLst/>
+              <a:cxnLst/>
+              <a:rect r="r" b="b" t="t" l="l"/>
+              <a:pathLst>
+                <a:path h="4565957" w="29573358">
+                  <a:moveTo>
+                    <a:pt x="157937" y="0"/>
+                  </a:moveTo>
+                  <a:lnTo>
+                    <a:pt x="29415420" y="0"/>
+                  </a:lnTo>
+                  <a:cubicBezTo>
+                    <a:pt x="29502646" y="0"/>
+                    <a:pt x="29573358" y="70711"/>
+                    <a:pt x="29573358" y="157937"/>
+                  </a:cubicBezTo>
+                  <a:lnTo>
+                    <a:pt x="29573358" y="4408020"/>
+                  </a:lnTo>
+                  <a:cubicBezTo>
+                    <a:pt x="29573358" y="4495247"/>
+                    <a:pt x="29502646" y="4565957"/>
+                    <a:pt x="29415420" y="4565957"/>
+                  </a:cubicBezTo>
+                  <a:lnTo>
+                    <a:pt x="157937" y="4565957"/>
+                  </a:lnTo>
+                  <a:cubicBezTo>
+                    <a:pt x="70711" y="4565957"/>
+                    <a:pt x="0" y="4495247"/>
+                    <a:pt x="0" y="4408020"/>
+                  </a:cubicBezTo>
+                  <a:lnTo>
+                    <a:pt x="0" y="157937"/>
+                  </a:lnTo>
+                  <a:cubicBezTo>
+                    <a:pt x="0" y="70711"/>
+                    <a:pt x="70711" y="0"/>
+                    <a:pt x="157937" y="0"/>
+                  </a:cubicBezTo>
+                  <a:close/>
+                </a:path>
+              </a:pathLst>
+            </a:custGeom>
+            <a:solidFill>
+              <a:srgbClr val="FFFFFF"/>
+            </a:solidFill>
+          </p:spPr>
+        </p:sp>
+      </p:grpSp>
+      <p:sp>
+        <p:nvSpPr>
+          <p:cNvPr name="TextBox 14" id="14"/>
+          <p:cNvSpPr txBox="true"/>
+          <p:nvPr/>
+        </p:nvSpPr>
+        <p:spPr>
+          <a:xfrm rot="0">
+            <a:off x="3238456" y="7883472"/>
+            <a:ext cx="14366674" cy="1695456"/>
+          </a:xfrm>
+          <a:prstGeom prst="rect">
+            <a:avLst/>
+          </a:prstGeom>
+        </p:spPr>
+        <p:txBody>
+          <a:bodyPr anchor="t" rtlCol="false" tIns="0" lIns="0" bIns="0" rIns="0">
+            <a:spAutoFit/>
+          </a:bodyPr>
+          <a:lstStyle/>
+          <a:p>
+            <a:pPr algn="just">
+              <a:lnSpc>
+                <a:spcPts val="3449"/>
+              </a:lnSpc>
+            </a:pPr>
+            <a:r>
+              <a:rPr lang="en-US" b="true" sz="2499">
+                <a:solidFill>
+                  <a:srgbClr val="47423E"/>
+                </a:solidFill>
+                <a:latin typeface="Montserrat Bold"/>
+                <a:ea typeface="Montserrat Bold"/>
+                <a:cs typeface="Montserrat Bold"/>
+                <a:sym typeface="Montserrat Bold"/>
+              </a:rPr>
+              <a:t>O acoplamento fraco permite uma maior agilidade. Os microsserviços podem ser dimensionados de forma idependente, falhas nao afetam outros serviços e reduz a complexidade de fluxo de trabalho. Os eventos podem ser armazenados em buffers e registrados de maneira flexivel. Os eventos baseados em push operam em tempo real.</a:t>
             </a:r>
           </a:p>
         </p:txBody>
@@ -5538,7 +5900,7 @@
         </p:nvSpPr>
         <p:spPr>
           <a:xfrm rot="0">
-            <a:off x="10805655" y="2838869"/>
+            <a:off x="10822447" y="2882083"/>
             <a:ext cx="6732805" cy="1695456"/>
           </a:xfrm>
           <a:prstGeom prst="rect">
@@ -5579,7 +5941,7 @@
         </p:nvGrpSpPr>
         <p:grpSpPr>
           <a:xfrm rot="0">
-            <a:off x="10538333" y="4954520"/>
+            <a:off x="10555125" y="5358922"/>
             <a:ext cx="7267449" cy="1753631"/>
             <a:chOff x="0" y="0"/>
             <a:chExt cx="11500046" cy="2774964"/>
@@ -5677,7 +6039,7 @@
         </p:nvSpPr>
         <p:spPr>
           <a:xfrm rot="0">
-            <a:off x="10805655" y="5105400"/>
+            <a:off x="10822447" y="5509801"/>
             <a:ext cx="6732805" cy="1266831"/>
           </a:xfrm>
           <a:prstGeom prst="rect">
@@ -5706,6 +6068,125 @@
                 <a:sym typeface="Montserrat Bold"/>
               </a:rPr>
               <a:t>A escolha para sistemas que precisam escalar horizontalmente sem centralizar a carga de trabalho</a:t>
+            </a:r>
+          </a:p>
+        </p:txBody>
+      </p:sp>
+      <p:grpSp>
+        <p:nvGrpSpPr>
+          <p:cNvPr name="Group 12" id="12"/>
+          <p:cNvGrpSpPr/>
+          <p:nvPr/>
+        </p:nvGrpSpPr>
+        <p:grpSpPr>
+          <a:xfrm rot="0">
+            <a:off x="4873250" y="7900938"/>
+            <a:ext cx="11468806" cy="1753631"/>
+            <a:chOff x="0" y="0"/>
+            <a:chExt cx="18148293" cy="2774964"/>
+          </a:xfrm>
+        </p:grpSpPr>
+        <p:sp>
+          <p:nvSpPr>
+            <p:cNvPr name="Freeform 13" id="13"/>
+            <p:cNvSpPr/>
+            <p:nvPr/>
+          </p:nvSpPr>
+          <p:spPr>
+            <a:xfrm flipH="false" flipV="false" rot="0">
+              <a:off x="0" y="0"/>
+              <a:ext cx="18148145" cy="2774916"/>
+            </a:xfrm>
+            <a:custGeom>
+              <a:avLst/>
+              <a:gdLst/>
+              <a:ahLst/>
+              <a:cxnLst/>
+              <a:rect r="r" b="b" t="t" l="l"/>
+              <a:pathLst>
+                <a:path h="2774916" w="18148145">
+                  <a:moveTo>
+                    <a:pt x="202551" y="0"/>
+                  </a:moveTo>
+                  <a:lnTo>
+                    <a:pt x="17945595" y="0"/>
+                  </a:lnTo>
+                  <a:cubicBezTo>
+                    <a:pt x="18057461" y="0"/>
+                    <a:pt x="18148145" y="90685"/>
+                    <a:pt x="18148145" y="202551"/>
+                  </a:cubicBezTo>
+                  <a:lnTo>
+                    <a:pt x="18148145" y="2572365"/>
+                  </a:lnTo>
+                  <a:cubicBezTo>
+                    <a:pt x="18148145" y="2684231"/>
+                    <a:pt x="18057461" y="2774916"/>
+                    <a:pt x="17945595" y="2774916"/>
+                  </a:cubicBezTo>
+                  <a:lnTo>
+                    <a:pt x="202551" y="2774916"/>
+                  </a:lnTo>
+                  <a:cubicBezTo>
+                    <a:pt x="90685" y="2774916"/>
+                    <a:pt x="0" y="2684231"/>
+                    <a:pt x="0" y="2572365"/>
+                  </a:cubicBezTo>
+                  <a:lnTo>
+                    <a:pt x="0" y="202551"/>
+                  </a:lnTo>
+                  <a:cubicBezTo>
+                    <a:pt x="0" y="90685"/>
+                    <a:pt x="90685" y="0"/>
+                    <a:pt x="202551" y="0"/>
+                  </a:cubicBezTo>
+                  <a:close/>
+                </a:path>
+              </a:pathLst>
+            </a:custGeom>
+            <a:solidFill>
+              <a:srgbClr val="FFFFFF"/>
+            </a:solidFill>
+          </p:spPr>
+        </p:sp>
+      </p:grpSp>
+      <p:sp>
+        <p:nvSpPr>
+          <p:cNvPr name="TextBox 14" id="14"/>
+          <p:cNvSpPr txBox="true"/>
+          <p:nvPr/>
+        </p:nvSpPr>
+        <p:spPr>
+          <a:xfrm rot="0">
+            <a:off x="5129026" y="8125288"/>
+            <a:ext cx="10852534" cy="1266831"/>
+          </a:xfrm>
+          <a:prstGeom prst="rect">
+            <a:avLst/>
+          </a:prstGeom>
+        </p:spPr>
+        <p:txBody>
+          <a:bodyPr anchor="t" rtlCol="false" tIns="0" lIns="0" bIns="0" rIns="0">
+            <a:spAutoFit/>
+          </a:bodyPr>
+          <a:lstStyle/>
+          <a:p>
+            <a:pPr algn="just">
+              <a:lnSpc>
+                <a:spcPts val="3449"/>
+              </a:lnSpc>
+            </a:pPr>
+            <a:r>
+              <a:rPr lang="en-US" b="true" sz="2499">
+                <a:solidFill>
+                  <a:srgbClr val="47423E"/>
+                </a:solidFill>
+                <a:latin typeface="Montserrat Bold"/>
+                <a:ea typeface="Montserrat Bold"/>
+                <a:cs typeface="Montserrat Bold"/>
+                <a:sym typeface="Montserrat Bold"/>
+              </a:rPr>
+              <a:t>Perde seu banco de dados central e no lugar são utilizados grids de dados replicados em memória. Com serviços replicando banco de dados com o mesmo nome para outros serviçoes</a:t>
             </a:r>
           </a:p>
         </p:txBody>
@@ -6070,7 +6551,7 @@
         </p:nvGrpSpPr>
         <p:grpSpPr>
           <a:xfrm rot="0">
-            <a:off x="9444002" y="4971991"/>
+            <a:off x="9625456" y="5695054"/>
             <a:ext cx="7153041" cy="2655806"/>
             <a:chOff x="0" y="0"/>
             <a:chExt cx="11659305" cy="4328922"/>
@@ -6148,7 +6629,7 @@
         </p:nvSpPr>
         <p:spPr>
           <a:xfrm rot="0">
-            <a:off x="9744848" y="5218804"/>
+            <a:off x="9926302" y="5941867"/>
             <a:ext cx="6453645" cy="2124081"/>
           </a:xfrm>
           <a:prstGeom prst="rect">

--- a/Apresentacao.pptx
+++ b/Apresentacao.pptx
@@ -44,25 +44,26 @@
     <p:sldId id="292" r:id="rId42"/>
     <p:sldId id="293" r:id="rId43"/>
     <p:sldId id="294" r:id="rId44"/>
+    <p:sldId id="295" r:id="rId45"/>
   </p:sldIdLst>
   <p:sldSz cx="18288000" cy="10287000"/>
   <p:notesSz cx="6858000" cy="9144000"/>
   <p:embeddedFontLst>
     <p:embeddedFont>
       <p:font typeface="Anton" charset="1" panose="00000500000000000000"/>
-      <p:regular r:id="rId45"/>
+      <p:regular r:id="rId46"/>
     </p:embeddedFont>
     <p:embeddedFont>
       <p:font typeface="Montserrat Bold" charset="1" panose="00000800000000000000"/>
-      <p:regular r:id="rId46"/>
+      <p:regular r:id="rId47"/>
     </p:embeddedFont>
     <p:embeddedFont>
       <p:font typeface="Montserrat" charset="1" panose="00000500000000000000"/>
-      <p:regular r:id="rId47"/>
+      <p:regular r:id="rId48"/>
     </p:embeddedFont>
     <p:embeddedFont>
       <p:font typeface="Montserrat Medium" charset="1" panose="00000600000000000000"/>
-      <p:regular r:id="rId48"/>
+      <p:regular r:id="rId49"/>
     </p:embeddedFont>
   </p:embeddedFontLst>
   <p:defaultTextStyle>
@@ -13905,7 +13906,7 @@
                 <a:cs typeface="Montserrat"/>
                 <a:sym typeface="Montserrat"/>
               </a:rPr>
-              <a:t>Tera um exemplo e leve resumo de cada uma arquiteturas. </a:t>
+              <a:t>Tera um exemplo, meio guia dos 3 modelos.</a:t>
             </a:r>
           </a:p>
           <a:p>
@@ -14193,8 +14194,8 @@
         </p:nvSpPr>
         <p:spPr>
           <a:xfrm flipH="false" flipV="false" rot="0">
-            <a:off x="266228" y="2227353"/>
-            <a:ext cx="17755545" cy="5149108"/>
+            <a:off x="5341721" y="1377292"/>
+            <a:ext cx="10118851" cy="8318462"/>
           </a:xfrm>
           <a:custGeom>
             <a:avLst/>
@@ -14203,18 +14204,18 @@
             <a:cxnLst/>
             <a:rect r="r" b="b" t="t" l="l"/>
             <a:pathLst>
-              <a:path h="5149108" w="17755545">
+              <a:path h="8318462" w="10118851">
                 <a:moveTo>
                   <a:pt x="0" y="0"/>
                 </a:moveTo>
                 <a:lnTo>
-                  <a:pt x="17755544" y="0"/>
+                  <a:pt x="10118851" y="0"/>
                 </a:lnTo>
                 <a:lnTo>
-                  <a:pt x="17755544" y="5149108"/>
+                  <a:pt x="10118851" y="8318462"/>
                 </a:lnTo>
                 <a:lnTo>
-                  <a:pt x="0" y="5149108"/>
+                  <a:pt x="0" y="8318462"/>
                 </a:lnTo>
                 <a:lnTo>
                   <a:pt x="0" y="0"/>
@@ -14231,236 +14232,47 @@
           </a:blipFill>
         </p:spPr>
       </p:sp>
-      <p:grpSp>
-        <p:nvGrpSpPr>
-          <p:cNvPr name="Group 3" id="3"/>
-          <p:cNvGrpSpPr/>
+      <p:sp>
+        <p:nvSpPr>
+          <p:cNvPr name="TextBox 3" id="3"/>
+          <p:cNvSpPr txBox="true"/>
           <p:nvPr/>
-        </p:nvGrpSpPr>
-        <p:grpSpPr>
+        </p:nvSpPr>
+        <p:spPr>
           <a:xfrm rot="0">
-            <a:off x="621952" y="3823778"/>
-            <a:ext cx="16960349" cy="3086100"/>
-            <a:chOff x="0" y="0"/>
-            <a:chExt cx="4466923" cy="812800"/>
+            <a:off x="1028700" y="904875"/>
+            <a:ext cx="3474433" cy="2422525"/>
           </a:xfrm>
-        </p:grpSpPr>
-        <p:sp>
-          <p:nvSpPr>
-            <p:cNvPr name="Freeform 4" id="4"/>
-            <p:cNvSpPr/>
-            <p:nvPr/>
-          </p:nvSpPr>
-          <p:spPr>
-            <a:xfrm flipH="false" flipV="false" rot="0">
-              <a:off x="0" y="0"/>
-              <a:ext cx="4466923" cy="812800"/>
-            </a:xfrm>
-            <a:custGeom>
-              <a:avLst/>
-              <a:gdLst/>
-              <a:ahLst/>
-              <a:cxnLst/>
-              <a:rect r="r" b="b" t="t" l="l"/>
-              <a:pathLst>
-                <a:path h="812800" w="4466923">
-                  <a:moveTo>
-                    <a:pt x="7760" y="0"/>
-                  </a:moveTo>
-                  <a:lnTo>
-                    <a:pt x="4459163" y="0"/>
-                  </a:lnTo>
-                  <a:cubicBezTo>
-                    <a:pt x="4461221" y="0"/>
-                    <a:pt x="4463195" y="818"/>
-                    <a:pt x="4464650" y="2273"/>
-                  </a:cubicBezTo>
-                  <a:cubicBezTo>
-                    <a:pt x="4466106" y="3728"/>
-                    <a:pt x="4466923" y="5702"/>
-                    <a:pt x="4466923" y="7760"/>
-                  </a:cubicBezTo>
-                  <a:lnTo>
-                    <a:pt x="4466923" y="805040"/>
-                  </a:lnTo>
-                  <a:cubicBezTo>
-                    <a:pt x="4466923" y="807098"/>
-                    <a:pt x="4466106" y="809072"/>
-                    <a:pt x="4464650" y="810527"/>
-                  </a:cubicBezTo>
-                  <a:cubicBezTo>
-                    <a:pt x="4463195" y="811982"/>
-                    <a:pt x="4461221" y="812800"/>
-                    <a:pt x="4459163" y="812800"/>
-                  </a:cubicBezTo>
-                  <a:lnTo>
-                    <a:pt x="7760" y="812800"/>
-                  </a:lnTo>
-                  <a:cubicBezTo>
-                    <a:pt x="5702" y="812800"/>
-                    <a:pt x="3728" y="811982"/>
-                    <a:pt x="2273" y="810527"/>
-                  </a:cubicBezTo>
-                  <a:cubicBezTo>
-                    <a:pt x="818" y="809072"/>
-                    <a:pt x="0" y="807098"/>
-                    <a:pt x="0" y="805040"/>
-                  </a:cubicBezTo>
-                  <a:lnTo>
-                    <a:pt x="0" y="7760"/>
-                  </a:lnTo>
-                  <a:cubicBezTo>
-                    <a:pt x="0" y="5702"/>
-                    <a:pt x="818" y="3728"/>
-                    <a:pt x="2273" y="2273"/>
-                  </a:cubicBezTo>
-                  <a:cubicBezTo>
-                    <a:pt x="3728" y="818"/>
-                    <a:pt x="5702" y="0"/>
-                    <a:pt x="7760" y="0"/>
-                  </a:cubicBezTo>
-                  <a:close/>
-                </a:path>
-              </a:pathLst>
-            </a:custGeom>
-            <a:solidFill>
-              <a:srgbClr val="233D89"/>
-            </a:solidFill>
-          </p:spPr>
-        </p:sp>
-        <p:sp>
-          <p:nvSpPr>
-            <p:cNvPr name="TextBox 5" id="5"/>
-            <p:cNvSpPr txBox="true"/>
-            <p:nvPr/>
-          </p:nvSpPr>
-          <p:spPr>
-            <a:xfrm>
-              <a:off x="0" y="-38100"/>
-              <a:ext cx="4466923" cy="850900"/>
-            </a:xfrm>
-            <a:prstGeom prst="rect">
-              <a:avLst/>
-            </a:prstGeom>
-          </p:spPr>
-          <p:txBody>
-            <a:bodyPr anchor="ctr" rtlCol="false" tIns="50800" lIns="50800" bIns="50800" rIns="50800"/>
-            <a:lstStyle/>
-            <a:p>
-              <a:pPr algn="ctr">
-                <a:lnSpc>
-                  <a:spcPts val="3449"/>
-                </a:lnSpc>
-              </a:pPr>
-            </a:p>
-          </p:txBody>
-        </p:sp>
-      </p:grpSp>
-      <p:grpSp>
-        <p:nvGrpSpPr>
-          <p:cNvPr name="Group 6" id="6"/>
-          <p:cNvGrpSpPr/>
-          <p:nvPr/>
-        </p:nvGrpSpPr>
-        <p:grpSpPr>
-          <a:xfrm rot="0">
-            <a:off x="7027534" y="2929328"/>
-            <a:ext cx="10776956" cy="3086100"/>
-            <a:chOff x="0" y="0"/>
-            <a:chExt cx="2838375" cy="812800"/>
-          </a:xfrm>
-        </p:grpSpPr>
-        <p:sp>
-          <p:nvSpPr>
-            <p:cNvPr name="Freeform 7" id="7"/>
-            <p:cNvSpPr/>
-            <p:nvPr/>
-          </p:nvSpPr>
-          <p:spPr>
-            <a:xfrm flipH="false" flipV="false" rot="0">
-              <a:off x="0" y="0"/>
-              <a:ext cx="2838375" cy="812800"/>
-            </a:xfrm>
-            <a:custGeom>
-              <a:avLst/>
-              <a:gdLst/>
-              <a:ahLst/>
-              <a:cxnLst/>
-              <a:rect r="r" b="b" t="t" l="l"/>
-              <a:pathLst>
-                <a:path h="812800" w="2838375">
-                  <a:moveTo>
-                    <a:pt x="12212" y="0"/>
-                  </a:moveTo>
-                  <a:lnTo>
-                    <a:pt x="2826163" y="0"/>
-                  </a:lnTo>
-                  <a:cubicBezTo>
-                    <a:pt x="2832908" y="0"/>
-                    <a:pt x="2838375" y="5468"/>
-                    <a:pt x="2838375" y="12212"/>
-                  </a:cubicBezTo>
-                  <a:lnTo>
-                    <a:pt x="2838375" y="800588"/>
-                  </a:lnTo>
-                  <a:cubicBezTo>
-                    <a:pt x="2838375" y="807332"/>
-                    <a:pt x="2832908" y="812800"/>
-                    <a:pt x="2826163" y="812800"/>
-                  </a:cubicBezTo>
-                  <a:lnTo>
-                    <a:pt x="12212" y="812800"/>
-                  </a:lnTo>
-                  <a:cubicBezTo>
-                    <a:pt x="5468" y="812800"/>
-                    <a:pt x="0" y="807332"/>
-                    <a:pt x="0" y="800588"/>
-                  </a:cubicBezTo>
-                  <a:lnTo>
-                    <a:pt x="0" y="12212"/>
-                  </a:lnTo>
-                  <a:cubicBezTo>
-                    <a:pt x="0" y="5468"/>
-                    <a:pt x="5468" y="0"/>
-                    <a:pt x="12212" y="0"/>
-                  </a:cubicBezTo>
-                  <a:close/>
-                </a:path>
-              </a:pathLst>
-            </a:custGeom>
-            <a:solidFill>
-              <a:srgbClr val="233D89"/>
-            </a:solidFill>
-          </p:spPr>
-        </p:sp>
-        <p:sp>
-          <p:nvSpPr>
-            <p:cNvPr name="TextBox 8" id="8"/>
-            <p:cNvSpPr txBox="true"/>
-            <p:nvPr/>
-          </p:nvSpPr>
-          <p:spPr>
-            <a:xfrm>
-              <a:off x="0" y="-38100"/>
-              <a:ext cx="2838375" cy="850900"/>
-            </a:xfrm>
-            <a:prstGeom prst="rect">
-              <a:avLst/>
-            </a:prstGeom>
-          </p:spPr>
-          <p:txBody>
-            <a:bodyPr anchor="ctr" rtlCol="false" tIns="50800" lIns="50800" bIns="50800" rIns="50800"/>
-            <a:lstStyle/>
-            <a:p>
-              <a:pPr algn="ctr">
-                <a:lnSpc>
-                  <a:spcPts val="3449"/>
-                </a:lnSpc>
-              </a:pPr>
-            </a:p>
-          </p:txBody>
-        </p:sp>
-      </p:grpSp>
+          <a:prstGeom prst="rect">
+            <a:avLst/>
+          </a:prstGeom>
+        </p:spPr>
+        <p:txBody>
+          <a:bodyPr anchor="t" rtlCol="false" tIns="0" lIns="0" bIns="0" rIns="0">
+            <a:spAutoFit/>
+          </a:bodyPr>
+          <a:lstStyle/>
+          <a:p>
+            <a:pPr algn="ctr">
+              <a:lnSpc>
+                <a:spcPts val="9799"/>
+              </a:lnSpc>
+            </a:pPr>
+            <a:r>
+              <a:rPr lang="en-US" sz="6999">
+                <a:solidFill>
+                  <a:srgbClr val="FFFFFF"/>
+                </a:solidFill>
+                <a:latin typeface="Anton"/>
+                <a:ea typeface="Anton"/>
+                <a:cs typeface="Anton"/>
+                <a:sym typeface="Anton"/>
+              </a:rPr>
+              <a:t>Exemplos:</a:t>
+            </a:r>
+          </a:p>
+        </p:txBody>
+      </p:sp>
     </p:spTree>
   </p:cSld>
   <p:clrMapOvr>
@@ -15055,7 +14867,7 @@
         </p:nvSpPr>
         <p:spPr>
           <a:xfrm flipH="false" flipV="false" rot="0">
-            <a:off x="266228" y="2227353"/>
+            <a:off x="266228" y="4109192"/>
             <a:ext cx="17755545" cy="5149108"/>
           </a:xfrm>
           <a:custGeom>
@@ -15101,10 +14913,10 @@
         </p:nvGrpSpPr>
         <p:grpSpPr>
           <a:xfrm rot="0">
-            <a:off x="621952" y="3823778"/>
-            <a:ext cx="16960349" cy="3086100"/>
+            <a:off x="646563" y="5840027"/>
+            <a:ext cx="16994873" cy="3086100"/>
             <a:chOff x="0" y="0"/>
-            <a:chExt cx="4466923" cy="812800"/>
+            <a:chExt cx="4476016" cy="812800"/>
           </a:xfrm>
         </p:grpSpPr>
         <p:sp>
@@ -15116,7 +14928,7 @@
           <p:spPr>
             <a:xfrm flipH="false" flipV="false" rot="0">
               <a:off x="0" y="0"/>
-              <a:ext cx="4466923" cy="812800"/>
+              <a:ext cx="4476016" cy="812800"/>
             </a:xfrm>
             <a:custGeom>
               <a:avLst/>
@@ -15125,61 +14937,61 @@
               <a:cxnLst/>
               <a:rect r="r" b="b" t="t" l="l"/>
               <a:pathLst>
-                <a:path h="812800" w="4466923">
+                <a:path h="812800" w="4476016">
                   <a:moveTo>
-                    <a:pt x="7760" y="0"/>
+                    <a:pt x="7744" y="0"/>
                   </a:moveTo>
                   <a:lnTo>
-                    <a:pt x="4459163" y="0"/>
-                  </a:lnTo>
-                  <a:cubicBezTo>
-                    <a:pt x="4461221" y="0"/>
-                    <a:pt x="4463195" y="818"/>
-                    <a:pt x="4464650" y="2273"/>
-                  </a:cubicBezTo>
-                  <a:cubicBezTo>
-                    <a:pt x="4466106" y="3728"/>
-                    <a:pt x="4466923" y="5702"/>
-                    <a:pt x="4466923" y="7760"/>
-                  </a:cubicBezTo>
-                  <a:lnTo>
-                    <a:pt x="4466923" y="805040"/>
-                  </a:lnTo>
-                  <a:cubicBezTo>
-                    <a:pt x="4466923" y="807098"/>
-                    <a:pt x="4466106" y="809072"/>
-                    <a:pt x="4464650" y="810527"/>
-                  </a:cubicBezTo>
-                  <a:cubicBezTo>
-                    <a:pt x="4463195" y="811982"/>
-                    <a:pt x="4461221" y="812800"/>
-                    <a:pt x="4459163" y="812800"/>
-                  </a:cubicBezTo>
-                  <a:lnTo>
-                    <a:pt x="7760" y="812800"/>
-                  </a:lnTo>
-                  <a:cubicBezTo>
-                    <a:pt x="5702" y="812800"/>
-                    <a:pt x="3728" y="811982"/>
-                    <a:pt x="2273" y="810527"/>
-                  </a:cubicBezTo>
-                  <a:cubicBezTo>
-                    <a:pt x="818" y="809072"/>
-                    <a:pt x="0" y="807098"/>
-                    <a:pt x="0" y="805040"/>
-                  </a:cubicBezTo>
-                  <a:lnTo>
-                    <a:pt x="0" y="7760"/>
-                  </a:lnTo>
-                  <a:cubicBezTo>
-                    <a:pt x="0" y="5702"/>
-                    <a:pt x="818" y="3728"/>
-                    <a:pt x="2273" y="2273"/>
-                  </a:cubicBezTo>
-                  <a:cubicBezTo>
-                    <a:pt x="3728" y="818"/>
-                    <a:pt x="5702" y="0"/>
-                    <a:pt x="7760" y="0"/>
+                    <a:pt x="4468272" y="0"/>
+                  </a:lnTo>
+                  <a:cubicBezTo>
+                    <a:pt x="4470326" y="0"/>
+                    <a:pt x="4472295" y="816"/>
+                    <a:pt x="4473748" y="2268"/>
+                  </a:cubicBezTo>
+                  <a:cubicBezTo>
+                    <a:pt x="4475200" y="3721"/>
+                    <a:pt x="4476016" y="5690"/>
+                    <a:pt x="4476016" y="7744"/>
+                  </a:cubicBezTo>
+                  <a:lnTo>
+                    <a:pt x="4476016" y="805056"/>
+                  </a:lnTo>
+                  <a:cubicBezTo>
+                    <a:pt x="4476016" y="807110"/>
+                    <a:pt x="4475200" y="809079"/>
+                    <a:pt x="4473748" y="810532"/>
+                  </a:cubicBezTo>
+                  <a:cubicBezTo>
+                    <a:pt x="4472295" y="811984"/>
+                    <a:pt x="4470326" y="812800"/>
+                    <a:pt x="4468272" y="812800"/>
+                  </a:cubicBezTo>
+                  <a:lnTo>
+                    <a:pt x="7744" y="812800"/>
+                  </a:lnTo>
+                  <a:cubicBezTo>
+                    <a:pt x="5690" y="812800"/>
+                    <a:pt x="3721" y="811984"/>
+                    <a:pt x="2268" y="810532"/>
+                  </a:cubicBezTo>
+                  <a:cubicBezTo>
+                    <a:pt x="816" y="809079"/>
+                    <a:pt x="0" y="807110"/>
+                    <a:pt x="0" y="805056"/>
+                  </a:cubicBezTo>
+                  <a:lnTo>
+                    <a:pt x="0" y="7744"/>
+                  </a:lnTo>
+                  <a:cubicBezTo>
+                    <a:pt x="0" y="5690"/>
+                    <a:pt x="816" y="3721"/>
+                    <a:pt x="2268" y="2268"/>
+                  </a:cubicBezTo>
+                  <a:cubicBezTo>
+                    <a:pt x="3721" y="816"/>
+                    <a:pt x="5690" y="0"/>
+                    <a:pt x="7744" y="0"/>
                   </a:cubicBezTo>
                   <a:close/>
                 </a:path>
@@ -15199,7 +15011,7 @@
           <p:spPr>
             <a:xfrm>
               <a:off x="0" y="-38100"/>
-              <a:ext cx="4466923" cy="850900"/>
+              <a:ext cx="4476016" cy="850900"/>
             </a:xfrm>
             <a:prstGeom prst="rect">
               <a:avLst/>
@@ -15226,10 +15038,10 @@
         </p:nvGrpSpPr>
         <p:grpSpPr>
           <a:xfrm rot="0">
-            <a:off x="11563883" y="2957244"/>
-            <a:ext cx="6324355" cy="3086100"/>
+            <a:off x="7345264" y="4109192"/>
+            <a:ext cx="10296173" cy="3086100"/>
             <a:chOff x="0" y="0"/>
-            <a:chExt cx="1665674" cy="812800"/>
+            <a:chExt cx="2711749" cy="812800"/>
           </a:xfrm>
         </p:grpSpPr>
         <p:sp>
@@ -15241,7 +15053,7 @@
           <p:spPr>
             <a:xfrm flipH="false" flipV="false" rot="0">
               <a:off x="0" y="0"/>
-              <a:ext cx="1665674" cy="812800"/>
+              <a:ext cx="2711749" cy="812800"/>
             </a:xfrm>
             <a:custGeom>
               <a:avLst/>
@@ -15250,61 +15062,61 @@
               <a:cxnLst/>
               <a:rect r="r" b="b" t="t" l="l"/>
               <a:pathLst>
-                <a:path h="812800" w="1665674">
+                <a:path h="812800" w="2711749">
                   <a:moveTo>
-                    <a:pt x="20810" y="0"/>
+                    <a:pt x="12783" y="0"/>
                   </a:moveTo>
                   <a:lnTo>
-                    <a:pt x="1644863" y="0"/>
-                  </a:lnTo>
-                  <a:cubicBezTo>
-                    <a:pt x="1650383" y="0"/>
-                    <a:pt x="1655676" y="2193"/>
-                    <a:pt x="1659579" y="6095"/>
-                  </a:cubicBezTo>
-                  <a:cubicBezTo>
-                    <a:pt x="1663481" y="9998"/>
-                    <a:pt x="1665674" y="15291"/>
-                    <a:pt x="1665674" y="20810"/>
-                  </a:cubicBezTo>
-                  <a:lnTo>
-                    <a:pt x="1665674" y="791990"/>
-                  </a:lnTo>
-                  <a:cubicBezTo>
-                    <a:pt x="1665674" y="797509"/>
-                    <a:pt x="1663481" y="802802"/>
-                    <a:pt x="1659579" y="806705"/>
-                  </a:cubicBezTo>
-                  <a:cubicBezTo>
-                    <a:pt x="1655676" y="810607"/>
-                    <a:pt x="1650383" y="812800"/>
-                    <a:pt x="1644863" y="812800"/>
-                  </a:cubicBezTo>
-                  <a:lnTo>
-                    <a:pt x="20810" y="812800"/>
-                  </a:lnTo>
-                  <a:cubicBezTo>
-                    <a:pt x="15291" y="812800"/>
-                    <a:pt x="9998" y="810607"/>
-                    <a:pt x="6095" y="806705"/>
-                  </a:cubicBezTo>
-                  <a:cubicBezTo>
-                    <a:pt x="2193" y="802802"/>
-                    <a:pt x="0" y="797509"/>
-                    <a:pt x="0" y="791990"/>
-                  </a:cubicBezTo>
-                  <a:lnTo>
-                    <a:pt x="0" y="20810"/>
-                  </a:lnTo>
-                  <a:cubicBezTo>
-                    <a:pt x="0" y="15291"/>
-                    <a:pt x="2193" y="9998"/>
-                    <a:pt x="6095" y="6095"/>
-                  </a:cubicBezTo>
-                  <a:cubicBezTo>
-                    <a:pt x="9998" y="2193"/>
-                    <a:pt x="15291" y="0"/>
-                    <a:pt x="20810" y="0"/>
+                    <a:pt x="2698966" y="0"/>
+                  </a:lnTo>
+                  <a:cubicBezTo>
+                    <a:pt x="2702357" y="0"/>
+                    <a:pt x="2705608" y="1347"/>
+                    <a:pt x="2708005" y="3744"/>
+                  </a:cubicBezTo>
+                  <a:cubicBezTo>
+                    <a:pt x="2710402" y="6141"/>
+                    <a:pt x="2711749" y="9392"/>
+                    <a:pt x="2711749" y="12783"/>
+                  </a:cubicBezTo>
+                  <a:lnTo>
+                    <a:pt x="2711749" y="800017"/>
+                  </a:lnTo>
+                  <a:cubicBezTo>
+                    <a:pt x="2711749" y="803408"/>
+                    <a:pt x="2710402" y="806659"/>
+                    <a:pt x="2708005" y="809056"/>
+                  </a:cubicBezTo>
+                  <a:cubicBezTo>
+                    <a:pt x="2705608" y="811453"/>
+                    <a:pt x="2702357" y="812800"/>
+                    <a:pt x="2698966" y="812800"/>
+                  </a:cubicBezTo>
+                  <a:lnTo>
+                    <a:pt x="12783" y="812800"/>
+                  </a:lnTo>
+                  <a:cubicBezTo>
+                    <a:pt x="9392" y="812800"/>
+                    <a:pt x="6141" y="811453"/>
+                    <a:pt x="3744" y="809056"/>
+                  </a:cubicBezTo>
+                  <a:cubicBezTo>
+                    <a:pt x="1347" y="806659"/>
+                    <a:pt x="0" y="803408"/>
+                    <a:pt x="0" y="800017"/>
+                  </a:cubicBezTo>
+                  <a:lnTo>
+                    <a:pt x="0" y="12783"/>
+                  </a:lnTo>
+                  <a:cubicBezTo>
+                    <a:pt x="0" y="9392"/>
+                    <a:pt x="1347" y="6141"/>
+                    <a:pt x="3744" y="3744"/>
+                  </a:cubicBezTo>
+                  <a:cubicBezTo>
+                    <a:pt x="6141" y="1347"/>
+                    <a:pt x="9392" y="0"/>
+                    <a:pt x="12783" y="0"/>
                   </a:cubicBezTo>
                   <a:close/>
                 </a:path>
@@ -15324,7 +15136,7 @@
           <p:spPr>
             <a:xfrm>
               <a:off x="0" y="-38100"/>
-              <a:ext cx="1665674" cy="850900"/>
+              <a:ext cx="2711749" cy="850900"/>
             </a:xfrm>
             <a:prstGeom prst="rect">
               <a:avLst/>
@@ -15383,7 +15195,7 @@
         </p:nvSpPr>
         <p:spPr>
           <a:xfrm flipH="false" flipV="false" rot="0">
-            <a:off x="266228" y="2227353"/>
+            <a:off x="266228" y="4109192"/>
             <a:ext cx="17755545" cy="5149108"/>
           </a:xfrm>
           <a:custGeom>
@@ -15429,10 +15241,10 @@
         </p:nvGrpSpPr>
         <p:grpSpPr>
           <a:xfrm rot="0">
-            <a:off x="663826" y="4577510"/>
-            <a:ext cx="16960349" cy="3086100"/>
+            <a:off x="646563" y="5840027"/>
+            <a:ext cx="16994873" cy="3086100"/>
             <a:chOff x="0" y="0"/>
-            <a:chExt cx="4466923" cy="812800"/>
+            <a:chExt cx="4476016" cy="812800"/>
           </a:xfrm>
         </p:grpSpPr>
         <p:sp>
@@ -15444,7 +15256,7 @@
           <p:spPr>
             <a:xfrm flipH="false" flipV="false" rot="0">
               <a:off x="0" y="0"/>
-              <a:ext cx="4466923" cy="812800"/>
+              <a:ext cx="4476016" cy="812800"/>
             </a:xfrm>
             <a:custGeom>
               <a:avLst/>
@@ -15453,61 +15265,61 @@
               <a:cxnLst/>
               <a:rect r="r" b="b" t="t" l="l"/>
               <a:pathLst>
-                <a:path h="812800" w="4466923">
+                <a:path h="812800" w="4476016">
                   <a:moveTo>
-                    <a:pt x="7760" y="0"/>
+                    <a:pt x="7744" y="0"/>
                   </a:moveTo>
                   <a:lnTo>
-                    <a:pt x="4459163" y="0"/>
-                  </a:lnTo>
-                  <a:cubicBezTo>
-                    <a:pt x="4461221" y="0"/>
-                    <a:pt x="4463195" y="818"/>
-                    <a:pt x="4464650" y="2273"/>
-                  </a:cubicBezTo>
-                  <a:cubicBezTo>
-                    <a:pt x="4466106" y="3728"/>
-                    <a:pt x="4466923" y="5702"/>
-                    <a:pt x="4466923" y="7760"/>
-                  </a:cubicBezTo>
-                  <a:lnTo>
-                    <a:pt x="4466923" y="805040"/>
-                  </a:lnTo>
-                  <a:cubicBezTo>
-                    <a:pt x="4466923" y="807098"/>
-                    <a:pt x="4466106" y="809072"/>
-                    <a:pt x="4464650" y="810527"/>
-                  </a:cubicBezTo>
-                  <a:cubicBezTo>
-                    <a:pt x="4463195" y="811982"/>
-                    <a:pt x="4461221" y="812800"/>
-                    <a:pt x="4459163" y="812800"/>
-                  </a:cubicBezTo>
-                  <a:lnTo>
-                    <a:pt x="7760" y="812800"/>
-                  </a:lnTo>
-                  <a:cubicBezTo>
-                    <a:pt x="5702" y="812800"/>
-                    <a:pt x="3728" y="811982"/>
-                    <a:pt x="2273" y="810527"/>
-                  </a:cubicBezTo>
-                  <a:cubicBezTo>
-                    <a:pt x="818" y="809072"/>
-                    <a:pt x="0" y="807098"/>
-                    <a:pt x="0" y="805040"/>
-                  </a:cubicBezTo>
-                  <a:lnTo>
-                    <a:pt x="0" y="7760"/>
-                  </a:lnTo>
-                  <a:cubicBezTo>
-                    <a:pt x="0" y="5702"/>
-                    <a:pt x="818" y="3728"/>
-                    <a:pt x="2273" y="2273"/>
-                  </a:cubicBezTo>
-                  <a:cubicBezTo>
-                    <a:pt x="3728" y="818"/>
-                    <a:pt x="5702" y="0"/>
-                    <a:pt x="7760" y="0"/>
+                    <a:pt x="4468272" y="0"/>
+                  </a:lnTo>
+                  <a:cubicBezTo>
+                    <a:pt x="4470326" y="0"/>
+                    <a:pt x="4472295" y="816"/>
+                    <a:pt x="4473748" y="2268"/>
+                  </a:cubicBezTo>
+                  <a:cubicBezTo>
+                    <a:pt x="4475200" y="3721"/>
+                    <a:pt x="4476016" y="5690"/>
+                    <a:pt x="4476016" y="7744"/>
+                  </a:cubicBezTo>
+                  <a:lnTo>
+                    <a:pt x="4476016" y="805056"/>
+                  </a:lnTo>
+                  <a:cubicBezTo>
+                    <a:pt x="4476016" y="807110"/>
+                    <a:pt x="4475200" y="809079"/>
+                    <a:pt x="4473748" y="810532"/>
+                  </a:cubicBezTo>
+                  <a:cubicBezTo>
+                    <a:pt x="4472295" y="811984"/>
+                    <a:pt x="4470326" y="812800"/>
+                    <a:pt x="4468272" y="812800"/>
+                  </a:cubicBezTo>
+                  <a:lnTo>
+                    <a:pt x="7744" y="812800"/>
+                  </a:lnTo>
+                  <a:cubicBezTo>
+                    <a:pt x="5690" y="812800"/>
+                    <a:pt x="3721" y="811984"/>
+                    <a:pt x="2268" y="810532"/>
+                  </a:cubicBezTo>
+                  <a:cubicBezTo>
+                    <a:pt x="816" y="809079"/>
+                    <a:pt x="0" y="807110"/>
+                    <a:pt x="0" y="805056"/>
+                  </a:cubicBezTo>
+                  <a:lnTo>
+                    <a:pt x="0" y="7744"/>
+                  </a:lnTo>
+                  <a:cubicBezTo>
+                    <a:pt x="0" y="5690"/>
+                    <a:pt x="816" y="3721"/>
+                    <a:pt x="2268" y="2268"/>
+                  </a:cubicBezTo>
+                  <a:cubicBezTo>
+                    <a:pt x="3721" y="816"/>
+                    <a:pt x="5690" y="0"/>
+                    <a:pt x="7744" y="0"/>
                   </a:cubicBezTo>
                   <a:close/>
                 </a:path>
@@ -15527,7 +15339,7 @@
           <p:spPr>
             <a:xfrm>
               <a:off x="0" y="-38100"/>
-              <a:ext cx="4466923" cy="850900"/>
+              <a:ext cx="4476016" cy="850900"/>
             </a:xfrm>
             <a:prstGeom prst="rect">
               <a:avLst/>
@@ -15554,10 +15366,10 @@
         </p:nvGrpSpPr>
         <p:grpSpPr>
           <a:xfrm rot="0">
-            <a:off x="1327651" y="3921484"/>
-            <a:ext cx="16960349" cy="3086100"/>
+            <a:off x="11574537" y="4109192"/>
+            <a:ext cx="6066900" cy="3086100"/>
             <a:chOff x="0" y="0"/>
-            <a:chExt cx="4466923" cy="812800"/>
+            <a:chExt cx="1597867" cy="812800"/>
           </a:xfrm>
         </p:grpSpPr>
         <p:sp>
@@ -15569,7 +15381,7 @@
           <p:spPr>
             <a:xfrm flipH="false" flipV="false" rot="0">
               <a:off x="0" y="0"/>
-              <a:ext cx="4466923" cy="812800"/>
+              <a:ext cx="1597867" cy="812800"/>
             </a:xfrm>
             <a:custGeom>
               <a:avLst/>
@@ -15578,61 +15390,46 @@
               <a:cxnLst/>
               <a:rect r="r" b="b" t="t" l="l"/>
               <a:pathLst>
-                <a:path h="812800" w="4466923">
+                <a:path h="812800" w="1597867">
                   <a:moveTo>
-                    <a:pt x="7760" y="0"/>
+                    <a:pt x="21694" y="0"/>
                   </a:moveTo>
                   <a:lnTo>
-                    <a:pt x="4459163" y="0"/>
-                  </a:lnTo>
-                  <a:cubicBezTo>
-                    <a:pt x="4461221" y="0"/>
-                    <a:pt x="4463195" y="818"/>
-                    <a:pt x="4464650" y="2273"/>
-                  </a:cubicBezTo>
-                  <a:cubicBezTo>
-                    <a:pt x="4466106" y="3728"/>
-                    <a:pt x="4466923" y="5702"/>
-                    <a:pt x="4466923" y="7760"/>
-                  </a:cubicBezTo>
-                  <a:lnTo>
-                    <a:pt x="4466923" y="805040"/>
-                  </a:lnTo>
-                  <a:cubicBezTo>
-                    <a:pt x="4466923" y="807098"/>
-                    <a:pt x="4466106" y="809072"/>
-                    <a:pt x="4464650" y="810527"/>
-                  </a:cubicBezTo>
-                  <a:cubicBezTo>
-                    <a:pt x="4463195" y="811982"/>
-                    <a:pt x="4461221" y="812800"/>
-                    <a:pt x="4459163" y="812800"/>
-                  </a:cubicBezTo>
-                  <a:lnTo>
-                    <a:pt x="7760" y="812800"/>
-                  </a:lnTo>
-                  <a:cubicBezTo>
-                    <a:pt x="5702" y="812800"/>
-                    <a:pt x="3728" y="811982"/>
-                    <a:pt x="2273" y="810527"/>
-                  </a:cubicBezTo>
-                  <a:cubicBezTo>
-                    <a:pt x="818" y="809072"/>
-                    <a:pt x="0" y="807098"/>
-                    <a:pt x="0" y="805040"/>
-                  </a:cubicBezTo>
-                  <a:lnTo>
-                    <a:pt x="0" y="7760"/>
-                  </a:lnTo>
-                  <a:cubicBezTo>
-                    <a:pt x="0" y="5702"/>
-                    <a:pt x="818" y="3728"/>
-                    <a:pt x="2273" y="2273"/>
-                  </a:cubicBezTo>
-                  <a:cubicBezTo>
-                    <a:pt x="3728" y="818"/>
-                    <a:pt x="5702" y="0"/>
-                    <a:pt x="7760" y="0"/>
+                    <a:pt x="1576173" y="0"/>
+                  </a:lnTo>
+                  <a:cubicBezTo>
+                    <a:pt x="1588154" y="0"/>
+                    <a:pt x="1597867" y="9713"/>
+                    <a:pt x="1597867" y="21694"/>
+                  </a:cubicBezTo>
+                  <a:lnTo>
+                    <a:pt x="1597867" y="791106"/>
+                  </a:lnTo>
+                  <a:cubicBezTo>
+                    <a:pt x="1597867" y="796860"/>
+                    <a:pt x="1595581" y="802378"/>
+                    <a:pt x="1591513" y="806446"/>
+                  </a:cubicBezTo>
+                  <a:cubicBezTo>
+                    <a:pt x="1587444" y="810514"/>
+                    <a:pt x="1581927" y="812800"/>
+                    <a:pt x="1576173" y="812800"/>
+                  </a:cubicBezTo>
+                  <a:lnTo>
+                    <a:pt x="21694" y="812800"/>
+                  </a:lnTo>
+                  <a:cubicBezTo>
+                    <a:pt x="9713" y="812800"/>
+                    <a:pt x="0" y="803087"/>
+                    <a:pt x="0" y="791106"/>
+                  </a:cubicBezTo>
+                  <a:lnTo>
+                    <a:pt x="0" y="21694"/>
+                  </a:lnTo>
+                  <a:cubicBezTo>
+                    <a:pt x="0" y="9713"/>
+                    <a:pt x="9713" y="0"/>
+                    <a:pt x="21694" y="0"/>
                   </a:cubicBezTo>
                   <a:close/>
                 </a:path>
@@ -15652,7 +15449,7 @@
           <p:spPr>
             <a:xfrm>
               <a:off x="0" y="-38100"/>
-              <a:ext cx="4466923" cy="850900"/>
+              <a:ext cx="1597867" cy="850900"/>
             </a:xfrm>
             <a:prstGeom prst="rect">
               <a:avLst/>
@@ -15711,7 +15508,7 @@
         </p:nvSpPr>
         <p:spPr>
           <a:xfrm flipH="false" flipV="false" rot="0">
-            <a:off x="266228" y="2227353"/>
+            <a:off x="266228" y="4109192"/>
             <a:ext cx="17755545" cy="5149108"/>
           </a:xfrm>
           <a:custGeom>
@@ -15757,10 +15554,10 @@
         </p:nvGrpSpPr>
         <p:grpSpPr>
           <a:xfrm rot="0">
-            <a:off x="663826" y="4577510"/>
-            <a:ext cx="16960349" cy="3086100"/>
+            <a:off x="646563" y="5840027"/>
+            <a:ext cx="16994873" cy="3086100"/>
             <a:chOff x="0" y="0"/>
-            <a:chExt cx="4466923" cy="812800"/>
+            <a:chExt cx="4476016" cy="812800"/>
           </a:xfrm>
         </p:grpSpPr>
         <p:sp>
@@ -15772,7 +15569,7 @@
           <p:spPr>
             <a:xfrm flipH="false" flipV="false" rot="0">
               <a:off x="0" y="0"/>
-              <a:ext cx="4466923" cy="812800"/>
+              <a:ext cx="4476016" cy="812800"/>
             </a:xfrm>
             <a:custGeom>
               <a:avLst/>
@@ -15781,61 +15578,61 @@
               <a:cxnLst/>
               <a:rect r="r" b="b" t="t" l="l"/>
               <a:pathLst>
-                <a:path h="812800" w="4466923">
+                <a:path h="812800" w="4476016">
                   <a:moveTo>
-                    <a:pt x="7760" y="0"/>
+                    <a:pt x="7744" y="0"/>
                   </a:moveTo>
                   <a:lnTo>
-                    <a:pt x="4459163" y="0"/>
-                  </a:lnTo>
-                  <a:cubicBezTo>
-                    <a:pt x="4461221" y="0"/>
-                    <a:pt x="4463195" y="818"/>
-                    <a:pt x="4464650" y="2273"/>
-                  </a:cubicBezTo>
-                  <a:cubicBezTo>
-                    <a:pt x="4466106" y="3728"/>
-                    <a:pt x="4466923" y="5702"/>
-                    <a:pt x="4466923" y="7760"/>
-                  </a:cubicBezTo>
-                  <a:lnTo>
-                    <a:pt x="4466923" y="805040"/>
-                  </a:lnTo>
-                  <a:cubicBezTo>
-                    <a:pt x="4466923" y="807098"/>
-                    <a:pt x="4466106" y="809072"/>
-                    <a:pt x="4464650" y="810527"/>
-                  </a:cubicBezTo>
-                  <a:cubicBezTo>
-                    <a:pt x="4463195" y="811982"/>
-                    <a:pt x="4461221" y="812800"/>
-                    <a:pt x="4459163" y="812800"/>
-                  </a:cubicBezTo>
-                  <a:lnTo>
-                    <a:pt x="7760" y="812800"/>
-                  </a:lnTo>
-                  <a:cubicBezTo>
-                    <a:pt x="5702" y="812800"/>
-                    <a:pt x="3728" y="811982"/>
-                    <a:pt x="2273" y="810527"/>
-                  </a:cubicBezTo>
-                  <a:cubicBezTo>
-                    <a:pt x="818" y="809072"/>
-                    <a:pt x="0" y="807098"/>
-                    <a:pt x="0" y="805040"/>
-                  </a:cubicBezTo>
-                  <a:lnTo>
-                    <a:pt x="0" y="7760"/>
-                  </a:lnTo>
-                  <a:cubicBezTo>
-                    <a:pt x="0" y="5702"/>
-                    <a:pt x="818" y="3728"/>
-                    <a:pt x="2273" y="2273"/>
-                  </a:cubicBezTo>
-                  <a:cubicBezTo>
-                    <a:pt x="3728" y="818"/>
-                    <a:pt x="5702" y="0"/>
-                    <a:pt x="7760" y="0"/>
+                    <a:pt x="4468272" y="0"/>
+                  </a:lnTo>
+                  <a:cubicBezTo>
+                    <a:pt x="4470326" y="0"/>
+                    <a:pt x="4472295" y="816"/>
+                    <a:pt x="4473748" y="2268"/>
+                  </a:cubicBezTo>
+                  <a:cubicBezTo>
+                    <a:pt x="4475200" y="3721"/>
+                    <a:pt x="4476016" y="5690"/>
+                    <a:pt x="4476016" y="7744"/>
+                  </a:cubicBezTo>
+                  <a:lnTo>
+                    <a:pt x="4476016" y="805056"/>
+                  </a:lnTo>
+                  <a:cubicBezTo>
+                    <a:pt x="4476016" y="807110"/>
+                    <a:pt x="4475200" y="809079"/>
+                    <a:pt x="4473748" y="810532"/>
+                  </a:cubicBezTo>
+                  <a:cubicBezTo>
+                    <a:pt x="4472295" y="811984"/>
+                    <a:pt x="4470326" y="812800"/>
+                    <a:pt x="4468272" y="812800"/>
+                  </a:cubicBezTo>
+                  <a:lnTo>
+                    <a:pt x="7744" y="812800"/>
+                  </a:lnTo>
+                  <a:cubicBezTo>
+                    <a:pt x="5690" y="812800"/>
+                    <a:pt x="3721" y="811984"/>
+                    <a:pt x="2268" y="810532"/>
+                  </a:cubicBezTo>
+                  <a:cubicBezTo>
+                    <a:pt x="816" y="809079"/>
+                    <a:pt x="0" y="807110"/>
+                    <a:pt x="0" y="805056"/>
+                  </a:cubicBezTo>
+                  <a:lnTo>
+                    <a:pt x="0" y="7744"/>
+                  </a:lnTo>
+                  <a:cubicBezTo>
+                    <a:pt x="0" y="5690"/>
+                    <a:pt x="816" y="3721"/>
+                    <a:pt x="2268" y="2268"/>
+                  </a:cubicBezTo>
+                  <a:cubicBezTo>
+                    <a:pt x="3721" y="816"/>
+                    <a:pt x="5690" y="0"/>
+                    <a:pt x="7744" y="0"/>
                   </a:cubicBezTo>
                   <a:close/>
                 </a:path>
@@ -15855,132 +15652,7 @@
           <p:spPr>
             <a:xfrm>
               <a:off x="0" y="-38100"/>
-              <a:ext cx="4466923" cy="850900"/>
-            </a:xfrm>
-            <a:prstGeom prst="rect">
-              <a:avLst/>
-            </a:prstGeom>
-          </p:spPr>
-          <p:txBody>
-            <a:bodyPr anchor="ctr" rtlCol="false" tIns="50800" lIns="50800" bIns="50800" rIns="50800"/>
-            <a:lstStyle/>
-            <a:p>
-              <a:pPr algn="ctr">
-                <a:lnSpc>
-                  <a:spcPts val="3449"/>
-                </a:lnSpc>
-              </a:pPr>
-            </a:p>
-          </p:txBody>
-        </p:sp>
-      </p:grpSp>
-      <p:grpSp>
-        <p:nvGrpSpPr>
-          <p:cNvPr name="Group 6" id="6"/>
-          <p:cNvGrpSpPr/>
-          <p:nvPr/>
-        </p:nvGrpSpPr>
-        <p:grpSpPr>
-          <a:xfrm rot="0">
-            <a:off x="5646830" y="3865652"/>
-            <a:ext cx="16960349" cy="3086100"/>
-            <a:chOff x="0" y="0"/>
-            <a:chExt cx="4466923" cy="812800"/>
-          </a:xfrm>
-        </p:grpSpPr>
-        <p:sp>
-          <p:nvSpPr>
-            <p:cNvPr name="Freeform 7" id="7"/>
-            <p:cNvSpPr/>
-            <p:nvPr/>
-          </p:nvSpPr>
-          <p:spPr>
-            <a:xfrm flipH="false" flipV="false" rot="0">
-              <a:off x="0" y="0"/>
-              <a:ext cx="4466923" cy="812800"/>
-            </a:xfrm>
-            <a:custGeom>
-              <a:avLst/>
-              <a:gdLst/>
-              <a:ahLst/>
-              <a:cxnLst/>
-              <a:rect r="r" b="b" t="t" l="l"/>
-              <a:pathLst>
-                <a:path h="812800" w="4466923">
-                  <a:moveTo>
-                    <a:pt x="7760" y="0"/>
-                  </a:moveTo>
-                  <a:lnTo>
-                    <a:pt x="4459163" y="0"/>
-                  </a:lnTo>
-                  <a:cubicBezTo>
-                    <a:pt x="4461221" y="0"/>
-                    <a:pt x="4463195" y="818"/>
-                    <a:pt x="4464650" y="2273"/>
-                  </a:cubicBezTo>
-                  <a:cubicBezTo>
-                    <a:pt x="4466106" y="3728"/>
-                    <a:pt x="4466923" y="5702"/>
-                    <a:pt x="4466923" y="7760"/>
-                  </a:cubicBezTo>
-                  <a:lnTo>
-                    <a:pt x="4466923" y="805040"/>
-                  </a:lnTo>
-                  <a:cubicBezTo>
-                    <a:pt x="4466923" y="807098"/>
-                    <a:pt x="4466106" y="809072"/>
-                    <a:pt x="4464650" y="810527"/>
-                  </a:cubicBezTo>
-                  <a:cubicBezTo>
-                    <a:pt x="4463195" y="811982"/>
-                    <a:pt x="4461221" y="812800"/>
-                    <a:pt x="4459163" y="812800"/>
-                  </a:cubicBezTo>
-                  <a:lnTo>
-                    <a:pt x="7760" y="812800"/>
-                  </a:lnTo>
-                  <a:cubicBezTo>
-                    <a:pt x="5702" y="812800"/>
-                    <a:pt x="3728" y="811982"/>
-                    <a:pt x="2273" y="810527"/>
-                  </a:cubicBezTo>
-                  <a:cubicBezTo>
-                    <a:pt x="818" y="809072"/>
-                    <a:pt x="0" y="807098"/>
-                    <a:pt x="0" y="805040"/>
-                  </a:cubicBezTo>
-                  <a:lnTo>
-                    <a:pt x="0" y="7760"/>
-                  </a:lnTo>
-                  <a:cubicBezTo>
-                    <a:pt x="0" y="5702"/>
-                    <a:pt x="818" y="3728"/>
-                    <a:pt x="2273" y="2273"/>
-                  </a:cubicBezTo>
-                  <a:cubicBezTo>
-                    <a:pt x="3728" y="818"/>
-                    <a:pt x="5702" y="0"/>
-                    <a:pt x="7760" y="0"/>
-                  </a:cubicBezTo>
-                  <a:close/>
-                </a:path>
-              </a:pathLst>
-            </a:custGeom>
-            <a:solidFill>
-              <a:srgbClr val="233D89"/>
-            </a:solidFill>
-          </p:spPr>
-        </p:sp>
-        <p:sp>
-          <p:nvSpPr>
-            <p:cNvPr name="TextBox 8" id="8"/>
-            <p:cNvSpPr txBox="true"/>
-            <p:nvPr/>
-          </p:nvSpPr>
-          <p:spPr>
-            <a:xfrm>
-              <a:off x="0" y="-38100"/>
-              <a:ext cx="4466923" cy="850900"/>
+              <a:ext cx="4476016" cy="850900"/>
             </a:xfrm>
             <a:prstGeom prst="rect">
               <a:avLst/>
@@ -16039,7 +15711,7 @@
         </p:nvSpPr>
         <p:spPr>
           <a:xfrm flipH="false" flipV="false" rot="0">
-            <a:off x="266228" y="2227353"/>
+            <a:off x="266228" y="4109192"/>
             <a:ext cx="17755545" cy="5149108"/>
           </a:xfrm>
           <a:custGeom>
@@ -16085,10 +15757,10 @@
         </p:nvGrpSpPr>
         <p:grpSpPr>
           <a:xfrm rot="0">
-            <a:off x="761532" y="4717090"/>
-            <a:ext cx="16960349" cy="3086100"/>
+            <a:off x="646563" y="6537927"/>
+            <a:ext cx="16994873" cy="3086100"/>
             <a:chOff x="0" y="0"/>
-            <a:chExt cx="4466923" cy="812800"/>
+            <a:chExt cx="4476016" cy="812800"/>
           </a:xfrm>
         </p:grpSpPr>
         <p:sp>
@@ -16100,7 +15772,7 @@
           <p:spPr>
             <a:xfrm flipH="false" flipV="false" rot="0">
               <a:off x="0" y="0"/>
-              <a:ext cx="4466923" cy="812800"/>
+              <a:ext cx="4476016" cy="812800"/>
             </a:xfrm>
             <a:custGeom>
               <a:avLst/>
@@ -16109,61 +15781,61 @@
               <a:cxnLst/>
               <a:rect r="r" b="b" t="t" l="l"/>
               <a:pathLst>
-                <a:path h="812800" w="4466923">
+                <a:path h="812800" w="4476016">
                   <a:moveTo>
-                    <a:pt x="7760" y="0"/>
+                    <a:pt x="7744" y="0"/>
                   </a:moveTo>
                   <a:lnTo>
-                    <a:pt x="4459163" y="0"/>
-                  </a:lnTo>
-                  <a:cubicBezTo>
-                    <a:pt x="4461221" y="0"/>
-                    <a:pt x="4463195" y="818"/>
-                    <a:pt x="4464650" y="2273"/>
-                  </a:cubicBezTo>
-                  <a:cubicBezTo>
-                    <a:pt x="4466106" y="3728"/>
-                    <a:pt x="4466923" y="5702"/>
-                    <a:pt x="4466923" y="7760"/>
-                  </a:cubicBezTo>
-                  <a:lnTo>
-                    <a:pt x="4466923" y="805040"/>
-                  </a:lnTo>
-                  <a:cubicBezTo>
-                    <a:pt x="4466923" y="807098"/>
-                    <a:pt x="4466106" y="809072"/>
-                    <a:pt x="4464650" y="810527"/>
-                  </a:cubicBezTo>
-                  <a:cubicBezTo>
-                    <a:pt x="4463195" y="811982"/>
-                    <a:pt x="4461221" y="812800"/>
-                    <a:pt x="4459163" y="812800"/>
-                  </a:cubicBezTo>
-                  <a:lnTo>
-                    <a:pt x="7760" y="812800"/>
-                  </a:lnTo>
-                  <a:cubicBezTo>
-                    <a:pt x="5702" y="812800"/>
-                    <a:pt x="3728" y="811982"/>
-                    <a:pt x="2273" y="810527"/>
-                  </a:cubicBezTo>
-                  <a:cubicBezTo>
-                    <a:pt x="818" y="809072"/>
-                    <a:pt x="0" y="807098"/>
-                    <a:pt x="0" y="805040"/>
-                  </a:cubicBezTo>
-                  <a:lnTo>
-                    <a:pt x="0" y="7760"/>
-                  </a:lnTo>
-                  <a:cubicBezTo>
-                    <a:pt x="0" y="5702"/>
-                    <a:pt x="818" y="3728"/>
-                    <a:pt x="2273" y="2273"/>
-                  </a:cubicBezTo>
-                  <a:cubicBezTo>
-                    <a:pt x="3728" y="818"/>
-                    <a:pt x="5702" y="0"/>
-                    <a:pt x="7760" y="0"/>
+                    <a:pt x="4468272" y="0"/>
+                  </a:lnTo>
+                  <a:cubicBezTo>
+                    <a:pt x="4470326" y="0"/>
+                    <a:pt x="4472295" y="816"/>
+                    <a:pt x="4473748" y="2268"/>
+                  </a:cubicBezTo>
+                  <a:cubicBezTo>
+                    <a:pt x="4475200" y="3721"/>
+                    <a:pt x="4476016" y="5690"/>
+                    <a:pt x="4476016" y="7744"/>
+                  </a:cubicBezTo>
+                  <a:lnTo>
+                    <a:pt x="4476016" y="805056"/>
+                  </a:lnTo>
+                  <a:cubicBezTo>
+                    <a:pt x="4476016" y="807110"/>
+                    <a:pt x="4475200" y="809079"/>
+                    <a:pt x="4473748" y="810532"/>
+                  </a:cubicBezTo>
+                  <a:cubicBezTo>
+                    <a:pt x="4472295" y="811984"/>
+                    <a:pt x="4470326" y="812800"/>
+                    <a:pt x="4468272" y="812800"/>
+                  </a:cubicBezTo>
+                  <a:lnTo>
+                    <a:pt x="7744" y="812800"/>
+                  </a:lnTo>
+                  <a:cubicBezTo>
+                    <a:pt x="5690" y="812800"/>
+                    <a:pt x="3721" y="811984"/>
+                    <a:pt x="2268" y="810532"/>
+                  </a:cubicBezTo>
+                  <a:cubicBezTo>
+                    <a:pt x="816" y="809079"/>
+                    <a:pt x="0" y="807110"/>
+                    <a:pt x="0" y="805056"/>
+                  </a:cubicBezTo>
+                  <a:lnTo>
+                    <a:pt x="0" y="7744"/>
+                  </a:lnTo>
+                  <a:cubicBezTo>
+                    <a:pt x="0" y="5690"/>
+                    <a:pt x="816" y="3721"/>
+                    <a:pt x="2268" y="2268"/>
+                  </a:cubicBezTo>
+                  <a:cubicBezTo>
+                    <a:pt x="3721" y="816"/>
+                    <a:pt x="5690" y="0"/>
+                    <a:pt x="7744" y="0"/>
                   </a:cubicBezTo>
                   <a:close/>
                 </a:path>
@@ -16183,7 +15855,7 @@
           <p:spPr>
             <a:xfrm>
               <a:off x="0" y="-38100"/>
-              <a:ext cx="4466923" cy="850900"/>
+              <a:ext cx="4476016" cy="850900"/>
             </a:xfrm>
             <a:prstGeom prst="rect">
               <a:avLst/>
@@ -16210,10 +15882,10 @@
         </p:nvGrpSpPr>
         <p:grpSpPr>
           <a:xfrm rot="0">
-            <a:off x="11662727" y="3823778"/>
-            <a:ext cx="5919573" cy="3086100"/>
+            <a:off x="6913704" y="5769099"/>
+            <a:ext cx="10727733" cy="3086100"/>
             <a:chOff x="0" y="0"/>
-            <a:chExt cx="1559065" cy="812800"/>
+            <a:chExt cx="2825411" cy="812800"/>
           </a:xfrm>
         </p:grpSpPr>
         <p:sp>
@@ -16225,7 +15897,7 @@
           <p:spPr>
             <a:xfrm flipH="false" flipV="false" rot="0">
               <a:off x="0" y="0"/>
-              <a:ext cx="1559065" cy="812800"/>
+              <a:ext cx="2825411" cy="812800"/>
             </a:xfrm>
             <a:custGeom>
               <a:avLst/>
@@ -16234,41 +15906,46 @@
               <a:cxnLst/>
               <a:rect r="r" b="b" t="t" l="l"/>
               <a:pathLst>
-                <a:path h="812800" w="1559065">
+                <a:path h="812800" w="2825411">
                   <a:moveTo>
-                    <a:pt x="22233" y="0"/>
+                    <a:pt x="12268" y="0"/>
                   </a:moveTo>
                   <a:lnTo>
-                    <a:pt x="1536831" y="0"/>
-                  </a:lnTo>
-                  <a:cubicBezTo>
-                    <a:pt x="1549110" y="0"/>
-                    <a:pt x="1559065" y="9954"/>
-                    <a:pt x="1559065" y="22233"/>
-                  </a:cubicBezTo>
-                  <a:lnTo>
-                    <a:pt x="1559065" y="790567"/>
-                  </a:lnTo>
-                  <a:cubicBezTo>
-                    <a:pt x="1559065" y="802846"/>
-                    <a:pt x="1549110" y="812800"/>
-                    <a:pt x="1536831" y="812800"/>
-                  </a:cubicBezTo>
-                  <a:lnTo>
-                    <a:pt x="22233" y="812800"/>
-                  </a:lnTo>
-                  <a:cubicBezTo>
-                    <a:pt x="9954" y="812800"/>
-                    <a:pt x="0" y="802846"/>
-                    <a:pt x="0" y="790567"/>
-                  </a:cubicBezTo>
-                  <a:lnTo>
-                    <a:pt x="0" y="22233"/>
-                  </a:lnTo>
-                  <a:cubicBezTo>
-                    <a:pt x="0" y="9954"/>
-                    <a:pt x="9954" y="0"/>
-                    <a:pt x="22233" y="0"/>
+                    <a:pt x="2813143" y="0"/>
+                  </a:lnTo>
+                  <a:cubicBezTo>
+                    <a:pt x="2816397" y="0"/>
+                    <a:pt x="2819517" y="1293"/>
+                    <a:pt x="2821818" y="3593"/>
+                  </a:cubicBezTo>
+                  <a:cubicBezTo>
+                    <a:pt x="2824119" y="5894"/>
+                    <a:pt x="2825411" y="9015"/>
+                    <a:pt x="2825411" y="12268"/>
+                  </a:cubicBezTo>
+                  <a:lnTo>
+                    <a:pt x="2825411" y="800532"/>
+                  </a:lnTo>
+                  <a:cubicBezTo>
+                    <a:pt x="2825411" y="807307"/>
+                    <a:pt x="2819918" y="812800"/>
+                    <a:pt x="2813143" y="812800"/>
+                  </a:cubicBezTo>
+                  <a:lnTo>
+                    <a:pt x="12268" y="812800"/>
+                  </a:lnTo>
+                  <a:cubicBezTo>
+                    <a:pt x="5493" y="812800"/>
+                    <a:pt x="0" y="807307"/>
+                    <a:pt x="0" y="800532"/>
+                  </a:cubicBezTo>
+                  <a:lnTo>
+                    <a:pt x="0" y="12268"/>
+                  </a:lnTo>
+                  <a:cubicBezTo>
+                    <a:pt x="0" y="5493"/>
+                    <a:pt x="5493" y="0"/>
+                    <a:pt x="12268" y="0"/>
                   </a:cubicBezTo>
                   <a:close/>
                 </a:path>
@@ -16288,7 +15965,7 @@
           <p:spPr>
             <a:xfrm>
               <a:off x="0" y="-38100"/>
-              <a:ext cx="1559065" cy="850900"/>
+              <a:ext cx="2825411" cy="850900"/>
             </a:xfrm>
             <a:prstGeom prst="rect">
               <a:avLst/>
@@ -16347,7 +16024,7 @@
         </p:nvSpPr>
         <p:spPr>
           <a:xfrm flipH="false" flipV="false" rot="0">
-            <a:off x="266228" y="2227353"/>
+            <a:off x="266228" y="4109192"/>
             <a:ext cx="17755545" cy="5149108"/>
           </a:xfrm>
           <a:custGeom>
@@ -16393,10 +16070,10 @@
         </p:nvGrpSpPr>
         <p:grpSpPr>
           <a:xfrm rot="0">
-            <a:off x="859238" y="4661258"/>
-            <a:ext cx="16960349" cy="3086100"/>
+            <a:off x="646563" y="6537927"/>
+            <a:ext cx="16994873" cy="3086100"/>
             <a:chOff x="0" y="0"/>
-            <a:chExt cx="4466923" cy="812800"/>
+            <a:chExt cx="4476016" cy="812800"/>
           </a:xfrm>
         </p:grpSpPr>
         <p:sp>
@@ -16408,7 +16085,7 @@
           <p:spPr>
             <a:xfrm flipH="false" flipV="false" rot="0">
               <a:off x="0" y="0"/>
-              <a:ext cx="4466923" cy="812800"/>
+              <a:ext cx="4476016" cy="812800"/>
             </a:xfrm>
             <a:custGeom>
               <a:avLst/>
@@ -16417,61 +16094,61 @@
               <a:cxnLst/>
               <a:rect r="r" b="b" t="t" l="l"/>
               <a:pathLst>
-                <a:path h="812800" w="4466923">
+                <a:path h="812800" w="4476016">
                   <a:moveTo>
-                    <a:pt x="7760" y="0"/>
+                    <a:pt x="7744" y="0"/>
                   </a:moveTo>
                   <a:lnTo>
-                    <a:pt x="4459163" y="0"/>
-                  </a:lnTo>
-                  <a:cubicBezTo>
-                    <a:pt x="4461221" y="0"/>
-                    <a:pt x="4463195" y="818"/>
-                    <a:pt x="4464650" y="2273"/>
-                  </a:cubicBezTo>
-                  <a:cubicBezTo>
-                    <a:pt x="4466106" y="3728"/>
-                    <a:pt x="4466923" y="5702"/>
-                    <a:pt x="4466923" y="7760"/>
-                  </a:cubicBezTo>
-                  <a:lnTo>
-                    <a:pt x="4466923" y="805040"/>
-                  </a:lnTo>
-                  <a:cubicBezTo>
-                    <a:pt x="4466923" y="807098"/>
-                    <a:pt x="4466106" y="809072"/>
-                    <a:pt x="4464650" y="810527"/>
-                  </a:cubicBezTo>
-                  <a:cubicBezTo>
-                    <a:pt x="4463195" y="811982"/>
-                    <a:pt x="4461221" y="812800"/>
-                    <a:pt x="4459163" y="812800"/>
-                  </a:cubicBezTo>
-                  <a:lnTo>
-                    <a:pt x="7760" y="812800"/>
-                  </a:lnTo>
-                  <a:cubicBezTo>
-                    <a:pt x="5702" y="812800"/>
-                    <a:pt x="3728" y="811982"/>
-                    <a:pt x="2273" y="810527"/>
-                  </a:cubicBezTo>
-                  <a:cubicBezTo>
-                    <a:pt x="818" y="809072"/>
-                    <a:pt x="0" y="807098"/>
-                    <a:pt x="0" y="805040"/>
-                  </a:cubicBezTo>
-                  <a:lnTo>
-                    <a:pt x="0" y="7760"/>
-                  </a:lnTo>
-                  <a:cubicBezTo>
-                    <a:pt x="0" y="5702"/>
-                    <a:pt x="818" y="3728"/>
-                    <a:pt x="2273" y="2273"/>
-                  </a:cubicBezTo>
-                  <a:cubicBezTo>
-                    <a:pt x="3728" y="818"/>
-                    <a:pt x="5702" y="0"/>
-                    <a:pt x="7760" y="0"/>
+                    <a:pt x="4468272" y="0"/>
+                  </a:lnTo>
+                  <a:cubicBezTo>
+                    <a:pt x="4470326" y="0"/>
+                    <a:pt x="4472295" y="816"/>
+                    <a:pt x="4473748" y="2268"/>
+                  </a:cubicBezTo>
+                  <a:cubicBezTo>
+                    <a:pt x="4475200" y="3721"/>
+                    <a:pt x="4476016" y="5690"/>
+                    <a:pt x="4476016" y="7744"/>
+                  </a:cubicBezTo>
+                  <a:lnTo>
+                    <a:pt x="4476016" y="805056"/>
+                  </a:lnTo>
+                  <a:cubicBezTo>
+                    <a:pt x="4476016" y="807110"/>
+                    <a:pt x="4475200" y="809079"/>
+                    <a:pt x="4473748" y="810532"/>
+                  </a:cubicBezTo>
+                  <a:cubicBezTo>
+                    <a:pt x="4472295" y="811984"/>
+                    <a:pt x="4470326" y="812800"/>
+                    <a:pt x="4468272" y="812800"/>
+                  </a:cubicBezTo>
+                  <a:lnTo>
+                    <a:pt x="7744" y="812800"/>
+                  </a:lnTo>
+                  <a:cubicBezTo>
+                    <a:pt x="5690" y="812800"/>
+                    <a:pt x="3721" y="811984"/>
+                    <a:pt x="2268" y="810532"/>
+                  </a:cubicBezTo>
+                  <a:cubicBezTo>
+                    <a:pt x="816" y="809079"/>
+                    <a:pt x="0" y="807110"/>
+                    <a:pt x="0" y="805056"/>
+                  </a:cubicBezTo>
+                  <a:lnTo>
+                    <a:pt x="0" y="7744"/>
+                  </a:lnTo>
+                  <a:cubicBezTo>
+                    <a:pt x="0" y="5690"/>
+                    <a:pt x="816" y="3721"/>
+                    <a:pt x="2268" y="2268"/>
+                  </a:cubicBezTo>
+                  <a:cubicBezTo>
+                    <a:pt x="3721" y="816"/>
+                    <a:pt x="5690" y="0"/>
+                    <a:pt x="7744" y="0"/>
                   </a:cubicBezTo>
                   <a:close/>
                 </a:path>
@@ -16491,7 +16168,132 @@
           <p:spPr>
             <a:xfrm>
               <a:off x="0" y="-38100"/>
-              <a:ext cx="4466923" cy="850900"/>
+              <a:ext cx="4476016" cy="850900"/>
+            </a:xfrm>
+            <a:prstGeom prst="rect">
+              <a:avLst/>
+            </a:prstGeom>
+          </p:spPr>
+          <p:txBody>
+            <a:bodyPr anchor="ctr" rtlCol="false" tIns="50800" lIns="50800" bIns="50800" rIns="50800"/>
+            <a:lstStyle/>
+            <a:p>
+              <a:pPr algn="ctr">
+                <a:lnSpc>
+                  <a:spcPts val="3449"/>
+                </a:lnSpc>
+              </a:pPr>
+            </a:p>
+          </p:txBody>
+        </p:sp>
+      </p:grpSp>
+      <p:grpSp>
+        <p:nvGrpSpPr>
+          <p:cNvPr name="Group 6" id="6"/>
+          <p:cNvGrpSpPr/>
+          <p:nvPr/>
+        </p:nvGrpSpPr>
+        <p:grpSpPr>
+          <a:xfrm rot="0">
+            <a:off x="11296515" y="5769099"/>
+            <a:ext cx="6344922" cy="3086100"/>
+            <a:chOff x="0" y="0"/>
+            <a:chExt cx="1671091" cy="812800"/>
+          </a:xfrm>
+        </p:grpSpPr>
+        <p:sp>
+          <p:nvSpPr>
+            <p:cNvPr name="Freeform 7" id="7"/>
+            <p:cNvSpPr/>
+            <p:nvPr/>
+          </p:nvSpPr>
+          <p:spPr>
+            <a:xfrm flipH="false" flipV="false" rot="0">
+              <a:off x="0" y="0"/>
+              <a:ext cx="1671090" cy="812800"/>
+            </a:xfrm>
+            <a:custGeom>
+              <a:avLst/>
+              <a:gdLst/>
+              <a:ahLst/>
+              <a:cxnLst/>
+              <a:rect r="r" b="b" t="t" l="l"/>
+              <a:pathLst>
+                <a:path h="812800" w="1671090">
+                  <a:moveTo>
+                    <a:pt x="20743" y="0"/>
+                  </a:moveTo>
+                  <a:lnTo>
+                    <a:pt x="1650348" y="0"/>
+                  </a:lnTo>
+                  <a:cubicBezTo>
+                    <a:pt x="1655849" y="0"/>
+                    <a:pt x="1661125" y="2185"/>
+                    <a:pt x="1665015" y="6075"/>
+                  </a:cubicBezTo>
+                  <a:cubicBezTo>
+                    <a:pt x="1668905" y="9966"/>
+                    <a:pt x="1671090" y="15242"/>
+                    <a:pt x="1671090" y="20743"/>
+                  </a:cubicBezTo>
+                  <a:lnTo>
+                    <a:pt x="1671090" y="792057"/>
+                  </a:lnTo>
+                  <a:cubicBezTo>
+                    <a:pt x="1671090" y="797558"/>
+                    <a:pt x="1668905" y="802834"/>
+                    <a:pt x="1665015" y="806724"/>
+                  </a:cubicBezTo>
+                  <a:cubicBezTo>
+                    <a:pt x="1661125" y="810615"/>
+                    <a:pt x="1655849" y="812800"/>
+                    <a:pt x="1650348" y="812800"/>
+                  </a:cubicBezTo>
+                  <a:lnTo>
+                    <a:pt x="20743" y="812800"/>
+                  </a:lnTo>
+                  <a:cubicBezTo>
+                    <a:pt x="15242" y="812800"/>
+                    <a:pt x="9966" y="810615"/>
+                    <a:pt x="6075" y="806724"/>
+                  </a:cubicBezTo>
+                  <a:cubicBezTo>
+                    <a:pt x="2185" y="802834"/>
+                    <a:pt x="0" y="797558"/>
+                    <a:pt x="0" y="792057"/>
+                  </a:cubicBezTo>
+                  <a:lnTo>
+                    <a:pt x="0" y="20743"/>
+                  </a:lnTo>
+                  <a:cubicBezTo>
+                    <a:pt x="0" y="15242"/>
+                    <a:pt x="2185" y="9966"/>
+                    <a:pt x="6075" y="6075"/>
+                  </a:cubicBezTo>
+                  <a:cubicBezTo>
+                    <a:pt x="9966" y="2185"/>
+                    <a:pt x="15242" y="0"/>
+                    <a:pt x="20743" y="0"/>
+                  </a:cubicBezTo>
+                  <a:close/>
+                </a:path>
+              </a:pathLst>
+            </a:custGeom>
+            <a:solidFill>
+              <a:srgbClr val="233D89"/>
+            </a:solidFill>
+          </p:spPr>
+        </p:sp>
+        <p:sp>
+          <p:nvSpPr>
+            <p:cNvPr name="TextBox 8" id="8"/>
+            <p:cNvSpPr txBox="true"/>
+            <p:nvPr/>
+          </p:nvSpPr>
+          <p:spPr>
+            <a:xfrm>
+              <a:off x="0" y="-38100"/>
+              <a:ext cx="1671091" cy="850900"/>
             </a:xfrm>
             <a:prstGeom prst="rect">
               <a:avLst/>
@@ -16550,7 +16352,7 @@
         </p:nvSpPr>
         <p:spPr>
           <a:xfrm flipH="false" flipV="false" rot="0">
-            <a:off x="266228" y="2227353"/>
+            <a:off x="266228" y="4109192"/>
             <a:ext cx="17755545" cy="5149108"/>
           </a:xfrm>
           <a:custGeom>
@@ -16596,10 +16398,10 @@
         </p:nvGrpSpPr>
         <p:grpSpPr>
           <a:xfrm rot="0">
-            <a:off x="775490" y="5442906"/>
-            <a:ext cx="16960349" cy="3086100"/>
+            <a:off x="646563" y="6537927"/>
+            <a:ext cx="16994873" cy="3086100"/>
             <a:chOff x="0" y="0"/>
-            <a:chExt cx="4466923" cy="812800"/>
+            <a:chExt cx="4476016" cy="812800"/>
           </a:xfrm>
         </p:grpSpPr>
         <p:sp>
@@ -16611,7 +16413,7 @@
           <p:spPr>
             <a:xfrm flipH="false" flipV="false" rot="0">
               <a:off x="0" y="0"/>
-              <a:ext cx="4466923" cy="812800"/>
+              <a:ext cx="4476016" cy="812800"/>
             </a:xfrm>
             <a:custGeom>
               <a:avLst/>
@@ -16620,61 +16422,61 @@
               <a:cxnLst/>
               <a:rect r="r" b="b" t="t" l="l"/>
               <a:pathLst>
-                <a:path h="812800" w="4466923">
+                <a:path h="812800" w="4476016">
                   <a:moveTo>
-                    <a:pt x="7760" y="0"/>
+                    <a:pt x="7744" y="0"/>
                   </a:moveTo>
                   <a:lnTo>
-                    <a:pt x="4459163" y="0"/>
-                  </a:lnTo>
-                  <a:cubicBezTo>
-                    <a:pt x="4461221" y="0"/>
-                    <a:pt x="4463195" y="818"/>
-                    <a:pt x="4464650" y="2273"/>
-                  </a:cubicBezTo>
-                  <a:cubicBezTo>
-                    <a:pt x="4466106" y="3728"/>
-                    <a:pt x="4466923" y="5702"/>
-                    <a:pt x="4466923" y="7760"/>
-                  </a:cubicBezTo>
-                  <a:lnTo>
-                    <a:pt x="4466923" y="805040"/>
-                  </a:lnTo>
-                  <a:cubicBezTo>
-                    <a:pt x="4466923" y="807098"/>
-                    <a:pt x="4466106" y="809072"/>
-                    <a:pt x="4464650" y="810527"/>
-                  </a:cubicBezTo>
-                  <a:cubicBezTo>
-                    <a:pt x="4463195" y="811982"/>
-                    <a:pt x="4461221" y="812800"/>
-                    <a:pt x="4459163" y="812800"/>
-                  </a:cubicBezTo>
-                  <a:lnTo>
-                    <a:pt x="7760" y="812800"/>
-                  </a:lnTo>
-                  <a:cubicBezTo>
-                    <a:pt x="5702" y="812800"/>
-                    <a:pt x="3728" y="811982"/>
-                    <a:pt x="2273" y="810527"/>
-                  </a:cubicBezTo>
-                  <a:cubicBezTo>
-                    <a:pt x="818" y="809072"/>
-                    <a:pt x="0" y="807098"/>
-                    <a:pt x="0" y="805040"/>
-                  </a:cubicBezTo>
-                  <a:lnTo>
-                    <a:pt x="0" y="7760"/>
-                  </a:lnTo>
-                  <a:cubicBezTo>
-                    <a:pt x="0" y="5702"/>
-                    <a:pt x="818" y="3728"/>
-                    <a:pt x="2273" y="2273"/>
-                  </a:cubicBezTo>
-                  <a:cubicBezTo>
-                    <a:pt x="3728" y="818"/>
-                    <a:pt x="5702" y="0"/>
-                    <a:pt x="7760" y="0"/>
+                    <a:pt x="4468272" y="0"/>
+                  </a:lnTo>
+                  <a:cubicBezTo>
+                    <a:pt x="4470326" y="0"/>
+                    <a:pt x="4472295" y="816"/>
+                    <a:pt x="4473748" y="2268"/>
+                  </a:cubicBezTo>
+                  <a:cubicBezTo>
+                    <a:pt x="4475200" y="3721"/>
+                    <a:pt x="4476016" y="5690"/>
+                    <a:pt x="4476016" y="7744"/>
+                  </a:cubicBezTo>
+                  <a:lnTo>
+                    <a:pt x="4476016" y="805056"/>
+                  </a:lnTo>
+                  <a:cubicBezTo>
+                    <a:pt x="4476016" y="807110"/>
+                    <a:pt x="4475200" y="809079"/>
+                    <a:pt x="4473748" y="810532"/>
+                  </a:cubicBezTo>
+                  <a:cubicBezTo>
+                    <a:pt x="4472295" y="811984"/>
+                    <a:pt x="4470326" y="812800"/>
+                    <a:pt x="4468272" y="812800"/>
+                  </a:cubicBezTo>
+                  <a:lnTo>
+                    <a:pt x="7744" y="812800"/>
+                  </a:lnTo>
+                  <a:cubicBezTo>
+                    <a:pt x="5690" y="812800"/>
+                    <a:pt x="3721" y="811984"/>
+                    <a:pt x="2268" y="810532"/>
+                  </a:cubicBezTo>
+                  <a:cubicBezTo>
+                    <a:pt x="816" y="809079"/>
+                    <a:pt x="0" y="807110"/>
+                    <a:pt x="0" y="805056"/>
+                  </a:cubicBezTo>
+                  <a:lnTo>
+                    <a:pt x="0" y="7744"/>
+                  </a:lnTo>
+                  <a:cubicBezTo>
+                    <a:pt x="0" y="5690"/>
+                    <a:pt x="816" y="3721"/>
+                    <a:pt x="2268" y="2268"/>
+                  </a:cubicBezTo>
+                  <a:cubicBezTo>
+                    <a:pt x="3721" y="816"/>
+                    <a:pt x="5690" y="0"/>
+                    <a:pt x="7744" y="0"/>
                   </a:cubicBezTo>
                   <a:close/>
                 </a:path>
@@ -16694,117 +16496,7 @@
           <p:spPr>
             <a:xfrm>
               <a:off x="0" y="-38100"/>
-              <a:ext cx="4466923" cy="850900"/>
-            </a:xfrm>
-            <a:prstGeom prst="rect">
-              <a:avLst/>
-            </a:prstGeom>
-          </p:spPr>
-          <p:txBody>
-            <a:bodyPr anchor="ctr" rtlCol="false" tIns="50800" lIns="50800" bIns="50800" rIns="50800"/>
-            <a:lstStyle/>
-            <a:p>
-              <a:pPr algn="ctr">
-                <a:lnSpc>
-                  <a:spcPts val="3449"/>
-                </a:lnSpc>
-              </a:pPr>
-            </a:p>
-          </p:txBody>
-        </p:sp>
-      </p:grpSp>
-      <p:grpSp>
-        <p:nvGrpSpPr>
-          <p:cNvPr name="Group 6" id="6"/>
-          <p:cNvGrpSpPr/>
-          <p:nvPr/>
-        </p:nvGrpSpPr>
-        <p:grpSpPr>
-          <a:xfrm rot="0">
-            <a:off x="6692542" y="4606495"/>
-            <a:ext cx="10330300" cy="3086100"/>
-            <a:chOff x="0" y="0"/>
-            <a:chExt cx="2720738" cy="812800"/>
-          </a:xfrm>
-        </p:grpSpPr>
-        <p:sp>
-          <p:nvSpPr>
-            <p:cNvPr name="Freeform 7" id="7"/>
-            <p:cNvSpPr/>
-            <p:nvPr/>
-          </p:nvSpPr>
-          <p:spPr>
-            <a:xfrm flipH="false" flipV="false" rot="0">
-              <a:off x="0" y="0"/>
-              <a:ext cx="2720738" cy="812800"/>
-            </a:xfrm>
-            <a:custGeom>
-              <a:avLst/>
-              <a:gdLst/>
-              <a:ahLst/>
-              <a:cxnLst/>
-              <a:rect r="r" b="b" t="t" l="l"/>
-              <a:pathLst>
-                <a:path h="812800" w="2720738">
-                  <a:moveTo>
-                    <a:pt x="12740" y="0"/>
-                  </a:moveTo>
-                  <a:lnTo>
-                    <a:pt x="2707997" y="0"/>
-                  </a:lnTo>
-                  <a:cubicBezTo>
-                    <a:pt x="2715034" y="0"/>
-                    <a:pt x="2720738" y="5704"/>
-                    <a:pt x="2720738" y="12740"/>
-                  </a:cubicBezTo>
-                  <a:lnTo>
-                    <a:pt x="2720738" y="800060"/>
-                  </a:lnTo>
-                  <a:cubicBezTo>
-                    <a:pt x="2720738" y="803439"/>
-                    <a:pt x="2719395" y="806679"/>
-                    <a:pt x="2717006" y="809068"/>
-                  </a:cubicBezTo>
-                  <a:cubicBezTo>
-                    <a:pt x="2714617" y="811458"/>
-                    <a:pt x="2711376" y="812800"/>
-                    <a:pt x="2707997" y="812800"/>
-                  </a:cubicBezTo>
-                  <a:lnTo>
-                    <a:pt x="12740" y="812800"/>
-                  </a:lnTo>
-                  <a:cubicBezTo>
-                    <a:pt x="5704" y="812800"/>
-                    <a:pt x="0" y="807096"/>
-                    <a:pt x="0" y="800060"/>
-                  </a:cubicBezTo>
-                  <a:lnTo>
-                    <a:pt x="0" y="12740"/>
-                  </a:lnTo>
-                  <a:cubicBezTo>
-                    <a:pt x="0" y="5704"/>
-                    <a:pt x="5704" y="0"/>
-                    <a:pt x="12740" y="0"/>
-                  </a:cubicBezTo>
-                  <a:close/>
-                </a:path>
-              </a:pathLst>
-            </a:custGeom>
-            <a:solidFill>
-              <a:srgbClr val="233D89"/>
-            </a:solidFill>
-          </p:spPr>
-        </p:sp>
-        <p:sp>
-          <p:nvSpPr>
-            <p:cNvPr name="TextBox 8" id="8"/>
-            <p:cNvSpPr txBox="true"/>
-            <p:nvPr/>
-          </p:nvSpPr>
-          <p:spPr>
-            <a:xfrm>
-              <a:off x="0" y="-38100"/>
-              <a:ext cx="2720738" cy="850900"/>
+              <a:ext cx="4476016" cy="850900"/>
             </a:xfrm>
             <a:prstGeom prst="rect">
               <a:avLst/>
@@ -16863,7 +16555,7 @@
         </p:nvSpPr>
         <p:spPr>
           <a:xfrm flipH="false" flipV="false" rot="0">
-            <a:off x="266228" y="2227353"/>
+            <a:off x="266228" y="4109192"/>
             <a:ext cx="17755545" cy="5149108"/>
           </a:xfrm>
           <a:custGeom>
@@ -16909,10 +16601,10 @@
         </p:nvGrpSpPr>
         <p:grpSpPr>
           <a:xfrm rot="0">
-            <a:off x="775490" y="5442906"/>
-            <a:ext cx="16960349" cy="3086100"/>
+            <a:off x="646563" y="7200900"/>
+            <a:ext cx="16994873" cy="3086100"/>
             <a:chOff x="0" y="0"/>
-            <a:chExt cx="4466923" cy="812800"/>
+            <a:chExt cx="4476016" cy="812800"/>
           </a:xfrm>
         </p:grpSpPr>
         <p:sp>
@@ -16924,7 +16616,7 @@
           <p:spPr>
             <a:xfrm flipH="false" flipV="false" rot="0">
               <a:off x="0" y="0"/>
-              <a:ext cx="4466923" cy="812800"/>
+              <a:ext cx="4476016" cy="812800"/>
             </a:xfrm>
             <a:custGeom>
               <a:avLst/>
@@ -16933,61 +16625,61 @@
               <a:cxnLst/>
               <a:rect r="r" b="b" t="t" l="l"/>
               <a:pathLst>
-                <a:path h="812800" w="4466923">
+                <a:path h="812800" w="4476016">
                   <a:moveTo>
-                    <a:pt x="7760" y="0"/>
+                    <a:pt x="7744" y="0"/>
                   </a:moveTo>
                   <a:lnTo>
-                    <a:pt x="4459163" y="0"/>
-                  </a:lnTo>
-                  <a:cubicBezTo>
-                    <a:pt x="4461221" y="0"/>
-                    <a:pt x="4463195" y="818"/>
-                    <a:pt x="4464650" y="2273"/>
-                  </a:cubicBezTo>
-                  <a:cubicBezTo>
-                    <a:pt x="4466106" y="3728"/>
-                    <a:pt x="4466923" y="5702"/>
-                    <a:pt x="4466923" y="7760"/>
-                  </a:cubicBezTo>
-                  <a:lnTo>
-                    <a:pt x="4466923" y="805040"/>
-                  </a:lnTo>
-                  <a:cubicBezTo>
-                    <a:pt x="4466923" y="807098"/>
-                    <a:pt x="4466106" y="809072"/>
-                    <a:pt x="4464650" y="810527"/>
-                  </a:cubicBezTo>
-                  <a:cubicBezTo>
-                    <a:pt x="4463195" y="811982"/>
-                    <a:pt x="4461221" y="812800"/>
-                    <a:pt x="4459163" y="812800"/>
-                  </a:cubicBezTo>
-                  <a:lnTo>
-                    <a:pt x="7760" y="812800"/>
-                  </a:lnTo>
-                  <a:cubicBezTo>
-                    <a:pt x="5702" y="812800"/>
-                    <a:pt x="3728" y="811982"/>
-                    <a:pt x="2273" y="810527"/>
-                  </a:cubicBezTo>
-                  <a:cubicBezTo>
-                    <a:pt x="818" y="809072"/>
-                    <a:pt x="0" y="807098"/>
-                    <a:pt x="0" y="805040"/>
-                  </a:cubicBezTo>
-                  <a:lnTo>
-                    <a:pt x="0" y="7760"/>
-                  </a:lnTo>
-                  <a:cubicBezTo>
-                    <a:pt x="0" y="5702"/>
-                    <a:pt x="818" y="3728"/>
-                    <a:pt x="2273" y="2273"/>
-                  </a:cubicBezTo>
-                  <a:cubicBezTo>
-                    <a:pt x="3728" y="818"/>
-                    <a:pt x="5702" y="0"/>
-                    <a:pt x="7760" y="0"/>
+                    <a:pt x="4468272" y="0"/>
+                  </a:lnTo>
+                  <a:cubicBezTo>
+                    <a:pt x="4470326" y="0"/>
+                    <a:pt x="4472295" y="816"/>
+                    <a:pt x="4473748" y="2268"/>
+                  </a:cubicBezTo>
+                  <a:cubicBezTo>
+                    <a:pt x="4475200" y="3721"/>
+                    <a:pt x="4476016" y="5690"/>
+                    <a:pt x="4476016" y="7744"/>
+                  </a:cubicBezTo>
+                  <a:lnTo>
+                    <a:pt x="4476016" y="805056"/>
+                  </a:lnTo>
+                  <a:cubicBezTo>
+                    <a:pt x="4476016" y="807110"/>
+                    <a:pt x="4475200" y="809079"/>
+                    <a:pt x="4473748" y="810532"/>
+                  </a:cubicBezTo>
+                  <a:cubicBezTo>
+                    <a:pt x="4472295" y="811984"/>
+                    <a:pt x="4470326" y="812800"/>
+                    <a:pt x="4468272" y="812800"/>
+                  </a:cubicBezTo>
+                  <a:lnTo>
+                    <a:pt x="7744" y="812800"/>
+                  </a:lnTo>
+                  <a:cubicBezTo>
+                    <a:pt x="5690" y="812800"/>
+                    <a:pt x="3721" y="811984"/>
+                    <a:pt x="2268" y="810532"/>
+                  </a:cubicBezTo>
+                  <a:cubicBezTo>
+                    <a:pt x="816" y="809079"/>
+                    <a:pt x="0" y="807110"/>
+                    <a:pt x="0" y="805056"/>
+                  </a:cubicBezTo>
+                  <a:lnTo>
+                    <a:pt x="0" y="7744"/>
+                  </a:lnTo>
+                  <a:cubicBezTo>
+                    <a:pt x="0" y="5690"/>
+                    <a:pt x="816" y="3721"/>
+                    <a:pt x="2268" y="2268"/>
+                  </a:cubicBezTo>
+                  <a:cubicBezTo>
+                    <a:pt x="3721" y="816"/>
+                    <a:pt x="5690" y="0"/>
+                    <a:pt x="7744" y="0"/>
                   </a:cubicBezTo>
                   <a:close/>
                 </a:path>
@@ -17007,7 +16699,7 @@
           <p:spPr>
             <a:xfrm>
               <a:off x="0" y="-38100"/>
-              <a:ext cx="4466923" cy="850900"/>
+              <a:ext cx="4476016" cy="850900"/>
             </a:xfrm>
             <a:prstGeom prst="rect">
               <a:avLst/>
@@ -17034,10 +16726,10 @@
         </p:nvGrpSpPr>
         <p:grpSpPr>
           <a:xfrm rot="0">
-            <a:off x="11410345" y="4606495"/>
-            <a:ext cx="5612497" cy="3086100"/>
+            <a:off x="6173930" y="6515820"/>
+            <a:ext cx="11467507" cy="3086100"/>
             <a:chOff x="0" y="0"/>
-            <a:chExt cx="1478189" cy="812800"/>
+            <a:chExt cx="3020249" cy="812800"/>
           </a:xfrm>
         </p:grpSpPr>
         <p:sp>
@@ -17049,7 +16741,7 @@
           <p:spPr>
             <a:xfrm flipH="false" flipV="false" rot="0">
               <a:off x="0" y="0"/>
-              <a:ext cx="1478189" cy="812800"/>
+              <a:ext cx="3020249" cy="812800"/>
             </a:xfrm>
             <a:custGeom>
               <a:avLst/>
@@ -17058,61 +16750,41 @@
               <a:cxnLst/>
               <a:rect r="r" b="b" t="t" l="l"/>
               <a:pathLst>
-                <a:path h="812800" w="1478189">
+                <a:path h="812800" w="3020249">
                   <a:moveTo>
-                    <a:pt x="23450" y="0"/>
+                    <a:pt x="11477" y="0"/>
                   </a:moveTo>
                   <a:lnTo>
-                    <a:pt x="1454739" y="0"/>
-                  </a:lnTo>
-                  <a:cubicBezTo>
-                    <a:pt x="1460958" y="0"/>
-                    <a:pt x="1466923" y="2471"/>
-                    <a:pt x="1471320" y="6868"/>
-                  </a:cubicBezTo>
-                  <a:cubicBezTo>
-                    <a:pt x="1475718" y="11266"/>
-                    <a:pt x="1478189" y="17231"/>
-                    <a:pt x="1478189" y="23450"/>
-                  </a:cubicBezTo>
-                  <a:lnTo>
-                    <a:pt x="1478189" y="789350"/>
-                  </a:lnTo>
-                  <a:cubicBezTo>
-                    <a:pt x="1478189" y="795569"/>
-                    <a:pt x="1475718" y="801534"/>
-                    <a:pt x="1471320" y="805932"/>
-                  </a:cubicBezTo>
-                  <a:cubicBezTo>
-                    <a:pt x="1466923" y="810329"/>
-                    <a:pt x="1460958" y="812800"/>
-                    <a:pt x="1454739" y="812800"/>
-                  </a:cubicBezTo>
-                  <a:lnTo>
-                    <a:pt x="23450" y="812800"/>
-                  </a:lnTo>
-                  <a:cubicBezTo>
-                    <a:pt x="17231" y="812800"/>
-                    <a:pt x="11266" y="810329"/>
-                    <a:pt x="6868" y="805932"/>
-                  </a:cubicBezTo>
-                  <a:cubicBezTo>
-                    <a:pt x="2471" y="801534"/>
-                    <a:pt x="0" y="795569"/>
-                    <a:pt x="0" y="789350"/>
-                  </a:cubicBezTo>
-                  <a:lnTo>
-                    <a:pt x="0" y="23450"/>
-                  </a:lnTo>
-                  <a:cubicBezTo>
-                    <a:pt x="0" y="17231"/>
-                    <a:pt x="2471" y="11266"/>
-                    <a:pt x="6868" y="6868"/>
-                  </a:cubicBezTo>
-                  <a:cubicBezTo>
-                    <a:pt x="11266" y="2471"/>
-                    <a:pt x="17231" y="0"/>
-                    <a:pt x="23450" y="0"/>
+                    <a:pt x="3008772" y="0"/>
+                  </a:lnTo>
+                  <a:cubicBezTo>
+                    <a:pt x="3015110" y="0"/>
+                    <a:pt x="3020249" y="5138"/>
+                    <a:pt x="3020249" y="11477"/>
+                  </a:cubicBezTo>
+                  <a:lnTo>
+                    <a:pt x="3020249" y="801323"/>
+                  </a:lnTo>
+                  <a:cubicBezTo>
+                    <a:pt x="3020249" y="807662"/>
+                    <a:pt x="3015110" y="812800"/>
+                    <a:pt x="3008772" y="812800"/>
+                  </a:cubicBezTo>
+                  <a:lnTo>
+                    <a:pt x="11477" y="812800"/>
+                  </a:lnTo>
+                  <a:cubicBezTo>
+                    <a:pt x="5138" y="812800"/>
+                    <a:pt x="0" y="807662"/>
+                    <a:pt x="0" y="801323"/>
+                  </a:cubicBezTo>
+                  <a:lnTo>
+                    <a:pt x="0" y="11477"/>
+                  </a:lnTo>
+                  <a:cubicBezTo>
+                    <a:pt x="0" y="5138"/>
+                    <a:pt x="5138" y="0"/>
+                    <a:pt x="11477" y="0"/>
                   </a:cubicBezTo>
                   <a:close/>
                 </a:path>
@@ -17132,7 +16804,7 @@
           <p:spPr>
             <a:xfrm>
               <a:off x="0" y="-38100"/>
-              <a:ext cx="1478189" cy="850900"/>
+              <a:ext cx="3020249" cy="850900"/>
             </a:xfrm>
             <a:prstGeom prst="rect">
               <a:avLst/>
@@ -17191,7 +16863,7 @@
         </p:nvSpPr>
         <p:spPr>
           <a:xfrm flipH="false" flipV="false" rot="0">
-            <a:off x="266228" y="2227353"/>
+            <a:off x="266228" y="4109192"/>
             <a:ext cx="17755545" cy="5149108"/>
           </a:xfrm>
           <a:custGeom>
@@ -17237,10 +16909,10 @@
         </p:nvGrpSpPr>
         <p:grpSpPr>
           <a:xfrm rot="0">
-            <a:off x="775490" y="5442906"/>
-            <a:ext cx="16960349" cy="3086100"/>
+            <a:off x="646563" y="7200900"/>
+            <a:ext cx="16994873" cy="3086100"/>
             <a:chOff x="0" y="0"/>
-            <a:chExt cx="4466923" cy="812800"/>
+            <a:chExt cx="4476016" cy="812800"/>
           </a:xfrm>
         </p:grpSpPr>
         <p:sp>
@@ -17252,7 +16924,7 @@
           <p:spPr>
             <a:xfrm flipH="false" flipV="false" rot="0">
               <a:off x="0" y="0"/>
-              <a:ext cx="4466923" cy="812800"/>
+              <a:ext cx="4476016" cy="812800"/>
             </a:xfrm>
             <a:custGeom>
               <a:avLst/>
@@ -17261,61 +16933,61 @@
               <a:cxnLst/>
               <a:rect r="r" b="b" t="t" l="l"/>
               <a:pathLst>
-                <a:path h="812800" w="4466923">
+                <a:path h="812800" w="4476016">
                   <a:moveTo>
-                    <a:pt x="7760" y="0"/>
+                    <a:pt x="7744" y="0"/>
                   </a:moveTo>
                   <a:lnTo>
-                    <a:pt x="4459163" y="0"/>
-                  </a:lnTo>
-                  <a:cubicBezTo>
-                    <a:pt x="4461221" y="0"/>
-                    <a:pt x="4463195" y="818"/>
-                    <a:pt x="4464650" y="2273"/>
-                  </a:cubicBezTo>
-                  <a:cubicBezTo>
-                    <a:pt x="4466106" y="3728"/>
-                    <a:pt x="4466923" y="5702"/>
-                    <a:pt x="4466923" y="7760"/>
-                  </a:cubicBezTo>
-                  <a:lnTo>
-                    <a:pt x="4466923" y="805040"/>
-                  </a:lnTo>
-                  <a:cubicBezTo>
-                    <a:pt x="4466923" y="807098"/>
-                    <a:pt x="4466106" y="809072"/>
-                    <a:pt x="4464650" y="810527"/>
-                  </a:cubicBezTo>
-                  <a:cubicBezTo>
-                    <a:pt x="4463195" y="811982"/>
-                    <a:pt x="4461221" y="812800"/>
-                    <a:pt x="4459163" y="812800"/>
-                  </a:cubicBezTo>
-                  <a:lnTo>
-                    <a:pt x="7760" y="812800"/>
-                  </a:lnTo>
-                  <a:cubicBezTo>
-                    <a:pt x="5702" y="812800"/>
-                    <a:pt x="3728" y="811982"/>
-                    <a:pt x="2273" y="810527"/>
-                  </a:cubicBezTo>
-                  <a:cubicBezTo>
-                    <a:pt x="818" y="809072"/>
-                    <a:pt x="0" y="807098"/>
-                    <a:pt x="0" y="805040"/>
-                  </a:cubicBezTo>
-                  <a:lnTo>
-                    <a:pt x="0" y="7760"/>
-                  </a:lnTo>
-                  <a:cubicBezTo>
-                    <a:pt x="0" y="5702"/>
-                    <a:pt x="818" y="3728"/>
-                    <a:pt x="2273" y="2273"/>
-                  </a:cubicBezTo>
-                  <a:cubicBezTo>
-                    <a:pt x="3728" y="818"/>
-                    <a:pt x="5702" y="0"/>
-                    <a:pt x="7760" y="0"/>
+                    <a:pt x="4468272" y="0"/>
+                  </a:lnTo>
+                  <a:cubicBezTo>
+                    <a:pt x="4470326" y="0"/>
+                    <a:pt x="4472295" y="816"/>
+                    <a:pt x="4473748" y="2268"/>
+                  </a:cubicBezTo>
+                  <a:cubicBezTo>
+                    <a:pt x="4475200" y="3721"/>
+                    <a:pt x="4476016" y="5690"/>
+                    <a:pt x="4476016" y="7744"/>
+                  </a:cubicBezTo>
+                  <a:lnTo>
+                    <a:pt x="4476016" y="805056"/>
+                  </a:lnTo>
+                  <a:cubicBezTo>
+                    <a:pt x="4476016" y="807110"/>
+                    <a:pt x="4475200" y="809079"/>
+                    <a:pt x="4473748" y="810532"/>
+                  </a:cubicBezTo>
+                  <a:cubicBezTo>
+                    <a:pt x="4472295" y="811984"/>
+                    <a:pt x="4470326" y="812800"/>
+                    <a:pt x="4468272" y="812800"/>
+                  </a:cubicBezTo>
+                  <a:lnTo>
+                    <a:pt x="7744" y="812800"/>
+                  </a:lnTo>
+                  <a:cubicBezTo>
+                    <a:pt x="5690" y="812800"/>
+                    <a:pt x="3721" y="811984"/>
+                    <a:pt x="2268" y="810532"/>
+                  </a:cubicBezTo>
+                  <a:cubicBezTo>
+                    <a:pt x="816" y="809079"/>
+                    <a:pt x="0" y="807110"/>
+                    <a:pt x="0" y="805056"/>
+                  </a:cubicBezTo>
+                  <a:lnTo>
+                    <a:pt x="0" y="7744"/>
+                  </a:lnTo>
+                  <a:cubicBezTo>
+                    <a:pt x="0" y="5690"/>
+                    <a:pt x="816" y="3721"/>
+                    <a:pt x="2268" y="2268"/>
+                  </a:cubicBezTo>
+                  <a:cubicBezTo>
+                    <a:pt x="3721" y="816"/>
+                    <a:pt x="5690" y="0"/>
+                    <a:pt x="7744" y="0"/>
                   </a:cubicBezTo>
                   <a:close/>
                 </a:path>
@@ -17335,7 +17007,132 @@
           <p:spPr>
             <a:xfrm>
               <a:off x="0" y="-38100"/>
-              <a:ext cx="4466923" cy="850900"/>
+              <a:ext cx="4476016" cy="850900"/>
+            </a:xfrm>
+            <a:prstGeom prst="rect">
+              <a:avLst/>
+            </a:prstGeom>
+          </p:spPr>
+          <p:txBody>
+            <a:bodyPr anchor="ctr" rtlCol="false" tIns="50800" lIns="50800" bIns="50800" rIns="50800"/>
+            <a:lstStyle/>
+            <a:p>
+              <a:pPr algn="ctr">
+                <a:lnSpc>
+                  <a:spcPts val="3449"/>
+                </a:lnSpc>
+              </a:pPr>
+            </a:p>
+          </p:txBody>
+        </p:sp>
+      </p:grpSp>
+      <p:grpSp>
+        <p:nvGrpSpPr>
+          <p:cNvPr name="Group 6" id="6"/>
+          <p:cNvGrpSpPr/>
+          <p:nvPr/>
+        </p:nvGrpSpPr>
+        <p:grpSpPr>
+          <a:xfrm rot="0">
+            <a:off x="11408179" y="6515820"/>
+            <a:ext cx="6233258" cy="3086100"/>
+            <a:chOff x="0" y="0"/>
+            <a:chExt cx="1641681" cy="812800"/>
+          </a:xfrm>
+        </p:grpSpPr>
+        <p:sp>
+          <p:nvSpPr>
+            <p:cNvPr name="Freeform 7" id="7"/>
+            <p:cNvSpPr/>
+            <p:nvPr/>
+          </p:nvSpPr>
+          <p:spPr>
+            <a:xfrm flipH="false" flipV="false" rot="0">
+              <a:off x="0" y="0"/>
+              <a:ext cx="1641681" cy="812800"/>
+            </a:xfrm>
+            <a:custGeom>
+              <a:avLst/>
+              <a:gdLst/>
+              <a:ahLst/>
+              <a:cxnLst/>
+              <a:rect r="r" b="b" t="t" l="l"/>
+              <a:pathLst>
+                <a:path h="812800" w="1641681">
+                  <a:moveTo>
+                    <a:pt x="21115" y="0"/>
+                  </a:moveTo>
+                  <a:lnTo>
+                    <a:pt x="1620566" y="0"/>
+                  </a:lnTo>
+                  <a:cubicBezTo>
+                    <a:pt x="1626166" y="0"/>
+                    <a:pt x="1631537" y="2225"/>
+                    <a:pt x="1635497" y="6184"/>
+                  </a:cubicBezTo>
+                  <a:cubicBezTo>
+                    <a:pt x="1639457" y="10144"/>
+                    <a:pt x="1641681" y="15515"/>
+                    <a:pt x="1641681" y="21115"/>
+                  </a:cubicBezTo>
+                  <a:lnTo>
+                    <a:pt x="1641681" y="791685"/>
+                  </a:lnTo>
+                  <a:cubicBezTo>
+                    <a:pt x="1641681" y="797285"/>
+                    <a:pt x="1639457" y="802656"/>
+                    <a:pt x="1635497" y="806616"/>
+                  </a:cubicBezTo>
+                  <a:cubicBezTo>
+                    <a:pt x="1631537" y="810575"/>
+                    <a:pt x="1626166" y="812800"/>
+                    <a:pt x="1620566" y="812800"/>
+                  </a:cubicBezTo>
+                  <a:lnTo>
+                    <a:pt x="21115" y="812800"/>
+                  </a:lnTo>
+                  <a:cubicBezTo>
+                    <a:pt x="15515" y="812800"/>
+                    <a:pt x="10144" y="810575"/>
+                    <a:pt x="6184" y="806616"/>
+                  </a:cubicBezTo>
+                  <a:cubicBezTo>
+                    <a:pt x="2225" y="802656"/>
+                    <a:pt x="0" y="797285"/>
+                    <a:pt x="0" y="791685"/>
+                  </a:cubicBezTo>
+                  <a:lnTo>
+                    <a:pt x="0" y="21115"/>
+                  </a:lnTo>
+                  <a:cubicBezTo>
+                    <a:pt x="0" y="15515"/>
+                    <a:pt x="2225" y="10144"/>
+                    <a:pt x="6184" y="6184"/>
+                  </a:cubicBezTo>
+                  <a:cubicBezTo>
+                    <a:pt x="10144" y="2225"/>
+                    <a:pt x="15515" y="0"/>
+                    <a:pt x="21115" y="0"/>
+                  </a:cubicBezTo>
+                  <a:close/>
+                </a:path>
+              </a:pathLst>
+            </a:custGeom>
+            <a:solidFill>
+              <a:srgbClr val="233D89"/>
+            </a:solidFill>
+          </p:spPr>
+        </p:sp>
+        <p:sp>
+          <p:nvSpPr>
+            <p:cNvPr name="TextBox 8" id="8"/>
+            <p:cNvSpPr txBox="true"/>
+            <p:nvPr/>
+          </p:nvSpPr>
+          <p:spPr>
+            <a:xfrm>
+              <a:off x="0" y="-38100"/>
+              <a:ext cx="1641681" cy="850900"/>
             </a:xfrm>
             <a:prstGeom prst="rect">
               <a:avLst/>
@@ -17394,7 +17191,7 @@
         </p:nvSpPr>
         <p:spPr>
           <a:xfrm flipH="false" flipV="false" rot="0">
-            <a:off x="266228" y="2227353"/>
+            <a:off x="266228" y="4109192"/>
             <a:ext cx="17755545" cy="5149108"/>
           </a:xfrm>
           <a:custGeom>
@@ -17440,10 +17237,10 @@
         </p:nvGrpSpPr>
         <p:grpSpPr>
           <a:xfrm rot="0">
-            <a:off x="621952" y="6126847"/>
-            <a:ext cx="5905615" cy="1425098"/>
+            <a:off x="646563" y="7200900"/>
+            <a:ext cx="16994873" cy="3086100"/>
             <a:chOff x="0" y="0"/>
-            <a:chExt cx="1555388" cy="375335"/>
+            <a:chExt cx="4476016" cy="812800"/>
           </a:xfrm>
         </p:grpSpPr>
         <p:sp>
@@ -17455,7 +17252,7 @@
           <p:spPr>
             <a:xfrm flipH="false" flipV="false" rot="0">
               <a:off x="0" y="0"/>
-              <a:ext cx="1555388" cy="375335"/>
+              <a:ext cx="4476016" cy="812800"/>
             </a:xfrm>
             <a:custGeom>
               <a:avLst/>
@@ -17464,51 +17261,61 @@
               <a:cxnLst/>
               <a:rect r="r" b="b" t="t" l="l"/>
               <a:pathLst>
-                <a:path h="375335" w="1555388">
+                <a:path h="812800" w="4476016">
                   <a:moveTo>
-                    <a:pt x="22286" y="0"/>
+                    <a:pt x="7744" y="0"/>
                   </a:moveTo>
                   <a:lnTo>
-                    <a:pt x="1533102" y="0"/>
-                  </a:lnTo>
-                  <a:cubicBezTo>
-                    <a:pt x="1539013" y="0"/>
-                    <a:pt x="1544682" y="2348"/>
-                    <a:pt x="1548861" y="6527"/>
-                  </a:cubicBezTo>
-                  <a:cubicBezTo>
-                    <a:pt x="1553040" y="10707"/>
-                    <a:pt x="1555388" y="16375"/>
-                    <a:pt x="1555388" y="22286"/>
-                  </a:cubicBezTo>
-                  <a:lnTo>
-                    <a:pt x="1555388" y="353049"/>
-                  </a:lnTo>
-                  <a:cubicBezTo>
-                    <a:pt x="1555388" y="365357"/>
-                    <a:pt x="1545411" y="375335"/>
-                    <a:pt x="1533102" y="375335"/>
-                  </a:cubicBezTo>
-                  <a:lnTo>
-                    <a:pt x="22286" y="375335"/>
-                  </a:lnTo>
-                  <a:cubicBezTo>
-                    <a:pt x="16375" y="375335"/>
-                    <a:pt x="10707" y="372987"/>
-                    <a:pt x="6527" y="368807"/>
-                  </a:cubicBezTo>
-                  <a:cubicBezTo>
-                    <a:pt x="2348" y="364628"/>
-                    <a:pt x="0" y="358959"/>
-                    <a:pt x="0" y="353049"/>
-                  </a:cubicBezTo>
-                  <a:lnTo>
-                    <a:pt x="0" y="22286"/>
-                  </a:lnTo>
-                  <a:cubicBezTo>
-                    <a:pt x="0" y="9978"/>
-                    <a:pt x="9978" y="0"/>
-                    <a:pt x="22286" y="0"/>
+                    <a:pt x="4468272" y="0"/>
+                  </a:lnTo>
+                  <a:cubicBezTo>
+                    <a:pt x="4470326" y="0"/>
+                    <a:pt x="4472295" y="816"/>
+                    <a:pt x="4473748" y="2268"/>
+                  </a:cubicBezTo>
+                  <a:cubicBezTo>
+                    <a:pt x="4475200" y="3721"/>
+                    <a:pt x="4476016" y="5690"/>
+                    <a:pt x="4476016" y="7744"/>
+                  </a:cubicBezTo>
+                  <a:lnTo>
+                    <a:pt x="4476016" y="805056"/>
+                  </a:lnTo>
+                  <a:cubicBezTo>
+                    <a:pt x="4476016" y="807110"/>
+                    <a:pt x="4475200" y="809079"/>
+                    <a:pt x="4473748" y="810532"/>
+                  </a:cubicBezTo>
+                  <a:cubicBezTo>
+                    <a:pt x="4472295" y="811984"/>
+                    <a:pt x="4470326" y="812800"/>
+                    <a:pt x="4468272" y="812800"/>
+                  </a:cubicBezTo>
+                  <a:lnTo>
+                    <a:pt x="7744" y="812800"/>
+                  </a:lnTo>
+                  <a:cubicBezTo>
+                    <a:pt x="5690" y="812800"/>
+                    <a:pt x="3721" y="811984"/>
+                    <a:pt x="2268" y="810532"/>
+                  </a:cubicBezTo>
+                  <a:cubicBezTo>
+                    <a:pt x="816" y="809079"/>
+                    <a:pt x="0" y="807110"/>
+                    <a:pt x="0" y="805056"/>
+                  </a:cubicBezTo>
+                  <a:lnTo>
+                    <a:pt x="0" y="7744"/>
+                  </a:lnTo>
+                  <a:cubicBezTo>
+                    <a:pt x="0" y="5690"/>
+                    <a:pt x="816" y="3721"/>
+                    <a:pt x="2268" y="2268"/>
+                  </a:cubicBezTo>
+                  <a:cubicBezTo>
+                    <a:pt x="3721" y="816"/>
+                    <a:pt x="5690" y="0"/>
+                    <a:pt x="7744" y="0"/>
                   </a:cubicBezTo>
                   <a:close/>
                 </a:path>
@@ -17528,127 +17335,7 @@
           <p:spPr>
             <a:xfrm>
               <a:off x="0" y="-38100"/>
-              <a:ext cx="1555388" cy="413435"/>
-            </a:xfrm>
-            <a:prstGeom prst="rect">
-              <a:avLst/>
-            </a:prstGeom>
-          </p:spPr>
-          <p:txBody>
-            <a:bodyPr anchor="ctr" rtlCol="false" tIns="50800" lIns="50800" bIns="50800" rIns="50800"/>
-            <a:lstStyle/>
-            <a:p>
-              <a:pPr algn="ctr">
-                <a:lnSpc>
-                  <a:spcPts val="3449"/>
-                </a:lnSpc>
-              </a:pPr>
-            </a:p>
-          </p:txBody>
-        </p:sp>
-      </p:grpSp>
-      <p:grpSp>
-        <p:nvGrpSpPr>
-          <p:cNvPr name="Group 6" id="6"/>
-          <p:cNvGrpSpPr/>
-          <p:nvPr/>
-        </p:nvGrpSpPr>
-        <p:grpSpPr>
-          <a:xfrm rot="0">
-            <a:off x="6441298" y="5246356"/>
-            <a:ext cx="10400090" cy="1425098"/>
-            <a:chOff x="0" y="0"/>
-            <a:chExt cx="2739118" cy="375335"/>
-          </a:xfrm>
-        </p:grpSpPr>
-        <p:sp>
-          <p:nvSpPr>
-            <p:cNvPr name="Freeform 7" id="7"/>
-            <p:cNvSpPr/>
-            <p:nvPr/>
-          </p:nvSpPr>
-          <p:spPr>
-            <a:xfrm flipH="false" flipV="false" rot="0">
-              <a:off x="0" y="0"/>
-              <a:ext cx="2739118" cy="375335"/>
-            </a:xfrm>
-            <a:custGeom>
-              <a:avLst/>
-              <a:gdLst/>
-              <a:ahLst/>
-              <a:cxnLst/>
-              <a:rect r="r" b="b" t="t" l="l"/>
-              <a:pathLst>
-                <a:path h="375335" w="2739118">
-                  <a:moveTo>
-                    <a:pt x="12655" y="0"/>
-                  </a:moveTo>
-                  <a:lnTo>
-                    <a:pt x="2726463" y="0"/>
-                  </a:lnTo>
-                  <a:cubicBezTo>
-                    <a:pt x="2733453" y="0"/>
-                    <a:pt x="2739118" y="5666"/>
-                    <a:pt x="2739118" y="12655"/>
-                  </a:cubicBezTo>
-                  <a:lnTo>
-                    <a:pt x="2739118" y="362680"/>
-                  </a:lnTo>
-                  <a:cubicBezTo>
-                    <a:pt x="2739118" y="366036"/>
-                    <a:pt x="2737785" y="369255"/>
-                    <a:pt x="2735412" y="371628"/>
-                  </a:cubicBezTo>
-                  <a:cubicBezTo>
-                    <a:pt x="2733039" y="374001"/>
-                    <a:pt x="2729820" y="375335"/>
-                    <a:pt x="2726463" y="375335"/>
-                  </a:cubicBezTo>
-                  <a:lnTo>
-                    <a:pt x="12655" y="375335"/>
-                  </a:lnTo>
-                  <a:cubicBezTo>
-                    <a:pt x="9299" y="375335"/>
-                    <a:pt x="6080" y="374001"/>
-                    <a:pt x="3707" y="371628"/>
-                  </a:cubicBezTo>
-                  <a:cubicBezTo>
-                    <a:pt x="1333" y="369255"/>
-                    <a:pt x="0" y="366036"/>
-                    <a:pt x="0" y="362680"/>
-                  </a:cubicBezTo>
-                  <a:lnTo>
-                    <a:pt x="0" y="12655"/>
-                  </a:lnTo>
-                  <a:cubicBezTo>
-                    <a:pt x="0" y="9299"/>
-                    <a:pt x="1333" y="6080"/>
-                    <a:pt x="3707" y="3707"/>
-                  </a:cubicBezTo>
-                  <a:cubicBezTo>
-                    <a:pt x="6080" y="1333"/>
-                    <a:pt x="9299" y="0"/>
-                    <a:pt x="12655" y="0"/>
-                  </a:cubicBezTo>
-                  <a:close/>
-                </a:path>
-              </a:pathLst>
-            </a:custGeom>
-            <a:solidFill>
-              <a:srgbClr val="233D89"/>
-            </a:solidFill>
-          </p:spPr>
-        </p:sp>
-        <p:sp>
-          <p:nvSpPr>
-            <p:cNvPr name="TextBox 8" id="8"/>
-            <p:cNvSpPr txBox="true"/>
-            <p:nvPr/>
-          </p:nvSpPr>
-          <p:spPr>
-            <a:xfrm>
-              <a:off x="0" y="-38100"/>
-              <a:ext cx="2739118" cy="413435"/>
+              <a:ext cx="4476016" cy="850900"/>
             </a:xfrm>
             <a:prstGeom prst="rect">
               <a:avLst/>
@@ -17707,7 +17394,7 @@
         </p:nvSpPr>
         <p:spPr>
           <a:xfrm flipH="false" flipV="false" rot="0">
-            <a:off x="266228" y="2227353"/>
+            <a:off x="266228" y="4109192"/>
             <a:ext cx="17755545" cy="5149108"/>
           </a:xfrm>
           <a:custGeom>
@@ -17753,10 +17440,10 @@
         </p:nvGrpSpPr>
         <p:grpSpPr>
           <a:xfrm rot="0">
-            <a:off x="621952" y="6126847"/>
-            <a:ext cx="5905615" cy="1425098"/>
+            <a:off x="646563" y="7982548"/>
+            <a:ext cx="16994873" cy="3086100"/>
             <a:chOff x="0" y="0"/>
-            <a:chExt cx="1555388" cy="375335"/>
+            <a:chExt cx="4476016" cy="812800"/>
           </a:xfrm>
         </p:grpSpPr>
         <p:sp>
@@ -17768,7 +17455,7 @@
           <p:spPr>
             <a:xfrm flipH="false" flipV="false" rot="0">
               <a:off x="0" y="0"/>
-              <a:ext cx="1555388" cy="375335"/>
+              <a:ext cx="4476016" cy="812800"/>
             </a:xfrm>
             <a:custGeom>
               <a:avLst/>
@@ -17777,51 +17464,61 @@
               <a:cxnLst/>
               <a:rect r="r" b="b" t="t" l="l"/>
               <a:pathLst>
-                <a:path h="375335" w="1555388">
+                <a:path h="812800" w="4476016">
                   <a:moveTo>
-                    <a:pt x="22286" y="0"/>
+                    <a:pt x="7744" y="0"/>
                   </a:moveTo>
                   <a:lnTo>
-                    <a:pt x="1533102" y="0"/>
-                  </a:lnTo>
-                  <a:cubicBezTo>
-                    <a:pt x="1539013" y="0"/>
-                    <a:pt x="1544682" y="2348"/>
-                    <a:pt x="1548861" y="6527"/>
-                  </a:cubicBezTo>
-                  <a:cubicBezTo>
-                    <a:pt x="1553040" y="10707"/>
-                    <a:pt x="1555388" y="16375"/>
-                    <a:pt x="1555388" y="22286"/>
-                  </a:cubicBezTo>
-                  <a:lnTo>
-                    <a:pt x="1555388" y="353049"/>
-                  </a:lnTo>
-                  <a:cubicBezTo>
-                    <a:pt x="1555388" y="365357"/>
-                    <a:pt x="1545411" y="375335"/>
-                    <a:pt x="1533102" y="375335"/>
-                  </a:cubicBezTo>
-                  <a:lnTo>
-                    <a:pt x="22286" y="375335"/>
-                  </a:lnTo>
-                  <a:cubicBezTo>
-                    <a:pt x="16375" y="375335"/>
-                    <a:pt x="10707" y="372987"/>
-                    <a:pt x="6527" y="368807"/>
-                  </a:cubicBezTo>
-                  <a:cubicBezTo>
-                    <a:pt x="2348" y="364628"/>
-                    <a:pt x="0" y="358959"/>
-                    <a:pt x="0" y="353049"/>
-                  </a:cubicBezTo>
-                  <a:lnTo>
-                    <a:pt x="0" y="22286"/>
-                  </a:lnTo>
-                  <a:cubicBezTo>
-                    <a:pt x="0" y="9978"/>
-                    <a:pt x="9978" y="0"/>
-                    <a:pt x="22286" y="0"/>
+                    <a:pt x="4468272" y="0"/>
+                  </a:lnTo>
+                  <a:cubicBezTo>
+                    <a:pt x="4470326" y="0"/>
+                    <a:pt x="4472295" y="816"/>
+                    <a:pt x="4473748" y="2268"/>
+                  </a:cubicBezTo>
+                  <a:cubicBezTo>
+                    <a:pt x="4475200" y="3721"/>
+                    <a:pt x="4476016" y="5690"/>
+                    <a:pt x="4476016" y="7744"/>
+                  </a:cubicBezTo>
+                  <a:lnTo>
+                    <a:pt x="4476016" y="805056"/>
+                  </a:lnTo>
+                  <a:cubicBezTo>
+                    <a:pt x="4476016" y="807110"/>
+                    <a:pt x="4475200" y="809079"/>
+                    <a:pt x="4473748" y="810532"/>
+                  </a:cubicBezTo>
+                  <a:cubicBezTo>
+                    <a:pt x="4472295" y="811984"/>
+                    <a:pt x="4470326" y="812800"/>
+                    <a:pt x="4468272" y="812800"/>
+                  </a:cubicBezTo>
+                  <a:lnTo>
+                    <a:pt x="7744" y="812800"/>
+                  </a:lnTo>
+                  <a:cubicBezTo>
+                    <a:pt x="5690" y="812800"/>
+                    <a:pt x="3721" y="811984"/>
+                    <a:pt x="2268" y="810532"/>
+                  </a:cubicBezTo>
+                  <a:cubicBezTo>
+                    <a:pt x="816" y="809079"/>
+                    <a:pt x="0" y="807110"/>
+                    <a:pt x="0" y="805056"/>
+                  </a:cubicBezTo>
+                  <a:lnTo>
+                    <a:pt x="0" y="7744"/>
+                  </a:lnTo>
+                  <a:cubicBezTo>
+                    <a:pt x="0" y="5690"/>
+                    <a:pt x="816" y="3721"/>
+                    <a:pt x="2268" y="2268"/>
+                  </a:cubicBezTo>
+                  <a:cubicBezTo>
+                    <a:pt x="3721" y="816"/>
+                    <a:pt x="5690" y="0"/>
+                    <a:pt x="7744" y="0"/>
                   </a:cubicBezTo>
                   <a:close/>
                 </a:path>
@@ -17841,7 +17538,7 @@
           <p:spPr>
             <a:xfrm>
               <a:off x="0" y="-38100"/>
-              <a:ext cx="1555388" cy="413435"/>
+              <a:ext cx="4476016" cy="850900"/>
             </a:xfrm>
             <a:prstGeom prst="rect">
               <a:avLst/>
@@ -17868,10 +17565,10 @@
         </p:nvGrpSpPr>
         <p:grpSpPr>
           <a:xfrm rot="0">
-            <a:off x="12261783" y="5246356"/>
-            <a:ext cx="4579606" cy="1425098"/>
+            <a:off x="6242582" y="7200900"/>
+            <a:ext cx="11607087" cy="3086100"/>
             <a:chOff x="0" y="0"/>
-            <a:chExt cx="1206151" cy="375335"/>
+            <a:chExt cx="3057010" cy="812800"/>
           </a:xfrm>
         </p:grpSpPr>
         <p:sp>
@@ -17883,7 +17580,7 @@
           <p:spPr>
             <a:xfrm flipH="false" flipV="false" rot="0">
               <a:off x="0" y="0"/>
-              <a:ext cx="1206151" cy="375335"/>
+              <a:ext cx="3057010" cy="812800"/>
             </a:xfrm>
             <a:custGeom>
               <a:avLst/>
@@ -17892,46 +17589,46 @@
               <a:cxnLst/>
               <a:rect r="r" b="b" t="t" l="l"/>
               <a:pathLst>
-                <a:path h="375335" w="1206151">
+                <a:path h="812800" w="3057010">
                   <a:moveTo>
-                    <a:pt x="28739" y="0"/>
+                    <a:pt x="11339" y="0"/>
                   </a:moveTo>
                   <a:lnTo>
-                    <a:pt x="1177412" y="0"/>
-                  </a:lnTo>
-                  <a:cubicBezTo>
-                    <a:pt x="1193284" y="0"/>
-                    <a:pt x="1206151" y="12867"/>
-                    <a:pt x="1206151" y="28739"/>
-                  </a:cubicBezTo>
-                  <a:lnTo>
-                    <a:pt x="1206151" y="346596"/>
-                  </a:lnTo>
-                  <a:cubicBezTo>
-                    <a:pt x="1206151" y="362468"/>
-                    <a:pt x="1193284" y="375335"/>
-                    <a:pt x="1177412" y="375335"/>
-                  </a:cubicBezTo>
-                  <a:lnTo>
-                    <a:pt x="28739" y="375335"/>
-                  </a:lnTo>
-                  <a:cubicBezTo>
-                    <a:pt x="21117" y="375335"/>
-                    <a:pt x="13807" y="372307"/>
-                    <a:pt x="8417" y="366917"/>
-                  </a:cubicBezTo>
-                  <a:cubicBezTo>
-                    <a:pt x="3028" y="361528"/>
-                    <a:pt x="0" y="354218"/>
-                    <a:pt x="0" y="346596"/>
-                  </a:cubicBezTo>
-                  <a:lnTo>
-                    <a:pt x="0" y="28739"/>
-                  </a:lnTo>
-                  <a:cubicBezTo>
-                    <a:pt x="0" y="12867"/>
-                    <a:pt x="12867" y="0"/>
-                    <a:pt x="28739" y="0"/>
+                    <a:pt x="3045671" y="0"/>
+                  </a:lnTo>
+                  <a:cubicBezTo>
+                    <a:pt x="3048679" y="0"/>
+                    <a:pt x="3051563" y="1195"/>
+                    <a:pt x="3053689" y="3321"/>
+                  </a:cubicBezTo>
+                  <a:cubicBezTo>
+                    <a:pt x="3055816" y="5448"/>
+                    <a:pt x="3057010" y="8332"/>
+                    <a:pt x="3057010" y="11339"/>
+                  </a:cubicBezTo>
+                  <a:lnTo>
+                    <a:pt x="3057010" y="801461"/>
+                  </a:lnTo>
+                  <a:cubicBezTo>
+                    <a:pt x="3057010" y="807723"/>
+                    <a:pt x="3051934" y="812800"/>
+                    <a:pt x="3045671" y="812800"/>
+                  </a:cubicBezTo>
+                  <a:lnTo>
+                    <a:pt x="11339" y="812800"/>
+                  </a:lnTo>
+                  <a:cubicBezTo>
+                    <a:pt x="5077" y="812800"/>
+                    <a:pt x="0" y="807723"/>
+                    <a:pt x="0" y="801461"/>
+                  </a:cubicBezTo>
+                  <a:lnTo>
+                    <a:pt x="0" y="11339"/>
+                  </a:lnTo>
+                  <a:cubicBezTo>
+                    <a:pt x="0" y="5077"/>
+                    <a:pt x="5077" y="0"/>
+                    <a:pt x="11339" y="0"/>
                   </a:cubicBezTo>
                   <a:close/>
                 </a:path>
@@ -17951,7 +17648,7 @@
           <p:spPr>
             <a:xfrm>
               <a:off x="0" y="-38100"/>
-              <a:ext cx="1206151" cy="413435"/>
+              <a:ext cx="3057010" cy="850900"/>
             </a:xfrm>
             <a:prstGeom prst="rect">
               <a:avLst/>
@@ -18327,7 +18024,7 @@
         </p:nvSpPr>
         <p:spPr>
           <a:xfrm flipH="false" flipV="false" rot="0">
-            <a:off x="266228" y="2227353"/>
+            <a:off x="266228" y="4109192"/>
             <a:ext cx="17755545" cy="5149108"/>
           </a:xfrm>
           <a:custGeom>
@@ -18373,10 +18070,10 @@
         </p:nvGrpSpPr>
         <p:grpSpPr>
           <a:xfrm rot="0">
-            <a:off x="621952" y="6126847"/>
-            <a:ext cx="5905615" cy="1425098"/>
+            <a:off x="646563" y="7982548"/>
+            <a:ext cx="16994873" cy="3086100"/>
             <a:chOff x="0" y="0"/>
-            <a:chExt cx="1555388" cy="375335"/>
+            <a:chExt cx="4476016" cy="812800"/>
           </a:xfrm>
         </p:grpSpPr>
         <p:sp>
@@ -18388,7 +18085,7 @@
           <p:spPr>
             <a:xfrm flipH="false" flipV="false" rot="0">
               <a:off x="0" y="0"/>
-              <a:ext cx="1555388" cy="375335"/>
+              <a:ext cx="4476016" cy="812800"/>
             </a:xfrm>
             <a:custGeom>
               <a:avLst/>
@@ -18397,51 +18094,61 @@
               <a:cxnLst/>
               <a:rect r="r" b="b" t="t" l="l"/>
               <a:pathLst>
-                <a:path h="375335" w="1555388">
+                <a:path h="812800" w="4476016">
                   <a:moveTo>
-                    <a:pt x="22286" y="0"/>
+                    <a:pt x="7744" y="0"/>
                   </a:moveTo>
                   <a:lnTo>
-                    <a:pt x="1533102" y="0"/>
-                  </a:lnTo>
-                  <a:cubicBezTo>
-                    <a:pt x="1539013" y="0"/>
-                    <a:pt x="1544682" y="2348"/>
-                    <a:pt x="1548861" y="6527"/>
-                  </a:cubicBezTo>
-                  <a:cubicBezTo>
-                    <a:pt x="1553040" y="10707"/>
-                    <a:pt x="1555388" y="16375"/>
-                    <a:pt x="1555388" y="22286"/>
-                  </a:cubicBezTo>
-                  <a:lnTo>
-                    <a:pt x="1555388" y="353049"/>
-                  </a:lnTo>
-                  <a:cubicBezTo>
-                    <a:pt x="1555388" y="365357"/>
-                    <a:pt x="1545411" y="375335"/>
-                    <a:pt x="1533102" y="375335"/>
-                  </a:cubicBezTo>
-                  <a:lnTo>
-                    <a:pt x="22286" y="375335"/>
-                  </a:lnTo>
-                  <a:cubicBezTo>
-                    <a:pt x="16375" y="375335"/>
-                    <a:pt x="10707" y="372987"/>
-                    <a:pt x="6527" y="368807"/>
-                  </a:cubicBezTo>
-                  <a:cubicBezTo>
-                    <a:pt x="2348" y="364628"/>
-                    <a:pt x="0" y="358959"/>
-                    <a:pt x="0" y="353049"/>
-                  </a:cubicBezTo>
-                  <a:lnTo>
-                    <a:pt x="0" y="22286"/>
-                  </a:lnTo>
-                  <a:cubicBezTo>
-                    <a:pt x="0" y="9978"/>
-                    <a:pt x="9978" y="0"/>
-                    <a:pt x="22286" y="0"/>
+                    <a:pt x="4468272" y="0"/>
+                  </a:lnTo>
+                  <a:cubicBezTo>
+                    <a:pt x="4470326" y="0"/>
+                    <a:pt x="4472295" y="816"/>
+                    <a:pt x="4473748" y="2268"/>
+                  </a:cubicBezTo>
+                  <a:cubicBezTo>
+                    <a:pt x="4475200" y="3721"/>
+                    <a:pt x="4476016" y="5690"/>
+                    <a:pt x="4476016" y="7744"/>
+                  </a:cubicBezTo>
+                  <a:lnTo>
+                    <a:pt x="4476016" y="805056"/>
+                  </a:lnTo>
+                  <a:cubicBezTo>
+                    <a:pt x="4476016" y="807110"/>
+                    <a:pt x="4475200" y="809079"/>
+                    <a:pt x="4473748" y="810532"/>
+                  </a:cubicBezTo>
+                  <a:cubicBezTo>
+                    <a:pt x="4472295" y="811984"/>
+                    <a:pt x="4470326" y="812800"/>
+                    <a:pt x="4468272" y="812800"/>
+                  </a:cubicBezTo>
+                  <a:lnTo>
+                    <a:pt x="7744" y="812800"/>
+                  </a:lnTo>
+                  <a:cubicBezTo>
+                    <a:pt x="5690" y="812800"/>
+                    <a:pt x="3721" y="811984"/>
+                    <a:pt x="2268" y="810532"/>
+                  </a:cubicBezTo>
+                  <a:cubicBezTo>
+                    <a:pt x="816" y="809079"/>
+                    <a:pt x="0" y="807110"/>
+                    <a:pt x="0" y="805056"/>
+                  </a:cubicBezTo>
+                  <a:lnTo>
+                    <a:pt x="0" y="7744"/>
+                  </a:lnTo>
+                  <a:cubicBezTo>
+                    <a:pt x="0" y="5690"/>
+                    <a:pt x="816" y="3721"/>
+                    <a:pt x="2268" y="2268"/>
+                  </a:cubicBezTo>
+                  <a:cubicBezTo>
+                    <a:pt x="3721" y="816"/>
+                    <a:pt x="5690" y="0"/>
+                    <a:pt x="7744" y="0"/>
                   </a:cubicBezTo>
                   <a:close/>
                 </a:path>
@@ -18461,7 +18168,132 @@
           <p:spPr>
             <a:xfrm>
               <a:off x="0" y="-38100"/>
-              <a:ext cx="1555388" cy="413435"/>
+              <a:ext cx="4476016" cy="850900"/>
+            </a:xfrm>
+            <a:prstGeom prst="rect">
+              <a:avLst/>
+            </a:prstGeom>
+          </p:spPr>
+          <p:txBody>
+            <a:bodyPr anchor="ctr" rtlCol="false" tIns="50800" lIns="50800" bIns="50800" rIns="50800"/>
+            <a:lstStyle/>
+            <a:p>
+              <a:pPr algn="ctr">
+                <a:lnSpc>
+                  <a:spcPts val="3449"/>
+                </a:lnSpc>
+              </a:pPr>
+            </a:p>
+          </p:txBody>
+        </p:sp>
+      </p:grpSp>
+      <p:grpSp>
+        <p:nvGrpSpPr>
+          <p:cNvPr name="Group 6" id="6"/>
+          <p:cNvGrpSpPr/>
+          <p:nvPr/>
+        </p:nvGrpSpPr>
+        <p:grpSpPr>
+          <a:xfrm rot="0">
+            <a:off x="12314311" y="7200900"/>
+            <a:ext cx="5535358" cy="3086100"/>
+            <a:chOff x="0" y="0"/>
+            <a:chExt cx="1457872" cy="812800"/>
+          </a:xfrm>
+        </p:grpSpPr>
+        <p:sp>
+          <p:nvSpPr>
+            <p:cNvPr name="Freeform 7" id="7"/>
+            <p:cNvSpPr/>
+            <p:nvPr/>
+          </p:nvSpPr>
+          <p:spPr>
+            <a:xfrm flipH="false" flipV="false" rot="0">
+              <a:off x="0" y="0"/>
+              <a:ext cx="1457872" cy="812800"/>
+            </a:xfrm>
+            <a:custGeom>
+              <a:avLst/>
+              <a:gdLst/>
+              <a:ahLst/>
+              <a:cxnLst/>
+              <a:rect r="r" b="b" t="t" l="l"/>
+              <a:pathLst>
+                <a:path h="812800" w="1457872">
+                  <a:moveTo>
+                    <a:pt x="23777" y="0"/>
+                  </a:moveTo>
+                  <a:lnTo>
+                    <a:pt x="1434095" y="0"/>
+                  </a:lnTo>
+                  <a:cubicBezTo>
+                    <a:pt x="1440401" y="0"/>
+                    <a:pt x="1446449" y="2505"/>
+                    <a:pt x="1450908" y="6964"/>
+                  </a:cubicBezTo>
+                  <a:cubicBezTo>
+                    <a:pt x="1455367" y="11423"/>
+                    <a:pt x="1457872" y="17471"/>
+                    <a:pt x="1457872" y="23777"/>
+                  </a:cubicBezTo>
+                  <a:lnTo>
+                    <a:pt x="1457872" y="789023"/>
+                  </a:lnTo>
+                  <a:cubicBezTo>
+                    <a:pt x="1457872" y="795329"/>
+                    <a:pt x="1455367" y="801377"/>
+                    <a:pt x="1450908" y="805836"/>
+                  </a:cubicBezTo>
+                  <a:cubicBezTo>
+                    <a:pt x="1446449" y="810295"/>
+                    <a:pt x="1440401" y="812800"/>
+                    <a:pt x="1434095" y="812800"/>
+                  </a:cubicBezTo>
+                  <a:lnTo>
+                    <a:pt x="23777" y="812800"/>
+                  </a:lnTo>
+                  <a:cubicBezTo>
+                    <a:pt x="17471" y="812800"/>
+                    <a:pt x="11423" y="810295"/>
+                    <a:pt x="6964" y="805836"/>
+                  </a:cubicBezTo>
+                  <a:cubicBezTo>
+                    <a:pt x="2505" y="801377"/>
+                    <a:pt x="0" y="795329"/>
+                    <a:pt x="0" y="789023"/>
+                  </a:cubicBezTo>
+                  <a:lnTo>
+                    <a:pt x="0" y="23777"/>
+                  </a:lnTo>
+                  <a:cubicBezTo>
+                    <a:pt x="0" y="17471"/>
+                    <a:pt x="2505" y="11423"/>
+                    <a:pt x="6964" y="6964"/>
+                  </a:cubicBezTo>
+                  <a:cubicBezTo>
+                    <a:pt x="11423" y="2505"/>
+                    <a:pt x="17471" y="0"/>
+                    <a:pt x="23777" y="0"/>
+                  </a:cubicBezTo>
+                  <a:close/>
+                </a:path>
+              </a:pathLst>
+            </a:custGeom>
+            <a:solidFill>
+              <a:srgbClr val="233D89"/>
+            </a:solidFill>
+          </p:spPr>
+        </p:sp>
+        <p:sp>
+          <p:nvSpPr>
+            <p:cNvPr name="TextBox 8" id="8"/>
+            <p:cNvSpPr txBox="true"/>
+            <p:nvPr/>
+          </p:nvSpPr>
+          <p:spPr>
+            <a:xfrm>
+              <a:off x="0" y="-38100"/>
+              <a:ext cx="1457872" cy="850900"/>
             </a:xfrm>
             <a:prstGeom prst="rect">
               <a:avLst/>
@@ -18520,7 +18352,210 @@
         </p:nvSpPr>
         <p:spPr>
           <a:xfrm flipH="false" flipV="false" rot="0">
-            <a:off x="266228" y="2227353"/>
+            <a:off x="266228" y="4109192"/>
+            <a:ext cx="17755545" cy="5149108"/>
+          </a:xfrm>
+          <a:custGeom>
+            <a:avLst/>
+            <a:gdLst/>
+            <a:ahLst/>
+            <a:cxnLst/>
+            <a:rect r="r" b="b" t="t" l="l"/>
+            <a:pathLst>
+              <a:path h="5149108" w="17755545">
+                <a:moveTo>
+                  <a:pt x="0" y="0"/>
+                </a:moveTo>
+                <a:lnTo>
+                  <a:pt x="17755544" y="0"/>
+                </a:lnTo>
+                <a:lnTo>
+                  <a:pt x="17755544" y="5149108"/>
+                </a:lnTo>
+                <a:lnTo>
+                  <a:pt x="0" y="5149108"/>
+                </a:lnTo>
+                <a:lnTo>
+                  <a:pt x="0" y="0"/>
+                </a:lnTo>
+                <a:close/>
+              </a:path>
+            </a:pathLst>
+          </a:custGeom>
+          <a:blipFill>
+            <a:blip r:embed="rId2"/>
+            <a:stretch>
+              <a:fillRect l="0" t="0" r="0" b="0"/>
+            </a:stretch>
+          </a:blipFill>
+        </p:spPr>
+      </p:sp>
+      <p:grpSp>
+        <p:nvGrpSpPr>
+          <p:cNvPr name="Group 3" id="3"/>
+          <p:cNvGrpSpPr/>
+          <p:nvPr/>
+        </p:nvGrpSpPr>
+        <p:grpSpPr>
+          <a:xfrm rot="0">
+            <a:off x="646563" y="7982548"/>
+            <a:ext cx="16994873" cy="3086100"/>
+            <a:chOff x="0" y="0"/>
+            <a:chExt cx="4476016" cy="812800"/>
+          </a:xfrm>
+        </p:grpSpPr>
+        <p:sp>
+          <p:nvSpPr>
+            <p:cNvPr name="Freeform 4" id="4"/>
+            <p:cNvSpPr/>
+            <p:nvPr/>
+          </p:nvSpPr>
+          <p:spPr>
+            <a:xfrm flipH="false" flipV="false" rot="0">
+              <a:off x="0" y="0"/>
+              <a:ext cx="4476016" cy="812800"/>
+            </a:xfrm>
+            <a:custGeom>
+              <a:avLst/>
+              <a:gdLst/>
+              <a:ahLst/>
+              <a:cxnLst/>
+              <a:rect r="r" b="b" t="t" l="l"/>
+              <a:pathLst>
+                <a:path h="812800" w="4476016">
+                  <a:moveTo>
+                    <a:pt x="7744" y="0"/>
+                  </a:moveTo>
+                  <a:lnTo>
+                    <a:pt x="4468272" y="0"/>
+                  </a:lnTo>
+                  <a:cubicBezTo>
+                    <a:pt x="4470326" y="0"/>
+                    <a:pt x="4472295" y="816"/>
+                    <a:pt x="4473748" y="2268"/>
+                  </a:cubicBezTo>
+                  <a:cubicBezTo>
+                    <a:pt x="4475200" y="3721"/>
+                    <a:pt x="4476016" y="5690"/>
+                    <a:pt x="4476016" y="7744"/>
+                  </a:cubicBezTo>
+                  <a:lnTo>
+                    <a:pt x="4476016" y="805056"/>
+                  </a:lnTo>
+                  <a:cubicBezTo>
+                    <a:pt x="4476016" y="807110"/>
+                    <a:pt x="4475200" y="809079"/>
+                    <a:pt x="4473748" y="810532"/>
+                  </a:cubicBezTo>
+                  <a:cubicBezTo>
+                    <a:pt x="4472295" y="811984"/>
+                    <a:pt x="4470326" y="812800"/>
+                    <a:pt x="4468272" y="812800"/>
+                  </a:cubicBezTo>
+                  <a:lnTo>
+                    <a:pt x="7744" y="812800"/>
+                  </a:lnTo>
+                  <a:cubicBezTo>
+                    <a:pt x="5690" y="812800"/>
+                    <a:pt x="3721" y="811984"/>
+                    <a:pt x="2268" y="810532"/>
+                  </a:cubicBezTo>
+                  <a:cubicBezTo>
+                    <a:pt x="816" y="809079"/>
+                    <a:pt x="0" y="807110"/>
+                    <a:pt x="0" y="805056"/>
+                  </a:cubicBezTo>
+                  <a:lnTo>
+                    <a:pt x="0" y="7744"/>
+                  </a:lnTo>
+                  <a:cubicBezTo>
+                    <a:pt x="0" y="5690"/>
+                    <a:pt x="816" y="3721"/>
+                    <a:pt x="2268" y="2268"/>
+                  </a:cubicBezTo>
+                  <a:cubicBezTo>
+                    <a:pt x="3721" y="816"/>
+                    <a:pt x="5690" y="0"/>
+                    <a:pt x="7744" y="0"/>
+                  </a:cubicBezTo>
+                  <a:close/>
+                </a:path>
+              </a:pathLst>
+            </a:custGeom>
+            <a:solidFill>
+              <a:srgbClr val="233D89"/>
+            </a:solidFill>
+          </p:spPr>
+        </p:sp>
+        <p:sp>
+          <p:nvSpPr>
+            <p:cNvPr name="TextBox 5" id="5"/>
+            <p:cNvSpPr txBox="true"/>
+            <p:nvPr/>
+          </p:nvSpPr>
+          <p:spPr>
+            <a:xfrm>
+              <a:off x="0" y="-38100"/>
+              <a:ext cx="4476016" cy="850900"/>
+            </a:xfrm>
+            <a:prstGeom prst="rect">
+              <a:avLst/>
+            </a:prstGeom>
+          </p:spPr>
+          <p:txBody>
+            <a:bodyPr anchor="ctr" rtlCol="false" tIns="50800" lIns="50800" bIns="50800" rIns="50800"/>
+            <a:lstStyle/>
+            <a:p>
+              <a:pPr algn="ctr">
+                <a:lnSpc>
+                  <a:spcPts val="3449"/>
+                </a:lnSpc>
+              </a:pPr>
+            </a:p>
+          </p:txBody>
+        </p:sp>
+      </p:grpSp>
+    </p:spTree>
+  </p:cSld>
+  <p:clrMapOvr>
+    <a:masterClrMapping/>
+  </p:clrMapOvr>
+</p:sld>
+</file>
+
+<file path=ppt/slides/slide32.xml><?xml version="1.0" encoding="utf-8"?>
+<p:sld xmlns:p="http://schemas.openxmlformats.org/presentationml/2006/main" xmlns:a="http://schemas.openxmlformats.org/drawingml/2006/main" xmlns:r="http://schemas.openxmlformats.org/officeDocument/2006/relationships">
+  <p:cSld>
+    <p:bg>
+      <p:bgPr>
+        <a:solidFill>
+          <a:srgbClr val="233D89"/>
+        </a:solidFill>
+      </p:bgPr>
+    </p:bg>
+    <p:spTree>
+      <p:nvGrpSpPr>
+        <p:cNvPr id="1" name=""/>
+        <p:cNvGrpSpPr/>
+        <p:nvPr/>
+      </p:nvGrpSpPr>
+      <p:grpSpPr>
+        <a:xfrm>
+          <a:off x="0" y="0"/>
+          <a:ext cx="0" cy="0"/>
+          <a:chOff x="0" y="0"/>
+          <a:chExt cx="0" cy="0"/>
+        </a:xfrm>
+      </p:grpSpPr>
+      <p:sp>
+        <p:nvSpPr>
+          <p:cNvPr name="Freeform 2" id="2"/>
+          <p:cNvSpPr/>
+          <p:nvPr/>
+        </p:nvSpPr>
+        <p:spPr>
+          <a:xfrm flipH="false" flipV="false" rot="0">
+            <a:off x="266228" y="4109192"/>
             <a:ext cx="17755545" cy="5149108"/>
           </a:xfrm>
           <a:custGeom>
@@ -18566,7 +18601,7 @@
 </p:sld>
 </file>
 
-<file path=ppt/slides/slide32.xml><?xml version="1.0" encoding="utf-8"?>
+<file path=ppt/slides/slide33.xml><?xml version="1.0" encoding="utf-8"?>
 <p:sld xmlns:p="http://schemas.openxmlformats.org/presentationml/2006/main" xmlns:a="http://schemas.openxmlformats.org/drawingml/2006/main">
   <p:cSld>
     <p:bg>
@@ -18639,7 +18674,7 @@
 </p:sld>
 </file>
 
-<file path=ppt/slides/slide33.xml><?xml version="1.0" encoding="utf-8"?>
+<file path=ppt/slides/slide34.xml><?xml version="1.0" encoding="utf-8"?>
 <p:sld xmlns:p="http://schemas.openxmlformats.org/presentationml/2006/main" xmlns:a="http://schemas.openxmlformats.org/drawingml/2006/main" xmlns:r="http://schemas.openxmlformats.org/officeDocument/2006/relationships">
   <p:cSld>
     <p:bg>
@@ -18717,7 +18752,7 @@
 </p:sld>
 </file>
 
-<file path=ppt/slides/slide34.xml><?xml version="1.0" encoding="utf-8"?>
+<file path=ppt/slides/slide35.xml><?xml version="1.0" encoding="utf-8"?>
 <p:sld xmlns:p="http://schemas.openxmlformats.org/presentationml/2006/main" xmlns:a="http://schemas.openxmlformats.org/drawingml/2006/main" xmlns:r="http://schemas.openxmlformats.org/officeDocument/2006/relationships">
   <p:cSld>
     <p:bg>
@@ -18795,7 +18830,7 @@
 </p:sld>
 </file>
 
-<file path=ppt/slides/slide35.xml><?xml version="1.0" encoding="utf-8"?>
+<file path=ppt/slides/slide36.xml><?xml version="1.0" encoding="utf-8"?>
 <p:sld xmlns:p="http://schemas.openxmlformats.org/presentationml/2006/main" xmlns:a="http://schemas.openxmlformats.org/drawingml/2006/main" xmlns:r="http://schemas.openxmlformats.org/officeDocument/2006/relationships">
   <p:cSld>
     <p:bg>
@@ -18873,7 +18908,7 @@
 </p:sld>
 </file>
 
-<file path=ppt/slides/slide36.xml><?xml version="1.0" encoding="utf-8"?>
+<file path=ppt/slides/slide37.xml><?xml version="1.0" encoding="utf-8"?>
 <p:sld xmlns:p="http://schemas.openxmlformats.org/presentationml/2006/main" xmlns:a="http://schemas.openxmlformats.org/drawingml/2006/main" xmlns:r="http://schemas.openxmlformats.org/officeDocument/2006/relationships">
   <p:cSld>
     <p:bg>
@@ -18951,7 +18986,7 @@
 </p:sld>
 </file>
 
-<file path=ppt/slides/slide37.xml><?xml version="1.0" encoding="utf-8"?>
+<file path=ppt/slides/slide38.xml><?xml version="1.0" encoding="utf-8"?>
 <p:sld xmlns:p="http://schemas.openxmlformats.org/presentationml/2006/main" xmlns:a="http://schemas.openxmlformats.org/drawingml/2006/main" xmlns:r="http://schemas.openxmlformats.org/officeDocument/2006/relationships">
   <p:cSld>
     <p:bg>
@@ -19029,7 +19064,7 @@
 </p:sld>
 </file>
 
-<file path=ppt/slides/slide38.xml><?xml version="1.0" encoding="utf-8"?>
+<file path=ppt/slides/slide39.xml><?xml version="1.0" encoding="utf-8"?>
 <p:sld xmlns:p="http://schemas.openxmlformats.org/presentationml/2006/main" xmlns:a="http://schemas.openxmlformats.org/drawingml/2006/main" xmlns:r="http://schemas.openxmlformats.org/officeDocument/2006/relationships">
   <p:cSld>
     <p:bg>
@@ -19098,79 +19133,6 @@
             </a:stretch>
           </a:blipFill>
         </p:spPr>
-      </p:sp>
-    </p:spTree>
-  </p:cSld>
-  <p:clrMapOvr>
-    <a:masterClrMapping/>
-  </p:clrMapOvr>
-</p:sld>
-</file>
-
-<file path=ppt/slides/slide39.xml><?xml version="1.0" encoding="utf-8"?>
-<p:sld xmlns:p="http://schemas.openxmlformats.org/presentationml/2006/main" xmlns:a="http://schemas.openxmlformats.org/drawingml/2006/main">
-  <p:cSld>
-    <p:bg>
-      <p:bgPr>
-        <a:solidFill>
-          <a:srgbClr val="1E3A8A"/>
-        </a:solidFill>
-      </p:bgPr>
-    </p:bg>
-    <p:spTree>
-      <p:nvGrpSpPr>
-        <p:cNvPr id="1" name=""/>
-        <p:cNvGrpSpPr/>
-        <p:nvPr/>
-      </p:nvGrpSpPr>
-      <p:grpSpPr>
-        <a:xfrm>
-          <a:off x="0" y="0"/>
-          <a:ext cx="0" cy="0"/>
-          <a:chOff x="0" y="0"/>
-          <a:chExt cx="0" cy="0"/>
-        </a:xfrm>
-      </p:grpSpPr>
-      <p:sp>
-        <p:nvSpPr>
-          <p:cNvPr name="TextBox 2" id="2"/>
-          <p:cNvSpPr txBox="true"/>
-          <p:nvPr/>
-        </p:nvSpPr>
-        <p:spPr>
-          <a:xfrm rot="0">
-            <a:off x="2335702" y="3518218"/>
-            <a:ext cx="13616597" cy="3145790"/>
-          </a:xfrm>
-          <a:prstGeom prst="rect">
-            <a:avLst/>
-          </a:prstGeom>
-        </p:spPr>
-        <p:txBody>
-          <a:bodyPr anchor="t" rtlCol="false" tIns="0" lIns="0" bIns="0" rIns="0">
-            <a:spAutoFit/>
-          </a:bodyPr>
-          <a:lstStyle/>
-          <a:p>
-            <a:pPr algn="l">
-              <a:lnSpc>
-                <a:spcPts val="25180"/>
-              </a:lnSpc>
-            </a:pPr>
-            <a:r>
-              <a:rPr lang="en-US" b="true" sz="20000">
-                <a:solidFill>
-                  <a:srgbClr val="FFFFFF"/>
-                </a:solidFill>
-                <a:latin typeface="Montserrat Bold"/>
-                <a:ea typeface="Montserrat Bold"/>
-                <a:cs typeface="Montserrat Bold"/>
-                <a:sym typeface="Montserrat Bold"/>
-              </a:rPr>
-              <a:t>Obrigado!</a:t>
-            </a:r>
-          </a:p>
-        </p:txBody>
       </p:sp>
     </p:spTree>
   </p:cSld>
@@ -19416,6 +19378,79 @@
                 <a:sym typeface="Montserrat"/>
               </a:rPr>
               <a:t>Os designer e programadores responsáveis pela contrução do sistema posuem outras preocupações, como verificar se determinado algoritimo atende aos resuisitos do sistema</a:t>
+            </a:r>
+          </a:p>
+        </p:txBody>
+      </p:sp>
+    </p:spTree>
+  </p:cSld>
+  <p:clrMapOvr>
+    <a:masterClrMapping/>
+  </p:clrMapOvr>
+</p:sld>
+</file>
+
+<file path=ppt/slides/slide40.xml><?xml version="1.0" encoding="utf-8"?>
+<p:sld xmlns:p="http://schemas.openxmlformats.org/presentationml/2006/main" xmlns:a="http://schemas.openxmlformats.org/drawingml/2006/main">
+  <p:cSld>
+    <p:bg>
+      <p:bgPr>
+        <a:solidFill>
+          <a:srgbClr val="1E3A8A"/>
+        </a:solidFill>
+      </p:bgPr>
+    </p:bg>
+    <p:spTree>
+      <p:nvGrpSpPr>
+        <p:cNvPr id="1" name=""/>
+        <p:cNvGrpSpPr/>
+        <p:nvPr/>
+      </p:nvGrpSpPr>
+      <p:grpSpPr>
+        <a:xfrm>
+          <a:off x="0" y="0"/>
+          <a:ext cx="0" cy="0"/>
+          <a:chOff x="0" y="0"/>
+          <a:chExt cx="0" cy="0"/>
+        </a:xfrm>
+      </p:grpSpPr>
+      <p:sp>
+        <p:nvSpPr>
+          <p:cNvPr name="TextBox 2" id="2"/>
+          <p:cNvSpPr txBox="true"/>
+          <p:nvPr/>
+        </p:nvSpPr>
+        <p:spPr>
+          <a:xfrm rot="0">
+            <a:off x="2335702" y="3518218"/>
+            <a:ext cx="13616597" cy="3145790"/>
+          </a:xfrm>
+          <a:prstGeom prst="rect">
+            <a:avLst/>
+          </a:prstGeom>
+        </p:spPr>
+        <p:txBody>
+          <a:bodyPr anchor="t" rtlCol="false" tIns="0" lIns="0" bIns="0" rIns="0">
+            <a:spAutoFit/>
+          </a:bodyPr>
+          <a:lstStyle/>
+          <a:p>
+            <a:pPr algn="l">
+              <a:lnSpc>
+                <a:spcPts val="25180"/>
+              </a:lnSpc>
+            </a:pPr>
+            <a:r>
+              <a:rPr lang="en-US" b="true" sz="20000">
+                <a:solidFill>
+                  <a:srgbClr val="FFFFFF"/>
+                </a:solidFill>
+                <a:latin typeface="Montserrat Bold"/>
+                <a:ea typeface="Montserrat Bold"/>
+                <a:cs typeface="Montserrat Bold"/>
+                <a:sym typeface="Montserrat Bold"/>
+              </a:rPr>
+              <a:t>Obrigado!</a:t>
             </a:r>
           </a:p>
         </p:txBody>
